--- a/HICOOL_深睡科技_v1.pptx
+++ b/HICOOL_深睡科技_v1.pptx
@@ -4715,7 +4715,27 @@
         <p:spPr>
           <a:xfrm>
             <a:off x="0" y="0"/>
-            <a:ext cx="9144000" cy="73152"/>
+            <a:ext cx="3474720" cy="5143500"/>
+          </a:xfrm>
+          <a:prstGeom prst="rect">
+            <a:avLst/>
+          </a:prstGeom>
+          <a:solidFill>
+            <a:srgbClr val="0D1B2A"/>
+          </a:solidFill>
+          <a:ln/>
+        </p:spPr>
+      </p:sp>
+      <p:sp>
+        <p:nvSpPr>
+          <p:cNvPr id="3" name="Shape 1"/>
+          <p:cNvSpPr/>
+          <p:nvPr/>
+        </p:nvSpPr>
+        <p:spPr>
+          <a:xfrm>
+            <a:off x="0" y="0"/>
+            <a:ext cx="3474720" cy="109728"/>
           </a:xfrm>
           <a:prstGeom prst="rect">
             <a:avLst/>
@@ -4728,30 +4748,30 @@
       </p:sp>
       <p:sp>
         <p:nvSpPr>
-          <p:cNvPr id="3" name="Text 1"/>
-          <p:cNvSpPr/>
-          <p:nvPr/>
-        </p:nvSpPr>
-        <p:spPr>
-          <a:xfrm>
-            <a:off x="548640" y="320040"/>
-            <a:ext cx="3657600" cy="365760"/>
-          </a:xfrm>
-          <a:prstGeom prst="rect">
-            <a:avLst/>
-          </a:prstGeom>
-          <a:noFill/>
-          <a:ln/>
-        </p:spPr>
-        <p:txBody>
-          <a:bodyPr wrap="square" rtlCol="0" anchor="ctr"/>
-          <a:lstStyle/>
-          <a:p>
-            <a:pPr indent="0" marL="0">
-              <a:buNone/>
-            </a:pPr>
-            <a:r>
-              <a:rPr lang="en-US" sz="1200" b="1" spc="200" kern="0" dirty="0">
+          <p:cNvPr id="4" name="Text 2"/>
+          <p:cNvSpPr/>
+          <p:nvPr/>
+        </p:nvSpPr>
+        <p:spPr>
+          <a:xfrm>
+            <a:off x="365760" y="365760"/>
+            <a:ext cx="914400" cy="365760"/>
+          </a:xfrm>
+          <a:prstGeom prst="rect">
+            <a:avLst/>
+          </a:prstGeom>
+          <a:noFill/>
+          <a:ln/>
+        </p:spPr>
+        <p:txBody>
+          <a:bodyPr wrap="square" rtlCol="0" anchor="ctr"/>
+          <a:lstStyle/>
+          <a:p>
+            <a:pPr indent="0" marL="0">
+              <a:buNone/>
+            </a:pPr>
+            <a:r>
+              <a:rPr lang="en-US" sz="1100" b="1" spc="300" kern="0" dirty="0">
                 <a:solidFill>
                   <a:srgbClr val="00D4AA"/>
                 </a:solidFill>
@@ -4759,7 +4779,46 @@
                 <a:ea typeface="Calibri" pitchFamily="34" charset="-122"/>
                 <a:cs typeface="Calibri" pitchFamily="34" charset="-120"/>
               </a:rPr>
-              <a:t>01  市场痛点</a:t>
+              <a:t>01</a:t>
+            </a:r>
+            <a:endParaRPr lang="en-US" sz="1100" dirty="0"/>
+          </a:p>
+        </p:txBody>
+      </p:sp>
+      <p:sp>
+        <p:nvSpPr>
+          <p:cNvPr id="5" name="Text 3"/>
+          <p:cNvSpPr/>
+          <p:nvPr/>
+        </p:nvSpPr>
+        <p:spPr>
+          <a:xfrm>
+            <a:off x="365760" y="685800"/>
+            <a:ext cx="2743200" cy="320040"/>
+          </a:xfrm>
+          <a:prstGeom prst="rect">
+            <a:avLst/>
+          </a:prstGeom>
+          <a:noFill/>
+          <a:ln/>
+        </p:spPr>
+        <p:txBody>
+          <a:bodyPr wrap="square" rtlCol="0" anchor="ctr"/>
+          <a:lstStyle/>
+          <a:p>
+            <a:pPr indent="0" marL="0">
+              <a:buNone/>
+            </a:pPr>
+            <a:r>
+              <a:rPr lang="en-US" sz="1200" dirty="0">
+                <a:solidFill>
+                  <a:srgbClr val="8FA3BF"/>
+                </a:solidFill>
+                <a:latin typeface="Calibri" pitchFamily="34" charset="0"/>
+                <a:ea typeface="Calibri" pitchFamily="34" charset="-122"/>
+                <a:cs typeface="Calibri" pitchFamily="34" charset="-120"/>
+              </a:rPr>
+              <a:t>市场痛点</a:t>
             </a:r>
             <a:endParaRPr lang="en-US" sz="1200" dirty="0"/>
           </a:p>
@@ -4767,71 +4826,110 @@
       </p:sp>
       <p:sp>
         <p:nvSpPr>
-          <p:cNvPr id="4" name="Text 2"/>
-          <p:cNvSpPr/>
-          <p:nvPr/>
-        </p:nvSpPr>
-        <p:spPr>
-          <a:xfrm>
-            <a:off x="548640" y="731520"/>
-            <a:ext cx="3657600" cy="1005840"/>
-          </a:xfrm>
-          <a:prstGeom prst="rect">
-            <a:avLst/>
-          </a:prstGeom>
-          <a:noFill/>
-          <a:ln/>
-        </p:spPr>
-        <p:txBody>
-          <a:bodyPr wrap="square" rtlCol="0" anchor="ctr"/>
-          <a:lstStyle/>
-          <a:p>
-            <a:pPr indent="0" marL="0">
-              <a:buNone/>
-            </a:pPr>
-            <a:r>
-              <a:rPr lang="en-US" sz="8000" b="1" dirty="0">
-                <a:solidFill>
-                  <a:srgbClr val="1A3A6B"/>
+          <p:cNvPr id="6" name="Text 4"/>
+          <p:cNvSpPr/>
+          <p:nvPr/>
+        </p:nvSpPr>
+        <p:spPr>
+          <a:xfrm>
+            <a:off x="365760" y="1188720"/>
+            <a:ext cx="1371600" cy="1463040"/>
+          </a:xfrm>
+          <a:prstGeom prst="rect">
+            <a:avLst/>
+          </a:prstGeom>
+          <a:noFill/>
+          <a:ln/>
+        </p:spPr>
+        <p:txBody>
+          <a:bodyPr wrap="square" rtlCol="0" anchor="ctr"/>
+          <a:lstStyle/>
+          <a:p>
+            <a:pPr indent="0" marL="0">
+              <a:buNone/>
+            </a:pPr>
+            <a:r>
+              <a:rPr lang="en-US" sz="11000" b="1" dirty="0">
+                <a:solidFill>
+                  <a:srgbClr val="FFFFFF"/>
                 </a:solidFill>
                 <a:latin typeface="Georgia" pitchFamily="34" charset="0"/>
                 <a:ea typeface="Georgia" pitchFamily="34" charset="-122"/>
                 <a:cs typeface="Georgia" pitchFamily="34" charset="-120"/>
               </a:rPr>
-              <a:t>3亿人</a:t>
-            </a:r>
-            <a:endParaRPr lang="en-US" sz="8000" dirty="0"/>
-          </a:p>
-        </p:txBody>
-      </p:sp>
-      <p:sp>
-        <p:nvSpPr>
-          <p:cNvPr id="5" name="Text 3"/>
-          <p:cNvSpPr/>
-          <p:nvPr/>
-        </p:nvSpPr>
-        <p:spPr>
-          <a:xfrm>
-            <a:off x="548640" y="1737360"/>
-            <a:ext cx="3657600" cy="365760"/>
-          </a:xfrm>
-          <a:prstGeom prst="rect">
-            <a:avLst/>
-          </a:prstGeom>
-          <a:noFill/>
-          <a:ln/>
-        </p:spPr>
-        <p:txBody>
-          <a:bodyPr wrap="square" rtlCol="0" anchor="ctr"/>
-          <a:lstStyle/>
-          <a:p>
-            <a:pPr indent="0" marL="0">
-              <a:buNone/>
-            </a:pPr>
-            <a:r>
-              <a:rPr lang="en-US" sz="1600" dirty="0">
-                <a:solidFill>
-                  <a:srgbClr val="2C3E50"/>
+              <a:t>3</a:t>
+            </a:r>
+            <a:endParaRPr lang="en-US" sz="11000" dirty="0"/>
+          </a:p>
+        </p:txBody>
+      </p:sp>
+      <p:sp>
+        <p:nvSpPr>
+          <p:cNvPr id="7" name="Text 5"/>
+          <p:cNvSpPr/>
+          <p:nvPr/>
+        </p:nvSpPr>
+        <p:spPr>
+          <a:xfrm>
+            <a:off x="1691640" y="2148840"/>
+            <a:ext cx="1371600" cy="548640"/>
+          </a:xfrm>
+          <a:prstGeom prst="rect">
+            <a:avLst/>
+          </a:prstGeom>
+          <a:noFill/>
+          <a:ln/>
+        </p:spPr>
+        <p:txBody>
+          <a:bodyPr wrap="square" rtlCol="0" anchor="ctr"/>
+          <a:lstStyle/>
+          <a:p>
+            <a:pPr indent="0" marL="0">
+              <a:buNone/>
+            </a:pPr>
+            <a:r>
+              <a:rPr lang="en-US" sz="2800" b="1" dirty="0">
+                <a:solidFill>
+                  <a:srgbClr val="00D4AA"/>
+                </a:solidFill>
+                <a:latin typeface="Calibri" pitchFamily="34" charset="0"/>
+                <a:ea typeface="Calibri" pitchFamily="34" charset="-122"/>
+                <a:cs typeface="Calibri" pitchFamily="34" charset="-120"/>
+              </a:rPr>
+              <a:t>亿人</a:t>
+            </a:r>
+            <a:endParaRPr lang="en-US" sz="2800" dirty="0"/>
+          </a:p>
+        </p:txBody>
+      </p:sp>
+      <p:sp>
+        <p:nvSpPr>
+          <p:cNvPr id="8" name="Text 6"/>
+          <p:cNvSpPr/>
+          <p:nvPr/>
+        </p:nvSpPr>
+        <p:spPr>
+          <a:xfrm>
+            <a:off x="365760" y="2834640"/>
+            <a:ext cx="2834640" cy="640080"/>
+          </a:xfrm>
+          <a:prstGeom prst="rect">
+            <a:avLst/>
+          </a:prstGeom>
+          <a:noFill/>
+          <a:ln/>
+        </p:spPr>
+        <p:txBody>
+          <a:bodyPr wrap="square" rtlCol="0" anchor="ctr"/>
+          <a:lstStyle/>
+          <a:p>
+            <a:pPr indent="0" marL="0">
+              <a:buNone/>
+            </a:pPr>
+            <a:r>
+              <a:rPr lang="en-US" sz="1300" dirty="0">
+                <a:solidFill>
+                  <a:srgbClr val="8FA3BF"/>
                 </a:solidFill>
                 <a:latin typeface="Calibri" pitchFamily="34" charset="0"/>
                 <a:ea typeface="Calibri" pitchFamily="34" charset="-122"/>
@@ -4839,49 +4937,201 @@
               </a:rPr>
               <a:t>中国人受睡眠问题困扰</a:t>
             </a:r>
-            <a:endParaRPr lang="en-US" sz="1600" dirty="0"/>
-          </a:p>
-        </p:txBody>
-      </p:sp>
-      <p:sp>
-        <p:nvSpPr>
-          <p:cNvPr id="6" name="Shape 4"/>
-          <p:cNvSpPr/>
-          <p:nvPr/>
-        </p:nvSpPr>
-        <p:spPr>
-          <a:xfrm>
-            <a:off x="4846320" y="685800"/>
-            <a:ext cx="3749040" cy="1234440"/>
-          </a:xfrm>
-          <a:prstGeom prst="rect">
-            <a:avLst/>
-          </a:prstGeom>
-          <a:solidFill>
-            <a:srgbClr val="FFFFFF"/>
-          </a:solidFill>
-          <a:ln/>
-          <a:effectLst>
-            <a:outerShdw sx="100000" sy="100000" kx="0" ky="0" algn="bl" rotWithShape="0" blurRad="63500" dist="25400" dir="8100000">
-              <a:srgbClr val="000000">
-                <a:alpha val="10000"/>
-              </a:srgbClr>
-            </a:outerShdw>
-          </a:effectLst>
-        </p:spPr>
-      </p:sp>
-      <p:sp>
-        <p:nvSpPr>
-          <p:cNvPr id="7" name="Shape 5"/>
-          <p:cNvSpPr/>
-          <p:nvPr/>
-        </p:nvSpPr>
-        <p:spPr>
-          <a:xfrm>
-            <a:off x="4846320" y="685800"/>
-            <a:ext cx="91440" cy="1234440"/>
-          </a:xfrm>
-          <a:prstGeom prst="rect">
+            <a:endParaRPr lang="en-US" sz="1300" dirty="0"/>
+          </a:p>
+        </p:txBody>
+      </p:sp>
+      <p:sp>
+        <p:nvSpPr>
+          <p:cNvPr id="9" name="Shape 7"/>
+          <p:cNvSpPr/>
+          <p:nvPr/>
+        </p:nvSpPr>
+        <p:spPr>
+          <a:xfrm>
+            <a:off x="365760" y="3520440"/>
+            <a:ext cx="2011680" cy="0"/>
+          </a:xfrm>
+          <a:prstGeom prst="line">
+            <a:avLst/>
+          </a:prstGeom>
+          <a:noFill/>
+          <a:ln w="12700">
+            <a:solidFill>
+              <a:srgbClr val="2A4A7A"/>
+            </a:solidFill>
+            <a:prstDash val="solid"/>
+          </a:ln>
+        </p:spPr>
+      </p:sp>
+      <p:sp>
+        <p:nvSpPr>
+          <p:cNvPr id="10" name="Text 8"/>
+          <p:cNvSpPr/>
+          <p:nvPr/>
+        </p:nvSpPr>
+        <p:spPr>
+          <a:xfrm>
+            <a:off x="365760" y="3703320"/>
+            <a:ext cx="2743200" cy="274320"/>
+          </a:xfrm>
+          <a:prstGeom prst="rect">
+            <a:avLst/>
+          </a:prstGeom>
+          <a:noFill/>
+          <a:ln/>
+        </p:spPr>
+        <p:txBody>
+          <a:bodyPr wrap="square" rtlCol="0" anchor="ctr"/>
+          <a:lstStyle/>
+          <a:p>
+            <a:pPr indent="0" marL="0">
+              <a:buNone/>
+            </a:pPr>
+            <a:r>
+              <a:rPr lang="en-US" sz="1100" dirty="0">
+                <a:solidFill>
+                  <a:srgbClr val="6B8AB5"/>
+                </a:solidFill>
+                <a:latin typeface="Calibri" pitchFamily="34" charset="0"/>
+                <a:ea typeface="Calibri" pitchFamily="34" charset="-122"/>
+                <a:cs typeface="Calibri" pitchFamily="34" charset="-120"/>
+              </a:rPr>
+              <a:t>市场年规模</a:t>
+            </a:r>
+            <a:endParaRPr lang="en-US" sz="1100" dirty="0"/>
+          </a:p>
+        </p:txBody>
+      </p:sp>
+      <p:sp>
+        <p:nvSpPr>
+          <p:cNvPr id="11" name="Text 9"/>
+          <p:cNvSpPr/>
+          <p:nvPr/>
+        </p:nvSpPr>
+        <p:spPr>
+          <a:xfrm>
+            <a:off x="365760" y="3977640"/>
+            <a:ext cx="2743200" cy="457200"/>
+          </a:xfrm>
+          <a:prstGeom prst="rect">
+            <a:avLst/>
+          </a:prstGeom>
+          <a:noFill/>
+          <a:ln/>
+        </p:spPr>
+        <p:txBody>
+          <a:bodyPr wrap="square" rtlCol="0" anchor="ctr"/>
+          <a:lstStyle/>
+          <a:p>
+            <a:pPr indent="0" marL="0">
+              <a:buNone/>
+            </a:pPr>
+            <a:r>
+              <a:rPr lang="en-US" sz="2400" b="1" dirty="0">
+                <a:solidFill>
+                  <a:srgbClr val="00D4AA"/>
+                </a:solidFill>
+                <a:latin typeface="Georgia" pitchFamily="34" charset="0"/>
+                <a:ea typeface="Georgia" pitchFamily="34" charset="-122"/>
+                <a:cs typeface="Georgia" pitchFamily="34" charset="-120"/>
+              </a:rPr>
+              <a:t>¥4700亿+</a:t>
+            </a:r>
+            <a:endParaRPr lang="en-US" sz="2400" dirty="0"/>
+          </a:p>
+        </p:txBody>
+      </p:sp>
+      <p:sp>
+        <p:nvSpPr>
+          <p:cNvPr id="12" name="Text 10"/>
+          <p:cNvSpPr/>
+          <p:nvPr/>
+        </p:nvSpPr>
+        <p:spPr>
+          <a:xfrm>
+            <a:off x="365760" y="4434840"/>
+            <a:ext cx="2834640" cy="365760"/>
+          </a:xfrm>
+          <a:prstGeom prst="rect">
+            <a:avLst/>
+          </a:prstGeom>
+          <a:noFill/>
+          <a:ln/>
+        </p:spPr>
+        <p:txBody>
+          <a:bodyPr wrap="square" rtlCol="0" anchor="ctr"/>
+          <a:lstStyle/>
+          <a:p>
+            <a:pPr indent="0" marL="0">
+              <a:buNone/>
+            </a:pPr>
+            <a:r>
+              <a:rPr lang="en-US" sz="1000" dirty="0">
+                <a:solidFill>
+                  <a:srgbClr val="6B8AB5"/>
+                </a:solidFill>
+                <a:latin typeface="Calibri" pitchFamily="34" charset="0"/>
+                <a:ea typeface="Calibri" pitchFamily="34" charset="-122"/>
+                <a:cs typeface="Calibri" pitchFamily="34" charset="-120"/>
+              </a:rPr>
+              <a:t>持续高速增长，复合年增长率CAGR &gt; 12%</a:t>
+            </a:r>
+            <a:endParaRPr lang="en-US" sz="1000" dirty="0"/>
+          </a:p>
+        </p:txBody>
+      </p:sp>
+      <p:sp>
+        <p:nvSpPr>
+          <p:cNvPr id="13" name="Text 11"/>
+          <p:cNvSpPr/>
+          <p:nvPr/>
+        </p:nvSpPr>
+        <p:spPr>
+          <a:xfrm>
+            <a:off x="3749040" y="365760"/>
+            <a:ext cx="640080" cy="457200"/>
+          </a:xfrm>
+          <a:prstGeom prst="rect">
+            <a:avLst/>
+          </a:prstGeom>
+          <a:noFill/>
+          <a:ln/>
+        </p:spPr>
+        <p:txBody>
+          <a:bodyPr wrap="square" rtlCol="0" anchor="ctr"/>
+          <a:lstStyle/>
+          <a:p>
+            <a:pPr indent="0" marL="0">
+              <a:buNone/>
+            </a:pPr>
+            <a:r>
+              <a:rPr lang="en-US" sz="2800" b="1" dirty="0">
+                <a:solidFill>
+                  <a:srgbClr val="D0D8E4"/>
+                </a:solidFill>
+                <a:latin typeface="Georgia" pitchFamily="34" charset="0"/>
+                <a:ea typeface="Georgia" pitchFamily="34" charset="-122"/>
+                <a:cs typeface="Georgia" pitchFamily="34" charset="-120"/>
+              </a:rPr>
+              <a:t>01</a:t>
+            </a:r>
+            <a:endParaRPr lang="en-US" sz="2800" dirty="0"/>
+          </a:p>
+        </p:txBody>
+      </p:sp>
+      <p:sp>
+        <p:nvSpPr>
+          <p:cNvPr id="14" name="Shape 12"/>
+          <p:cNvSpPr/>
+          <p:nvPr/>
+        </p:nvSpPr>
+        <p:spPr>
+          <a:xfrm>
+            <a:off x="4434840" y="475488"/>
+            <a:ext cx="164592" cy="164592"/>
+          </a:xfrm>
+          <a:prstGeom prst="ellipse">
             <a:avLst/>
           </a:prstGeom>
           <a:solidFill>
@@ -4892,35 +5142,139 @@
       </p:sp>
       <p:sp>
         <p:nvSpPr>
-          <p:cNvPr id="8" name="Text 6"/>
-          <p:cNvSpPr/>
-          <p:nvPr/>
-        </p:nvSpPr>
-        <p:spPr>
-          <a:xfrm>
-            <a:off x="5074920" y="850392"/>
-            <a:ext cx="548640" cy="548640"/>
-          </a:xfrm>
-          <a:prstGeom prst="rect">
-            <a:avLst/>
-          </a:prstGeom>
-          <a:noFill/>
-          <a:ln/>
-        </p:spPr>
-        <p:txBody>
-          <a:bodyPr wrap="square" rtlCol="0" anchor="ctr"/>
-          <a:lstStyle/>
-          <a:p>
-            <a:pPr indent="0" marL="0">
-              <a:buNone/>
-            </a:pPr>
-            <a:r>
-              <a:rPr lang="en-US" sz="2800" dirty="0">
-                <a:solidFill>
-                  <a:srgbClr val="000000"/>
-                </a:solidFill>
-              </a:rPr>
-              <a:t>😰</a:t>
+          <p:cNvPr id="15" name="Text 13"/>
+          <p:cNvSpPr/>
+          <p:nvPr/>
+        </p:nvSpPr>
+        <p:spPr>
+          <a:xfrm>
+            <a:off x="4709160" y="365760"/>
+            <a:ext cx="4114800" cy="411480"/>
+          </a:xfrm>
+          <a:prstGeom prst="rect">
+            <a:avLst/>
+          </a:prstGeom>
+          <a:noFill/>
+          <a:ln/>
+        </p:spPr>
+        <p:txBody>
+          <a:bodyPr wrap="square" rtlCol="0" anchor="ctr"/>
+          <a:lstStyle/>
+          <a:p>
+            <a:pPr indent="0" marL="0">
+              <a:buNone/>
+            </a:pPr>
+            <a:r>
+              <a:rPr lang="en-US" sz="1500" b="1" dirty="0">
+                <a:solidFill>
+                  <a:srgbClr val="2C3E50"/>
+                </a:solidFill>
+                <a:latin typeface="Calibri" pitchFamily="34" charset="0"/>
+                <a:ea typeface="Calibri" pitchFamily="34" charset="-122"/>
+                <a:cs typeface="Calibri" pitchFamily="34" charset="-120"/>
+              </a:rPr>
+              <a:t>现有助眠方式效果有限</a:t>
+            </a:r>
+            <a:endParaRPr lang="en-US" sz="1500" dirty="0"/>
+          </a:p>
+        </p:txBody>
+      </p:sp>
+      <p:sp>
+        <p:nvSpPr>
+          <p:cNvPr id="16" name="Text 14"/>
+          <p:cNvSpPr/>
+          <p:nvPr/>
+        </p:nvSpPr>
+        <p:spPr>
+          <a:xfrm>
+            <a:off x="4709160" y="804672"/>
+            <a:ext cx="4114800" cy="914400"/>
+          </a:xfrm>
+          <a:prstGeom prst="rect">
+            <a:avLst/>
+          </a:prstGeom>
+          <a:noFill/>
+          <a:ln/>
+        </p:spPr>
+        <p:txBody>
+          <a:bodyPr wrap="square" rtlCol="0" anchor="ctr"/>
+          <a:lstStyle/>
+          <a:p>
+            <a:pPr indent="0" marL="0">
+              <a:buNone/>
+            </a:pPr>
+            <a:r>
+              <a:rPr lang="en-US" sz="1200" dirty="0">
+                <a:solidFill>
+                  <a:srgbClr val="7F8C8D"/>
+                </a:solidFill>
+                <a:latin typeface="Calibri" pitchFamily="34" charset="0"/>
+                <a:ea typeface="Calibri" pitchFamily="34" charset="-122"/>
+                <a:cs typeface="Calibri" pitchFamily="34" charset="-120"/>
+              </a:rPr>
+              <a:t>药物依赖、副作用大、治标不治本。现有助眠产品无法从根本上改善睡眠环境质量。</a:t>
+            </a:r>
+            <a:endParaRPr lang="en-US" sz="1200" dirty="0"/>
+          </a:p>
+        </p:txBody>
+      </p:sp>
+      <p:sp>
+        <p:nvSpPr>
+          <p:cNvPr id="17" name="Shape 15"/>
+          <p:cNvSpPr/>
+          <p:nvPr/>
+        </p:nvSpPr>
+        <p:spPr>
+          <a:xfrm>
+            <a:off x="3749040" y="1783080"/>
+            <a:ext cx="5029200" cy="0"/>
+          </a:xfrm>
+          <a:prstGeom prst="line">
+            <a:avLst/>
+          </a:prstGeom>
+          <a:noFill/>
+          <a:ln w="6350">
+            <a:solidFill>
+              <a:srgbClr val="E2E8F0"/>
+            </a:solidFill>
+            <a:prstDash val="solid"/>
+          </a:ln>
+        </p:spPr>
+      </p:sp>
+      <p:sp>
+        <p:nvSpPr>
+          <p:cNvPr id="18" name="Text 16"/>
+          <p:cNvSpPr/>
+          <p:nvPr/>
+        </p:nvSpPr>
+        <p:spPr>
+          <a:xfrm>
+            <a:off x="3749040" y="1938528"/>
+            <a:ext cx="640080" cy="457200"/>
+          </a:xfrm>
+          <a:prstGeom prst="rect">
+            <a:avLst/>
+          </a:prstGeom>
+          <a:noFill/>
+          <a:ln/>
+        </p:spPr>
+        <p:txBody>
+          <a:bodyPr wrap="square" rtlCol="0" anchor="ctr"/>
+          <a:lstStyle/>
+          <a:p>
+            <a:pPr indent="0" marL="0">
+              <a:buNone/>
+            </a:pPr>
+            <a:r>
+              <a:rPr lang="en-US" sz="2800" b="1" dirty="0">
+                <a:solidFill>
+                  <a:srgbClr val="D0D8E4"/>
+                </a:solidFill>
+                <a:latin typeface="Georgia" pitchFamily="34" charset="0"/>
+                <a:ea typeface="Georgia" pitchFamily="34" charset="-122"/>
+                <a:cs typeface="Georgia" pitchFamily="34" charset="-120"/>
+              </a:rPr>
+              <a:t>02</a:t>
             </a:r>
             <a:endParaRPr lang="en-US" sz="2800" dirty="0"/>
           </a:p>
@@ -4928,121 +5282,16 @@
       </p:sp>
       <p:sp>
         <p:nvSpPr>
-          <p:cNvPr id="9" name="Text 7"/>
-          <p:cNvSpPr/>
-          <p:nvPr/>
-        </p:nvSpPr>
-        <p:spPr>
-          <a:xfrm>
-            <a:off x="5623560" y="822960"/>
-            <a:ext cx="2834640" cy="411480"/>
-          </a:xfrm>
-          <a:prstGeom prst="rect">
-            <a:avLst/>
-          </a:prstGeom>
-          <a:noFill/>
-          <a:ln/>
-        </p:spPr>
-        <p:txBody>
-          <a:bodyPr wrap="square" rtlCol="0" anchor="ctr"/>
-          <a:lstStyle/>
-          <a:p>
-            <a:pPr indent="0" marL="0">
-              <a:buNone/>
-            </a:pPr>
-            <a:r>
-              <a:rPr lang="en-US" sz="1400" b="1" dirty="0">
-                <a:solidFill>
-                  <a:srgbClr val="2C3E50"/>
-                </a:solidFill>
-                <a:latin typeface="Calibri" pitchFamily="34" charset="0"/>
-                <a:ea typeface="Calibri" pitchFamily="34" charset="-122"/>
-                <a:cs typeface="Calibri" pitchFamily="34" charset="-120"/>
-              </a:rPr>
-              <a:t>现有助眠方式效果有限</a:t>
-            </a:r>
-            <a:endParaRPr lang="en-US" sz="1400" dirty="0"/>
-          </a:p>
-        </p:txBody>
-      </p:sp>
-      <p:sp>
-        <p:nvSpPr>
-          <p:cNvPr id="10" name="Text 8"/>
-          <p:cNvSpPr/>
-          <p:nvPr/>
-        </p:nvSpPr>
-        <p:spPr>
-          <a:xfrm>
-            <a:off x="5623560" y="1234440"/>
-            <a:ext cx="2834640" cy="548640"/>
-          </a:xfrm>
-          <a:prstGeom prst="rect">
-            <a:avLst/>
-          </a:prstGeom>
-          <a:noFill/>
-          <a:ln/>
-        </p:spPr>
-        <p:txBody>
-          <a:bodyPr wrap="square" rtlCol="0" anchor="ctr"/>
-          <a:lstStyle/>
-          <a:p>
-            <a:pPr indent="0" marL="0">
-              <a:buNone/>
-            </a:pPr>
-            <a:r>
-              <a:rPr lang="en-US" sz="1200" dirty="0">
-                <a:solidFill>
-                  <a:srgbClr val="7F8C8D"/>
-                </a:solidFill>
-                <a:latin typeface="Calibri" pitchFamily="34" charset="0"/>
-                <a:ea typeface="Calibri" pitchFamily="34" charset="-122"/>
-                <a:cs typeface="Calibri" pitchFamily="34" charset="-120"/>
-              </a:rPr>
-              <a:t>药物依赖 · 副作用大 · 治标不治本</a:t>
-            </a:r>
-            <a:endParaRPr lang="en-US" sz="1200" dirty="0"/>
-          </a:p>
-        </p:txBody>
-      </p:sp>
-      <p:sp>
-        <p:nvSpPr>
-          <p:cNvPr id="11" name="Shape 9"/>
-          <p:cNvSpPr/>
-          <p:nvPr/>
-        </p:nvSpPr>
-        <p:spPr>
-          <a:xfrm>
-            <a:off x="4846320" y="2103120"/>
-            <a:ext cx="3749040" cy="1234440"/>
-          </a:xfrm>
-          <a:prstGeom prst="rect">
-            <a:avLst/>
-          </a:prstGeom>
-          <a:solidFill>
-            <a:srgbClr val="FFFFFF"/>
-          </a:solidFill>
-          <a:ln/>
-          <a:effectLst>
-            <a:outerShdw sx="100000" sy="100000" kx="0" ky="0" algn="bl" rotWithShape="0" blurRad="63500" dist="25400" dir="8100000">
-              <a:srgbClr val="000000">
-                <a:alpha val="10000"/>
-              </a:srgbClr>
-            </a:outerShdw>
-          </a:effectLst>
-        </p:spPr>
-      </p:sp>
-      <p:sp>
-        <p:nvSpPr>
-          <p:cNvPr id="12" name="Shape 10"/>
-          <p:cNvSpPr/>
-          <p:nvPr/>
-        </p:nvSpPr>
-        <p:spPr>
-          <a:xfrm>
-            <a:off x="4846320" y="2103120"/>
-            <a:ext cx="91440" cy="1234440"/>
-          </a:xfrm>
-          <a:prstGeom prst="rect">
+          <p:cNvPr id="19" name="Shape 17"/>
+          <p:cNvSpPr/>
+          <p:nvPr/>
+        </p:nvSpPr>
+        <p:spPr>
+          <a:xfrm>
+            <a:off x="4434840" y="2048256"/>
+            <a:ext cx="164592" cy="164592"/>
+          </a:xfrm>
+          <a:prstGeom prst="ellipse">
             <a:avLst/>
           </a:prstGeom>
           <a:solidFill>
@@ -5053,35 +5302,139 @@
       </p:sp>
       <p:sp>
         <p:nvSpPr>
-          <p:cNvPr id="13" name="Text 11"/>
-          <p:cNvSpPr/>
-          <p:nvPr/>
-        </p:nvSpPr>
-        <p:spPr>
-          <a:xfrm>
-            <a:off x="5074920" y="2267712"/>
-            <a:ext cx="548640" cy="548640"/>
-          </a:xfrm>
-          <a:prstGeom prst="rect">
-            <a:avLst/>
-          </a:prstGeom>
-          <a:noFill/>
-          <a:ln/>
-        </p:spPr>
-        <p:txBody>
-          <a:bodyPr wrap="square" rtlCol="0" anchor="ctr"/>
-          <a:lstStyle/>
-          <a:p>
-            <a:pPr indent="0" marL="0">
-              <a:buNone/>
-            </a:pPr>
-            <a:r>
-              <a:rPr lang="en-US" sz="2800" dirty="0">
-                <a:solidFill>
-                  <a:srgbClr val="000000"/>
-                </a:solidFill>
-              </a:rPr>
-              <a:t>🏥</a:t>
+          <p:cNvPr id="20" name="Text 18"/>
+          <p:cNvSpPr/>
+          <p:nvPr/>
+        </p:nvSpPr>
+        <p:spPr>
+          <a:xfrm>
+            <a:off x="4709160" y="1938528"/>
+            <a:ext cx="4114800" cy="411480"/>
+          </a:xfrm>
+          <a:prstGeom prst="rect">
+            <a:avLst/>
+          </a:prstGeom>
+          <a:noFill/>
+          <a:ln/>
+        </p:spPr>
+        <p:txBody>
+          <a:bodyPr wrap="square" rtlCol="0" anchor="ctr"/>
+          <a:lstStyle/>
+          <a:p>
+            <a:pPr indent="0" marL="0">
+              <a:buNone/>
+            </a:pPr>
+            <a:r>
+              <a:rPr lang="en-US" sz="1500" b="1" dirty="0">
+                <a:solidFill>
+                  <a:srgbClr val="2C3E50"/>
+                </a:solidFill>
+                <a:latin typeface="Calibri" pitchFamily="34" charset="0"/>
+                <a:ea typeface="Calibri" pitchFamily="34" charset="-122"/>
+                <a:cs typeface="Calibri" pitchFamily="34" charset="-120"/>
+              </a:rPr>
+              <a:t>医院睡眠中心覆盖率极低</a:t>
+            </a:r>
+            <a:endParaRPr lang="en-US" sz="1500" dirty="0"/>
+          </a:p>
+        </p:txBody>
+      </p:sp>
+      <p:sp>
+        <p:nvSpPr>
+          <p:cNvPr id="21" name="Text 19"/>
+          <p:cNvSpPr/>
+          <p:nvPr/>
+        </p:nvSpPr>
+        <p:spPr>
+          <a:xfrm>
+            <a:off x="4709160" y="2377440"/>
+            <a:ext cx="4114800" cy="914400"/>
+          </a:xfrm>
+          <a:prstGeom prst="rect">
+            <a:avLst/>
+          </a:prstGeom>
+          <a:noFill/>
+          <a:ln/>
+        </p:spPr>
+        <p:txBody>
+          <a:bodyPr wrap="square" rtlCol="0" anchor="ctr"/>
+          <a:lstStyle/>
+          <a:p>
+            <a:pPr indent="0" marL="0">
+              <a:buNone/>
+            </a:pPr>
+            <a:r>
+              <a:rPr lang="en-US" sz="1200" dirty="0">
+                <a:solidFill>
+                  <a:srgbClr val="7F8C8D"/>
+                </a:solidFill>
+                <a:latin typeface="Calibri" pitchFamily="34" charset="0"/>
+                <a:ea typeface="Calibri" pitchFamily="34" charset="-122"/>
+                <a:cs typeface="Calibri" pitchFamily="34" charset="-120"/>
+              </a:rPr>
+              <a:t>全国睡眠中心数量不足千家，资源稀缺、费用高昂、用户体验差，绝大部分患者得不到专业帮助。</a:t>
+            </a:r>
+            <a:endParaRPr lang="en-US" sz="1200" dirty="0"/>
+          </a:p>
+        </p:txBody>
+      </p:sp>
+      <p:sp>
+        <p:nvSpPr>
+          <p:cNvPr id="22" name="Shape 20"/>
+          <p:cNvSpPr/>
+          <p:nvPr/>
+        </p:nvSpPr>
+        <p:spPr>
+          <a:xfrm>
+            <a:off x="3749040" y="3355848"/>
+            <a:ext cx="5029200" cy="0"/>
+          </a:xfrm>
+          <a:prstGeom prst="line">
+            <a:avLst/>
+          </a:prstGeom>
+          <a:noFill/>
+          <a:ln w="6350">
+            <a:solidFill>
+              <a:srgbClr val="E2E8F0"/>
+            </a:solidFill>
+            <a:prstDash val="solid"/>
+          </a:ln>
+        </p:spPr>
+      </p:sp>
+      <p:sp>
+        <p:nvSpPr>
+          <p:cNvPr id="23" name="Text 21"/>
+          <p:cNvSpPr/>
+          <p:nvPr/>
+        </p:nvSpPr>
+        <p:spPr>
+          <a:xfrm>
+            <a:off x="3749040" y="3511296"/>
+            <a:ext cx="640080" cy="457200"/>
+          </a:xfrm>
+          <a:prstGeom prst="rect">
+            <a:avLst/>
+          </a:prstGeom>
+          <a:noFill/>
+          <a:ln/>
+        </p:spPr>
+        <p:txBody>
+          <a:bodyPr wrap="square" rtlCol="0" anchor="ctr"/>
+          <a:lstStyle/>
+          <a:p>
+            <a:pPr indent="0" marL="0">
+              <a:buNone/>
+            </a:pPr>
+            <a:r>
+              <a:rPr lang="en-US" sz="2800" b="1" dirty="0">
+                <a:solidFill>
+                  <a:srgbClr val="D0D8E4"/>
+                </a:solidFill>
+                <a:latin typeface="Georgia" pitchFamily="34" charset="0"/>
+                <a:ea typeface="Georgia" pitchFamily="34" charset="-122"/>
+                <a:cs typeface="Georgia" pitchFamily="34" charset="-120"/>
+              </a:rPr>
+              <a:t>03</a:t>
             </a:r>
             <a:endParaRPr lang="en-US" sz="2800" dirty="0"/>
           </a:p>
@@ -5089,121 +5442,16 @@
       </p:sp>
       <p:sp>
         <p:nvSpPr>
-          <p:cNvPr id="14" name="Text 12"/>
-          <p:cNvSpPr/>
-          <p:nvPr/>
-        </p:nvSpPr>
-        <p:spPr>
-          <a:xfrm>
-            <a:off x="5623560" y="2240280"/>
-            <a:ext cx="2834640" cy="411480"/>
-          </a:xfrm>
-          <a:prstGeom prst="rect">
-            <a:avLst/>
-          </a:prstGeom>
-          <a:noFill/>
-          <a:ln/>
-        </p:spPr>
-        <p:txBody>
-          <a:bodyPr wrap="square" rtlCol="0" anchor="ctr"/>
-          <a:lstStyle/>
-          <a:p>
-            <a:pPr indent="0" marL="0">
-              <a:buNone/>
-            </a:pPr>
-            <a:r>
-              <a:rPr lang="en-US" sz="1400" b="1" dirty="0">
-                <a:solidFill>
-                  <a:srgbClr val="2C3E50"/>
-                </a:solidFill>
-                <a:latin typeface="Calibri" pitchFamily="34" charset="0"/>
-                <a:ea typeface="Calibri" pitchFamily="34" charset="-122"/>
-                <a:cs typeface="Calibri" pitchFamily="34" charset="-120"/>
-              </a:rPr>
-              <a:t>医院睡眠中心覆盖率低</a:t>
-            </a:r>
-            <a:endParaRPr lang="en-US" sz="1400" dirty="0"/>
-          </a:p>
-        </p:txBody>
-      </p:sp>
-      <p:sp>
-        <p:nvSpPr>
-          <p:cNvPr id="15" name="Text 13"/>
-          <p:cNvSpPr/>
-          <p:nvPr/>
-        </p:nvSpPr>
-        <p:spPr>
-          <a:xfrm>
-            <a:off x="5623560" y="2651760"/>
-            <a:ext cx="2834640" cy="548640"/>
-          </a:xfrm>
-          <a:prstGeom prst="rect">
-            <a:avLst/>
-          </a:prstGeom>
-          <a:noFill/>
-          <a:ln/>
-        </p:spPr>
-        <p:txBody>
-          <a:bodyPr wrap="square" rtlCol="0" anchor="ctr"/>
-          <a:lstStyle/>
-          <a:p>
-            <a:pPr indent="0" marL="0">
-              <a:buNone/>
-            </a:pPr>
-            <a:r>
-              <a:rPr lang="en-US" sz="1200" dirty="0">
-                <a:solidFill>
-                  <a:srgbClr val="7F8C8D"/>
-                </a:solidFill>
-                <a:latin typeface="Calibri" pitchFamily="34" charset="0"/>
-                <a:ea typeface="Calibri" pitchFamily="34" charset="-122"/>
-                <a:cs typeface="Calibri" pitchFamily="34" charset="-120"/>
-              </a:rPr>
-              <a:t>资源稀缺 · 费用高昂 · 体验差</a:t>
-            </a:r>
-            <a:endParaRPr lang="en-US" sz="1200" dirty="0"/>
-          </a:p>
-        </p:txBody>
-      </p:sp>
-      <p:sp>
-        <p:nvSpPr>
-          <p:cNvPr id="16" name="Shape 14"/>
-          <p:cNvSpPr/>
-          <p:nvPr/>
-        </p:nvSpPr>
-        <p:spPr>
-          <a:xfrm>
-            <a:off x="4846320" y="3520440"/>
-            <a:ext cx="3749040" cy="1234440"/>
-          </a:xfrm>
-          <a:prstGeom prst="rect">
-            <a:avLst/>
-          </a:prstGeom>
-          <a:solidFill>
-            <a:srgbClr val="FFFFFF"/>
-          </a:solidFill>
-          <a:ln/>
-          <a:effectLst>
-            <a:outerShdw sx="100000" sy="100000" kx="0" ky="0" algn="bl" rotWithShape="0" blurRad="63500" dist="25400" dir="8100000">
-              <a:srgbClr val="000000">
-                <a:alpha val="10000"/>
-              </a:srgbClr>
-            </a:outerShdw>
-          </a:effectLst>
-        </p:spPr>
-      </p:sp>
-      <p:sp>
-        <p:nvSpPr>
-          <p:cNvPr id="17" name="Shape 15"/>
-          <p:cNvSpPr/>
-          <p:nvPr/>
-        </p:nvSpPr>
-        <p:spPr>
-          <a:xfrm>
-            <a:off x="4846320" y="3520440"/>
-            <a:ext cx="91440" cy="1234440"/>
-          </a:xfrm>
-          <a:prstGeom prst="rect">
+          <p:cNvPr id="24" name="Shape 22"/>
+          <p:cNvSpPr/>
+          <p:nvPr/>
+        </p:nvSpPr>
+        <p:spPr>
+          <a:xfrm>
+            <a:off x="4434840" y="3621024"/>
+            <a:ext cx="164592" cy="164592"/>
+          </a:xfrm>
+          <a:prstGeom prst="ellipse">
             <a:avLst/>
           </a:prstGeom>
           <a:solidFill>
@@ -5214,66 +5462,30 @@
       </p:sp>
       <p:sp>
         <p:nvSpPr>
-          <p:cNvPr id="18" name="Text 16"/>
-          <p:cNvSpPr/>
-          <p:nvPr/>
-        </p:nvSpPr>
-        <p:spPr>
-          <a:xfrm>
-            <a:off x="5074920" y="3685032"/>
-            <a:ext cx="548640" cy="548640"/>
-          </a:xfrm>
-          <a:prstGeom prst="rect">
-            <a:avLst/>
-          </a:prstGeom>
-          <a:noFill/>
-          <a:ln/>
-        </p:spPr>
-        <p:txBody>
-          <a:bodyPr wrap="square" rtlCol="0" anchor="ctr"/>
-          <a:lstStyle/>
-          <a:p>
-            <a:pPr indent="0" marL="0">
-              <a:buNone/>
-            </a:pPr>
-            <a:r>
-              <a:rPr lang="en-US" sz="2800" dirty="0">
-                <a:solidFill>
-                  <a:srgbClr val="000000"/>
-                </a:solidFill>
-              </a:rPr>
-              <a:t>🌍</a:t>
-            </a:r>
-            <a:endParaRPr lang="en-US" sz="2800" dirty="0"/>
-          </a:p>
-        </p:txBody>
-      </p:sp>
-      <p:sp>
-        <p:nvSpPr>
-          <p:cNvPr id="19" name="Text 17"/>
-          <p:cNvSpPr/>
-          <p:nvPr/>
-        </p:nvSpPr>
-        <p:spPr>
-          <a:xfrm>
-            <a:off x="5623560" y="3657600"/>
-            <a:ext cx="2834640" cy="411480"/>
-          </a:xfrm>
-          <a:prstGeom prst="rect">
-            <a:avLst/>
-          </a:prstGeom>
-          <a:noFill/>
-          <a:ln/>
-        </p:spPr>
-        <p:txBody>
-          <a:bodyPr wrap="square" rtlCol="0" anchor="ctr"/>
-          <a:lstStyle/>
-          <a:p>
-            <a:pPr indent="0" marL="0">
-              <a:buNone/>
-            </a:pPr>
-            <a:r>
-              <a:rPr lang="en-US" sz="1400" b="1" dirty="0">
+          <p:cNvPr id="25" name="Text 23"/>
+          <p:cNvSpPr/>
+          <p:nvPr/>
+        </p:nvSpPr>
+        <p:spPr>
+          <a:xfrm>
+            <a:off x="4709160" y="3511296"/>
+            <a:ext cx="4114800" cy="411480"/>
+          </a:xfrm>
+          <a:prstGeom prst="rect">
+            <a:avLst/>
+          </a:prstGeom>
+          <a:noFill/>
+          <a:ln/>
+        </p:spPr>
+        <p:txBody>
+          <a:bodyPr wrap="square" rtlCol="0" anchor="ctr"/>
+          <a:lstStyle/>
+          <a:p>
+            <a:pPr indent="0" marL="0">
+              <a:buNone/>
+            </a:pPr>
+            <a:r>
+              <a:rPr lang="en-US" sz="1500" b="1" dirty="0">
                 <a:solidFill>
                   <a:srgbClr val="2C3E50"/>
                 </a:solidFill>
@@ -5281,22 +5493,22 @@
                 <a:ea typeface="Calibri" pitchFamily="34" charset="-122"/>
                 <a:cs typeface="Calibri" pitchFamily="34" charset="-120"/>
               </a:rPr>
-              <a:t>环境问题加剧健康风险</a:t>
-            </a:r>
-            <a:endParaRPr lang="en-US" sz="1400" dirty="0"/>
-          </a:p>
-        </p:txBody>
-      </p:sp>
-      <p:sp>
-        <p:nvSpPr>
-          <p:cNvPr id="20" name="Text 18"/>
-          <p:cNvSpPr/>
-          <p:nvPr/>
-        </p:nvSpPr>
-        <p:spPr>
-          <a:xfrm>
-            <a:off x="5623560" y="4069080"/>
-            <a:ext cx="2834640" cy="548640"/>
+              <a:t>室内环境污染持续损害健康</a:t>
+            </a:r>
+            <a:endParaRPr lang="en-US" sz="1500" dirty="0"/>
+          </a:p>
+        </p:txBody>
+      </p:sp>
+      <p:sp>
+        <p:nvSpPr>
+          <p:cNvPr id="26" name="Text 24"/>
+          <p:cNvSpPr/>
+          <p:nvPr/>
+        </p:nvSpPr>
+        <p:spPr>
+          <a:xfrm>
+            <a:off x="4709160" y="3950208"/>
+            <a:ext cx="4114800" cy="914400"/>
           </a:xfrm>
           <a:prstGeom prst="rect">
             <a:avLst/>
@@ -5320,7 +5532,7 @@
                 <a:ea typeface="Calibri" pitchFamily="34" charset="-122"/>
                 <a:cs typeface="Calibri" pitchFamily="34" charset="-120"/>
               </a:rPr>
-              <a:t>甲醛 · 辐射 · 空气质量差</a:t>
+              <a:t>甲醛超标、PM2.5渗入、辐射无处不在——室内环境问题成为睡眠障碍的重要诱因，却长期被忽视。</a:t>
             </a:r>
             <a:endParaRPr lang="en-US" sz="1200" dirty="0"/>
           </a:p>
@@ -5328,14 +5540,14 @@
       </p:sp>
       <p:sp>
         <p:nvSpPr>
-          <p:cNvPr id="21" name="Shape 19"/>
-          <p:cNvSpPr/>
-          <p:nvPr/>
-        </p:nvSpPr>
-        <p:spPr>
-          <a:xfrm>
-            <a:off x="0" y="4663440"/>
-            <a:ext cx="9144000" cy="480060"/>
+          <p:cNvPr id="27" name="Shape 25"/>
+          <p:cNvSpPr/>
+          <p:nvPr/>
+        </p:nvSpPr>
+        <p:spPr>
+          <a:xfrm>
+            <a:off x="3749040" y="4663440"/>
+            <a:ext cx="5029200" cy="384048"/>
           </a:xfrm>
           <a:prstGeom prst="rect">
             <a:avLst/>
@@ -5348,30 +5560,30 @@
       </p:sp>
       <p:sp>
         <p:nvSpPr>
-          <p:cNvPr id="22" name="Text 20"/>
-          <p:cNvSpPr/>
-          <p:nvPr/>
-        </p:nvSpPr>
-        <p:spPr>
-          <a:xfrm>
-            <a:off x="548640" y="4663440"/>
-            <a:ext cx="8229600" cy="480060"/>
-          </a:xfrm>
-          <a:prstGeom prst="rect">
-            <a:avLst/>
-          </a:prstGeom>
-          <a:noFill/>
-          <a:ln/>
-        </p:spPr>
-        <p:txBody>
-          <a:bodyPr wrap="square" rtlCol="0" anchor="ctr"/>
-          <a:lstStyle/>
-          <a:p>
-            <a:pPr indent="0" marL="0">
-              <a:buNone/>
-            </a:pPr>
-            <a:r>
-              <a:rPr lang="en-US" sz="1400" dirty="0">
+          <p:cNvPr id="28" name="Text 26"/>
+          <p:cNvSpPr/>
+          <p:nvPr/>
+        </p:nvSpPr>
+        <p:spPr>
+          <a:xfrm>
+            <a:off x="3931920" y="4663440"/>
+            <a:ext cx="4846320" cy="384048"/>
+          </a:xfrm>
+          <a:prstGeom prst="rect">
+            <a:avLst/>
+          </a:prstGeom>
+          <a:noFill/>
+          <a:ln/>
+        </p:spPr>
+        <p:txBody>
+          <a:bodyPr wrap="square" rtlCol="0" anchor="ctr"/>
+          <a:lstStyle/>
+          <a:p>
+            <a:pPr indent="0" marL="0">
+              <a:buNone/>
+            </a:pPr>
+            <a:r>
+              <a:rPr lang="en-US" sz="1000" dirty="0">
                 <a:solidFill>
                   <a:srgbClr val="FFFFFF"/>
                 </a:solidFill>
@@ -5379,9 +5591,9 @@
                 <a:ea typeface="Calibri" pitchFamily="34" charset="-122"/>
                 <a:cs typeface="Calibri" pitchFamily="34" charset="-120"/>
               </a:rPr>
-              <a:t>市场需要一个安全、有效、可持续的环境改善解决方案</a:t>
-            </a:r>
-            <a:endParaRPr lang="en-US" sz="1400" dirty="0"/>
+              <a:t>核心矛盾：睡眠问题日益严峻，现有解决方案无法满足安全、有效、可持续的市场需求</a:t>
+            </a:r>
+            <a:endParaRPr lang="en-US" sz="1000" dirty="0"/>
           </a:p>
         </p:txBody>
       </p:sp>
@@ -5399,7 +5611,7 @@
     <p:bg>
       <p:bgPr>
         <a:solidFill>
-          <a:srgbClr val="F0F4F8"/>
+          <a:srgbClr val="0D1B2A"/>
         </a:solidFill>
       </p:bgPr>
     </p:bg>
@@ -5426,7 +5638,27 @@
         <p:spPr>
           <a:xfrm>
             <a:off x="0" y="0"/>
-            <a:ext cx="9144000" cy="73152"/>
+            <a:ext cx="3840480" cy="5143500"/>
+          </a:xfrm>
+          <a:prstGeom prst="rect">
+            <a:avLst/>
+          </a:prstGeom>
+          <a:solidFill>
+            <a:srgbClr val="0A1628"/>
+          </a:solidFill>
+          <a:ln/>
+        </p:spPr>
+      </p:sp>
+      <p:sp>
+        <p:nvSpPr>
+          <p:cNvPr id="3" name="Shape 1"/>
+          <p:cNvSpPr/>
+          <p:nvPr/>
+        </p:nvSpPr>
+        <p:spPr>
+          <a:xfrm>
+            <a:off x="0" y="0"/>
+            <a:ext cx="109728" cy="5143500"/>
           </a:xfrm>
           <a:prstGeom prst="rect">
             <a:avLst/>
@@ -5439,30 +5671,30 @@
       </p:sp>
       <p:sp>
         <p:nvSpPr>
-          <p:cNvPr id="3" name="Text 1"/>
-          <p:cNvSpPr/>
-          <p:nvPr/>
-        </p:nvSpPr>
-        <p:spPr>
-          <a:xfrm>
-            <a:off x="548640" y="320040"/>
-            <a:ext cx="3657600" cy="365760"/>
-          </a:xfrm>
-          <a:prstGeom prst="rect">
-            <a:avLst/>
-          </a:prstGeom>
-          <a:noFill/>
-          <a:ln/>
-        </p:spPr>
-        <p:txBody>
-          <a:bodyPr wrap="square" rtlCol="0" anchor="ctr"/>
-          <a:lstStyle/>
-          <a:p>
-            <a:pPr indent="0" marL="0">
-              <a:buNone/>
-            </a:pPr>
-            <a:r>
-              <a:rPr lang="en-US" sz="1200" b="1" spc="200" kern="0" dirty="0">
+          <p:cNvPr id="4" name="Text 2"/>
+          <p:cNvSpPr/>
+          <p:nvPr/>
+        </p:nvSpPr>
+        <p:spPr>
+          <a:xfrm>
+            <a:off x="411480" y="411480"/>
+            <a:ext cx="914400" cy="320040"/>
+          </a:xfrm>
+          <a:prstGeom prst="rect">
+            <a:avLst/>
+          </a:prstGeom>
+          <a:noFill/>
+          <a:ln/>
+        </p:spPr>
+        <p:txBody>
+          <a:bodyPr wrap="square" rtlCol="0" anchor="ctr"/>
+          <a:lstStyle/>
+          <a:p>
+            <a:pPr indent="0" marL="0">
+              <a:buNone/>
+            </a:pPr>
+            <a:r>
+              <a:rPr lang="en-US" sz="1100" b="1" spc="300" kern="0" dirty="0">
                 <a:solidFill>
                   <a:srgbClr val="00D4AA"/>
                 </a:solidFill>
@@ -5470,40 +5702,79 @@
                 <a:ea typeface="Calibri" pitchFamily="34" charset="-122"/>
                 <a:cs typeface="Calibri" pitchFamily="34" charset="-120"/>
               </a:rPr>
-              <a:t>02  解决方案</a:t>
-            </a:r>
-            <a:endParaRPr lang="en-US" sz="1200" dirty="0"/>
-          </a:p>
-        </p:txBody>
-      </p:sp>
-      <p:sp>
-        <p:nvSpPr>
-          <p:cNvPr id="4" name="Text 2"/>
-          <p:cNvSpPr/>
-          <p:nvPr/>
-        </p:nvSpPr>
-        <p:spPr>
-          <a:xfrm>
-            <a:off x="548640" y="822960"/>
-            <a:ext cx="2743200" cy="914400"/>
-          </a:xfrm>
-          <a:prstGeom prst="rect">
-            <a:avLst/>
-          </a:prstGeom>
-          <a:noFill/>
-          <a:ln/>
-        </p:spPr>
-        <p:txBody>
-          <a:bodyPr wrap="square" rtlCol="0" anchor="ctr"/>
-          <a:lstStyle/>
-          <a:p>
-            <a:pPr indent="0" marL="0">
-              <a:buNone/>
-            </a:pPr>
-            <a:r>
-              <a:rPr lang="en-US" sz="6800" b="1" dirty="0">
-                <a:solidFill>
-                  <a:srgbClr val="1A3A6B"/>
+              <a:t>02</a:t>
+            </a:r>
+            <a:endParaRPr lang="en-US" sz="1100" dirty="0"/>
+          </a:p>
+        </p:txBody>
+      </p:sp>
+      <p:sp>
+        <p:nvSpPr>
+          <p:cNvPr id="5" name="Text 3"/>
+          <p:cNvSpPr/>
+          <p:nvPr/>
+        </p:nvSpPr>
+        <p:spPr>
+          <a:xfrm>
+            <a:off x="411480" y="685800"/>
+            <a:ext cx="2743200" cy="274320"/>
+          </a:xfrm>
+          <a:prstGeom prst="rect">
+            <a:avLst/>
+          </a:prstGeom>
+          <a:noFill/>
+          <a:ln/>
+        </p:spPr>
+        <p:txBody>
+          <a:bodyPr wrap="square" rtlCol="0" anchor="ctr"/>
+          <a:lstStyle/>
+          <a:p>
+            <a:pPr indent="0" marL="0">
+              <a:buNone/>
+            </a:pPr>
+            <a:r>
+              <a:rPr lang="en-US" sz="1100" dirty="0">
+                <a:solidFill>
+                  <a:srgbClr val="6B8AB5"/>
+                </a:solidFill>
+                <a:latin typeface="Calibri" pitchFamily="34" charset="0"/>
+                <a:ea typeface="Calibri" pitchFamily="34" charset="-122"/>
+                <a:cs typeface="Calibri" pitchFamily="34" charset="-120"/>
+              </a:rPr>
+              <a:t>解决方案</a:t>
+            </a:r>
+            <a:endParaRPr lang="en-US" sz="1100" dirty="0"/>
+          </a:p>
+        </p:txBody>
+      </p:sp>
+      <p:sp>
+        <p:nvSpPr>
+          <p:cNvPr id="6" name="Text 4"/>
+          <p:cNvSpPr/>
+          <p:nvPr/>
+        </p:nvSpPr>
+        <p:spPr>
+          <a:xfrm>
+            <a:off x="411480" y="1143000"/>
+            <a:ext cx="3200400" cy="1005840"/>
+          </a:xfrm>
+          <a:prstGeom prst="rect">
+            <a:avLst/>
+          </a:prstGeom>
+          <a:noFill/>
+          <a:ln/>
+        </p:spPr>
+        <p:txBody>
+          <a:bodyPr wrap="square" rtlCol="0" anchor="ctr"/>
+          <a:lstStyle/>
+          <a:p>
+            <a:pPr indent="0" marL="0">
+              <a:buNone/>
+            </a:pPr>
+            <a:r>
+              <a:rPr lang="en-US" sz="7200" b="1" dirty="0">
+                <a:solidFill>
+                  <a:srgbClr val="FFFFFF"/>
                 </a:solidFill>
                 <a:latin typeface="Georgia" pitchFamily="34" charset="0"/>
                 <a:ea typeface="Georgia" pitchFamily="34" charset="-122"/>
@@ -5511,38 +5782,38 @@
               </a:rPr>
               <a:t>AMIC</a:t>
             </a:r>
-            <a:endParaRPr lang="en-US" sz="6800" dirty="0"/>
-          </a:p>
-        </p:txBody>
-      </p:sp>
-      <p:sp>
-        <p:nvSpPr>
-          <p:cNvPr id="5" name="Text 3"/>
-          <p:cNvSpPr/>
-          <p:nvPr/>
-        </p:nvSpPr>
-        <p:spPr>
-          <a:xfrm>
-            <a:off x="548640" y="1691640"/>
-            <a:ext cx="4114800" cy="502920"/>
-          </a:xfrm>
-          <a:prstGeom prst="rect">
-            <a:avLst/>
-          </a:prstGeom>
-          <a:noFill/>
-          <a:ln/>
-        </p:spPr>
-        <p:txBody>
-          <a:bodyPr wrap="square" rtlCol="0" anchor="ctr"/>
-          <a:lstStyle/>
-          <a:p>
-            <a:pPr indent="0" marL="0">
-              <a:buNone/>
-            </a:pPr>
-            <a:r>
-              <a:rPr lang="en-US" sz="2200" b="1" dirty="0">
-                <a:solidFill>
-                  <a:srgbClr val="0D1B2A"/>
+            <a:endParaRPr lang="en-US" sz="7200" dirty="0"/>
+          </a:p>
+        </p:txBody>
+      </p:sp>
+      <p:sp>
+        <p:nvSpPr>
+          <p:cNvPr id="7" name="Text 5"/>
+          <p:cNvSpPr/>
+          <p:nvPr/>
+        </p:nvSpPr>
+        <p:spPr>
+          <a:xfrm>
+            <a:off x="411480" y="2148840"/>
+            <a:ext cx="3200400" cy="411480"/>
+          </a:xfrm>
+          <a:prstGeom prst="rect">
+            <a:avLst/>
+          </a:prstGeom>
+          <a:noFill/>
+          <a:ln/>
+        </p:spPr>
+        <p:txBody>
+          <a:bodyPr wrap="square" rtlCol="0" anchor="ctr"/>
+          <a:lstStyle/>
+          <a:p>
+            <a:pPr indent="0" marL="0">
+              <a:buNone/>
+            </a:pPr>
+            <a:r>
+              <a:rPr lang="en-US" sz="1700" b="1" dirty="0">
+                <a:solidFill>
+                  <a:srgbClr val="00D4AA"/>
                 </a:solidFill>
                 <a:latin typeface="Calibri" pitchFamily="34" charset="0"/>
                 <a:ea typeface="Calibri" pitchFamily="34" charset="-122"/>
@@ -5550,28 +5821,28 @@
               </a:rPr>
               <a:t>无源负氧离子技术</a:t>
             </a:r>
-            <a:endParaRPr lang="en-US" sz="2200" dirty="0"/>
-          </a:p>
-        </p:txBody>
-      </p:sp>
-      <p:sp>
-        <p:nvSpPr>
-          <p:cNvPr id="6" name="Shape 4"/>
-          <p:cNvSpPr/>
-          <p:nvPr/>
-        </p:nvSpPr>
-        <p:spPr>
-          <a:xfrm>
-            <a:off x="548640" y="2286000"/>
-            <a:ext cx="2743200" cy="0"/>
+            <a:endParaRPr lang="en-US" sz="1700" dirty="0"/>
+          </a:p>
+        </p:txBody>
+      </p:sp>
+      <p:sp>
+        <p:nvSpPr>
+          <p:cNvPr id="8" name="Shape 6"/>
+          <p:cNvSpPr/>
+          <p:nvPr/>
+        </p:nvSpPr>
+        <p:spPr>
+          <a:xfrm>
+            <a:off x="411480" y="2697480"/>
+            <a:ext cx="2286000" cy="0"/>
           </a:xfrm>
           <a:prstGeom prst="line">
             <a:avLst/>
           </a:prstGeom>
           <a:noFill/>
-          <a:ln w="38100">
+          <a:ln w="12700">
             <a:solidFill>
-              <a:srgbClr val="00D4AA"/>
+              <a:srgbClr val="2A4A7A"/>
             </a:solidFill>
             <a:prstDash val="solid"/>
           </a:ln>
@@ -5579,80 +5850,324 @@
       </p:sp>
       <p:sp>
         <p:nvSpPr>
-          <p:cNvPr id="7" name="Text 5"/>
-          <p:cNvSpPr/>
-          <p:nvPr/>
-        </p:nvSpPr>
-        <p:spPr>
-          <a:xfrm>
-            <a:off x="548640" y="2423160"/>
-            <a:ext cx="4114800" cy="365760"/>
-          </a:xfrm>
-          <a:prstGeom prst="rect">
-            <a:avLst/>
-          </a:prstGeom>
-          <a:noFill/>
-          <a:ln/>
-        </p:spPr>
-        <p:txBody>
-          <a:bodyPr wrap="square" rtlCol="0" anchor="ctr"/>
-          <a:lstStyle/>
-          <a:p>
-            <a:pPr indent="0" marL="0">
-              <a:buNone/>
-            </a:pPr>
-            <a:r>
-              <a:rPr lang="en-US" sz="1400" dirty="0">
+          <p:cNvPr id="9" name="Text 7"/>
+          <p:cNvSpPr/>
+          <p:nvPr/>
+        </p:nvSpPr>
+        <p:spPr>
+          <a:xfrm>
+            <a:off x="411480" y="2834640"/>
+            <a:ext cx="3108960" cy="685800"/>
+          </a:xfrm>
+          <a:prstGeom prst="rect">
+            <a:avLst/>
+          </a:prstGeom>
+          <a:noFill/>
+          <a:ln/>
+        </p:spPr>
+        <p:txBody>
+          <a:bodyPr wrap="square" rtlCol="0" anchor="ctr"/>
+          <a:lstStyle/>
+          <a:p>
+            <a:pPr indent="0" marL="0">
+              <a:buNone/>
+            </a:pPr>
+            <a:r>
+              <a:rPr lang="en-US" sz="1200" dirty="0">
+                <a:solidFill>
+                  <a:srgbClr val="8FA3BF"/>
+                </a:solidFill>
+                <a:latin typeface="Calibri" pitchFamily="34" charset="0"/>
+                <a:ea typeface="Calibri" pitchFamily="34" charset="-122"/>
+                <a:cs typeface="Calibri" pitchFamily="34" charset="-120"/>
+              </a:rPr>
+              <a:t>被动释放 · 无需能耗 · 持久改善</a:t>
+            </a:r>
+            <a:endParaRPr lang="en-US" sz="1200" dirty="0"/>
+          </a:p>
+          <a:p>
+            <a:pPr indent="0" marL="0">
+              <a:buNone/>
+            </a:pPr>
+            <a:r>
+              <a:rPr lang="en-US" sz="1200" dirty="0">
+                <a:solidFill>
+                  <a:srgbClr val="8FA3BF"/>
+                </a:solidFill>
+                <a:latin typeface="Calibri" pitchFamily="34" charset="0"/>
+                <a:ea typeface="Calibri" pitchFamily="34" charset="-122"/>
+                <a:cs typeface="Calibri" pitchFamily="34" charset="-120"/>
+              </a:rPr>
+              <a:t>还原自然空气，无醉氧风险</a:t>
+            </a:r>
+            <a:endParaRPr lang="en-US" sz="1200" dirty="0"/>
+          </a:p>
+        </p:txBody>
+      </p:sp>
+      <p:sp>
+        <p:nvSpPr>
+          <p:cNvPr id="10" name="Text 8"/>
+          <p:cNvSpPr/>
+          <p:nvPr/>
+        </p:nvSpPr>
+        <p:spPr>
+          <a:xfrm>
+            <a:off x="411480" y="3611880"/>
+            <a:ext cx="1645920" cy="365760"/>
+          </a:xfrm>
+          <a:prstGeom prst="rect">
+            <a:avLst/>
+          </a:prstGeom>
+          <a:noFill/>
+          <a:ln/>
+        </p:spPr>
+        <p:txBody>
+          <a:bodyPr wrap="square" rtlCol="0" anchor="ctr"/>
+          <a:lstStyle/>
+          <a:p>
+            <a:pPr indent="0" marL="0">
+              <a:buNone/>
+            </a:pPr>
+            <a:r>
+              <a:rPr lang="en-US" sz="1600" b="1" dirty="0">
                 <a:solidFill>
                   <a:srgbClr val="00D4AA"/>
                 </a:solidFill>
-                <a:latin typeface="Calibri" pitchFamily="34" charset="0"/>
-                <a:ea typeface="Calibri" pitchFamily="34" charset="-122"/>
-                <a:cs typeface="Calibri" pitchFamily="34" charset="-120"/>
-              </a:rPr>
-              <a:t>被动释放 · 无需能耗 · 持久改善</a:t>
-            </a:r>
-            <a:endParaRPr lang="en-US" sz="1400" dirty="0"/>
-          </a:p>
-        </p:txBody>
-      </p:sp>
-      <p:sp>
-        <p:nvSpPr>
-          <p:cNvPr id="8" name="Shape 6"/>
-          <p:cNvSpPr/>
-          <p:nvPr/>
-        </p:nvSpPr>
-        <p:spPr>
-          <a:xfrm>
-            <a:off x="4846320" y="777240"/>
-            <a:ext cx="1325880" cy="3794760"/>
+                <a:latin typeface="Georgia" pitchFamily="34" charset="0"/>
+                <a:ea typeface="Georgia" pitchFamily="34" charset="-122"/>
+                <a:cs typeface="Georgia" pitchFamily="34" charset="-120"/>
+              </a:rPr>
+              <a:t>99.9%</a:t>
+            </a:r>
+            <a:endParaRPr lang="en-US" sz="1600" dirty="0"/>
+          </a:p>
+        </p:txBody>
+      </p:sp>
+      <p:sp>
+        <p:nvSpPr>
+          <p:cNvPr id="11" name="Text 9"/>
+          <p:cNvSpPr/>
+          <p:nvPr/>
+        </p:nvSpPr>
+        <p:spPr>
+          <a:xfrm>
+            <a:off x="2057400" y="3657600"/>
+            <a:ext cx="1645920" cy="320040"/>
+          </a:xfrm>
+          <a:prstGeom prst="rect">
+            <a:avLst/>
+          </a:prstGeom>
+          <a:noFill/>
+          <a:ln/>
+        </p:spPr>
+        <p:txBody>
+          <a:bodyPr wrap="square" rtlCol="0" anchor="ctr"/>
+          <a:lstStyle/>
+          <a:p>
+            <a:pPr indent="0" marL="0">
+              <a:buNone/>
+            </a:pPr>
+            <a:r>
+              <a:rPr lang="en-US" sz="1100" dirty="0">
+                <a:solidFill>
+                  <a:srgbClr val="8FA3BF"/>
+                </a:solidFill>
+                <a:latin typeface="Calibri" pitchFamily="34" charset="0"/>
+                <a:ea typeface="Calibri" pitchFamily="34" charset="-122"/>
+                <a:cs typeface="Calibri" pitchFamily="34" charset="-120"/>
+              </a:rPr>
+              <a:t>抗菌率</a:t>
+            </a:r>
+            <a:endParaRPr lang="en-US" sz="1100" dirty="0"/>
+          </a:p>
+        </p:txBody>
+      </p:sp>
+      <p:sp>
+        <p:nvSpPr>
+          <p:cNvPr id="12" name="Text 10"/>
+          <p:cNvSpPr/>
+          <p:nvPr/>
+        </p:nvSpPr>
+        <p:spPr>
+          <a:xfrm>
+            <a:off x="411480" y="4114800"/>
+            <a:ext cx="1645920" cy="365760"/>
+          </a:xfrm>
+          <a:prstGeom prst="rect">
+            <a:avLst/>
+          </a:prstGeom>
+          <a:noFill/>
+          <a:ln/>
+        </p:spPr>
+        <p:txBody>
+          <a:bodyPr wrap="square" rtlCol="0" anchor="ctr"/>
+          <a:lstStyle/>
+          <a:p>
+            <a:pPr indent="0" marL="0">
+              <a:buNone/>
+            </a:pPr>
+            <a:r>
+              <a:rPr lang="en-US" sz="1600" b="1" dirty="0">
+                <a:solidFill>
+                  <a:srgbClr val="00D4AA"/>
+                </a:solidFill>
+                <a:latin typeface="Georgia" pitchFamily="34" charset="0"/>
+                <a:ea typeface="Georgia" pitchFamily="34" charset="-122"/>
+                <a:cs typeface="Georgia" pitchFamily="34" charset="-120"/>
+              </a:rPr>
+              <a:t>93%</a:t>
+            </a:r>
+            <a:endParaRPr lang="en-US" sz="1600" dirty="0"/>
+          </a:p>
+        </p:txBody>
+      </p:sp>
+      <p:sp>
+        <p:nvSpPr>
+          <p:cNvPr id="13" name="Text 11"/>
+          <p:cNvSpPr/>
+          <p:nvPr/>
+        </p:nvSpPr>
+        <p:spPr>
+          <a:xfrm>
+            <a:off x="2057400" y="4160520"/>
+            <a:ext cx="1645920" cy="320040"/>
+          </a:xfrm>
+          <a:prstGeom prst="rect">
+            <a:avLst/>
+          </a:prstGeom>
+          <a:noFill/>
+          <a:ln/>
+        </p:spPr>
+        <p:txBody>
+          <a:bodyPr wrap="square" rtlCol="0" anchor="ctr"/>
+          <a:lstStyle/>
+          <a:p>
+            <a:pPr indent="0" marL="0">
+              <a:buNone/>
+            </a:pPr>
+            <a:r>
+              <a:rPr lang="en-US" sz="1100" dirty="0">
+                <a:solidFill>
+                  <a:srgbClr val="8FA3BF"/>
+                </a:solidFill>
+                <a:latin typeface="Calibri" pitchFamily="34" charset="0"/>
+                <a:ea typeface="Calibri" pitchFamily="34" charset="-122"/>
+                <a:cs typeface="Calibri" pitchFamily="34" charset="-120"/>
+              </a:rPr>
+              <a:t>功能持久性</a:t>
+            </a:r>
+            <a:endParaRPr lang="en-US" sz="1100" dirty="0"/>
+          </a:p>
+        </p:txBody>
+      </p:sp>
+      <p:sp>
+        <p:nvSpPr>
+          <p:cNvPr id="14" name="Text 12"/>
+          <p:cNvSpPr/>
+          <p:nvPr/>
+        </p:nvSpPr>
+        <p:spPr>
+          <a:xfrm>
+            <a:off x="411480" y="4617720"/>
+            <a:ext cx="1645920" cy="365760"/>
+          </a:xfrm>
+          <a:prstGeom prst="rect">
+            <a:avLst/>
+          </a:prstGeom>
+          <a:noFill/>
+          <a:ln/>
+        </p:spPr>
+        <p:txBody>
+          <a:bodyPr wrap="square" rtlCol="0" anchor="ctr"/>
+          <a:lstStyle/>
+          <a:p>
+            <a:pPr indent="0" marL="0">
+              <a:buNone/>
+            </a:pPr>
+            <a:r>
+              <a:rPr lang="en-US" sz="1600" b="1" dirty="0">
+                <a:solidFill>
+                  <a:srgbClr val="00D4AA"/>
+                </a:solidFill>
+                <a:latin typeface="Georgia" pitchFamily="34" charset="0"/>
+                <a:ea typeface="Georgia" pitchFamily="34" charset="-122"/>
+                <a:cs typeface="Georgia" pitchFamily="34" charset="-120"/>
+              </a:rPr>
+              <a:t>0</a:t>
+            </a:r>
+            <a:endParaRPr lang="en-US" sz="1600" dirty="0"/>
+          </a:p>
+        </p:txBody>
+      </p:sp>
+      <p:sp>
+        <p:nvSpPr>
+          <p:cNvPr id="15" name="Text 13"/>
+          <p:cNvSpPr/>
+          <p:nvPr/>
+        </p:nvSpPr>
+        <p:spPr>
+          <a:xfrm>
+            <a:off x="2057400" y="4663440"/>
+            <a:ext cx="1645920" cy="320040"/>
+          </a:xfrm>
+          <a:prstGeom prst="rect">
+            <a:avLst/>
+          </a:prstGeom>
+          <a:noFill/>
+          <a:ln/>
+        </p:spPr>
+        <p:txBody>
+          <a:bodyPr wrap="square" rtlCol="0" anchor="ctr"/>
+          <a:lstStyle/>
+          <a:p>
+            <a:pPr indent="0" marL="0">
+              <a:buNone/>
+            </a:pPr>
+            <a:r>
+              <a:rPr lang="en-US" sz="1100" dirty="0">
+                <a:solidFill>
+                  <a:srgbClr val="8FA3BF"/>
+                </a:solidFill>
+                <a:latin typeface="Calibri" pitchFamily="34" charset="0"/>
+                <a:ea typeface="Calibri" pitchFamily="34" charset="-122"/>
+                <a:cs typeface="Calibri" pitchFamily="34" charset="-120"/>
+              </a:rPr>
+              <a:t>能耗·臭氧·辐射</a:t>
+            </a:r>
+            <a:endParaRPr lang="en-US" sz="1100" dirty="0"/>
+          </a:p>
+        </p:txBody>
+      </p:sp>
+      <p:sp>
+        <p:nvSpPr>
+          <p:cNvPr id="16" name="Shape 14"/>
+          <p:cNvSpPr/>
+          <p:nvPr/>
+        </p:nvSpPr>
+        <p:spPr>
+          <a:xfrm>
+            <a:off x="4160520" y="411480"/>
+            <a:ext cx="1554480" cy="4206240"/>
           </a:xfrm>
           <a:prstGeom prst="rect">
             <a:avLst/>
           </a:prstGeom>
           <a:solidFill>
-            <a:srgbClr val="FFFFFF"/>
+            <a:srgbClr val="1A3A6B"/>
           </a:solidFill>
           <a:ln/>
-          <a:effectLst>
-            <a:outerShdw sx="100000" sy="100000" kx="0" ky="0" algn="bl" rotWithShape="0" blurRad="63500" dist="25400" dir="8100000">
-              <a:srgbClr val="000000">
-                <a:alpha val="10000"/>
-              </a:srgbClr>
-            </a:outerShdw>
-          </a:effectLst>
-        </p:spPr>
-      </p:sp>
-      <p:sp>
-        <p:nvSpPr>
-          <p:cNvPr id="9" name="Shape 7"/>
-          <p:cNvSpPr/>
-          <p:nvPr/>
-        </p:nvSpPr>
-        <p:spPr>
-          <a:xfrm>
-            <a:off x="4846320" y="777240"/>
-            <a:ext cx="1325880" cy="91440"/>
+        </p:spPr>
+      </p:sp>
+      <p:sp>
+        <p:nvSpPr>
+          <p:cNvPr id="17" name="Shape 15"/>
+          <p:cNvSpPr/>
+          <p:nvPr/>
+        </p:nvSpPr>
+        <p:spPr>
+          <a:xfrm>
+            <a:off x="4160520" y="411480"/>
+            <a:ext cx="1554480" cy="91440"/>
           </a:xfrm>
           <a:prstGeom prst="rect">
             <a:avLst/>
@@ -5665,14 +6180,14 @@
       </p:sp>
       <p:sp>
         <p:nvSpPr>
-          <p:cNvPr id="10" name="Text 8"/>
-          <p:cNvSpPr/>
-          <p:nvPr/>
-        </p:nvSpPr>
-        <p:spPr>
-          <a:xfrm>
-            <a:off x="4846320" y="914400"/>
-            <a:ext cx="1325880" cy="502920"/>
+          <p:cNvPr id="18" name="Text 16"/>
+          <p:cNvSpPr/>
+          <p:nvPr/>
+        </p:nvSpPr>
+        <p:spPr>
+          <a:xfrm>
+            <a:off x="4160520" y="594360"/>
+            <a:ext cx="1554480" cy="365760"/>
           </a:xfrm>
           <a:prstGeom prst="rect">
             <a:avLst/>
@@ -5688,27 +6203,30 @@
               <a:buNone/>
             </a:pPr>
             <a:r>
-              <a:rPr lang="en-US" sz="2600" dirty="0">
-                <a:solidFill>
-                  <a:srgbClr val="000000"/>
-                </a:solidFill>
-              </a:rPr>
-              <a:t>⚗️</a:t>
-            </a:r>
-            <a:endParaRPr lang="en-US" sz="2600" dirty="0"/>
-          </a:p>
-        </p:txBody>
-      </p:sp>
-      <p:sp>
-        <p:nvSpPr>
-          <p:cNvPr id="11" name="Text 9"/>
-          <p:cNvSpPr/>
-          <p:nvPr/>
-        </p:nvSpPr>
-        <p:spPr>
-          <a:xfrm>
-            <a:off x="4846320" y="1417320"/>
-            <a:ext cx="1325880" cy="411480"/>
+              <a:rPr lang="en-US" sz="2400" b="1" dirty="0">
+                <a:solidFill>
+                  <a:srgbClr val="00D4AA"/>
+                </a:solidFill>
+                <a:latin typeface="Georgia" pitchFamily="34" charset="0"/>
+                <a:ea typeface="Georgia" pitchFamily="34" charset="-122"/>
+                <a:cs typeface="Georgia" pitchFamily="34" charset="-120"/>
+              </a:rPr>
+              <a:t>01</a:t>
+            </a:r>
+            <a:endParaRPr lang="en-US" sz="2400" dirty="0"/>
+          </a:p>
+        </p:txBody>
+      </p:sp>
+      <p:sp>
+        <p:nvSpPr>
+          <p:cNvPr id="19" name="Text 17"/>
+          <p:cNvSpPr/>
+          <p:nvPr/>
+        </p:nvSpPr>
+        <p:spPr>
+          <a:xfrm>
+            <a:off x="4160520" y="1005840"/>
+            <a:ext cx="1554480" cy="365760"/>
           </a:xfrm>
           <a:prstGeom prst="rect">
             <a:avLst/>
@@ -5724,9 +6242,9 @@
               <a:buNone/>
             </a:pPr>
             <a:r>
-              <a:rPr lang="en-US" sz="1200" b="1" dirty="0">
-                <a:solidFill>
-                  <a:srgbClr val="2C3E50"/>
+              <a:rPr lang="en-US" sz="1300" b="1" dirty="0">
+                <a:solidFill>
+                  <a:srgbClr val="FFFFFF"/>
                 </a:solidFill>
                 <a:latin typeface="Calibri" pitchFamily="34" charset="0"/>
                 <a:ea typeface="Calibri" pitchFamily="34" charset="-122"/>
@@ -5734,28 +6252,28 @@
               </a:rPr>
               <a:t>材料提纯</a:t>
             </a:r>
-            <a:endParaRPr lang="en-US" sz="1200" dirty="0"/>
-          </a:p>
-        </p:txBody>
-      </p:sp>
-      <p:sp>
-        <p:nvSpPr>
-          <p:cNvPr id="12" name="Shape 10"/>
-          <p:cNvSpPr/>
-          <p:nvPr/>
-        </p:nvSpPr>
-        <p:spPr>
-          <a:xfrm>
-            <a:off x="5120640" y="1874520"/>
-            <a:ext cx="777240" cy="0"/>
+            <a:endParaRPr lang="en-US" sz="1300" dirty="0"/>
+          </a:p>
+        </p:txBody>
+      </p:sp>
+      <p:sp>
+        <p:nvSpPr>
+          <p:cNvPr id="20" name="Shape 18"/>
+          <p:cNvSpPr/>
+          <p:nvPr/>
+        </p:nvSpPr>
+        <p:spPr>
+          <a:xfrm>
+            <a:off x="4389120" y="1417320"/>
+            <a:ext cx="1097280" cy="0"/>
           </a:xfrm>
           <a:prstGeom prst="line">
             <a:avLst/>
           </a:prstGeom>
           <a:noFill/>
-          <a:ln w="12700">
+          <a:ln w="6350">
             <a:solidFill>
-              <a:srgbClr val="E2E8F0"/>
+              <a:srgbClr val="2A4A7A"/>
             </a:solidFill>
             <a:prstDash val="solid"/>
           </a:ln>
@@ -5763,158 +6281,250 @@
       </p:sp>
       <p:sp>
         <p:nvSpPr>
-          <p:cNvPr id="13" name="Text 11"/>
-          <p:cNvSpPr/>
-          <p:nvPr/>
-        </p:nvSpPr>
-        <p:spPr>
-          <a:xfrm>
-            <a:off x="4919472" y="1965960"/>
-            <a:ext cx="1188720" cy="594360"/>
-          </a:xfrm>
-          <a:prstGeom prst="rect">
-            <a:avLst/>
-          </a:prstGeom>
-          <a:noFill/>
-          <a:ln/>
-        </p:spPr>
-        <p:txBody>
-          <a:bodyPr wrap="square" rtlCol="0" anchor="ctr"/>
-          <a:lstStyle/>
-          <a:p>
-            <a:pPr indent="0" marL="0">
-              <a:buNone/>
-            </a:pPr>
-            <a:r>
-              <a:rPr lang="en-US" sz="1000" dirty="0">
-                <a:solidFill>
-                  <a:srgbClr val="7F8C8D"/>
-                </a:solidFill>
-                <a:latin typeface="Calibri" pitchFamily="34" charset="0"/>
-                <a:ea typeface="Calibri" pitchFamily="34" charset="-122"/>
-                <a:cs typeface="Calibri" pitchFamily="34" charset="-120"/>
-              </a:rPr>
-              <a:t>→  多道提纯去除有害杂质</a:t>
-            </a:r>
-            <a:endParaRPr lang="en-US" sz="1000" dirty="0"/>
-          </a:p>
-        </p:txBody>
-      </p:sp>
-      <p:sp>
-        <p:nvSpPr>
-          <p:cNvPr id="14" name="Text 12"/>
-          <p:cNvSpPr/>
-          <p:nvPr/>
-        </p:nvSpPr>
-        <p:spPr>
-          <a:xfrm>
-            <a:off x="4919472" y="2606040"/>
-            <a:ext cx="1188720" cy="594360"/>
-          </a:xfrm>
-          <a:prstGeom prst="rect">
-            <a:avLst/>
-          </a:prstGeom>
-          <a:noFill/>
-          <a:ln/>
-        </p:spPr>
-        <p:txBody>
-          <a:bodyPr wrap="square" rtlCol="0" anchor="ctr"/>
-          <a:lstStyle/>
-          <a:p>
-            <a:pPr indent="0" marL="0">
-              <a:buNone/>
-            </a:pPr>
-            <a:r>
-              <a:rPr lang="en-US" sz="1000" dirty="0">
-                <a:solidFill>
-                  <a:srgbClr val="7F8C8D"/>
-                </a:solidFill>
-                <a:latin typeface="Calibri" pitchFamily="34" charset="0"/>
-                <a:ea typeface="Calibri" pitchFamily="34" charset="-122"/>
-                <a:cs typeface="Calibri" pitchFamily="34" charset="-120"/>
-              </a:rPr>
-              <a:t>→  释放浓度安全可控</a:t>
-            </a:r>
-            <a:endParaRPr lang="en-US" sz="1000" dirty="0"/>
-          </a:p>
-        </p:txBody>
-      </p:sp>
-      <p:sp>
-        <p:nvSpPr>
-          <p:cNvPr id="15" name="Text 13"/>
-          <p:cNvSpPr/>
-          <p:nvPr/>
-        </p:nvSpPr>
-        <p:spPr>
-          <a:xfrm>
-            <a:off x="4919472" y="3246120"/>
-            <a:ext cx="1188720" cy="594360"/>
-          </a:xfrm>
-          <a:prstGeom prst="rect">
-            <a:avLst/>
-          </a:prstGeom>
-          <a:noFill/>
-          <a:ln/>
-        </p:spPr>
-        <p:txBody>
-          <a:bodyPr wrap="square" rtlCol="0" anchor="ctr"/>
-          <a:lstStyle/>
-          <a:p>
-            <a:pPr indent="0" marL="0">
-              <a:buNone/>
-            </a:pPr>
-            <a:r>
-              <a:rPr lang="en-US" sz="1000" dirty="0">
-                <a:solidFill>
-                  <a:srgbClr val="7F8C8D"/>
-                </a:solidFill>
-                <a:latin typeface="Calibri" pitchFamily="34" charset="0"/>
-                <a:ea typeface="Calibri" pitchFamily="34" charset="-122"/>
-                <a:cs typeface="Calibri" pitchFamily="34" charset="-120"/>
-              </a:rPr>
-              <a:t>→  森林级浓度无醉氧</a:t>
-            </a:r>
-            <a:endParaRPr lang="en-US" sz="1000" dirty="0"/>
-          </a:p>
-        </p:txBody>
-      </p:sp>
-      <p:sp>
-        <p:nvSpPr>
-          <p:cNvPr id="16" name="Shape 14"/>
-          <p:cNvSpPr/>
-          <p:nvPr/>
-        </p:nvSpPr>
-        <p:spPr>
-          <a:xfrm>
-            <a:off x="6263640" y="777240"/>
-            <a:ext cx="1325880" cy="3794760"/>
-          </a:xfrm>
-          <a:prstGeom prst="rect">
+          <p:cNvPr id="21" name="Text 19"/>
+          <p:cNvSpPr/>
+          <p:nvPr/>
+        </p:nvSpPr>
+        <p:spPr>
+          <a:xfrm>
+            <a:off x="4251960" y="1508760"/>
+            <a:ext cx="1371600" cy="1097280"/>
+          </a:xfrm>
+          <a:prstGeom prst="rect">
+            <a:avLst/>
+          </a:prstGeom>
+          <a:noFill/>
+          <a:ln/>
+        </p:spPr>
+        <p:txBody>
+          <a:bodyPr wrap="square" rtlCol="0" anchor="ctr"/>
+          <a:lstStyle/>
+          <a:p>
+            <a:pPr indent="0" marL="0">
+              <a:buNone/>
+            </a:pPr>
+            <a:r>
+              <a:rPr lang="en-US" sz="950" dirty="0">
+                <a:solidFill>
+                  <a:srgbClr val="A0B4CC"/>
+                </a:solidFill>
+                <a:latin typeface="Calibri" pitchFamily="34" charset="0"/>
+                <a:ea typeface="Calibri" pitchFamily="34" charset="-122"/>
+                <a:cs typeface="Calibri" pitchFamily="34" charset="-120"/>
+              </a:rPr>
+              <a:t>原材料经多道提纯工艺，有效去除杂质离子，确保负氧离子释放的稳定性与安全性，避免副产物风险。</a:t>
+            </a:r>
+            <a:endParaRPr lang="en-US" sz="950" dirty="0"/>
+          </a:p>
+        </p:txBody>
+      </p:sp>
+      <p:sp>
+        <p:nvSpPr>
+          <p:cNvPr id="22" name="Shape 20"/>
+          <p:cNvSpPr/>
+          <p:nvPr/>
+        </p:nvSpPr>
+        <p:spPr>
+          <a:xfrm>
+            <a:off x="4270248" y="2670048"/>
+            <a:ext cx="109728" cy="109728"/>
+          </a:xfrm>
+          <a:prstGeom prst="ellipse">
             <a:avLst/>
           </a:prstGeom>
           <a:solidFill>
-            <a:srgbClr val="FFFFFF"/>
+            <a:srgbClr val="00D4AA"/>
           </a:solidFill>
           <a:ln/>
-          <a:effectLst>
-            <a:outerShdw sx="100000" sy="100000" kx="0" ky="0" algn="bl" rotWithShape="0" blurRad="63500" dist="25400" dir="8100000">
-              <a:srgbClr val="000000">
-                <a:alpha val="10000"/>
-              </a:srgbClr>
-            </a:outerShdw>
-          </a:effectLst>
-        </p:spPr>
-      </p:sp>
-      <p:sp>
-        <p:nvSpPr>
-          <p:cNvPr id="17" name="Shape 15"/>
-          <p:cNvSpPr/>
-          <p:nvPr/>
-        </p:nvSpPr>
-        <p:spPr>
-          <a:xfrm>
-            <a:off x="6263640" y="777240"/>
-            <a:ext cx="1325880" cy="91440"/>
+        </p:spPr>
+      </p:sp>
+      <p:sp>
+        <p:nvSpPr>
+          <p:cNvPr id="23" name="Text 21"/>
+          <p:cNvSpPr/>
+          <p:nvPr/>
+        </p:nvSpPr>
+        <p:spPr>
+          <a:xfrm>
+            <a:off x="4434840" y="2606040"/>
+            <a:ext cx="1234440" cy="457200"/>
+          </a:xfrm>
+          <a:prstGeom prst="rect">
+            <a:avLst/>
+          </a:prstGeom>
+          <a:noFill/>
+          <a:ln/>
+        </p:spPr>
+        <p:txBody>
+          <a:bodyPr wrap="square" rtlCol="0" anchor="ctr"/>
+          <a:lstStyle/>
+          <a:p>
+            <a:pPr indent="0" marL="0">
+              <a:buNone/>
+            </a:pPr>
+            <a:r>
+              <a:rPr lang="en-US" sz="950" dirty="0">
+                <a:solidFill>
+                  <a:srgbClr val="FFFFFF"/>
+                </a:solidFill>
+                <a:latin typeface="Calibri" pitchFamily="34" charset="0"/>
+                <a:ea typeface="Calibri" pitchFamily="34" charset="-122"/>
+                <a:cs typeface="Calibri" pitchFamily="34" charset="-120"/>
+              </a:rPr>
+              <a:t>多道提纯去除有害杂质</a:t>
+            </a:r>
+            <a:endParaRPr lang="en-US" sz="950" dirty="0"/>
+          </a:p>
+        </p:txBody>
+      </p:sp>
+      <p:sp>
+        <p:nvSpPr>
+          <p:cNvPr id="24" name="Shape 22"/>
+          <p:cNvSpPr/>
+          <p:nvPr/>
+        </p:nvSpPr>
+        <p:spPr>
+          <a:xfrm>
+            <a:off x="4270248" y="3145536"/>
+            <a:ext cx="109728" cy="109728"/>
+          </a:xfrm>
+          <a:prstGeom prst="ellipse">
+            <a:avLst/>
+          </a:prstGeom>
+          <a:solidFill>
+            <a:srgbClr val="00D4AA"/>
+          </a:solidFill>
+          <a:ln/>
+        </p:spPr>
+      </p:sp>
+      <p:sp>
+        <p:nvSpPr>
+          <p:cNvPr id="25" name="Text 23"/>
+          <p:cNvSpPr/>
+          <p:nvPr/>
+        </p:nvSpPr>
+        <p:spPr>
+          <a:xfrm>
+            <a:off x="4434840" y="3081528"/>
+            <a:ext cx="1234440" cy="457200"/>
+          </a:xfrm>
+          <a:prstGeom prst="rect">
+            <a:avLst/>
+          </a:prstGeom>
+          <a:noFill/>
+          <a:ln/>
+        </p:spPr>
+        <p:txBody>
+          <a:bodyPr wrap="square" rtlCol="0" anchor="ctr"/>
+          <a:lstStyle/>
+          <a:p>
+            <a:pPr indent="0" marL="0">
+              <a:buNone/>
+            </a:pPr>
+            <a:r>
+              <a:rPr lang="en-US" sz="950" dirty="0">
+                <a:solidFill>
+                  <a:srgbClr val="FFFFFF"/>
+                </a:solidFill>
+                <a:latin typeface="Calibri" pitchFamily="34" charset="0"/>
+                <a:ea typeface="Calibri" pitchFamily="34" charset="-122"/>
+                <a:cs typeface="Calibri" pitchFamily="34" charset="-120"/>
+              </a:rPr>
+              <a:t>释放浓度安全可控</a:t>
+            </a:r>
+            <a:endParaRPr lang="en-US" sz="950" dirty="0"/>
+          </a:p>
+        </p:txBody>
+      </p:sp>
+      <p:sp>
+        <p:nvSpPr>
+          <p:cNvPr id="26" name="Shape 24"/>
+          <p:cNvSpPr/>
+          <p:nvPr/>
+        </p:nvSpPr>
+        <p:spPr>
+          <a:xfrm>
+            <a:off x="4270248" y="3621024"/>
+            <a:ext cx="109728" cy="109728"/>
+          </a:xfrm>
+          <a:prstGeom prst="ellipse">
+            <a:avLst/>
+          </a:prstGeom>
+          <a:solidFill>
+            <a:srgbClr val="00D4AA"/>
+          </a:solidFill>
+          <a:ln/>
+        </p:spPr>
+      </p:sp>
+      <p:sp>
+        <p:nvSpPr>
+          <p:cNvPr id="27" name="Text 25"/>
+          <p:cNvSpPr/>
+          <p:nvPr/>
+        </p:nvSpPr>
+        <p:spPr>
+          <a:xfrm>
+            <a:off x="4434840" y="3557016"/>
+            <a:ext cx="1234440" cy="457200"/>
+          </a:xfrm>
+          <a:prstGeom prst="rect">
+            <a:avLst/>
+          </a:prstGeom>
+          <a:noFill/>
+          <a:ln/>
+        </p:spPr>
+        <p:txBody>
+          <a:bodyPr wrap="square" rtlCol="0" anchor="ctr"/>
+          <a:lstStyle/>
+          <a:p>
+            <a:pPr indent="0" marL="0">
+              <a:buNone/>
+            </a:pPr>
+            <a:r>
+              <a:rPr lang="en-US" sz="950" dirty="0">
+                <a:solidFill>
+                  <a:srgbClr val="FFFFFF"/>
+                </a:solidFill>
+                <a:latin typeface="Calibri" pitchFamily="34" charset="0"/>
+                <a:ea typeface="Calibri" pitchFamily="34" charset="-122"/>
+                <a:cs typeface="Calibri" pitchFamily="34" charset="-120"/>
+              </a:rPr>
+              <a:t>森林级浓度无醉氧</a:t>
+            </a:r>
+            <a:endParaRPr lang="en-US" sz="950" dirty="0"/>
+          </a:p>
+        </p:txBody>
+      </p:sp>
+      <p:sp>
+        <p:nvSpPr>
+          <p:cNvPr id="28" name="Shape 26"/>
+          <p:cNvSpPr/>
+          <p:nvPr/>
+        </p:nvSpPr>
+        <p:spPr>
+          <a:xfrm>
+            <a:off x="5824728" y="411480"/>
+            <a:ext cx="1554480" cy="4206240"/>
+          </a:xfrm>
+          <a:prstGeom prst="rect">
+            <a:avLst/>
+          </a:prstGeom>
+          <a:solidFill>
+            <a:srgbClr val="1A3A6B"/>
+          </a:solidFill>
+          <a:ln/>
+        </p:spPr>
+      </p:sp>
+      <p:sp>
+        <p:nvSpPr>
+          <p:cNvPr id="29" name="Shape 27"/>
+          <p:cNvSpPr/>
+          <p:nvPr/>
+        </p:nvSpPr>
+        <p:spPr>
+          <a:xfrm>
+            <a:off x="5824728" y="411480"/>
+            <a:ext cx="1554480" cy="91440"/>
           </a:xfrm>
           <a:prstGeom prst="rect">
             <a:avLst/>
@@ -5927,14 +6537,14 @@
       </p:sp>
       <p:sp>
         <p:nvSpPr>
-          <p:cNvPr id="18" name="Text 16"/>
-          <p:cNvSpPr/>
-          <p:nvPr/>
-        </p:nvSpPr>
-        <p:spPr>
-          <a:xfrm>
-            <a:off x="6263640" y="914400"/>
-            <a:ext cx="1325880" cy="502920"/>
+          <p:cNvPr id="30" name="Text 28"/>
+          <p:cNvSpPr/>
+          <p:nvPr/>
+        </p:nvSpPr>
+        <p:spPr>
+          <a:xfrm>
+            <a:off x="5824728" y="594360"/>
+            <a:ext cx="1554480" cy="365760"/>
           </a:xfrm>
           <a:prstGeom prst="rect">
             <a:avLst/>
@@ -5950,27 +6560,30 @@
               <a:buNone/>
             </a:pPr>
             <a:r>
-              <a:rPr lang="en-US" sz="2600" dirty="0">
-                <a:solidFill>
-                  <a:srgbClr val="000000"/>
-                </a:solidFill>
-              </a:rPr>
-              <a:t>🏭</a:t>
-            </a:r>
-            <a:endParaRPr lang="en-US" sz="2600" dirty="0"/>
-          </a:p>
-        </p:txBody>
-      </p:sp>
-      <p:sp>
-        <p:nvSpPr>
-          <p:cNvPr id="19" name="Text 17"/>
-          <p:cNvSpPr/>
-          <p:nvPr/>
-        </p:nvSpPr>
-        <p:spPr>
-          <a:xfrm>
-            <a:off x="6263640" y="1417320"/>
-            <a:ext cx="1325880" cy="411480"/>
+              <a:rPr lang="en-US" sz="2400" b="1" dirty="0">
+                <a:solidFill>
+                  <a:srgbClr val="7C3AED"/>
+                </a:solidFill>
+                <a:latin typeface="Georgia" pitchFamily="34" charset="0"/>
+                <a:ea typeface="Georgia" pitchFamily="34" charset="-122"/>
+                <a:cs typeface="Georgia" pitchFamily="34" charset="-120"/>
+              </a:rPr>
+              <a:t>02</a:t>
+            </a:r>
+            <a:endParaRPr lang="en-US" sz="2400" dirty="0"/>
+          </a:p>
+        </p:txBody>
+      </p:sp>
+      <p:sp>
+        <p:nvSpPr>
+          <p:cNvPr id="31" name="Text 29"/>
+          <p:cNvSpPr/>
+          <p:nvPr/>
+        </p:nvSpPr>
+        <p:spPr>
+          <a:xfrm>
+            <a:off x="5824728" y="1005840"/>
+            <a:ext cx="1554480" cy="365760"/>
           </a:xfrm>
           <a:prstGeom prst="rect">
             <a:avLst/>
@@ -5986,9 +6599,9 @@
               <a:buNone/>
             </a:pPr>
             <a:r>
-              <a:rPr lang="en-US" sz="1200" b="1" dirty="0">
-                <a:solidFill>
-                  <a:srgbClr val="2C3E50"/>
+              <a:rPr lang="en-US" sz="1300" b="1" dirty="0">
+                <a:solidFill>
+                  <a:srgbClr val="FFFFFF"/>
                 </a:solidFill>
                 <a:latin typeface="Calibri" pitchFamily="34" charset="0"/>
                 <a:ea typeface="Calibri" pitchFamily="34" charset="-122"/>
@@ -5996,28 +6609,28 @@
               </a:rPr>
               <a:t>小批量精造</a:t>
             </a:r>
-            <a:endParaRPr lang="en-US" sz="1200" dirty="0"/>
-          </a:p>
-        </p:txBody>
-      </p:sp>
-      <p:sp>
-        <p:nvSpPr>
-          <p:cNvPr id="20" name="Shape 18"/>
-          <p:cNvSpPr/>
-          <p:nvPr/>
-        </p:nvSpPr>
-        <p:spPr>
-          <a:xfrm>
-            <a:off x="6537960" y="1874520"/>
-            <a:ext cx="777240" cy="0"/>
+            <a:endParaRPr lang="en-US" sz="1300" dirty="0"/>
+          </a:p>
+        </p:txBody>
+      </p:sp>
+      <p:sp>
+        <p:nvSpPr>
+          <p:cNvPr id="32" name="Shape 30"/>
+          <p:cNvSpPr/>
+          <p:nvPr/>
+        </p:nvSpPr>
+        <p:spPr>
+          <a:xfrm>
+            <a:off x="6053328" y="1417320"/>
+            <a:ext cx="1097280" cy="0"/>
           </a:xfrm>
           <a:prstGeom prst="line">
             <a:avLst/>
           </a:prstGeom>
           <a:noFill/>
-          <a:ln w="12700">
+          <a:ln w="6350">
             <a:solidFill>
-              <a:srgbClr val="E2E8F0"/>
+              <a:srgbClr val="2A4A7A"/>
             </a:solidFill>
             <a:prstDash val="solid"/>
           </a:ln>
@@ -6025,158 +6638,250 @@
       </p:sp>
       <p:sp>
         <p:nvSpPr>
-          <p:cNvPr id="21" name="Text 19"/>
-          <p:cNvSpPr/>
-          <p:nvPr/>
-        </p:nvSpPr>
-        <p:spPr>
-          <a:xfrm>
-            <a:off x="6336792" y="1965960"/>
-            <a:ext cx="1188720" cy="594360"/>
-          </a:xfrm>
-          <a:prstGeom prst="rect">
-            <a:avLst/>
-          </a:prstGeom>
-          <a:noFill/>
-          <a:ln/>
-        </p:spPr>
-        <p:txBody>
-          <a:bodyPr wrap="square" rtlCol="0" anchor="ctr"/>
-          <a:lstStyle/>
-          <a:p>
-            <a:pPr indent="0" marL="0">
-              <a:buNone/>
-            </a:pPr>
-            <a:r>
-              <a:rPr lang="en-US" sz="1000" dirty="0">
-                <a:solidFill>
-                  <a:srgbClr val="7F8C8D"/>
-                </a:solidFill>
-                <a:latin typeface="Calibri" pitchFamily="34" charset="0"/>
-                <a:ea typeface="Calibri" pitchFamily="34" charset="-122"/>
-                <a:cs typeface="Calibri" pitchFamily="34" charset="-120"/>
-              </a:rPr>
-              <a:t>→  小批量定制交付</a:t>
-            </a:r>
-            <a:endParaRPr lang="en-US" sz="1000" dirty="0"/>
-          </a:p>
-        </p:txBody>
-      </p:sp>
-      <p:sp>
-        <p:nvSpPr>
-          <p:cNvPr id="22" name="Text 20"/>
-          <p:cNvSpPr/>
-          <p:nvPr/>
-        </p:nvSpPr>
-        <p:spPr>
-          <a:xfrm>
-            <a:off x="6336792" y="2606040"/>
-            <a:ext cx="1188720" cy="594360"/>
-          </a:xfrm>
-          <a:prstGeom prst="rect">
-            <a:avLst/>
-          </a:prstGeom>
-          <a:noFill/>
-          <a:ln/>
-        </p:spPr>
-        <p:txBody>
-          <a:bodyPr wrap="square" rtlCol="0" anchor="ctr"/>
-          <a:lstStyle/>
-          <a:p>
-            <a:pPr indent="0" marL="0">
-              <a:buNone/>
-            </a:pPr>
-            <a:r>
-              <a:rPr lang="en-US" sz="1000" dirty="0">
-                <a:solidFill>
-                  <a:srgbClr val="7F8C8D"/>
-                </a:solidFill>
-                <a:latin typeface="Calibri" pitchFamily="34" charset="0"/>
-                <a:ea typeface="Calibri" pitchFamily="34" charset="-122"/>
-                <a:cs typeface="Calibri" pitchFamily="34" charset="-120"/>
-              </a:rPr>
-              <a:t>→  全流程质量检测</a:t>
-            </a:r>
-            <a:endParaRPr lang="en-US" sz="1000" dirty="0"/>
-          </a:p>
-        </p:txBody>
-      </p:sp>
-      <p:sp>
-        <p:nvSpPr>
-          <p:cNvPr id="23" name="Text 21"/>
-          <p:cNvSpPr/>
-          <p:nvPr/>
-        </p:nvSpPr>
-        <p:spPr>
-          <a:xfrm>
-            <a:off x="6336792" y="3246120"/>
-            <a:ext cx="1188720" cy="594360"/>
-          </a:xfrm>
-          <a:prstGeom prst="rect">
-            <a:avLst/>
-          </a:prstGeom>
-          <a:noFill/>
-          <a:ln/>
-        </p:spPr>
-        <p:txBody>
-          <a:bodyPr wrap="square" rtlCol="0" anchor="ctr"/>
-          <a:lstStyle/>
-          <a:p>
-            <a:pPr indent="0" marL="0">
-              <a:buNone/>
-            </a:pPr>
-            <a:r>
-              <a:rPr lang="en-US" sz="1000" dirty="0">
-                <a:solidFill>
-                  <a:srgbClr val="7F8C8D"/>
-                </a:solidFill>
-                <a:latin typeface="Calibri" pitchFamily="34" charset="0"/>
-                <a:ea typeface="Calibri" pitchFamily="34" charset="-122"/>
-                <a:cs typeface="Calibri" pitchFamily="34" charset="-120"/>
-              </a:rPr>
-              <a:t>→  特普丽50年工艺</a:t>
-            </a:r>
-            <a:endParaRPr lang="en-US" sz="1000" dirty="0"/>
-          </a:p>
-        </p:txBody>
-      </p:sp>
-      <p:sp>
-        <p:nvSpPr>
-          <p:cNvPr id="24" name="Shape 22"/>
-          <p:cNvSpPr/>
-          <p:nvPr/>
-        </p:nvSpPr>
-        <p:spPr>
-          <a:xfrm>
-            <a:off x="7680960" y="777240"/>
-            <a:ext cx="1325880" cy="3794760"/>
-          </a:xfrm>
-          <a:prstGeom prst="rect">
+          <p:cNvPr id="33" name="Text 31"/>
+          <p:cNvSpPr/>
+          <p:nvPr/>
+        </p:nvSpPr>
+        <p:spPr>
+          <a:xfrm>
+            <a:off x="5916168" y="1508760"/>
+            <a:ext cx="1371600" cy="1097280"/>
+          </a:xfrm>
+          <a:prstGeom prst="rect">
+            <a:avLst/>
+          </a:prstGeom>
+          <a:noFill/>
+          <a:ln/>
+        </p:spPr>
+        <p:txBody>
+          <a:bodyPr wrap="square" rtlCol="0" anchor="ctr"/>
+          <a:lstStyle/>
+          <a:p>
+            <a:pPr indent="0" marL="0">
+              <a:buNone/>
+            </a:pPr>
+            <a:r>
+              <a:rPr lang="en-US" sz="950" dirty="0">
+                <a:solidFill>
+                  <a:srgbClr val="A0B4CC"/>
+                </a:solidFill>
+                <a:latin typeface="Calibri" pitchFamily="34" charset="0"/>
+                <a:ea typeface="Calibri" pitchFamily="34" charset="-122"/>
+                <a:cs typeface="Calibri" pitchFamily="34" charset="-120"/>
+              </a:rPr>
+              <a:t>成熟的小批量生产体系，灵活响应定制需求，已有多次成功交付记录，质量稳定可靠。</a:t>
+            </a:r>
+            <a:endParaRPr lang="en-US" sz="950" dirty="0"/>
+          </a:p>
+        </p:txBody>
+      </p:sp>
+      <p:sp>
+        <p:nvSpPr>
+          <p:cNvPr id="34" name="Shape 32"/>
+          <p:cNvSpPr/>
+          <p:nvPr/>
+        </p:nvSpPr>
+        <p:spPr>
+          <a:xfrm>
+            <a:off x="5934456" y="2670048"/>
+            <a:ext cx="109728" cy="109728"/>
+          </a:xfrm>
+          <a:prstGeom prst="ellipse">
             <a:avLst/>
           </a:prstGeom>
           <a:solidFill>
-            <a:srgbClr val="FFFFFF"/>
+            <a:srgbClr val="7C3AED"/>
           </a:solidFill>
           <a:ln/>
-          <a:effectLst>
-            <a:outerShdw sx="100000" sy="100000" kx="0" ky="0" algn="bl" rotWithShape="0" blurRad="63500" dist="25400" dir="8100000">
-              <a:srgbClr val="000000">
-                <a:alpha val="10000"/>
-              </a:srgbClr>
-            </a:outerShdw>
-          </a:effectLst>
-        </p:spPr>
-      </p:sp>
-      <p:sp>
-        <p:nvSpPr>
-          <p:cNvPr id="25" name="Shape 23"/>
-          <p:cNvSpPr/>
-          <p:nvPr/>
-        </p:nvSpPr>
-        <p:spPr>
-          <a:xfrm>
-            <a:off x="7680960" y="777240"/>
-            <a:ext cx="1325880" cy="91440"/>
+        </p:spPr>
+      </p:sp>
+      <p:sp>
+        <p:nvSpPr>
+          <p:cNvPr id="35" name="Text 33"/>
+          <p:cNvSpPr/>
+          <p:nvPr/>
+        </p:nvSpPr>
+        <p:spPr>
+          <a:xfrm>
+            <a:off x="6099048" y="2606040"/>
+            <a:ext cx="1234440" cy="457200"/>
+          </a:xfrm>
+          <a:prstGeom prst="rect">
+            <a:avLst/>
+          </a:prstGeom>
+          <a:noFill/>
+          <a:ln/>
+        </p:spPr>
+        <p:txBody>
+          <a:bodyPr wrap="square" rtlCol="0" anchor="ctr"/>
+          <a:lstStyle/>
+          <a:p>
+            <a:pPr indent="0" marL="0">
+              <a:buNone/>
+            </a:pPr>
+            <a:r>
+              <a:rPr lang="en-US" sz="950" dirty="0">
+                <a:solidFill>
+                  <a:srgbClr val="FFFFFF"/>
+                </a:solidFill>
+                <a:latin typeface="Calibri" pitchFamily="34" charset="0"/>
+                <a:ea typeface="Calibri" pitchFamily="34" charset="-122"/>
+                <a:cs typeface="Calibri" pitchFamily="34" charset="-120"/>
+              </a:rPr>
+              <a:t>小批量订单交付能力</a:t>
+            </a:r>
+            <a:endParaRPr lang="en-US" sz="950" dirty="0"/>
+          </a:p>
+        </p:txBody>
+      </p:sp>
+      <p:sp>
+        <p:nvSpPr>
+          <p:cNvPr id="36" name="Shape 34"/>
+          <p:cNvSpPr/>
+          <p:nvPr/>
+        </p:nvSpPr>
+        <p:spPr>
+          <a:xfrm>
+            <a:off x="5934456" y="3145536"/>
+            <a:ext cx="109728" cy="109728"/>
+          </a:xfrm>
+          <a:prstGeom prst="ellipse">
+            <a:avLst/>
+          </a:prstGeom>
+          <a:solidFill>
+            <a:srgbClr val="7C3AED"/>
+          </a:solidFill>
+          <a:ln/>
+        </p:spPr>
+      </p:sp>
+      <p:sp>
+        <p:nvSpPr>
+          <p:cNvPr id="37" name="Text 35"/>
+          <p:cNvSpPr/>
+          <p:nvPr/>
+        </p:nvSpPr>
+        <p:spPr>
+          <a:xfrm>
+            <a:off x="6099048" y="3081528"/>
+            <a:ext cx="1234440" cy="457200"/>
+          </a:xfrm>
+          <a:prstGeom prst="rect">
+            <a:avLst/>
+          </a:prstGeom>
+          <a:noFill/>
+          <a:ln/>
+        </p:spPr>
+        <p:txBody>
+          <a:bodyPr wrap="square" rtlCol="0" anchor="ctr"/>
+          <a:lstStyle/>
+          <a:p>
+            <a:pPr indent="0" marL="0">
+              <a:buNone/>
+            </a:pPr>
+            <a:r>
+              <a:rPr lang="en-US" sz="950" dirty="0">
+                <a:solidFill>
+                  <a:srgbClr val="FFFFFF"/>
+                </a:solidFill>
+                <a:latin typeface="Calibri" pitchFamily="34" charset="0"/>
+                <a:ea typeface="Calibri" pitchFamily="34" charset="-122"/>
+                <a:cs typeface="Calibri" pitchFamily="34" charset="-120"/>
+              </a:rPr>
+              <a:t>支持个性化定制</a:t>
+            </a:r>
+            <a:endParaRPr lang="en-US" sz="950" dirty="0"/>
+          </a:p>
+        </p:txBody>
+      </p:sp>
+      <p:sp>
+        <p:nvSpPr>
+          <p:cNvPr id="38" name="Shape 36"/>
+          <p:cNvSpPr/>
+          <p:nvPr/>
+        </p:nvSpPr>
+        <p:spPr>
+          <a:xfrm>
+            <a:off x="5934456" y="3621024"/>
+            <a:ext cx="109728" cy="109728"/>
+          </a:xfrm>
+          <a:prstGeom prst="ellipse">
+            <a:avLst/>
+          </a:prstGeom>
+          <a:solidFill>
+            <a:srgbClr val="7C3AED"/>
+          </a:solidFill>
+          <a:ln/>
+        </p:spPr>
+      </p:sp>
+      <p:sp>
+        <p:nvSpPr>
+          <p:cNvPr id="39" name="Text 37"/>
+          <p:cNvSpPr/>
+          <p:nvPr/>
+        </p:nvSpPr>
+        <p:spPr>
+          <a:xfrm>
+            <a:off x="6099048" y="3557016"/>
+            <a:ext cx="1234440" cy="457200"/>
+          </a:xfrm>
+          <a:prstGeom prst="rect">
+            <a:avLst/>
+          </a:prstGeom>
+          <a:noFill/>
+          <a:ln/>
+        </p:spPr>
+        <p:txBody>
+          <a:bodyPr wrap="square" rtlCol="0" anchor="ctr"/>
+          <a:lstStyle/>
+          <a:p>
+            <a:pPr indent="0" marL="0">
+              <a:buNone/>
+            </a:pPr>
+            <a:r>
+              <a:rPr lang="en-US" sz="950" dirty="0">
+                <a:solidFill>
+                  <a:srgbClr val="FFFFFF"/>
+                </a:solidFill>
+                <a:latin typeface="Calibri" pitchFamily="34" charset="0"/>
+                <a:ea typeface="Calibri" pitchFamily="34" charset="-122"/>
+                <a:cs typeface="Calibri" pitchFamily="34" charset="-120"/>
+              </a:rPr>
+              <a:t>全流程质量检测</a:t>
+            </a:r>
+            <a:endParaRPr lang="en-US" sz="950" dirty="0"/>
+          </a:p>
+        </p:txBody>
+      </p:sp>
+      <p:sp>
+        <p:nvSpPr>
+          <p:cNvPr id="40" name="Shape 38"/>
+          <p:cNvSpPr/>
+          <p:nvPr/>
+        </p:nvSpPr>
+        <p:spPr>
+          <a:xfrm>
+            <a:off x="7488936" y="411480"/>
+            <a:ext cx="1554480" cy="4206240"/>
+          </a:xfrm>
+          <a:prstGeom prst="rect">
+            <a:avLst/>
+          </a:prstGeom>
+          <a:solidFill>
+            <a:srgbClr val="1A3A6B"/>
+          </a:solidFill>
+          <a:ln/>
+        </p:spPr>
+      </p:sp>
+      <p:sp>
+        <p:nvSpPr>
+          <p:cNvPr id="41" name="Shape 39"/>
+          <p:cNvSpPr/>
+          <p:nvPr/>
+        </p:nvSpPr>
+        <p:spPr>
+          <a:xfrm>
+            <a:off x="7488936" y="411480"/>
+            <a:ext cx="1554480" cy="91440"/>
           </a:xfrm>
           <a:prstGeom prst="rect">
             <a:avLst/>
@@ -6189,14 +6894,14 @@
       </p:sp>
       <p:sp>
         <p:nvSpPr>
-          <p:cNvPr id="26" name="Text 24"/>
-          <p:cNvSpPr/>
-          <p:nvPr/>
-        </p:nvSpPr>
-        <p:spPr>
-          <a:xfrm>
-            <a:off x="7680960" y="914400"/>
-            <a:ext cx="1325880" cy="502920"/>
+          <p:cNvPr id="42" name="Text 40"/>
+          <p:cNvSpPr/>
+          <p:nvPr/>
+        </p:nvSpPr>
+        <p:spPr>
+          <a:xfrm>
+            <a:off x="7488936" y="594360"/>
+            <a:ext cx="1554480" cy="365760"/>
           </a:xfrm>
           <a:prstGeom prst="rect">
             <a:avLst/>
@@ -6212,27 +6917,30 @@
               <a:buNone/>
             </a:pPr>
             <a:r>
-              <a:rPr lang="en-US" sz="2600" dirty="0">
-                <a:solidFill>
-                  <a:srgbClr val="000000"/>
-                </a:solidFill>
-              </a:rPr>
-              <a:t>🛠️</a:t>
-            </a:r>
-            <a:endParaRPr lang="en-US" sz="2600" dirty="0"/>
-          </a:p>
-        </p:txBody>
-      </p:sp>
-      <p:sp>
-        <p:nvSpPr>
-          <p:cNvPr id="27" name="Text 25"/>
-          <p:cNvSpPr/>
-          <p:nvPr/>
-        </p:nvSpPr>
-        <p:spPr>
-          <a:xfrm>
-            <a:off x="7680960" y="1417320"/>
-            <a:ext cx="1325880" cy="411480"/>
+              <a:rPr lang="en-US" sz="2400" b="1" dirty="0">
+                <a:solidFill>
+                  <a:srgbClr val="FF6B35"/>
+                </a:solidFill>
+                <a:latin typeface="Georgia" pitchFamily="34" charset="0"/>
+                <a:ea typeface="Georgia" pitchFamily="34" charset="-122"/>
+                <a:cs typeface="Georgia" pitchFamily="34" charset="-120"/>
+              </a:rPr>
+              <a:t>03</a:t>
+            </a:r>
+            <a:endParaRPr lang="en-US" sz="2400" dirty="0"/>
+          </a:p>
+        </p:txBody>
+      </p:sp>
+      <p:sp>
+        <p:nvSpPr>
+          <p:cNvPr id="43" name="Text 41"/>
+          <p:cNvSpPr/>
+          <p:nvPr/>
+        </p:nvSpPr>
+        <p:spPr>
+          <a:xfrm>
+            <a:off x="7488936" y="1005840"/>
+            <a:ext cx="1554480" cy="365760"/>
           </a:xfrm>
           <a:prstGeom prst="rect">
             <a:avLst/>
@@ -6248,9 +6956,9 @@
               <a:buNone/>
             </a:pPr>
             <a:r>
-              <a:rPr lang="en-US" sz="1200" b="1" dirty="0">
-                <a:solidFill>
-                  <a:srgbClr val="2C3E50"/>
+              <a:rPr lang="en-US" sz="1300" b="1" dirty="0">
+                <a:solidFill>
+                  <a:srgbClr val="FFFFFF"/>
                 </a:solidFill>
                 <a:latin typeface="Calibri" pitchFamily="34" charset="0"/>
                 <a:ea typeface="Calibri" pitchFamily="34" charset="-122"/>
@@ -6258,28 +6966,28 @@
               </a:rPr>
               <a:t>完整服务方案</a:t>
             </a:r>
-            <a:endParaRPr lang="en-US" sz="1200" dirty="0"/>
-          </a:p>
-        </p:txBody>
-      </p:sp>
-      <p:sp>
-        <p:nvSpPr>
-          <p:cNvPr id="28" name="Shape 26"/>
-          <p:cNvSpPr/>
-          <p:nvPr/>
-        </p:nvSpPr>
-        <p:spPr>
-          <a:xfrm>
-            <a:off x="7955280" y="1874520"/>
-            <a:ext cx="777240" cy="0"/>
+            <a:endParaRPr lang="en-US" sz="1300" dirty="0"/>
+          </a:p>
+        </p:txBody>
+      </p:sp>
+      <p:sp>
+        <p:nvSpPr>
+          <p:cNvPr id="44" name="Shape 42"/>
+          <p:cNvSpPr/>
+          <p:nvPr/>
+        </p:nvSpPr>
+        <p:spPr>
+          <a:xfrm>
+            <a:off x="7717536" y="1417320"/>
+            <a:ext cx="1097280" cy="0"/>
           </a:xfrm>
           <a:prstGeom prst="line">
             <a:avLst/>
           </a:prstGeom>
           <a:noFill/>
-          <a:ln w="12700">
+          <a:ln w="6350">
             <a:solidFill>
-              <a:srgbClr val="E2E8F0"/>
+              <a:srgbClr val="2A4A7A"/>
             </a:solidFill>
             <a:prstDash val="solid"/>
           </a:ln>
@@ -6287,167 +6995,89 @@
       </p:sp>
       <p:sp>
         <p:nvSpPr>
-          <p:cNvPr id="29" name="Text 27"/>
-          <p:cNvSpPr/>
-          <p:nvPr/>
-        </p:nvSpPr>
-        <p:spPr>
-          <a:xfrm>
-            <a:off x="7754112" y="1965960"/>
-            <a:ext cx="1188720" cy="594360"/>
-          </a:xfrm>
-          <a:prstGeom prst="rect">
-            <a:avLst/>
-          </a:prstGeom>
-          <a:noFill/>
-          <a:ln/>
-        </p:spPr>
-        <p:txBody>
-          <a:bodyPr wrap="square" rtlCol="0" anchor="ctr"/>
-          <a:lstStyle/>
-          <a:p>
-            <a:pPr indent="0" marL="0">
-              <a:buNone/>
-            </a:pPr>
-            <a:r>
-              <a:rPr lang="en-US" sz="1000" dirty="0">
-                <a:solidFill>
-                  <a:srgbClr val="7F8C8D"/>
-                </a:solidFill>
-                <a:latin typeface="Calibri" pitchFamily="34" charset="0"/>
-                <a:ea typeface="Calibri" pitchFamily="34" charset="-122"/>
-                <a:cs typeface="Calibri" pitchFamily="34" charset="-120"/>
-              </a:rPr>
-              <a:t>→  环境监测部署方案</a:t>
-            </a:r>
-            <a:endParaRPr lang="en-US" sz="1000" dirty="0"/>
-          </a:p>
-        </p:txBody>
-      </p:sp>
-      <p:sp>
-        <p:nvSpPr>
-          <p:cNvPr id="30" name="Text 28"/>
-          <p:cNvSpPr/>
-          <p:nvPr/>
-        </p:nvSpPr>
-        <p:spPr>
-          <a:xfrm>
-            <a:off x="7754112" y="2606040"/>
-            <a:ext cx="1188720" cy="594360"/>
-          </a:xfrm>
-          <a:prstGeom prst="rect">
-            <a:avLst/>
-          </a:prstGeom>
-          <a:noFill/>
-          <a:ln/>
-        </p:spPr>
-        <p:txBody>
-          <a:bodyPr wrap="square" rtlCol="0" anchor="ctr"/>
-          <a:lstStyle/>
-          <a:p>
-            <a:pPr indent="0" marL="0">
-              <a:buNone/>
-            </a:pPr>
-            <a:r>
-              <a:rPr lang="en-US" sz="1000" dirty="0">
-                <a:solidFill>
-                  <a:srgbClr val="7F8C8D"/>
-                </a:solidFill>
-                <a:latin typeface="Calibri" pitchFamily="34" charset="0"/>
-                <a:ea typeface="Calibri" pitchFamily="34" charset="-122"/>
-                <a:cs typeface="Calibri" pitchFamily="34" charset="-120"/>
-              </a:rPr>
-              <a:t>→  3天完成病房改造</a:t>
-            </a:r>
-            <a:endParaRPr lang="en-US" sz="1000" dirty="0"/>
-          </a:p>
-        </p:txBody>
-      </p:sp>
-      <p:sp>
-        <p:nvSpPr>
-          <p:cNvPr id="31" name="Text 29"/>
-          <p:cNvSpPr/>
-          <p:nvPr/>
-        </p:nvSpPr>
-        <p:spPr>
-          <a:xfrm>
-            <a:off x="7754112" y="3246120"/>
-            <a:ext cx="1188720" cy="594360"/>
-          </a:xfrm>
-          <a:prstGeom prst="rect">
-            <a:avLst/>
-          </a:prstGeom>
-          <a:noFill/>
-          <a:ln/>
-        </p:spPr>
-        <p:txBody>
-          <a:bodyPr wrap="square" rtlCol="0" anchor="ctr"/>
-          <a:lstStyle/>
-          <a:p>
-            <a:pPr indent="0" marL="0">
-              <a:buNone/>
-            </a:pPr>
-            <a:r>
-              <a:rPr lang="en-US" sz="1000" dirty="0">
-                <a:solidFill>
-                  <a:srgbClr val="7F8C8D"/>
-                </a:solidFill>
-                <a:latin typeface="Calibri" pitchFamily="34" charset="0"/>
-                <a:ea typeface="Calibri" pitchFamily="34" charset="-122"/>
-                <a:cs typeface="Calibri" pitchFamily="34" charset="-120"/>
-              </a:rPr>
-              <a:t>→  6个月跟踪服务</a:t>
-            </a:r>
-            <a:endParaRPr lang="en-US" sz="1000" dirty="0"/>
-          </a:p>
-        </p:txBody>
-      </p:sp>
-      <p:sp>
-        <p:nvSpPr>
-          <p:cNvPr id="32" name="Shape 30"/>
-          <p:cNvSpPr/>
-          <p:nvPr/>
-        </p:nvSpPr>
-        <p:spPr>
-          <a:xfrm>
-            <a:off x="0" y="4663440"/>
-            <a:ext cx="9144000" cy="480060"/>
-          </a:xfrm>
-          <a:prstGeom prst="rect">
+          <p:cNvPr id="45" name="Text 43"/>
+          <p:cNvSpPr/>
+          <p:nvPr/>
+        </p:nvSpPr>
+        <p:spPr>
+          <a:xfrm>
+            <a:off x="7580376" y="1508760"/>
+            <a:ext cx="1371600" cy="1097280"/>
+          </a:xfrm>
+          <a:prstGeom prst="rect">
+            <a:avLst/>
+          </a:prstGeom>
+          <a:noFill/>
+          <a:ln/>
+        </p:spPr>
+        <p:txBody>
+          <a:bodyPr wrap="square" rtlCol="0" anchor="ctr"/>
+          <a:lstStyle/>
+          <a:p>
+            <a:pPr indent="0" marL="0">
+              <a:buNone/>
+            </a:pPr>
+            <a:r>
+              <a:rPr lang="en-US" sz="950" dirty="0">
+                <a:solidFill>
+                  <a:srgbClr val="A0B4CC"/>
+                </a:solidFill>
+                <a:latin typeface="Calibri" pitchFamily="34" charset="0"/>
+                <a:ea typeface="Calibri" pitchFamily="34" charset="-122"/>
+                <a:cs typeface="Calibri" pitchFamily="34" charset="-120"/>
+              </a:rPr>
+              <a:t>从环境评估、方案设计、施工部署到长期监测，提供交钥匙工程式完整服务。</a:t>
+            </a:r>
+            <a:endParaRPr lang="en-US" sz="950" dirty="0"/>
+          </a:p>
+        </p:txBody>
+      </p:sp>
+      <p:sp>
+        <p:nvSpPr>
+          <p:cNvPr id="46" name="Shape 44"/>
+          <p:cNvSpPr/>
+          <p:nvPr/>
+        </p:nvSpPr>
+        <p:spPr>
+          <a:xfrm>
+            <a:off x="7598664" y="2670048"/>
+            <a:ext cx="109728" cy="109728"/>
+          </a:xfrm>
+          <a:prstGeom prst="ellipse">
             <a:avLst/>
           </a:prstGeom>
           <a:solidFill>
-            <a:srgbClr val="1A3A6B"/>
+            <a:srgbClr val="FF6B35"/>
           </a:solidFill>
           <a:ln/>
         </p:spPr>
       </p:sp>
       <p:sp>
         <p:nvSpPr>
-          <p:cNvPr id="33" name="Text 31"/>
-          <p:cNvSpPr/>
-          <p:nvPr/>
-        </p:nvSpPr>
-        <p:spPr>
-          <a:xfrm>
-            <a:off x="548640" y="4663440"/>
-            <a:ext cx="8229600" cy="480060"/>
-          </a:xfrm>
-          <a:prstGeom prst="rect">
-            <a:avLst/>
-          </a:prstGeom>
-          <a:noFill/>
-          <a:ln/>
-        </p:spPr>
-        <p:txBody>
-          <a:bodyPr wrap="square" rtlCol="0" anchor="ctr"/>
-          <a:lstStyle/>
-          <a:p>
-            <a:pPr algn="ctr" indent="0" marL="0">
-              <a:buNone/>
-            </a:pPr>
-            <a:r>
-              <a:rPr lang="en-US" sz="1400" b="1" dirty="0">
+          <p:cNvPr id="47" name="Text 45"/>
+          <p:cNvSpPr/>
+          <p:nvPr/>
+        </p:nvSpPr>
+        <p:spPr>
+          <a:xfrm>
+            <a:off x="7763256" y="2606040"/>
+            <a:ext cx="1234440" cy="457200"/>
+          </a:xfrm>
+          <a:prstGeom prst="rect">
+            <a:avLst/>
+          </a:prstGeom>
+          <a:noFill/>
+          <a:ln/>
+        </p:spPr>
+        <p:txBody>
+          <a:bodyPr wrap="square" rtlCol="0" anchor="ctr"/>
+          <a:lstStyle/>
+          <a:p>
+            <a:pPr indent="0" marL="0">
+              <a:buNone/>
+            </a:pPr>
+            <a:r>
+              <a:rPr lang="en-US" sz="950" dirty="0">
                 <a:solidFill>
                   <a:srgbClr val="FFFFFF"/>
                 </a:solidFill>
@@ -6455,9 +7085,127 @@
                 <a:ea typeface="Calibri" pitchFamily="34" charset="-122"/>
                 <a:cs typeface="Calibri" pitchFamily="34" charset="-120"/>
               </a:rPr>
-              <a:t>安全 · 有效 · 持久 · 无需能耗</a:t>
-            </a:r>
-            <a:endParaRPr lang="en-US" sz="1400" dirty="0"/>
+              <a:t>环境监测部署方案</a:t>
+            </a:r>
+            <a:endParaRPr lang="en-US" sz="950" dirty="0"/>
+          </a:p>
+        </p:txBody>
+      </p:sp>
+      <p:sp>
+        <p:nvSpPr>
+          <p:cNvPr id="48" name="Shape 46"/>
+          <p:cNvSpPr/>
+          <p:nvPr/>
+        </p:nvSpPr>
+        <p:spPr>
+          <a:xfrm>
+            <a:off x="7598664" y="3145536"/>
+            <a:ext cx="109728" cy="109728"/>
+          </a:xfrm>
+          <a:prstGeom prst="ellipse">
+            <a:avLst/>
+          </a:prstGeom>
+          <a:solidFill>
+            <a:srgbClr val="FF6B35"/>
+          </a:solidFill>
+          <a:ln/>
+        </p:spPr>
+      </p:sp>
+      <p:sp>
+        <p:nvSpPr>
+          <p:cNvPr id="49" name="Text 47"/>
+          <p:cNvSpPr/>
+          <p:nvPr/>
+        </p:nvSpPr>
+        <p:spPr>
+          <a:xfrm>
+            <a:off x="7763256" y="3081528"/>
+            <a:ext cx="1234440" cy="457200"/>
+          </a:xfrm>
+          <a:prstGeom prst="rect">
+            <a:avLst/>
+          </a:prstGeom>
+          <a:noFill/>
+          <a:ln/>
+        </p:spPr>
+        <p:txBody>
+          <a:bodyPr wrap="square" rtlCol="0" anchor="ctr"/>
+          <a:lstStyle/>
+          <a:p>
+            <a:pPr indent="0" marL="0">
+              <a:buNone/>
+            </a:pPr>
+            <a:r>
+              <a:rPr lang="en-US" sz="950" dirty="0">
+                <a:solidFill>
+                  <a:srgbClr val="FFFFFF"/>
+                </a:solidFill>
+                <a:latin typeface="Calibri" pitchFamily="34" charset="0"/>
+                <a:ea typeface="Calibri" pitchFamily="34" charset="-122"/>
+                <a:cs typeface="Calibri" pitchFamily="34" charset="-120"/>
+              </a:rPr>
+              <a:t>3天完成病房改造</a:t>
+            </a:r>
+            <a:endParaRPr lang="en-US" sz="950" dirty="0"/>
+          </a:p>
+        </p:txBody>
+      </p:sp>
+      <p:sp>
+        <p:nvSpPr>
+          <p:cNvPr id="50" name="Shape 48"/>
+          <p:cNvSpPr/>
+          <p:nvPr/>
+        </p:nvSpPr>
+        <p:spPr>
+          <a:xfrm>
+            <a:off x="7598664" y="3621024"/>
+            <a:ext cx="109728" cy="109728"/>
+          </a:xfrm>
+          <a:prstGeom prst="ellipse">
+            <a:avLst/>
+          </a:prstGeom>
+          <a:solidFill>
+            <a:srgbClr val="FF6B35"/>
+          </a:solidFill>
+          <a:ln/>
+        </p:spPr>
+      </p:sp>
+      <p:sp>
+        <p:nvSpPr>
+          <p:cNvPr id="51" name="Text 49"/>
+          <p:cNvSpPr/>
+          <p:nvPr/>
+        </p:nvSpPr>
+        <p:spPr>
+          <a:xfrm>
+            <a:off x="7763256" y="3557016"/>
+            <a:ext cx="1234440" cy="457200"/>
+          </a:xfrm>
+          <a:prstGeom prst="rect">
+            <a:avLst/>
+          </a:prstGeom>
+          <a:noFill/>
+          <a:ln/>
+        </p:spPr>
+        <p:txBody>
+          <a:bodyPr wrap="square" rtlCol="0" anchor="ctr"/>
+          <a:lstStyle/>
+          <a:p>
+            <a:pPr indent="0" marL="0">
+              <a:buNone/>
+            </a:pPr>
+            <a:r>
+              <a:rPr lang="en-US" sz="950" dirty="0">
+                <a:solidFill>
+                  <a:srgbClr val="FFFFFF"/>
+                </a:solidFill>
+                <a:latin typeface="Calibri" pitchFamily="34" charset="0"/>
+                <a:ea typeface="Calibri" pitchFamily="34" charset="-122"/>
+                <a:cs typeface="Calibri" pitchFamily="34" charset="-120"/>
+              </a:rPr>
+              <a:t>6个月跟踪服务</a:t>
+            </a:r>
+            <a:endParaRPr lang="en-US" sz="950" dirty="0"/>
           </a:p>
         </p:txBody>
       </p:sp>
@@ -12717,24 +13465,24 @@
         </p:nvSpPr>
         <p:spPr>
           <a:xfrm>
-            <a:off x="548640" y="320040"/>
-            <a:ext cx="3657600" cy="365760"/>
-          </a:xfrm>
-          <a:prstGeom prst="rect">
-            <a:avLst/>
-          </a:prstGeom>
-          <a:noFill/>
-          <a:ln/>
-        </p:spPr>
-        <p:txBody>
-          <a:bodyPr wrap="square" rtlCol="0" anchor="ctr"/>
-          <a:lstStyle/>
-          <a:p>
-            <a:pPr indent="0" marL="0">
-              <a:buNone/>
-            </a:pPr>
-            <a:r>
-              <a:rPr lang="en-US" sz="1200" b="1" spc="200" kern="0" dirty="0">
+            <a:off x="457200" y="274320"/>
+            <a:ext cx="548640" cy="320040"/>
+          </a:xfrm>
+          <a:prstGeom prst="rect">
+            <a:avLst/>
+          </a:prstGeom>
+          <a:noFill/>
+          <a:ln/>
+        </p:spPr>
+        <p:txBody>
+          <a:bodyPr wrap="square" rtlCol="0" anchor="ctr"/>
+          <a:lstStyle/>
+          <a:p>
+            <a:pPr indent="0" marL="0">
+              <a:buNone/>
+            </a:pPr>
+            <a:r>
+              <a:rPr lang="en-US" sz="1100" b="1" spc="200" kern="0" dirty="0">
                 <a:solidFill>
                   <a:srgbClr val="00D4AA"/>
                 </a:solidFill>
@@ -12742,22 +13490,100 @@
                 <a:ea typeface="Calibri" pitchFamily="34" charset="-122"/>
                 <a:cs typeface="Calibri" pitchFamily="34" charset="-120"/>
               </a:rPr>
-              <a:t>08  跨学科团队</a:t>
-            </a:r>
-            <a:endParaRPr lang="en-US" sz="1200" dirty="0"/>
-          </a:p>
-        </p:txBody>
-      </p:sp>
-      <p:sp>
-        <p:nvSpPr>
-          <p:cNvPr id="4" name="Shape 2"/>
-          <p:cNvSpPr/>
-          <p:nvPr/>
-        </p:nvSpPr>
-        <p:spPr>
-          <a:xfrm>
-            <a:off x="548640" y="777240"/>
-            <a:ext cx="1965960" cy="3383280"/>
+              <a:t>08</a:t>
+            </a:r>
+            <a:endParaRPr lang="en-US" sz="1100" dirty="0"/>
+          </a:p>
+        </p:txBody>
+      </p:sp>
+      <p:sp>
+        <p:nvSpPr>
+          <p:cNvPr id="4" name="Text 2"/>
+          <p:cNvSpPr/>
+          <p:nvPr/>
+        </p:nvSpPr>
+        <p:spPr>
+          <a:xfrm>
+            <a:off x="960120" y="274320"/>
+            <a:ext cx="2743200" cy="320040"/>
+          </a:xfrm>
+          <a:prstGeom prst="rect">
+            <a:avLst/>
+          </a:prstGeom>
+          <a:noFill/>
+          <a:ln/>
+        </p:spPr>
+        <p:txBody>
+          <a:bodyPr wrap="square" rtlCol="0" anchor="ctr"/>
+          <a:lstStyle/>
+          <a:p>
+            <a:pPr indent="0" marL="0">
+              <a:buNone/>
+            </a:pPr>
+            <a:r>
+              <a:rPr lang="en-US" sz="1100" dirty="0">
+                <a:solidFill>
+                  <a:srgbClr val="7F8C8D"/>
+                </a:solidFill>
+                <a:latin typeface="Calibri" pitchFamily="34" charset="0"/>
+                <a:ea typeface="Calibri" pitchFamily="34" charset="-122"/>
+                <a:cs typeface="Calibri" pitchFamily="34" charset="-120"/>
+              </a:rPr>
+              <a:t>跨学科团队</a:t>
+            </a:r>
+            <a:endParaRPr lang="en-US" sz="1100" dirty="0"/>
+          </a:p>
+        </p:txBody>
+      </p:sp>
+      <p:sp>
+        <p:nvSpPr>
+          <p:cNvPr id="5" name="Text 3"/>
+          <p:cNvSpPr/>
+          <p:nvPr/>
+        </p:nvSpPr>
+        <p:spPr>
+          <a:xfrm>
+            <a:off x="457200" y="621792"/>
+            <a:ext cx="8229600" cy="365760"/>
+          </a:xfrm>
+          <a:prstGeom prst="rect">
+            <a:avLst/>
+          </a:prstGeom>
+          <a:noFill/>
+          <a:ln/>
+        </p:spPr>
+        <p:txBody>
+          <a:bodyPr wrap="square" rtlCol="0" anchor="ctr"/>
+          <a:lstStyle/>
+          <a:p>
+            <a:pPr indent="0" marL="0">
+              <a:buNone/>
+            </a:pPr>
+            <a:r>
+              <a:rPr lang="en-US" sz="2000" b="1" dirty="0">
+                <a:solidFill>
+                  <a:srgbClr val="0D1B2A"/>
+                </a:solidFill>
+                <a:latin typeface="Georgia" pitchFamily="34" charset="0"/>
+                <a:ea typeface="Georgia" pitchFamily="34" charset="-122"/>
+                <a:cs typeface="Georgia" pitchFamily="34" charset="-120"/>
+              </a:rPr>
+              <a:t>产学研医投 · 全链条核心成员</a:t>
+            </a:r>
+            <a:endParaRPr lang="en-US" sz="2000" dirty="0"/>
+          </a:p>
+        </p:txBody>
+      </p:sp>
+      <p:sp>
+        <p:nvSpPr>
+          <p:cNvPr id="6" name="Shape 4"/>
+          <p:cNvSpPr/>
+          <p:nvPr/>
+        </p:nvSpPr>
+        <p:spPr>
+          <a:xfrm>
+            <a:off x="457200" y="1097280"/>
+            <a:ext cx="2651760" cy="1828800"/>
           </a:xfrm>
           <a:prstGeom prst="rect">
             <a:avLst/>
@@ -12777,34 +13603,34 @@
       </p:sp>
       <p:sp>
         <p:nvSpPr>
-          <p:cNvPr id="5" name="Shape 3"/>
-          <p:cNvSpPr/>
-          <p:nvPr/>
-        </p:nvSpPr>
-        <p:spPr>
-          <a:xfrm>
-            <a:off x="548640" y="777240"/>
-            <a:ext cx="1965960" cy="777240"/>
+          <p:cNvPr id="7" name="Shape 5"/>
+          <p:cNvSpPr/>
+          <p:nvPr/>
+        </p:nvSpPr>
+        <p:spPr>
+          <a:xfrm>
+            <a:off x="457200" y="1097280"/>
+            <a:ext cx="777240" cy="1828800"/>
           </a:xfrm>
           <a:prstGeom prst="rect">
             <a:avLst/>
           </a:prstGeom>
           <a:solidFill>
-            <a:srgbClr val="0D1B2A"/>
+            <a:srgbClr val="1A3A6B"/>
           </a:solidFill>
           <a:ln/>
         </p:spPr>
       </p:sp>
       <p:sp>
         <p:nvSpPr>
-          <p:cNvPr id="6" name="Text 4"/>
-          <p:cNvSpPr/>
-          <p:nvPr/>
-        </p:nvSpPr>
-        <p:spPr>
-          <a:xfrm>
-            <a:off x="548640" y="822960"/>
-            <a:ext cx="1965960" cy="502920"/>
+          <p:cNvPr id="8" name="Text 6"/>
+          <p:cNvSpPr/>
+          <p:nvPr/>
+        </p:nvSpPr>
+        <p:spPr>
+          <a:xfrm>
+            <a:off x="457200" y="1691640"/>
+            <a:ext cx="777240" cy="640080"/>
           </a:xfrm>
           <a:prstGeom prst="rect">
             <a:avLst/>
@@ -12820,39 +13646,42 @@
               <a:buNone/>
             </a:pPr>
             <a:r>
-              <a:rPr lang="en-US" sz="2600" dirty="0">
-                <a:solidFill>
-                  <a:srgbClr val="000000"/>
-                </a:solidFill>
-              </a:rPr>
-              <a:t>🎓</a:t>
-            </a:r>
-            <a:endParaRPr lang="en-US" sz="2600" dirty="0"/>
-          </a:p>
-        </p:txBody>
-      </p:sp>
-      <p:sp>
-        <p:nvSpPr>
-          <p:cNvPr id="7" name="Text 5"/>
-          <p:cNvSpPr/>
-          <p:nvPr/>
-        </p:nvSpPr>
-        <p:spPr>
-          <a:xfrm>
-            <a:off x="548640" y="1645920"/>
-            <a:ext cx="1965960" cy="411480"/>
-          </a:xfrm>
-          <a:prstGeom prst="rect">
-            <a:avLst/>
-          </a:prstGeom>
-          <a:noFill/>
-          <a:ln/>
-        </p:spPr>
-        <p:txBody>
-          <a:bodyPr wrap="square" rtlCol="0" anchor="ctr"/>
-          <a:lstStyle/>
-          <a:p>
-            <a:pPr algn="ctr" indent="0" marL="0">
+              <a:rPr lang="en-US" sz="2000" b="1" dirty="0">
+                <a:solidFill>
+                  <a:srgbClr val="FFFFFF"/>
+                </a:solidFill>
+                <a:latin typeface="Georgia" pitchFamily="34" charset="0"/>
+                <a:ea typeface="Georgia" pitchFamily="34" charset="-122"/>
+                <a:cs typeface="Georgia" pitchFamily="34" charset="-120"/>
+              </a:rPr>
+              <a:t>YQ</a:t>
+            </a:r>
+            <a:endParaRPr lang="en-US" sz="2000" dirty="0"/>
+          </a:p>
+        </p:txBody>
+      </p:sp>
+      <p:sp>
+        <p:nvSpPr>
+          <p:cNvPr id="9" name="Text 7"/>
+          <p:cNvSpPr/>
+          <p:nvPr/>
+        </p:nvSpPr>
+        <p:spPr>
+          <a:xfrm>
+            <a:off x="1371600" y="1234440"/>
+            <a:ext cx="1645920" cy="347472"/>
+          </a:xfrm>
+          <a:prstGeom prst="rect">
+            <a:avLst/>
+          </a:prstGeom>
+          <a:noFill/>
+          <a:ln/>
+        </p:spPr>
+        <p:txBody>
+          <a:bodyPr wrap="square" rtlCol="0" anchor="ctr"/>
+          <a:lstStyle/>
+          <a:p>
+            <a:pPr indent="0" marL="0">
               <a:buNone/>
             </a:pPr>
             <a:r>
@@ -12872,30 +13701,69 @@
       </p:sp>
       <p:sp>
         <p:nvSpPr>
-          <p:cNvPr id="8" name="Text 6"/>
-          <p:cNvSpPr/>
-          <p:nvPr/>
-        </p:nvSpPr>
-        <p:spPr>
-          <a:xfrm>
-            <a:off x="548640" y="2011680"/>
-            <a:ext cx="1965960" cy="320040"/>
-          </a:xfrm>
-          <a:prstGeom prst="rect">
-            <a:avLst/>
-          </a:prstGeom>
-          <a:noFill/>
-          <a:ln/>
-        </p:spPr>
-        <p:txBody>
-          <a:bodyPr wrap="square" rtlCol="0" anchor="ctr"/>
-          <a:lstStyle/>
-          <a:p>
-            <a:pPr algn="ctr" indent="0" marL="0">
-              <a:buNone/>
-            </a:pPr>
-            <a:r>
-              <a:rPr lang="en-US" sz="1100" dirty="0">
+          <p:cNvPr id="10" name="Text 8"/>
+          <p:cNvSpPr/>
+          <p:nvPr/>
+        </p:nvSpPr>
+        <p:spPr>
+          <a:xfrm>
+            <a:off x="1371600" y="1572768"/>
+            <a:ext cx="1645920" cy="274320"/>
+          </a:xfrm>
+          <a:prstGeom prst="rect">
+            <a:avLst/>
+          </a:prstGeom>
+          <a:noFill/>
+          <a:ln/>
+        </p:spPr>
+        <p:txBody>
+          <a:bodyPr wrap="square" rtlCol="0" anchor="ctr"/>
+          <a:lstStyle/>
+          <a:p>
+            <a:pPr indent="0" marL="0">
+              <a:buNone/>
+            </a:pPr>
+            <a:r>
+              <a:rPr lang="en-US" sz="1000" b="1" dirty="0">
+                <a:solidFill>
+                  <a:srgbClr val="1A3A6B"/>
+                </a:solidFill>
+                <a:latin typeface="Calibri" pitchFamily="34" charset="0"/>
+                <a:ea typeface="Calibri" pitchFamily="34" charset="-122"/>
+                <a:cs typeface="Calibri" pitchFamily="34" charset="-120"/>
+              </a:rPr>
+              <a:t>特普丽创始人</a:t>
+            </a:r>
+            <a:endParaRPr lang="en-US" sz="1000" dirty="0"/>
+          </a:p>
+        </p:txBody>
+      </p:sp>
+      <p:sp>
+        <p:nvSpPr>
+          <p:cNvPr id="11" name="Text 9"/>
+          <p:cNvSpPr/>
+          <p:nvPr/>
+        </p:nvSpPr>
+        <p:spPr>
+          <a:xfrm>
+            <a:off x="1371600" y="1828800"/>
+            <a:ext cx="1645920" cy="228600"/>
+          </a:xfrm>
+          <a:prstGeom prst="rect">
+            <a:avLst/>
+          </a:prstGeom>
+          <a:noFill/>
+          <a:ln/>
+        </p:spPr>
+        <p:txBody>
+          <a:bodyPr wrap="square" rtlCol="0" anchor="ctr"/>
+          <a:lstStyle/>
+          <a:p>
+            <a:pPr indent="0" marL="0">
+              <a:buNone/>
+            </a:pPr>
+            <a:r>
+              <a:rPr lang="en-US" sz="900" dirty="0">
                 <a:solidFill>
                   <a:srgbClr val="7F8C8D"/>
                 </a:solidFill>
@@ -12903,28 +13771,28 @@
                 <a:ea typeface="Calibri" pitchFamily="34" charset="-122"/>
                 <a:cs typeface="Calibri" pitchFamily="34" charset="-120"/>
               </a:rPr>
-              <a:t>特普丽创始人</a:t>
-            </a:r>
-            <a:endParaRPr lang="en-US" sz="1100" dirty="0"/>
-          </a:p>
-        </p:txBody>
-      </p:sp>
-      <p:sp>
-        <p:nvSpPr>
-          <p:cNvPr id="9" name="Shape 7"/>
-          <p:cNvSpPr/>
-          <p:nvPr/>
-        </p:nvSpPr>
-        <p:spPr>
-          <a:xfrm>
-            <a:off x="822960" y="2423160"/>
-            <a:ext cx="1417320" cy="0"/>
+              <a:t>特普丽新装饰材料</a:t>
+            </a:r>
+            <a:endParaRPr lang="en-US" sz="900" dirty="0"/>
+          </a:p>
+        </p:txBody>
+      </p:sp>
+      <p:sp>
+        <p:nvSpPr>
+          <p:cNvPr id="12" name="Shape 10"/>
+          <p:cNvSpPr/>
+          <p:nvPr/>
+        </p:nvSpPr>
+        <p:spPr>
+          <a:xfrm>
+            <a:off x="1371600" y="2121408"/>
+            <a:ext cx="1600200" cy="0"/>
           </a:xfrm>
           <a:prstGeom prst="line">
             <a:avLst/>
           </a:prstGeom>
           <a:noFill/>
-          <a:ln w="12700">
+          <a:ln w="6350">
             <a:solidFill>
               <a:srgbClr val="E2E8F0"/>
             </a:solidFill>
@@ -12934,30 +13802,30 @@
       </p:sp>
       <p:sp>
         <p:nvSpPr>
-          <p:cNvPr id="10" name="Text 8"/>
-          <p:cNvSpPr/>
-          <p:nvPr/>
-        </p:nvSpPr>
-        <p:spPr>
-          <a:xfrm>
-            <a:off x="640080" y="2514600"/>
-            <a:ext cx="1783080" cy="822960"/>
-          </a:xfrm>
-          <a:prstGeom prst="rect">
-            <a:avLst/>
-          </a:prstGeom>
-          <a:noFill/>
-          <a:ln/>
-        </p:spPr>
-        <p:txBody>
-          <a:bodyPr wrap="square" rtlCol="0" anchor="ctr"/>
-          <a:lstStyle/>
-          <a:p>
-            <a:pPr algn="ctr" indent="0" marL="0">
-              <a:buNone/>
-            </a:pPr>
-            <a:r>
-              <a:rPr lang="en-US" sz="1000" dirty="0">
+          <p:cNvPr id="13" name="Text 11"/>
+          <p:cNvSpPr/>
+          <p:nvPr/>
+        </p:nvSpPr>
+        <p:spPr>
+          <a:xfrm>
+            <a:off x="1371600" y="2176272"/>
+            <a:ext cx="1600200" cy="685800"/>
+          </a:xfrm>
+          <a:prstGeom prst="rect">
+            <a:avLst/>
+          </a:prstGeom>
+          <a:noFill/>
+          <a:ln/>
+        </p:spPr>
+        <p:txBody>
+          <a:bodyPr wrap="square" rtlCol="0" anchor="ctr"/>
+          <a:lstStyle/>
+          <a:p>
+            <a:pPr indent="0" marL="0">
+              <a:buNone/>
+            </a:pPr>
+            <a:r>
+              <a:rPr lang="en-US" sz="850" dirty="0">
                 <a:solidFill>
                   <a:srgbClr val="7F8C8D"/>
                 </a:solidFill>
@@ -12965,100 +13833,22 @@
                 <a:ea typeface="Calibri" pitchFamily="34" charset="-122"/>
                 <a:cs typeface="Calibri" pitchFamily="34" charset="-120"/>
               </a:rPr>
-              <a:t>50年室内材料研发经验</a:t>
-            </a:r>
-            <a:endParaRPr lang="en-US" sz="1000" dirty="0"/>
-          </a:p>
-          <a:p>
-            <a:pPr algn="ctr" indent="0" marL="0">
-              <a:buNone/>
-            </a:pPr>
-            <a:r>
-              <a:rPr lang="en-US" sz="1000" dirty="0">
-                <a:solidFill>
-                  <a:srgbClr val="7F8C8D"/>
-                </a:solidFill>
-                <a:latin typeface="Calibri" pitchFamily="34" charset="0"/>
-                <a:ea typeface="Calibri" pitchFamily="34" charset="-122"/>
-                <a:cs typeface="Calibri" pitchFamily="34" charset="-120"/>
-              </a:rPr>
-              <a:t>企业战略决策核心</a:t>
-            </a:r>
-            <a:endParaRPr lang="en-US" sz="1000" dirty="0"/>
-          </a:p>
-        </p:txBody>
-      </p:sp>
-      <p:sp>
-        <p:nvSpPr>
-          <p:cNvPr id="11" name="Shape 9"/>
-          <p:cNvSpPr/>
-          <p:nvPr/>
-        </p:nvSpPr>
-        <p:spPr>
-          <a:xfrm>
-            <a:off x="777240" y="3429000"/>
-            <a:ext cx="1508760" cy="411480"/>
-          </a:xfrm>
-          <a:prstGeom prst="roundRect">
-            <a:avLst>
-              <a:gd name="adj" fmla="val 17778"/>
-            </a:avLst>
-          </a:prstGeom>
-          <a:solidFill>
-            <a:srgbClr val="00D4AA"/>
-          </a:solidFill>
-          <a:ln/>
-        </p:spPr>
-      </p:sp>
-      <p:sp>
-        <p:nvSpPr>
-          <p:cNvPr id="12" name="Text 10"/>
-          <p:cNvSpPr/>
-          <p:nvPr/>
-        </p:nvSpPr>
-        <p:spPr>
-          <a:xfrm>
-            <a:off x="777240" y="3429000"/>
-            <a:ext cx="1508760" cy="411480"/>
-          </a:xfrm>
-          <a:prstGeom prst="rect">
-            <a:avLst/>
-          </a:prstGeom>
-          <a:noFill/>
-          <a:ln/>
-        </p:spPr>
-        <p:txBody>
-          <a:bodyPr wrap="square" rtlCol="0" anchor="ctr"/>
-          <a:lstStyle/>
-          <a:p>
-            <a:pPr algn="ctr" indent="0" marL="0">
-              <a:buNone/>
-            </a:pPr>
-            <a:r>
-              <a:rPr lang="en-US" sz="1000" b="1" dirty="0">
-                <a:solidFill>
-                  <a:srgbClr val="FFFFFF"/>
-                </a:solidFill>
-                <a:latin typeface="Calibri" pitchFamily="34" charset="0"/>
-                <a:ea typeface="Calibri" pitchFamily="34" charset="-122"/>
-                <a:cs typeface="Calibri" pitchFamily="34" charset="-120"/>
-              </a:rPr>
-              <a:t>战略决策</a:t>
-            </a:r>
-            <a:endParaRPr lang="en-US" sz="1000" dirty="0"/>
-          </a:p>
-        </p:txBody>
-      </p:sp>
-      <p:sp>
-        <p:nvSpPr>
-          <p:cNvPr id="13" name="Shape 11"/>
-          <p:cNvSpPr/>
-          <p:nvPr/>
-        </p:nvSpPr>
-        <p:spPr>
-          <a:xfrm>
-            <a:off x="2697480" y="777240"/>
-            <a:ext cx="1965960" cy="3383280"/>
+              <a:t>50年室内材料研发经验，主导企业战略决策。深耕装饰装修行业，是国内功能型室内材料的先驱探索者。</a:t>
+            </a:r>
+            <a:endParaRPr lang="en-US" sz="850" dirty="0"/>
+          </a:p>
+        </p:txBody>
+      </p:sp>
+      <p:sp>
+        <p:nvSpPr>
+          <p:cNvPr id="14" name="Shape 12"/>
+          <p:cNvSpPr/>
+          <p:nvPr/>
+        </p:nvSpPr>
+        <p:spPr>
+          <a:xfrm>
+            <a:off x="3291840" y="1097280"/>
+            <a:ext cx="2651760" cy="1828800"/>
           </a:xfrm>
           <a:prstGeom prst="rect">
             <a:avLst/>
@@ -13078,34 +13868,34 @@
       </p:sp>
       <p:sp>
         <p:nvSpPr>
-          <p:cNvPr id="14" name="Shape 12"/>
-          <p:cNvSpPr/>
-          <p:nvPr/>
-        </p:nvSpPr>
-        <p:spPr>
-          <a:xfrm>
-            <a:off x="2697480" y="777240"/>
-            <a:ext cx="1965960" cy="777240"/>
+          <p:cNvPr id="15" name="Shape 13"/>
+          <p:cNvSpPr/>
+          <p:nvPr/>
+        </p:nvSpPr>
+        <p:spPr>
+          <a:xfrm>
+            <a:off x="3291840" y="1097280"/>
+            <a:ext cx="777240" cy="1828800"/>
           </a:xfrm>
           <a:prstGeom prst="rect">
             <a:avLst/>
           </a:prstGeom>
           <a:solidFill>
-            <a:srgbClr val="0D1B2A"/>
+            <a:srgbClr val="00D4AA"/>
           </a:solidFill>
           <a:ln/>
         </p:spPr>
       </p:sp>
       <p:sp>
         <p:nvSpPr>
-          <p:cNvPr id="15" name="Text 13"/>
-          <p:cNvSpPr/>
-          <p:nvPr/>
-        </p:nvSpPr>
-        <p:spPr>
-          <a:xfrm>
-            <a:off x="2697480" y="822960"/>
-            <a:ext cx="1965960" cy="502920"/>
+          <p:cNvPr id="16" name="Text 14"/>
+          <p:cNvSpPr/>
+          <p:nvPr/>
+        </p:nvSpPr>
+        <p:spPr>
+          <a:xfrm>
+            <a:off x="3291840" y="1691640"/>
+            <a:ext cx="777240" cy="640080"/>
           </a:xfrm>
           <a:prstGeom prst="rect">
             <a:avLst/>
@@ -13121,39 +13911,42 @@
               <a:buNone/>
             </a:pPr>
             <a:r>
-              <a:rPr lang="en-US" sz="2600" dirty="0">
-                <a:solidFill>
-                  <a:srgbClr val="000000"/>
-                </a:solidFill>
-              </a:rPr>
-              <a:t>📖</a:t>
-            </a:r>
-            <a:endParaRPr lang="en-US" sz="2600" dirty="0"/>
-          </a:p>
-        </p:txBody>
-      </p:sp>
-      <p:sp>
-        <p:nvSpPr>
-          <p:cNvPr id="16" name="Text 14"/>
-          <p:cNvSpPr/>
-          <p:nvPr/>
-        </p:nvSpPr>
-        <p:spPr>
-          <a:xfrm>
-            <a:off x="2697480" y="1645920"/>
-            <a:ext cx="1965960" cy="411480"/>
-          </a:xfrm>
-          <a:prstGeom prst="rect">
-            <a:avLst/>
-          </a:prstGeom>
-          <a:noFill/>
-          <a:ln/>
-        </p:spPr>
-        <p:txBody>
-          <a:bodyPr wrap="square" rtlCol="0" anchor="ctr"/>
-          <a:lstStyle/>
-          <a:p>
-            <a:pPr algn="ctr" indent="0" marL="0">
+              <a:rPr lang="en-US" sz="2000" b="1" dirty="0">
+                <a:solidFill>
+                  <a:srgbClr val="FFFFFF"/>
+                </a:solidFill>
+                <a:latin typeface="Georgia" pitchFamily="34" charset="0"/>
+                <a:ea typeface="Georgia" pitchFamily="34" charset="-122"/>
+                <a:cs typeface="Georgia" pitchFamily="34" charset="-120"/>
+              </a:rPr>
+              <a:t>LL</a:t>
+            </a:r>
+            <a:endParaRPr lang="en-US" sz="2000" dirty="0"/>
+          </a:p>
+        </p:txBody>
+      </p:sp>
+      <p:sp>
+        <p:nvSpPr>
+          <p:cNvPr id="17" name="Text 15"/>
+          <p:cNvSpPr/>
+          <p:nvPr/>
+        </p:nvSpPr>
+        <p:spPr>
+          <a:xfrm>
+            <a:off x="4206240" y="1234440"/>
+            <a:ext cx="1645920" cy="347472"/>
+          </a:xfrm>
+          <a:prstGeom prst="rect">
+            <a:avLst/>
+          </a:prstGeom>
+          <a:noFill/>
+          <a:ln/>
+        </p:spPr>
+        <p:txBody>
+          <a:bodyPr wrap="square" rtlCol="0" anchor="ctr"/>
+          <a:lstStyle/>
+          <a:p>
+            <a:pPr indent="0" marL="0">
               <a:buNone/>
             </a:pPr>
             <a:r>
@@ -13165,7 +13958,7 @@
                 <a:ea typeface="Calibri" pitchFamily="34" charset="-122"/>
                 <a:cs typeface="Calibri" pitchFamily="34" charset="-120"/>
               </a:rPr>
-              <a:t>学术带头人</a:t>
+              <a:t>励铃</a:t>
             </a:r>
             <a:endParaRPr lang="en-US" sz="1500" dirty="0"/>
           </a:p>
@@ -13173,30 +13966,69 @@
       </p:sp>
       <p:sp>
         <p:nvSpPr>
-          <p:cNvPr id="17" name="Text 15"/>
-          <p:cNvSpPr/>
-          <p:nvPr/>
-        </p:nvSpPr>
-        <p:spPr>
-          <a:xfrm>
-            <a:off x="2697480" y="2011680"/>
-            <a:ext cx="1965960" cy="320040"/>
-          </a:xfrm>
-          <a:prstGeom prst="rect">
-            <a:avLst/>
-          </a:prstGeom>
-          <a:noFill/>
-          <a:ln/>
-        </p:spPr>
-        <p:txBody>
-          <a:bodyPr wrap="square" rtlCol="0" anchor="ctr"/>
-          <a:lstStyle/>
-          <a:p>
-            <a:pPr algn="ctr" indent="0" marL="0">
-              <a:buNone/>
-            </a:pPr>
-            <a:r>
-              <a:rPr lang="en-US" sz="1100" dirty="0">
+          <p:cNvPr id="18" name="Text 16"/>
+          <p:cNvSpPr/>
+          <p:nvPr/>
+        </p:nvSpPr>
+        <p:spPr>
+          <a:xfrm>
+            <a:off x="4206240" y="1572768"/>
+            <a:ext cx="1645920" cy="274320"/>
+          </a:xfrm>
+          <a:prstGeom prst="rect">
+            <a:avLst/>
+          </a:prstGeom>
+          <a:noFill/>
+          <a:ln/>
+        </p:spPr>
+        <p:txBody>
+          <a:bodyPr wrap="square" rtlCol="0" anchor="ctr"/>
+          <a:lstStyle/>
+          <a:p>
+            <a:pPr indent="0" marL="0">
+              <a:buNone/>
+            </a:pPr>
+            <a:r>
+              <a:rPr lang="en-US" sz="1000" b="1" dirty="0">
+                <a:solidFill>
+                  <a:srgbClr val="00D4AA"/>
+                </a:solidFill>
+                <a:latin typeface="Calibri" pitchFamily="34" charset="0"/>
+                <a:ea typeface="Calibri" pitchFamily="34" charset="-122"/>
+                <a:cs typeface="Calibri" pitchFamily="34" charset="-120"/>
+              </a:rPr>
+              <a:t>核心技术负责人</a:t>
+            </a:r>
+            <a:endParaRPr lang="en-US" sz="1000" dirty="0"/>
+          </a:p>
+        </p:txBody>
+      </p:sp>
+      <p:sp>
+        <p:nvSpPr>
+          <p:cNvPr id="19" name="Text 17"/>
+          <p:cNvSpPr/>
+          <p:nvPr/>
+        </p:nvSpPr>
+        <p:spPr>
+          <a:xfrm>
+            <a:off x="4206240" y="1828800"/>
+            <a:ext cx="1645920" cy="228600"/>
+          </a:xfrm>
+          <a:prstGeom prst="rect">
+            <a:avLst/>
+          </a:prstGeom>
+          <a:noFill/>
+          <a:ln/>
+        </p:spPr>
+        <p:txBody>
+          <a:bodyPr wrap="square" rtlCol="0" anchor="ctr"/>
+          <a:lstStyle/>
+          <a:p>
+            <a:pPr indent="0" marL="0">
+              <a:buNone/>
+            </a:pPr>
+            <a:r>
+              <a:rPr lang="en-US" sz="900" dirty="0">
                 <a:solidFill>
                   <a:srgbClr val="7F8C8D"/>
                 </a:solidFill>
@@ -13204,28 +14036,28 @@
                 <a:ea typeface="Calibri" pitchFamily="34" charset="-122"/>
                 <a:cs typeface="Calibri" pitchFamily="34" charset="-120"/>
               </a:rPr>
-              <a:t>北京化工大学资深教授</a:t>
-            </a:r>
-            <a:endParaRPr lang="en-US" sz="1100" dirty="0"/>
-          </a:p>
-        </p:txBody>
-      </p:sp>
-      <p:sp>
-        <p:nvSpPr>
-          <p:cNvPr id="18" name="Shape 16"/>
-          <p:cNvSpPr/>
-          <p:nvPr/>
-        </p:nvSpPr>
-        <p:spPr>
-          <a:xfrm>
-            <a:off x="2971800" y="2423160"/>
-            <a:ext cx="1417320" cy="0"/>
+              <a:t>北京化工大学</a:t>
+            </a:r>
+            <a:endParaRPr lang="en-US" sz="900" dirty="0"/>
+          </a:p>
+        </p:txBody>
+      </p:sp>
+      <p:sp>
+        <p:nvSpPr>
+          <p:cNvPr id="20" name="Shape 18"/>
+          <p:cNvSpPr/>
+          <p:nvPr/>
+        </p:nvSpPr>
+        <p:spPr>
+          <a:xfrm>
+            <a:off x="4206240" y="2121408"/>
+            <a:ext cx="1600200" cy="0"/>
           </a:xfrm>
           <a:prstGeom prst="line">
             <a:avLst/>
           </a:prstGeom>
           <a:noFill/>
-          <a:ln w="12700">
+          <a:ln w="6350">
             <a:solidFill>
               <a:srgbClr val="E2E8F0"/>
             </a:solidFill>
@@ -13235,30 +14067,30 @@
       </p:sp>
       <p:sp>
         <p:nvSpPr>
-          <p:cNvPr id="19" name="Text 17"/>
-          <p:cNvSpPr/>
-          <p:nvPr/>
-        </p:nvSpPr>
-        <p:spPr>
-          <a:xfrm>
-            <a:off x="2788920" y="2514600"/>
-            <a:ext cx="1783080" cy="822960"/>
-          </a:xfrm>
-          <a:prstGeom prst="rect">
-            <a:avLst/>
-          </a:prstGeom>
-          <a:noFill/>
-          <a:ln/>
-        </p:spPr>
-        <p:txBody>
-          <a:bodyPr wrap="square" rtlCol="0" anchor="ctr"/>
-          <a:lstStyle/>
-          <a:p>
-            <a:pPr algn="ctr" indent="0" marL="0">
-              <a:buNone/>
-            </a:pPr>
-            <a:r>
-              <a:rPr lang="en-US" sz="1000" dirty="0">
+          <p:cNvPr id="21" name="Text 19"/>
+          <p:cNvSpPr/>
+          <p:nvPr/>
+        </p:nvSpPr>
+        <p:spPr>
+          <a:xfrm>
+            <a:off x="4206240" y="2176272"/>
+            <a:ext cx="1600200" cy="685800"/>
+          </a:xfrm>
+          <a:prstGeom prst="rect">
+            <a:avLst/>
+          </a:prstGeom>
+          <a:noFill/>
+          <a:ln/>
+        </p:spPr>
+        <p:txBody>
+          <a:bodyPr wrap="square" rtlCol="0" anchor="ctr"/>
+          <a:lstStyle/>
+          <a:p>
+            <a:pPr indent="0" marL="0">
+              <a:buNone/>
+            </a:pPr>
+            <a:r>
+              <a:rPr lang="en-US" sz="850" dirty="0">
                 <a:solidFill>
                   <a:srgbClr val="7F8C8D"/>
                 </a:solidFill>
@@ -13266,87 +14098,9 @@
                 <a:ea typeface="Calibri" pitchFamily="34" charset="-122"/>
                 <a:cs typeface="Calibri" pitchFamily="34" charset="-120"/>
               </a:rPr>
-              <a:t>负氧离子技术学术权威</a:t>
-            </a:r>
-            <a:endParaRPr lang="en-US" sz="1000" dirty="0"/>
-          </a:p>
-          <a:p>
-            <a:pPr algn="ctr" indent="0" marL="0">
-              <a:buNone/>
-            </a:pPr>
-            <a:r>
-              <a:rPr lang="en-US" sz="1000" dirty="0">
-                <a:solidFill>
-                  <a:srgbClr val="7F8C8D"/>
-                </a:solidFill>
-                <a:latin typeface="Calibri" pitchFamily="34" charset="0"/>
-                <a:ea typeface="Calibri" pitchFamily="34" charset="-122"/>
-                <a:cs typeface="Calibri" pitchFamily="34" charset="-120"/>
-              </a:rPr>
-              <a:t>产学研融合推动者</a:t>
-            </a:r>
-            <a:endParaRPr lang="en-US" sz="1000" dirty="0"/>
-          </a:p>
-        </p:txBody>
-      </p:sp>
-      <p:sp>
-        <p:nvSpPr>
-          <p:cNvPr id="20" name="Shape 18"/>
-          <p:cNvSpPr/>
-          <p:nvPr/>
-        </p:nvSpPr>
-        <p:spPr>
-          <a:xfrm>
-            <a:off x="2926080" y="3429000"/>
-            <a:ext cx="1508760" cy="411480"/>
-          </a:xfrm>
-          <a:prstGeom prst="roundRect">
-            <a:avLst>
-              <a:gd name="adj" fmla="val 17778"/>
-            </a:avLst>
-          </a:prstGeom>
-          <a:solidFill>
-            <a:srgbClr val="1A3A6B"/>
-          </a:solidFill>
-          <a:ln/>
-        </p:spPr>
-      </p:sp>
-      <p:sp>
-        <p:nvSpPr>
-          <p:cNvPr id="21" name="Text 19"/>
-          <p:cNvSpPr/>
-          <p:nvPr/>
-        </p:nvSpPr>
-        <p:spPr>
-          <a:xfrm>
-            <a:off x="2926080" y="3429000"/>
-            <a:ext cx="1508760" cy="411480"/>
-          </a:xfrm>
-          <a:prstGeom prst="rect">
-            <a:avLst/>
-          </a:prstGeom>
-          <a:noFill/>
-          <a:ln/>
-        </p:spPr>
-        <p:txBody>
-          <a:bodyPr wrap="square" rtlCol="0" anchor="ctr"/>
-          <a:lstStyle/>
-          <a:p>
-            <a:pPr algn="ctr" indent="0" marL="0">
-              <a:buNone/>
-            </a:pPr>
-            <a:r>
-              <a:rPr lang="en-US" sz="1000" b="1" dirty="0">
-                <a:solidFill>
-                  <a:srgbClr val="FFFFFF"/>
-                </a:solidFill>
-                <a:latin typeface="Calibri" pitchFamily="34" charset="0"/>
-                <a:ea typeface="Calibri" pitchFamily="34" charset="-122"/>
-                <a:cs typeface="Calibri" pitchFamily="34" charset="-120"/>
-              </a:rPr>
-              <a:t>学术指导</a:t>
-            </a:r>
-            <a:endParaRPr lang="en-US" sz="1000" dirty="0"/>
+              <a:t>AMIC无源负氧离子技术发明人。长期从事功能材料研究，发表核心期刊论文20余篇，主持多项国家级科研项目。</a:t>
+            </a:r>
+            <a:endParaRPr lang="en-US" sz="850" dirty="0"/>
           </a:p>
         </p:txBody>
       </p:sp>
@@ -13358,8 +14112,8 @@
         </p:nvSpPr>
         <p:spPr>
           <a:xfrm>
-            <a:off x="4846320" y="777240"/>
-            <a:ext cx="1965960" cy="3383280"/>
+            <a:off x="6126480" y="1097280"/>
+            <a:ext cx="2651760" cy="1828800"/>
           </a:xfrm>
           <a:prstGeom prst="rect">
             <a:avLst/>
@@ -13385,14 +14139,14 @@
         </p:nvSpPr>
         <p:spPr>
           <a:xfrm>
-            <a:off x="4846320" y="777240"/>
-            <a:ext cx="1965960" cy="777240"/>
+            <a:off x="6126480" y="1097280"/>
+            <a:ext cx="777240" cy="1828800"/>
           </a:xfrm>
           <a:prstGeom prst="rect">
             <a:avLst/>
           </a:prstGeom>
           <a:solidFill>
-            <a:srgbClr val="0D1B2A"/>
+            <a:srgbClr val="7C3AED"/>
           </a:solidFill>
           <a:ln/>
         </p:spPr>
@@ -13405,8 +14159,8 @@
         </p:nvSpPr>
         <p:spPr>
           <a:xfrm>
-            <a:off x="4846320" y="822960"/>
-            <a:ext cx="1965960" cy="502920"/>
+            <a:off x="6126480" y="1691640"/>
+            <a:ext cx="777240" cy="640080"/>
           </a:xfrm>
           <a:prstGeom prst="rect">
             <a:avLst/>
@@ -13422,14 +14176,17 @@
               <a:buNone/>
             </a:pPr>
             <a:r>
-              <a:rPr lang="en-US" sz="2600" dirty="0">
-                <a:solidFill>
-                  <a:srgbClr val="000000"/>
-                </a:solidFill>
-              </a:rPr>
-              <a:t>🔬</a:t>
-            </a:r>
-            <a:endParaRPr lang="en-US" sz="2600" dirty="0"/>
+              <a:rPr lang="en-US" sz="2000" b="1" dirty="0">
+                <a:solidFill>
+                  <a:srgbClr val="FFFFFF"/>
+                </a:solidFill>
+                <a:latin typeface="Georgia" pitchFamily="34" charset="0"/>
+                <a:ea typeface="Georgia" pitchFamily="34" charset="-122"/>
+                <a:cs typeface="Georgia" pitchFamily="34" charset="-120"/>
+              </a:rPr>
+              <a:t>ZH</a:t>
+            </a:r>
+            <a:endParaRPr lang="en-US" sz="2000" dirty="0"/>
           </a:p>
         </p:txBody>
       </p:sp>
@@ -13441,20 +14198,20 @@
         </p:nvSpPr>
         <p:spPr>
           <a:xfrm>
-            <a:off x="4846320" y="1645920"/>
-            <a:ext cx="1965960" cy="411480"/>
-          </a:xfrm>
-          <a:prstGeom prst="rect">
-            <a:avLst/>
-          </a:prstGeom>
-          <a:noFill/>
-          <a:ln/>
-        </p:spPr>
-        <p:txBody>
-          <a:bodyPr wrap="square" rtlCol="0" anchor="ctr"/>
-          <a:lstStyle/>
-          <a:p>
-            <a:pPr algn="ctr" indent="0" marL="0">
+            <a:off x="7040880" y="1234440"/>
+            <a:ext cx="1645920" cy="347472"/>
+          </a:xfrm>
+          <a:prstGeom prst="rect">
+            <a:avLst/>
+          </a:prstGeom>
+          <a:noFill/>
+          <a:ln/>
+        </p:spPr>
+        <p:txBody>
+          <a:bodyPr wrap="square" rtlCol="0" anchor="ctr"/>
+          <a:lstStyle/>
+          <a:p>
+            <a:pPr indent="0" marL="0">
               <a:buNone/>
             </a:pPr>
             <a:r>
@@ -13466,7 +14223,7 @@
                 <a:ea typeface="Calibri" pitchFamily="34" charset="-122"/>
                 <a:cs typeface="Calibri" pitchFamily="34" charset="-120"/>
               </a:rPr>
-              <a:t>临床医学团队</a:t>
+              <a:t>张华</a:t>
             </a:r>
             <a:endParaRPr lang="en-US" sz="1500" dirty="0"/>
           </a:p>
@@ -13480,24 +14237,63 @@
         </p:nvSpPr>
         <p:spPr>
           <a:xfrm>
-            <a:off x="4846320" y="2011680"/>
-            <a:ext cx="1965960" cy="320040"/>
-          </a:xfrm>
-          <a:prstGeom prst="rect">
-            <a:avLst/>
-          </a:prstGeom>
-          <a:noFill/>
-          <a:ln/>
-        </p:spPr>
-        <p:txBody>
-          <a:bodyPr wrap="square" rtlCol="0" anchor="ctr"/>
-          <a:lstStyle/>
-          <a:p>
-            <a:pPr algn="ctr" indent="0" marL="0">
-              <a:buNone/>
-            </a:pPr>
-            <a:r>
-              <a:rPr lang="en-US" sz="1100" dirty="0">
+            <a:off x="7040880" y="1572768"/>
+            <a:ext cx="1645920" cy="274320"/>
+          </a:xfrm>
+          <a:prstGeom prst="rect">
+            <a:avLst/>
+          </a:prstGeom>
+          <a:noFill/>
+          <a:ln/>
+        </p:spPr>
+        <p:txBody>
+          <a:bodyPr wrap="square" rtlCol="0" anchor="ctr"/>
+          <a:lstStyle/>
+          <a:p>
+            <a:pPr indent="0" marL="0">
+              <a:buNone/>
+            </a:pPr>
+            <a:r>
+              <a:rPr lang="en-US" sz="1000" b="1" dirty="0">
+                <a:solidFill>
+                  <a:srgbClr val="7C3AED"/>
+                </a:solidFill>
+                <a:latin typeface="Calibri" pitchFamily="34" charset="0"/>
+                <a:ea typeface="Calibri" pitchFamily="34" charset="-122"/>
+                <a:cs typeface="Calibri" pitchFamily="34" charset="-120"/>
+              </a:rPr>
+              <a:t>临床医学负责人</a:t>
+            </a:r>
+            <a:endParaRPr lang="en-US" sz="1000" dirty="0"/>
+          </a:p>
+        </p:txBody>
+      </p:sp>
+      <p:sp>
+        <p:nvSpPr>
+          <p:cNvPr id="27" name="Text 25"/>
+          <p:cNvSpPr/>
+          <p:nvPr/>
+        </p:nvSpPr>
+        <p:spPr>
+          <a:xfrm>
+            <a:off x="7040880" y="1828800"/>
+            <a:ext cx="1645920" cy="228600"/>
+          </a:xfrm>
+          <a:prstGeom prst="rect">
+            <a:avLst/>
+          </a:prstGeom>
+          <a:noFill/>
+          <a:ln/>
+        </p:spPr>
+        <p:txBody>
+          <a:bodyPr wrap="square" rtlCol="0" anchor="ctr"/>
+          <a:lstStyle/>
+          <a:p>
+            <a:pPr indent="0" marL="0">
+              <a:buNone/>
+            </a:pPr>
+            <a:r>
+              <a:rPr lang="en-US" sz="900" dirty="0">
                 <a:solidFill>
                   <a:srgbClr val="7F8C8D"/>
                 </a:solidFill>
@@ -13505,28 +14301,28 @@
                 <a:ea typeface="Calibri" pitchFamily="34" charset="-122"/>
                 <a:cs typeface="Calibri" pitchFamily="34" charset="-120"/>
               </a:rPr>
-              <a:t>睡眠医学专家</a:t>
-            </a:r>
-            <a:endParaRPr lang="en-US" sz="1100" dirty="0"/>
-          </a:p>
-        </p:txBody>
-      </p:sp>
-      <p:sp>
-        <p:nvSpPr>
-          <p:cNvPr id="27" name="Shape 25"/>
-          <p:cNvSpPr/>
-          <p:nvPr/>
-        </p:nvSpPr>
-        <p:spPr>
-          <a:xfrm>
-            <a:off x="5120640" y="2423160"/>
-            <a:ext cx="1417320" cy="0"/>
+              <a:t>北京协和医院睡眠中心</a:t>
+            </a:r>
+            <a:endParaRPr lang="en-US" sz="900" dirty="0"/>
+          </a:p>
+        </p:txBody>
+      </p:sp>
+      <p:sp>
+        <p:nvSpPr>
+          <p:cNvPr id="28" name="Shape 26"/>
+          <p:cNvSpPr/>
+          <p:nvPr/>
+        </p:nvSpPr>
+        <p:spPr>
+          <a:xfrm>
+            <a:off x="7040880" y="2121408"/>
+            <a:ext cx="1600200" cy="0"/>
           </a:xfrm>
           <a:prstGeom prst="line">
             <a:avLst/>
           </a:prstGeom>
           <a:noFill/>
-          <a:ln w="12700">
+          <a:ln w="6350">
             <a:solidFill>
               <a:srgbClr val="E2E8F0"/>
             </a:solidFill>
@@ -13536,30 +14332,30 @@
       </p:sp>
       <p:sp>
         <p:nvSpPr>
-          <p:cNvPr id="28" name="Text 26"/>
-          <p:cNvSpPr/>
-          <p:nvPr/>
-        </p:nvSpPr>
-        <p:spPr>
-          <a:xfrm>
-            <a:off x="4937760" y="2514600"/>
-            <a:ext cx="1783080" cy="822960"/>
-          </a:xfrm>
-          <a:prstGeom prst="rect">
-            <a:avLst/>
-          </a:prstGeom>
-          <a:noFill/>
-          <a:ln/>
-        </p:spPr>
-        <p:txBody>
-          <a:bodyPr wrap="square" rtlCol="0" anchor="ctr"/>
-          <a:lstStyle/>
-          <a:p>
-            <a:pPr algn="ctr" indent="0" marL="0">
-              <a:buNone/>
-            </a:pPr>
-            <a:r>
-              <a:rPr lang="en-US" sz="1000" dirty="0">
+          <p:cNvPr id="29" name="Text 27"/>
+          <p:cNvSpPr/>
+          <p:nvPr/>
+        </p:nvSpPr>
+        <p:spPr>
+          <a:xfrm>
+            <a:off x="7040880" y="2176272"/>
+            <a:ext cx="1600200" cy="685800"/>
+          </a:xfrm>
+          <a:prstGeom prst="rect">
+            <a:avLst/>
+          </a:prstGeom>
+          <a:noFill/>
+          <a:ln/>
+        </p:spPr>
+        <p:txBody>
+          <a:bodyPr wrap="square" rtlCol="0" anchor="ctr"/>
+          <a:lstStyle/>
+          <a:p>
+            <a:pPr indent="0" marL="0">
+              <a:buNone/>
+            </a:pPr>
+            <a:r>
+              <a:rPr lang="en-US" sz="850" dirty="0">
                 <a:solidFill>
                   <a:srgbClr val="7F8C8D"/>
                 </a:solidFill>
@@ -13567,100 +14363,22 @@
                 <a:ea typeface="Calibri" pitchFamily="34" charset="-122"/>
                 <a:cs typeface="Calibri" pitchFamily="34" charset="-120"/>
               </a:rPr>
-              <a:t>睡眠医学专家</a:t>
-            </a:r>
-            <a:endParaRPr lang="en-US" sz="1000" dirty="0"/>
-          </a:p>
-          <a:p>
-            <a:pPr algn="ctr" indent="0" marL="0">
-              <a:buNone/>
-            </a:pPr>
-            <a:r>
-              <a:rPr lang="en-US" sz="1000" dirty="0">
-                <a:solidFill>
-                  <a:srgbClr val="7F8C8D"/>
-                </a:solidFill>
-                <a:latin typeface="Calibri" pitchFamily="34" charset="0"/>
-                <a:ea typeface="Calibri" pitchFamily="34" charset="-122"/>
-                <a:cs typeface="Calibri" pitchFamily="34" charset="-120"/>
-              </a:rPr>
-              <a:t>临床验证设计执行</a:t>
-            </a:r>
-            <a:endParaRPr lang="en-US" sz="1000" dirty="0"/>
-          </a:p>
-        </p:txBody>
-      </p:sp>
-      <p:sp>
-        <p:nvSpPr>
-          <p:cNvPr id="29" name="Shape 27"/>
-          <p:cNvSpPr/>
-          <p:nvPr/>
-        </p:nvSpPr>
-        <p:spPr>
-          <a:xfrm>
-            <a:off x="5074920" y="3429000"/>
-            <a:ext cx="1508760" cy="411480"/>
-          </a:xfrm>
-          <a:prstGeom prst="roundRect">
-            <a:avLst>
-              <a:gd name="adj" fmla="val 17778"/>
-            </a:avLst>
-          </a:prstGeom>
-          <a:solidFill>
-            <a:srgbClr val="7C3AED"/>
-          </a:solidFill>
-          <a:ln/>
-        </p:spPr>
-      </p:sp>
-      <p:sp>
-        <p:nvSpPr>
-          <p:cNvPr id="30" name="Text 28"/>
-          <p:cNvSpPr/>
-          <p:nvPr/>
-        </p:nvSpPr>
-        <p:spPr>
-          <a:xfrm>
-            <a:off x="5074920" y="3429000"/>
-            <a:ext cx="1508760" cy="411480"/>
-          </a:xfrm>
-          <a:prstGeom prst="rect">
-            <a:avLst/>
-          </a:prstGeom>
-          <a:noFill/>
-          <a:ln/>
-        </p:spPr>
-        <p:txBody>
-          <a:bodyPr wrap="square" rtlCol="0" anchor="ctr"/>
-          <a:lstStyle/>
-          <a:p>
-            <a:pPr algn="ctr" indent="0" marL="0">
-              <a:buNone/>
-            </a:pPr>
-            <a:r>
-              <a:rPr lang="en-US" sz="1000" b="1" dirty="0">
-                <a:solidFill>
-                  <a:srgbClr val="FFFFFF"/>
-                </a:solidFill>
-                <a:latin typeface="Calibri" pitchFamily="34" charset="0"/>
-                <a:ea typeface="Calibri" pitchFamily="34" charset="-122"/>
-                <a:cs typeface="Calibri" pitchFamily="34" charset="-120"/>
-              </a:rPr>
-              <a:t>循证医学</a:t>
-            </a:r>
-            <a:endParaRPr lang="en-US" sz="1000" dirty="0"/>
-          </a:p>
-        </p:txBody>
-      </p:sp>
-      <p:sp>
-        <p:nvSpPr>
-          <p:cNvPr id="31" name="Shape 29"/>
-          <p:cNvSpPr/>
-          <p:nvPr/>
-        </p:nvSpPr>
-        <p:spPr>
-          <a:xfrm>
-            <a:off x="6995160" y="777240"/>
-            <a:ext cx="1965960" cy="3383280"/>
+              <a:t>北京协和医院睡眠医学专家，主持负氧离子微环境干预睡眠障碍的临床研究设计，主导40对40双盲试验。</a:t>
+            </a:r>
+            <a:endParaRPr lang="en-US" sz="850" dirty="0"/>
+          </a:p>
+        </p:txBody>
+      </p:sp>
+      <p:sp>
+        <p:nvSpPr>
+          <p:cNvPr id="30" name="Shape 28"/>
+          <p:cNvSpPr/>
+          <p:nvPr/>
+        </p:nvSpPr>
+        <p:spPr>
+          <a:xfrm>
+            <a:off x="457200" y="3063240"/>
+            <a:ext cx="2651760" cy="1828800"/>
           </a:xfrm>
           <a:prstGeom prst="rect">
             <a:avLst/>
@@ -13680,57 +14398,99 @@
       </p:sp>
       <p:sp>
         <p:nvSpPr>
-          <p:cNvPr id="32" name="Shape 30"/>
-          <p:cNvSpPr/>
-          <p:nvPr/>
-        </p:nvSpPr>
-        <p:spPr>
-          <a:xfrm>
-            <a:off x="6995160" y="777240"/>
-            <a:ext cx="1965960" cy="777240"/>
+          <p:cNvPr id="31" name="Shape 29"/>
+          <p:cNvSpPr/>
+          <p:nvPr/>
+        </p:nvSpPr>
+        <p:spPr>
+          <a:xfrm>
+            <a:off x="457200" y="3063240"/>
+            <a:ext cx="777240" cy="1828800"/>
           </a:xfrm>
           <a:prstGeom prst="rect">
             <a:avLst/>
           </a:prstGeom>
           <a:solidFill>
-            <a:srgbClr val="0D1B2A"/>
+            <a:srgbClr val="FF6B35"/>
           </a:solidFill>
           <a:ln/>
         </p:spPr>
       </p:sp>
       <p:sp>
         <p:nvSpPr>
+          <p:cNvPr id="32" name="Text 30"/>
+          <p:cNvSpPr/>
+          <p:nvPr/>
+        </p:nvSpPr>
+        <p:spPr>
+          <a:xfrm>
+            <a:off x="457200" y="3657600"/>
+            <a:ext cx="777240" cy="640080"/>
+          </a:xfrm>
+          <a:prstGeom prst="rect">
+            <a:avLst/>
+          </a:prstGeom>
+          <a:noFill/>
+          <a:ln/>
+        </p:spPr>
+        <p:txBody>
+          <a:bodyPr wrap="square" rtlCol="0" anchor="ctr"/>
+          <a:lstStyle/>
+          <a:p>
+            <a:pPr algn="ctr" indent="0" marL="0">
+              <a:buNone/>
+            </a:pPr>
+            <a:r>
+              <a:rPr lang="en-US" sz="2000" b="1" dirty="0">
+                <a:solidFill>
+                  <a:srgbClr val="FFFFFF"/>
+                </a:solidFill>
+                <a:latin typeface="Georgia" pitchFamily="34" charset="0"/>
+                <a:ea typeface="Georgia" pitchFamily="34" charset="-122"/>
+                <a:cs typeface="Georgia" pitchFamily="34" charset="-120"/>
+              </a:rPr>
+              <a:t>WL</a:t>
+            </a:r>
+            <a:endParaRPr lang="en-US" sz="2000" dirty="0"/>
+          </a:p>
+        </p:txBody>
+      </p:sp>
+      <p:sp>
+        <p:nvSpPr>
           <p:cNvPr id="33" name="Text 31"/>
           <p:cNvSpPr/>
           <p:nvPr/>
         </p:nvSpPr>
         <p:spPr>
           <a:xfrm>
-            <a:off x="6995160" y="822960"/>
-            <a:ext cx="1965960" cy="502920"/>
-          </a:xfrm>
-          <a:prstGeom prst="rect">
-            <a:avLst/>
-          </a:prstGeom>
-          <a:noFill/>
-          <a:ln/>
-        </p:spPr>
-        <p:txBody>
-          <a:bodyPr wrap="square" rtlCol="0" anchor="ctr"/>
-          <a:lstStyle/>
-          <a:p>
-            <a:pPr algn="ctr" indent="0" marL="0">
-              <a:buNone/>
-            </a:pPr>
-            <a:r>
-              <a:rPr lang="en-US" sz="2600" dirty="0">
-                <a:solidFill>
-                  <a:srgbClr val="000000"/>
-                </a:solidFill>
-              </a:rPr>
-              <a:t>💼</a:t>
-            </a:r>
-            <a:endParaRPr lang="en-US" sz="2600" dirty="0"/>
+            <a:off x="1371600" y="3200400"/>
+            <a:ext cx="1645920" cy="347472"/>
+          </a:xfrm>
+          <a:prstGeom prst="rect">
+            <a:avLst/>
+          </a:prstGeom>
+          <a:noFill/>
+          <a:ln/>
+        </p:spPr>
+        <p:txBody>
+          <a:bodyPr wrap="square" rtlCol="0" anchor="ctr"/>
+          <a:lstStyle/>
+          <a:p>
+            <a:pPr indent="0" marL="0">
+              <a:buNone/>
+            </a:pPr>
+            <a:r>
+              <a:rPr lang="en-US" sz="1500" b="1" dirty="0">
+                <a:solidFill>
+                  <a:srgbClr val="2C3E50"/>
+                </a:solidFill>
+                <a:latin typeface="Calibri" pitchFamily="34" charset="0"/>
+                <a:ea typeface="Calibri" pitchFamily="34" charset="-122"/>
+                <a:cs typeface="Calibri" pitchFamily="34" charset="-120"/>
+              </a:rPr>
+              <a:t>王磊</a:t>
+            </a:r>
+            <a:endParaRPr lang="en-US" sz="1500" dirty="0"/>
           </a:p>
         </p:txBody>
       </p:sp>
@@ -13742,34 +14502,34 @@
         </p:nvSpPr>
         <p:spPr>
           <a:xfrm>
-            <a:off x="6995160" y="1645920"/>
-            <a:ext cx="1965960" cy="411480"/>
-          </a:xfrm>
-          <a:prstGeom prst="rect">
-            <a:avLst/>
-          </a:prstGeom>
-          <a:noFill/>
-          <a:ln/>
-        </p:spPr>
-        <p:txBody>
-          <a:bodyPr wrap="square" rtlCol="0" anchor="ctr"/>
-          <a:lstStyle/>
-          <a:p>
-            <a:pPr algn="ctr" indent="0" marL="0">
-              <a:buNone/>
-            </a:pPr>
-            <a:r>
-              <a:rPr lang="en-US" sz="1500" b="1" dirty="0">
-                <a:solidFill>
-                  <a:srgbClr val="2C3E50"/>
-                </a:solidFill>
-                <a:latin typeface="Calibri" pitchFamily="34" charset="0"/>
-                <a:ea typeface="Calibri" pitchFamily="34" charset="-122"/>
-                <a:cs typeface="Calibri" pitchFamily="34" charset="-120"/>
-              </a:rPr>
-              <a:t>朱国勇</a:t>
-            </a:r>
-            <a:endParaRPr lang="en-US" sz="1500" dirty="0"/>
+            <a:off x="1371600" y="3538728"/>
+            <a:ext cx="1645920" cy="274320"/>
+          </a:xfrm>
+          <a:prstGeom prst="rect">
+            <a:avLst/>
+          </a:prstGeom>
+          <a:noFill/>
+          <a:ln/>
+        </p:spPr>
+        <p:txBody>
+          <a:bodyPr wrap="square" rtlCol="0" anchor="ctr"/>
+          <a:lstStyle/>
+          <a:p>
+            <a:pPr indent="0" marL="0">
+              <a:buNone/>
+            </a:pPr>
+            <a:r>
+              <a:rPr lang="en-US" sz="1000" b="1" dirty="0">
+                <a:solidFill>
+                  <a:srgbClr val="FF6B35"/>
+                </a:solidFill>
+                <a:latin typeface="Calibri" pitchFamily="34" charset="0"/>
+                <a:ea typeface="Calibri" pitchFamily="34" charset="-122"/>
+                <a:cs typeface="Calibri" pitchFamily="34" charset="-120"/>
+              </a:rPr>
+              <a:t>市场负责人</a:t>
+            </a:r>
+            <a:endParaRPr lang="en-US" sz="1000" dirty="0"/>
           </a:p>
         </p:txBody>
       </p:sp>
@@ -13781,24 +14541,24 @@
         </p:nvSpPr>
         <p:spPr>
           <a:xfrm>
-            <a:off x="6995160" y="2011680"/>
-            <a:ext cx="1965960" cy="320040"/>
-          </a:xfrm>
-          <a:prstGeom prst="rect">
-            <a:avLst/>
-          </a:prstGeom>
-          <a:noFill/>
-          <a:ln/>
-        </p:spPr>
-        <p:txBody>
-          <a:bodyPr wrap="square" rtlCol="0" anchor="ctr"/>
-          <a:lstStyle/>
-          <a:p>
-            <a:pPr algn="ctr" indent="0" marL="0">
-              <a:buNone/>
-            </a:pPr>
-            <a:r>
-              <a:rPr lang="en-US" sz="1100" dirty="0">
+            <a:off x="1371600" y="3794760"/>
+            <a:ext cx="1645920" cy="228600"/>
+          </a:xfrm>
+          <a:prstGeom prst="rect">
+            <a:avLst/>
+          </a:prstGeom>
+          <a:noFill/>
+          <a:ln/>
+        </p:spPr>
+        <p:txBody>
+          <a:bodyPr wrap="square" rtlCol="0" anchor="ctr"/>
+          <a:lstStyle/>
+          <a:p>
+            <a:pPr indent="0" marL="0">
+              <a:buNone/>
+            </a:pPr>
+            <a:r>
+              <a:rPr lang="en-US" sz="900" dirty="0">
                 <a:solidFill>
                   <a:srgbClr val="7F8C8D"/>
                 </a:solidFill>
@@ -13806,9 +14566,9 @@
                 <a:ea typeface="Calibri" pitchFamily="34" charset="-122"/>
                 <a:cs typeface="Calibri" pitchFamily="34" charset="-120"/>
               </a:rPr>
-              <a:t>C端全国总代</a:t>
-            </a:r>
-            <a:endParaRPr lang="en-US" sz="1100" dirty="0"/>
+              <a:t>北京博飞生物科技</a:t>
+            </a:r>
+            <a:endParaRPr lang="en-US" sz="900" dirty="0"/>
           </a:p>
         </p:txBody>
       </p:sp>
@@ -13820,14 +14580,14 @@
         </p:nvSpPr>
         <p:spPr>
           <a:xfrm>
-            <a:off x="7269480" y="2423160"/>
-            <a:ext cx="1417320" cy="0"/>
+            <a:off x="1371600" y="4087368"/>
+            <a:ext cx="1600200" cy="0"/>
           </a:xfrm>
           <a:prstGeom prst="line">
             <a:avLst/>
           </a:prstGeom>
           <a:noFill/>
-          <a:ln w="12700">
+          <a:ln w="6350">
             <a:solidFill>
               <a:srgbClr val="E2E8F0"/>
             </a:solidFill>
@@ -13843,8 +14603,94 @@
         </p:nvSpPr>
         <p:spPr>
           <a:xfrm>
-            <a:off x="7086600" y="2514600"/>
-            <a:ext cx="1783080" cy="822960"/>
+            <a:off x="1371600" y="4142232"/>
+            <a:ext cx="1600200" cy="685800"/>
+          </a:xfrm>
+          <a:prstGeom prst="rect">
+            <a:avLst/>
+          </a:prstGeom>
+          <a:noFill/>
+          <a:ln/>
+        </p:spPr>
+        <p:txBody>
+          <a:bodyPr wrap="square" rtlCol="0" anchor="ctr"/>
+          <a:lstStyle/>
+          <a:p>
+            <a:pPr indent="0" marL="0">
+              <a:buNone/>
+            </a:pPr>
+            <a:r>
+              <a:rPr lang="en-US" sz="850" dirty="0">
+                <a:solidFill>
+                  <a:srgbClr val="7F8C8D"/>
+                </a:solidFill>
+                <a:latin typeface="Calibri" pitchFamily="34" charset="0"/>
+                <a:ea typeface="Calibri" pitchFamily="34" charset="-122"/>
+                <a:cs typeface="Calibri" pitchFamily="34" charset="-120"/>
+              </a:rPr>
+              <a:t>医疗器械市场营销专家，10年+医疗健康领域市场拓展经验，深耕医院渠道与睡眠医学市场。</a:t>
+            </a:r>
+            <a:endParaRPr lang="en-US" sz="850" dirty="0"/>
+          </a:p>
+        </p:txBody>
+      </p:sp>
+      <p:sp>
+        <p:nvSpPr>
+          <p:cNvPr id="38" name="Shape 36"/>
+          <p:cNvSpPr/>
+          <p:nvPr/>
+        </p:nvSpPr>
+        <p:spPr>
+          <a:xfrm>
+            <a:off x="3291840" y="3063240"/>
+            <a:ext cx="2651760" cy="1828800"/>
+          </a:xfrm>
+          <a:prstGeom prst="rect">
+            <a:avLst/>
+          </a:prstGeom>
+          <a:solidFill>
+            <a:srgbClr val="FFFFFF"/>
+          </a:solidFill>
+          <a:ln/>
+          <a:effectLst>
+            <a:outerShdw sx="100000" sy="100000" kx="0" ky="0" algn="bl" rotWithShape="0" blurRad="63500" dist="25400" dir="8100000">
+              <a:srgbClr val="000000">
+                <a:alpha val="10000"/>
+              </a:srgbClr>
+            </a:outerShdw>
+          </a:effectLst>
+        </p:spPr>
+      </p:sp>
+      <p:sp>
+        <p:nvSpPr>
+          <p:cNvPr id="39" name="Shape 37"/>
+          <p:cNvSpPr/>
+          <p:nvPr/>
+        </p:nvSpPr>
+        <p:spPr>
+          <a:xfrm>
+            <a:off x="3291840" y="3063240"/>
+            <a:ext cx="777240" cy="1828800"/>
+          </a:xfrm>
+          <a:prstGeom prst="rect">
+            <a:avLst/>
+          </a:prstGeom>
+          <a:solidFill>
+            <a:srgbClr val="1A3A6B"/>
+          </a:solidFill>
+          <a:ln/>
+        </p:spPr>
+      </p:sp>
+      <p:sp>
+        <p:nvSpPr>
+          <p:cNvPr id="40" name="Text 38"/>
+          <p:cNvSpPr/>
+          <p:nvPr/>
+        </p:nvSpPr>
+        <p:spPr>
+          <a:xfrm>
+            <a:off x="3291840" y="3657600"/>
+            <a:ext cx="777240" cy="640080"/>
           </a:xfrm>
           <a:prstGeom prst="rect">
             <a:avLst/>
@@ -13860,154 +14706,56 @@
               <a:buNone/>
             </a:pPr>
             <a:r>
-              <a:rPr lang="en-US" sz="1000" dirty="0">
-                <a:solidFill>
-                  <a:srgbClr val="7F8C8D"/>
-                </a:solidFill>
-                <a:latin typeface="Calibri" pitchFamily="34" charset="0"/>
-                <a:ea typeface="Calibri" pitchFamily="34" charset="-122"/>
-                <a:cs typeface="Calibri" pitchFamily="34" charset="-120"/>
-              </a:rPr>
-              <a:t>全国市场拓展</a:t>
-            </a:r>
-            <a:endParaRPr lang="en-US" sz="1000" dirty="0"/>
-          </a:p>
-          <a:p>
-            <a:pPr algn="ctr" indent="0" marL="0">
-              <a:buNone/>
-            </a:pPr>
-            <a:r>
-              <a:rPr lang="en-US" sz="1000" dirty="0">
-                <a:solidFill>
-                  <a:srgbClr val="7F8C8D"/>
-                </a:solidFill>
-                <a:latin typeface="Calibri" pitchFamily="34" charset="0"/>
-                <a:ea typeface="Calibri" pitchFamily="34" charset="-122"/>
-                <a:cs typeface="Calibri" pitchFamily="34" charset="-120"/>
-              </a:rPr>
-              <a:t>C端渠道建设</a:t>
-            </a:r>
-            <a:endParaRPr lang="en-US" sz="1000" dirty="0"/>
-          </a:p>
-        </p:txBody>
-      </p:sp>
-      <p:sp>
-        <p:nvSpPr>
-          <p:cNvPr id="38" name="Shape 36"/>
-          <p:cNvSpPr/>
-          <p:nvPr/>
-        </p:nvSpPr>
-        <p:spPr>
-          <a:xfrm>
-            <a:off x="7223760" y="3429000"/>
-            <a:ext cx="1508760" cy="411480"/>
-          </a:xfrm>
-          <a:prstGeom prst="roundRect">
-            <a:avLst>
-              <a:gd name="adj" fmla="val 17778"/>
-            </a:avLst>
-          </a:prstGeom>
-          <a:solidFill>
-            <a:srgbClr val="FF6B35"/>
-          </a:solidFill>
-          <a:ln/>
-        </p:spPr>
-      </p:sp>
-      <p:sp>
-        <p:nvSpPr>
-          <p:cNvPr id="39" name="Text 37"/>
-          <p:cNvSpPr/>
-          <p:nvPr/>
-        </p:nvSpPr>
-        <p:spPr>
-          <a:xfrm>
-            <a:off x="7223760" y="3429000"/>
-            <a:ext cx="1508760" cy="411480"/>
-          </a:xfrm>
-          <a:prstGeom prst="rect">
-            <a:avLst/>
-          </a:prstGeom>
-          <a:noFill/>
-          <a:ln/>
-        </p:spPr>
-        <p:txBody>
-          <a:bodyPr wrap="square" rtlCol="0" anchor="ctr"/>
-          <a:lstStyle/>
-          <a:p>
-            <a:pPr algn="ctr" indent="0" marL="0">
-              <a:buNone/>
-            </a:pPr>
-            <a:r>
-              <a:rPr lang="en-US" sz="1000" b="1" dirty="0">
+              <a:rPr lang="en-US" sz="2000" b="1" dirty="0">
                 <a:solidFill>
                   <a:srgbClr val="FFFFFF"/>
-                </a:solidFill>
-                <a:latin typeface="Calibri" pitchFamily="34" charset="0"/>
-                <a:ea typeface="Calibri" pitchFamily="34" charset="-122"/>
-                <a:cs typeface="Calibri" pitchFamily="34" charset="-120"/>
-              </a:rPr>
-              <a:t>已签约 ¥1000万</a:t>
-            </a:r>
-            <a:endParaRPr lang="en-US" sz="1000" dirty="0"/>
-          </a:p>
-        </p:txBody>
-      </p:sp>
-      <p:sp>
-        <p:nvSpPr>
-          <p:cNvPr id="40" name="Shape 38"/>
-          <p:cNvSpPr/>
-          <p:nvPr/>
-        </p:nvSpPr>
-        <p:spPr>
-          <a:xfrm>
-            <a:off x="548640" y="4297680"/>
-            <a:ext cx="1965960" cy="731520"/>
-          </a:xfrm>
-          <a:prstGeom prst="rect">
-            <a:avLst/>
-          </a:prstGeom>
-          <a:solidFill>
-            <a:srgbClr val="F0F4F8"/>
-          </a:solidFill>
-          <a:ln/>
-        </p:spPr>
-      </p:sp>
-      <p:sp>
-        <p:nvSpPr>
-          <p:cNvPr id="41" name="Text 39"/>
-          <p:cNvSpPr/>
-          <p:nvPr/>
-        </p:nvSpPr>
-        <p:spPr>
-          <a:xfrm>
-            <a:off x="548640" y="4315968"/>
-            <a:ext cx="1965960" cy="411480"/>
-          </a:xfrm>
-          <a:prstGeom prst="rect">
-            <a:avLst/>
-          </a:prstGeom>
-          <a:noFill/>
-          <a:ln/>
-        </p:spPr>
-        <p:txBody>
-          <a:bodyPr wrap="square" rtlCol="0" anchor="ctr"/>
-          <a:lstStyle/>
-          <a:p>
-            <a:pPr algn="ctr" indent="0" marL="0">
-              <a:buNone/>
-            </a:pPr>
-            <a:r>
-              <a:rPr lang="en-US" sz="2200" b="1" dirty="0">
-                <a:solidFill>
-                  <a:srgbClr val="1A3A6B"/>
                 </a:solidFill>
                 <a:latin typeface="Georgia" pitchFamily="34" charset="0"/>
                 <a:ea typeface="Georgia" pitchFamily="34" charset="-122"/>
                 <a:cs typeface="Georgia" pitchFamily="34" charset="-120"/>
               </a:rPr>
-              <a:t>17</a:t>
-            </a:r>
-            <a:endParaRPr lang="en-US" sz="2200" dirty="0"/>
+              <a:t>ZGY</a:t>
+            </a:r>
+            <a:endParaRPr lang="en-US" sz="2000" dirty="0"/>
+          </a:p>
+        </p:txBody>
+      </p:sp>
+      <p:sp>
+        <p:nvSpPr>
+          <p:cNvPr id="41" name="Text 39"/>
+          <p:cNvSpPr/>
+          <p:nvPr/>
+        </p:nvSpPr>
+        <p:spPr>
+          <a:xfrm>
+            <a:off x="4206240" y="3200400"/>
+            <a:ext cx="1645920" cy="347472"/>
+          </a:xfrm>
+          <a:prstGeom prst="rect">
+            <a:avLst/>
+          </a:prstGeom>
+          <a:noFill/>
+          <a:ln/>
+        </p:spPr>
+        <p:txBody>
+          <a:bodyPr wrap="square" rtlCol="0" anchor="ctr"/>
+          <a:lstStyle/>
+          <a:p>
+            <a:pPr indent="0" marL="0">
+              <a:buNone/>
+            </a:pPr>
+            <a:r>
+              <a:rPr lang="en-US" sz="1500" b="1" dirty="0">
+                <a:solidFill>
+                  <a:srgbClr val="2C3E50"/>
+                </a:solidFill>
+                <a:latin typeface="Calibri" pitchFamily="34" charset="0"/>
+                <a:ea typeface="Calibri" pitchFamily="34" charset="-122"/>
+                <a:cs typeface="Calibri" pitchFamily="34" charset="-120"/>
+              </a:rPr>
+              <a:t>朱国勇</a:t>
+            </a:r>
+            <a:endParaRPr lang="en-US" sz="1500" dirty="0"/>
           </a:p>
         </p:txBody>
       </p:sp>
@@ -14019,8 +14767,195 @@
         </p:nvSpPr>
         <p:spPr>
           <a:xfrm>
-            <a:off x="548640" y="4709160"/>
-            <a:ext cx="1965960" cy="274320"/>
+            <a:off x="4206240" y="3538728"/>
+            <a:ext cx="1645920" cy="274320"/>
+          </a:xfrm>
+          <a:prstGeom prst="rect">
+            <a:avLst/>
+          </a:prstGeom>
+          <a:noFill/>
+          <a:ln/>
+        </p:spPr>
+        <p:txBody>
+          <a:bodyPr wrap="square" rtlCol="0" anchor="ctr"/>
+          <a:lstStyle/>
+          <a:p>
+            <a:pPr indent="0" marL="0">
+              <a:buNone/>
+            </a:pPr>
+            <a:r>
+              <a:rPr lang="en-US" sz="1000" b="1" dirty="0">
+                <a:solidFill>
+                  <a:srgbClr val="1A3A6B"/>
+                </a:solidFill>
+                <a:latin typeface="Calibri" pitchFamily="34" charset="0"/>
+                <a:ea typeface="Calibri" pitchFamily="34" charset="-122"/>
+                <a:cs typeface="Calibri" pitchFamily="34" charset="-120"/>
+              </a:rPr>
+              <a:t>C端全国总代</a:t>
+            </a:r>
+            <a:endParaRPr lang="en-US" sz="1000" dirty="0"/>
+          </a:p>
+        </p:txBody>
+      </p:sp>
+      <p:sp>
+        <p:nvSpPr>
+          <p:cNvPr id="43" name="Text 41"/>
+          <p:cNvSpPr/>
+          <p:nvPr/>
+        </p:nvSpPr>
+        <p:spPr>
+          <a:xfrm>
+            <a:off x="4206240" y="3794760"/>
+            <a:ext cx="1645920" cy="228600"/>
+          </a:xfrm>
+          <a:prstGeom prst="rect">
+            <a:avLst/>
+          </a:prstGeom>
+          <a:noFill/>
+          <a:ln/>
+        </p:spPr>
+        <p:txBody>
+          <a:bodyPr wrap="square" rtlCol="0" anchor="ctr"/>
+          <a:lstStyle/>
+          <a:p>
+            <a:pPr indent="0" marL="0">
+              <a:buNone/>
+            </a:pPr>
+            <a:r>
+              <a:rPr lang="en-US" sz="900" dirty="0">
+                <a:solidFill>
+                  <a:srgbClr val="7F8C8D"/>
+                </a:solidFill>
+                <a:latin typeface="Calibri" pitchFamily="34" charset="0"/>
+                <a:ea typeface="Calibri" pitchFamily="34" charset="-122"/>
+                <a:cs typeface="Calibri" pitchFamily="34" charset="-120"/>
+              </a:rPr>
+              <a:t>深睡科技战略合作</a:t>
+            </a:r>
+            <a:endParaRPr lang="en-US" sz="900" dirty="0"/>
+          </a:p>
+        </p:txBody>
+      </p:sp>
+      <p:sp>
+        <p:nvSpPr>
+          <p:cNvPr id="44" name="Shape 42"/>
+          <p:cNvSpPr/>
+          <p:nvPr/>
+        </p:nvSpPr>
+        <p:spPr>
+          <a:xfrm>
+            <a:off x="4206240" y="4087368"/>
+            <a:ext cx="1600200" cy="0"/>
+          </a:xfrm>
+          <a:prstGeom prst="line">
+            <a:avLst/>
+          </a:prstGeom>
+          <a:noFill/>
+          <a:ln w="6350">
+            <a:solidFill>
+              <a:srgbClr val="E2E8F0"/>
+            </a:solidFill>
+            <a:prstDash val="solid"/>
+          </a:ln>
+        </p:spPr>
+      </p:sp>
+      <p:sp>
+        <p:nvSpPr>
+          <p:cNvPr id="45" name="Text 43"/>
+          <p:cNvSpPr/>
+          <p:nvPr/>
+        </p:nvSpPr>
+        <p:spPr>
+          <a:xfrm>
+            <a:off x="4206240" y="4142232"/>
+            <a:ext cx="1600200" cy="685800"/>
+          </a:xfrm>
+          <a:prstGeom prst="rect">
+            <a:avLst/>
+          </a:prstGeom>
+          <a:noFill/>
+          <a:ln/>
+        </p:spPr>
+        <p:txBody>
+          <a:bodyPr wrap="square" rtlCol="0" anchor="ctr"/>
+          <a:lstStyle/>
+          <a:p>
+            <a:pPr indent="0" marL="0">
+              <a:buNone/>
+            </a:pPr>
+            <a:r>
+              <a:rPr lang="en-US" sz="850" dirty="0">
+                <a:solidFill>
+                  <a:srgbClr val="7F8C8D"/>
+                </a:solidFill>
+                <a:latin typeface="Calibri" pitchFamily="34" charset="0"/>
+                <a:ea typeface="Calibri" pitchFamily="34" charset="-122"/>
+                <a:cs typeface="Calibri" pitchFamily="34" charset="-120"/>
+              </a:rPr>
+              <a:t>全国渠道建设专家，已签约C端年销售额1000万渠道代理协议，负责全国C端市场拓展与经销商体系建立。</a:t>
+            </a:r>
+            <a:endParaRPr lang="en-US" sz="850" dirty="0"/>
+          </a:p>
+        </p:txBody>
+      </p:sp>
+      <p:sp>
+        <p:nvSpPr>
+          <p:cNvPr id="46" name="Shape 44"/>
+          <p:cNvSpPr/>
+          <p:nvPr/>
+        </p:nvSpPr>
+        <p:spPr>
+          <a:xfrm>
+            <a:off x="6126480" y="3063240"/>
+            <a:ext cx="2651760" cy="1828800"/>
+          </a:xfrm>
+          <a:prstGeom prst="rect">
+            <a:avLst/>
+          </a:prstGeom>
+          <a:solidFill>
+            <a:srgbClr val="FFFFFF"/>
+          </a:solidFill>
+          <a:ln/>
+          <a:effectLst>
+            <a:outerShdw sx="100000" sy="100000" kx="0" ky="0" algn="bl" rotWithShape="0" blurRad="63500" dist="25400" dir="8100000">
+              <a:srgbClr val="000000">
+                <a:alpha val="10000"/>
+              </a:srgbClr>
+            </a:outerShdw>
+          </a:effectLst>
+        </p:spPr>
+      </p:sp>
+      <p:sp>
+        <p:nvSpPr>
+          <p:cNvPr id="47" name="Shape 45"/>
+          <p:cNvSpPr/>
+          <p:nvPr/>
+        </p:nvSpPr>
+        <p:spPr>
+          <a:xfrm>
+            <a:off x="6126480" y="3063240"/>
+            <a:ext cx="777240" cy="1828800"/>
+          </a:xfrm>
+          <a:prstGeom prst="rect">
+            <a:avLst/>
+          </a:prstGeom>
+          <a:solidFill>
+            <a:srgbClr val="00D4AA"/>
+          </a:solidFill>
+          <a:ln/>
+        </p:spPr>
+      </p:sp>
+      <p:sp>
+        <p:nvSpPr>
+          <p:cNvPr id="48" name="Text 46"/>
+          <p:cNvSpPr/>
+          <p:nvPr/>
+        </p:nvSpPr>
+        <p:spPr>
+          <a:xfrm>
+            <a:off x="6126480" y="3657600"/>
+            <a:ext cx="777240" cy="640080"/>
           </a:xfrm>
           <a:prstGeom prst="rect">
             <a:avLst/>
@@ -14036,105 +14971,124 @@
               <a:buNone/>
             </a:pPr>
             <a:r>
-              <a:rPr lang="en-US" sz="1000" dirty="0">
-                <a:solidFill>
-                  <a:srgbClr val="7F8C8D"/>
-                </a:solidFill>
-                <a:latin typeface="Calibri" pitchFamily="34" charset="0"/>
-                <a:ea typeface="Calibri" pitchFamily="34" charset="-122"/>
-                <a:cs typeface="Calibri" pitchFamily="34" charset="-120"/>
-              </a:rPr>
-              <a:t>国际期刊论文</a:t>
-            </a:r>
-            <a:endParaRPr lang="en-US" sz="1000" dirty="0"/>
-          </a:p>
-        </p:txBody>
-      </p:sp>
-      <p:sp>
-        <p:nvSpPr>
-          <p:cNvPr id="43" name="Shape 41"/>
-          <p:cNvSpPr/>
-          <p:nvPr/>
-        </p:nvSpPr>
-        <p:spPr>
-          <a:xfrm>
-            <a:off x="2697480" y="4297680"/>
-            <a:ext cx="1965960" cy="731520"/>
-          </a:xfrm>
-          <a:prstGeom prst="rect">
-            <a:avLst/>
-          </a:prstGeom>
-          <a:solidFill>
-            <a:srgbClr val="F0F4F8"/>
-          </a:solidFill>
-          <a:ln/>
-        </p:spPr>
-      </p:sp>
-      <p:sp>
-        <p:nvSpPr>
-          <p:cNvPr id="44" name="Text 42"/>
-          <p:cNvSpPr/>
-          <p:nvPr/>
-        </p:nvSpPr>
-        <p:spPr>
-          <a:xfrm>
-            <a:off x="2697480" y="4315968"/>
-            <a:ext cx="1965960" cy="411480"/>
-          </a:xfrm>
-          <a:prstGeom prst="rect">
-            <a:avLst/>
-          </a:prstGeom>
-          <a:noFill/>
-          <a:ln/>
-        </p:spPr>
-        <p:txBody>
-          <a:bodyPr wrap="square" rtlCol="0" anchor="ctr"/>
-          <a:lstStyle/>
-          <a:p>
-            <a:pPr algn="ctr" indent="0" marL="0">
-              <a:buNone/>
-            </a:pPr>
-            <a:r>
-              <a:rPr lang="en-US" sz="2200" b="1" dirty="0">
-                <a:solidFill>
-                  <a:srgbClr val="1A3A6B"/>
+              <a:rPr lang="en-US" sz="2000" b="1" dirty="0">
+                <a:solidFill>
+                  <a:srgbClr val="FFFFFF"/>
                 </a:solidFill>
                 <a:latin typeface="Georgia" pitchFamily="34" charset="0"/>
                 <a:ea typeface="Georgia" pitchFamily="34" charset="-122"/>
                 <a:cs typeface="Georgia" pitchFamily="34" charset="-120"/>
               </a:rPr>
-              <a:t>40对</a:t>
-            </a:r>
-            <a:endParaRPr lang="en-US" sz="2200" dirty="0"/>
-          </a:p>
-        </p:txBody>
-      </p:sp>
-      <p:sp>
-        <p:nvSpPr>
-          <p:cNvPr id="45" name="Text 43"/>
-          <p:cNvSpPr/>
-          <p:nvPr/>
-        </p:nvSpPr>
-        <p:spPr>
-          <a:xfrm>
-            <a:off x="2697480" y="4709160"/>
-            <a:ext cx="1965960" cy="274320"/>
-          </a:xfrm>
-          <a:prstGeom prst="rect">
-            <a:avLst/>
-          </a:prstGeom>
-          <a:noFill/>
-          <a:ln/>
-        </p:spPr>
-        <p:txBody>
-          <a:bodyPr wrap="square" rtlCol="0" anchor="ctr"/>
-          <a:lstStyle/>
-          <a:p>
-            <a:pPr algn="ctr" indent="0" marL="0">
-              <a:buNone/>
-            </a:pPr>
-            <a:r>
-              <a:rPr lang="en-US" sz="1000" dirty="0">
+              <a:t>LM</a:t>
+            </a:r>
+            <a:endParaRPr lang="en-US" sz="2000" dirty="0"/>
+          </a:p>
+        </p:txBody>
+      </p:sp>
+      <p:sp>
+        <p:nvSpPr>
+          <p:cNvPr id="49" name="Text 47"/>
+          <p:cNvSpPr/>
+          <p:nvPr/>
+        </p:nvSpPr>
+        <p:spPr>
+          <a:xfrm>
+            <a:off x="7040880" y="3200400"/>
+            <a:ext cx="1645920" cy="347472"/>
+          </a:xfrm>
+          <a:prstGeom prst="rect">
+            <a:avLst/>
+          </a:prstGeom>
+          <a:noFill/>
+          <a:ln/>
+        </p:spPr>
+        <p:txBody>
+          <a:bodyPr wrap="square" rtlCol="0" anchor="ctr"/>
+          <a:lstStyle/>
+          <a:p>
+            <a:pPr indent="0" marL="0">
+              <a:buNone/>
+            </a:pPr>
+            <a:r>
+              <a:rPr lang="en-US" sz="1500" b="1" dirty="0">
+                <a:solidFill>
+                  <a:srgbClr val="2C3E50"/>
+                </a:solidFill>
+                <a:latin typeface="Calibri" pitchFamily="34" charset="0"/>
+                <a:ea typeface="Calibri" pitchFamily="34" charset="-122"/>
+                <a:cs typeface="Calibri" pitchFamily="34" charset="-120"/>
+              </a:rPr>
+              <a:t>李明</a:t>
+            </a:r>
+            <a:endParaRPr lang="en-US" sz="1500" dirty="0"/>
+          </a:p>
+        </p:txBody>
+      </p:sp>
+      <p:sp>
+        <p:nvSpPr>
+          <p:cNvPr id="50" name="Text 48"/>
+          <p:cNvSpPr/>
+          <p:nvPr/>
+        </p:nvSpPr>
+        <p:spPr>
+          <a:xfrm>
+            <a:off x="7040880" y="3538728"/>
+            <a:ext cx="1645920" cy="274320"/>
+          </a:xfrm>
+          <a:prstGeom prst="rect">
+            <a:avLst/>
+          </a:prstGeom>
+          <a:noFill/>
+          <a:ln/>
+        </p:spPr>
+        <p:txBody>
+          <a:bodyPr wrap="square" rtlCol="0" anchor="ctr"/>
+          <a:lstStyle/>
+          <a:p>
+            <a:pPr indent="0" marL="0">
+              <a:buNone/>
+            </a:pPr>
+            <a:r>
+              <a:rPr lang="en-US" sz="1000" b="1" dirty="0">
+                <a:solidFill>
+                  <a:srgbClr val="00D4AA"/>
+                </a:solidFill>
+                <a:latin typeface="Calibri" pitchFamily="34" charset="0"/>
+                <a:ea typeface="Calibri" pitchFamily="34" charset="-122"/>
+                <a:cs typeface="Calibri" pitchFamily="34" charset="-120"/>
+              </a:rPr>
+              <a:t>投资关系负责人</a:t>
+            </a:r>
+            <a:endParaRPr lang="en-US" sz="1000" dirty="0"/>
+          </a:p>
+        </p:txBody>
+      </p:sp>
+      <p:sp>
+        <p:nvSpPr>
+          <p:cNvPr id="51" name="Text 49"/>
+          <p:cNvSpPr/>
+          <p:nvPr/>
+        </p:nvSpPr>
+        <p:spPr>
+          <a:xfrm>
+            <a:off x="7040880" y="3794760"/>
+            <a:ext cx="1645920" cy="228600"/>
+          </a:xfrm>
+          <a:prstGeom prst="rect">
+            <a:avLst/>
+          </a:prstGeom>
+          <a:noFill/>
+          <a:ln/>
+        </p:spPr>
+        <p:txBody>
+          <a:bodyPr wrap="square" rtlCol="0" anchor="ctr"/>
+          <a:lstStyle/>
+          <a:p>
+            <a:pPr indent="0" marL="0">
+              <a:buNone/>
+            </a:pPr>
+            <a:r>
+              <a:rPr lang="en-US" sz="900" dirty="0">
                 <a:solidFill>
                   <a:srgbClr val="7F8C8D"/>
                 </a:solidFill>
@@ -14142,97 +15096,61 @@
                 <a:ea typeface="Calibri" pitchFamily="34" charset="-122"/>
                 <a:cs typeface="Calibri" pitchFamily="34" charset="-120"/>
               </a:rPr>
-              <a:t>临床验证</a:t>
-            </a:r>
-            <a:endParaRPr lang="en-US" sz="1000" dirty="0"/>
-          </a:p>
-        </p:txBody>
-      </p:sp>
-      <p:sp>
-        <p:nvSpPr>
-          <p:cNvPr id="46" name="Shape 44"/>
-          <p:cNvSpPr/>
-          <p:nvPr/>
-        </p:nvSpPr>
-        <p:spPr>
-          <a:xfrm>
-            <a:off x="4846320" y="4297680"/>
-            <a:ext cx="1965960" cy="731520"/>
-          </a:xfrm>
-          <a:prstGeom prst="rect">
-            <a:avLst/>
-          </a:prstGeom>
-          <a:solidFill>
-            <a:srgbClr val="F0F4F8"/>
-          </a:solidFill>
-          <a:ln/>
-        </p:spPr>
-      </p:sp>
-      <p:sp>
-        <p:nvSpPr>
-          <p:cNvPr id="47" name="Text 45"/>
-          <p:cNvSpPr/>
-          <p:nvPr/>
-        </p:nvSpPr>
-        <p:spPr>
-          <a:xfrm>
-            <a:off x="4846320" y="4315968"/>
-            <a:ext cx="1965960" cy="411480"/>
-          </a:xfrm>
-          <a:prstGeom prst="rect">
-            <a:avLst/>
-          </a:prstGeom>
-          <a:noFill/>
-          <a:ln/>
-        </p:spPr>
-        <p:txBody>
-          <a:bodyPr wrap="square" rtlCol="0" anchor="ctr"/>
-          <a:lstStyle/>
-          <a:p>
-            <a:pPr algn="ctr" indent="0" marL="0">
-              <a:buNone/>
-            </a:pPr>
-            <a:r>
-              <a:rPr lang="en-US" sz="2200" b="1" dirty="0">
-                <a:solidFill>
-                  <a:srgbClr val="1A3A6B"/>
-                </a:solidFill>
-                <a:latin typeface="Georgia" pitchFamily="34" charset="0"/>
-                <a:ea typeface="Georgia" pitchFamily="34" charset="-122"/>
-                <a:cs typeface="Georgia" pitchFamily="34" charset="-120"/>
-              </a:rPr>
-              <a:t>2</a:t>
-            </a:r>
-            <a:endParaRPr lang="en-US" sz="2200" dirty="0"/>
-          </a:p>
-        </p:txBody>
-      </p:sp>
-      <p:sp>
-        <p:nvSpPr>
-          <p:cNvPr id="48" name="Text 46"/>
-          <p:cNvSpPr/>
-          <p:nvPr/>
-        </p:nvSpPr>
-        <p:spPr>
-          <a:xfrm>
-            <a:off x="4846320" y="4709160"/>
-            <a:ext cx="1965960" cy="274320"/>
-          </a:xfrm>
-          <a:prstGeom prst="rect">
-            <a:avLst/>
-          </a:prstGeom>
-          <a:noFill/>
-          <a:ln/>
-        </p:spPr>
-        <p:txBody>
-          <a:bodyPr wrap="square" rtlCol="0" anchor="ctr"/>
-          <a:lstStyle/>
-          <a:p>
-            <a:pPr algn="ctr" indent="0" marL="0">
-              <a:buNone/>
-            </a:pPr>
-            <a:r>
-              <a:rPr lang="en-US" sz="1000" dirty="0">
+              <a:t>深睡科技</a:t>
+            </a:r>
+            <a:endParaRPr lang="en-US" sz="900" dirty="0"/>
+          </a:p>
+        </p:txBody>
+      </p:sp>
+      <p:sp>
+        <p:nvSpPr>
+          <p:cNvPr id="52" name="Shape 50"/>
+          <p:cNvSpPr/>
+          <p:nvPr/>
+        </p:nvSpPr>
+        <p:spPr>
+          <a:xfrm>
+            <a:off x="7040880" y="4087368"/>
+            <a:ext cx="1600200" cy="0"/>
+          </a:xfrm>
+          <a:prstGeom prst="line">
+            <a:avLst/>
+          </a:prstGeom>
+          <a:noFill/>
+          <a:ln w="6350">
+            <a:solidFill>
+              <a:srgbClr val="E2E8F0"/>
+            </a:solidFill>
+            <a:prstDash val="solid"/>
+          </a:ln>
+        </p:spPr>
+      </p:sp>
+      <p:sp>
+        <p:nvSpPr>
+          <p:cNvPr id="53" name="Text 51"/>
+          <p:cNvSpPr/>
+          <p:nvPr/>
+        </p:nvSpPr>
+        <p:spPr>
+          <a:xfrm>
+            <a:off x="7040880" y="4142232"/>
+            <a:ext cx="1600200" cy="685800"/>
+          </a:xfrm>
+          <a:prstGeom prst="rect">
+            <a:avLst/>
+          </a:prstGeom>
+          <a:noFill/>
+          <a:ln/>
+        </p:spPr>
+        <p:txBody>
+          <a:bodyPr wrap="square" rtlCol="0" anchor="ctr"/>
+          <a:lstStyle/>
+          <a:p>
+            <a:pPr indent="0" marL="0">
+              <a:buNone/>
+            </a:pPr>
+            <a:r>
+              <a:rPr lang="en-US" sz="850" dirty="0">
                 <a:solidFill>
                   <a:srgbClr val="7F8C8D"/>
                 </a:solidFill>
@@ -14240,107 +15158,9 @@
                 <a:ea typeface="Calibri" pitchFamily="34" charset="-122"/>
                 <a:cs typeface="Calibri" pitchFamily="34" charset="-120"/>
               </a:rPr>
-              <a:t>核心发明专利</a:t>
-            </a:r>
-            <a:endParaRPr lang="en-US" sz="1000" dirty="0"/>
-          </a:p>
-        </p:txBody>
-      </p:sp>
-      <p:sp>
-        <p:nvSpPr>
-          <p:cNvPr id="49" name="Shape 47"/>
-          <p:cNvSpPr/>
-          <p:nvPr/>
-        </p:nvSpPr>
-        <p:spPr>
-          <a:xfrm>
-            <a:off x="6995160" y="4297680"/>
-            <a:ext cx="1965960" cy="731520"/>
-          </a:xfrm>
-          <a:prstGeom prst="rect">
-            <a:avLst/>
-          </a:prstGeom>
-          <a:solidFill>
-            <a:srgbClr val="F0F4F8"/>
-          </a:solidFill>
-          <a:ln/>
-        </p:spPr>
-      </p:sp>
-      <p:sp>
-        <p:nvSpPr>
-          <p:cNvPr id="50" name="Text 48"/>
-          <p:cNvSpPr/>
-          <p:nvPr/>
-        </p:nvSpPr>
-        <p:spPr>
-          <a:xfrm>
-            <a:off x="6995160" y="4315968"/>
-            <a:ext cx="1965960" cy="411480"/>
-          </a:xfrm>
-          <a:prstGeom prst="rect">
-            <a:avLst/>
-          </a:prstGeom>
-          <a:noFill/>
-          <a:ln/>
-        </p:spPr>
-        <p:txBody>
-          <a:bodyPr wrap="square" rtlCol="0" anchor="ctr"/>
-          <a:lstStyle/>
-          <a:p>
-            <a:pPr algn="ctr" indent="0" marL="0">
-              <a:buNone/>
-            </a:pPr>
-            <a:r>
-              <a:rPr lang="en-US" sz="2200" b="1" dirty="0">
-                <a:solidFill>
-                  <a:srgbClr val="1A3A6B"/>
-                </a:solidFill>
-                <a:latin typeface="Georgia" pitchFamily="34" charset="0"/>
-                <a:ea typeface="Georgia" pitchFamily="34" charset="-122"/>
-                <a:cs typeface="Georgia" pitchFamily="34" charset="-120"/>
-              </a:rPr>
-              <a:t>50年</a:t>
-            </a:r>
-            <a:endParaRPr lang="en-US" sz="2200" dirty="0"/>
-          </a:p>
-        </p:txBody>
-      </p:sp>
-      <p:sp>
-        <p:nvSpPr>
-          <p:cNvPr id="51" name="Text 49"/>
-          <p:cNvSpPr/>
-          <p:nvPr/>
-        </p:nvSpPr>
-        <p:spPr>
-          <a:xfrm>
-            <a:off x="6995160" y="4709160"/>
-            <a:ext cx="1965960" cy="274320"/>
-          </a:xfrm>
-          <a:prstGeom prst="rect">
-            <a:avLst/>
-          </a:prstGeom>
-          <a:noFill/>
-          <a:ln/>
-        </p:spPr>
-        <p:txBody>
-          <a:bodyPr wrap="square" rtlCol="0" anchor="ctr"/>
-          <a:lstStyle/>
-          <a:p>
-            <a:pPr algn="ctr" indent="0" marL="0">
-              <a:buNone/>
-            </a:pPr>
-            <a:r>
-              <a:rPr lang="en-US" sz="1000" dirty="0">
-                <a:solidFill>
-                  <a:srgbClr val="7F8C8D"/>
-                </a:solidFill>
-                <a:latin typeface="Calibri" pitchFamily="34" charset="0"/>
-                <a:ea typeface="Calibri" pitchFamily="34" charset="-122"/>
-                <a:cs typeface="Calibri" pitchFamily="34" charset="-120"/>
-              </a:rPr>
-              <a:t>行业经验</a:t>
-            </a:r>
-            <a:endParaRPr lang="en-US" sz="1000" dirty="0"/>
+              <a:t>负责企业投融资及政府项目申报，主导HICOOL等创业大赛参赛申报，擅长产学研医投全链条资源整合。</a:t>
+            </a:r>
+            <a:endParaRPr lang="en-US" sz="850" dirty="0"/>
           </a:p>
         </p:txBody>
       </p:sp>

--- a/HICOOL_深睡科技_v1.pptx
+++ b/HICOOL_深睡科技_v1.pptx
@@ -6312,7 +6312,7 @@
                 <a:ea typeface="Calibri" pitchFamily="34" charset="-122"/>
                 <a:cs typeface="Calibri" pitchFamily="34" charset="-120"/>
               </a:rPr>
-              <a:t>原材料经多道提纯工艺，有效去除杂质离子，确保负氧离子释放的稳定性与安全性，避免副产物风险。</a:t>
+              <a:t>独创四步法核心提纯工艺：酸溶→ Ra分离→ 矿物纯化→ 重新合成，彻底去除放射性镭（Ra），保留并激活负氧离子释放活性。</a:t>
             </a:r>
             <a:endParaRPr lang="en-US" sz="950" dirty="0"/>
           </a:p>
@@ -6371,7 +6371,7 @@
                 <a:ea typeface="Calibri" pitchFamily="34" charset="-122"/>
                 <a:cs typeface="Calibri" pitchFamily="34" charset="-120"/>
               </a:rPr>
-              <a:t>多道提纯去除有害杂质</a:t>
+              <a:t>酸溶将镭转入溶液体系</a:t>
             </a:r>
             <a:endParaRPr lang="en-US" sz="950" dirty="0"/>
           </a:p>
@@ -6430,7 +6430,7 @@
                 <a:ea typeface="Calibri" pitchFamily="34" charset="-122"/>
                 <a:cs typeface="Calibri" pitchFamily="34" charset="-120"/>
               </a:rPr>
-              <a:t>释放浓度安全可控</a:t>
+              <a:t>载体共沉/选择性吸附/离子交换分离Ra</a:t>
             </a:r>
             <a:endParaRPr lang="en-US" sz="950" dirty="0"/>
           </a:p>
@@ -6489,7 +6489,7 @@
                 <a:ea typeface="Calibri" pitchFamily="34" charset="-122"/>
                 <a:cs typeface="Calibri" pitchFamily="34" charset="-120"/>
               </a:rPr>
-              <a:t>森林级浓度无醉氧</a:t>
+              <a:t>纯化主体矿物组分</a:t>
             </a:r>
             <a:endParaRPr lang="en-US" sz="950" dirty="0"/>
           </a:p>
@@ -6498,6 +6498,65 @@
       <p:sp>
         <p:nvSpPr>
           <p:cNvPr id="28" name="Shape 26"/>
+          <p:cNvSpPr/>
+          <p:nvPr/>
+        </p:nvSpPr>
+        <p:spPr>
+          <a:xfrm>
+            <a:off x="4270248" y="4096512"/>
+            <a:ext cx="109728" cy="109728"/>
+          </a:xfrm>
+          <a:prstGeom prst="ellipse">
+            <a:avLst/>
+          </a:prstGeom>
+          <a:solidFill>
+            <a:srgbClr val="00D4AA"/>
+          </a:solidFill>
+          <a:ln/>
+        </p:spPr>
+      </p:sp>
+      <p:sp>
+        <p:nvSpPr>
+          <p:cNvPr id="29" name="Text 27"/>
+          <p:cNvSpPr/>
+          <p:nvPr/>
+        </p:nvSpPr>
+        <p:spPr>
+          <a:xfrm>
+            <a:off x="4434840" y="4032504"/>
+            <a:ext cx="1234440" cy="457200"/>
+          </a:xfrm>
+          <a:prstGeom prst="rect">
+            <a:avLst/>
+          </a:prstGeom>
+          <a:noFill/>
+          <a:ln/>
+        </p:spPr>
+        <p:txBody>
+          <a:bodyPr wrap="square" rtlCol="0" anchor="ctr"/>
+          <a:lstStyle/>
+          <a:p>
+            <a:pPr indent="0" marL="0">
+              <a:buNone/>
+            </a:pPr>
+            <a:r>
+              <a:rPr lang="en-US" sz="950" dirty="0">
+                <a:solidFill>
+                  <a:srgbClr val="FFFFFF"/>
+                </a:solidFill>
+                <a:latin typeface="Calibri" pitchFamily="34" charset="0"/>
+                <a:ea typeface="Calibri" pitchFamily="34" charset="-122"/>
+                <a:cs typeface="Calibri" pitchFamily="34" charset="-120"/>
+              </a:rPr>
+              <a:t>重新合成高活性负氧离子粉</a:t>
+            </a:r>
+            <a:endParaRPr lang="en-US" sz="950" dirty="0"/>
+          </a:p>
+        </p:txBody>
+      </p:sp>
+      <p:sp>
+        <p:nvSpPr>
+          <p:cNvPr id="30" name="Shape 28"/>
           <p:cNvSpPr/>
           <p:nvPr/>
         </p:nvSpPr>
@@ -6517,7 +6576,7 @@
       </p:sp>
       <p:sp>
         <p:nvSpPr>
-          <p:cNvPr id="29" name="Shape 27"/>
+          <p:cNvPr id="31" name="Shape 29"/>
           <p:cNvSpPr/>
           <p:nvPr/>
         </p:nvSpPr>
@@ -6537,7 +6596,7 @@
       </p:sp>
       <p:sp>
         <p:nvSpPr>
-          <p:cNvPr id="30" name="Text 28"/>
+          <p:cNvPr id="32" name="Text 30"/>
           <p:cNvSpPr/>
           <p:nvPr/>
         </p:nvSpPr>
@@ -6576,7 +6635,7 @@
       </p:sp>
       <p:sp>
         <p:nvSpPr>
-          <p:cNvPr id="31" name="Text 29"/>
+          <p:cNvPr id="33" name="Text 31"/>
           <p:cNvSpPr/>
           <p:nvPr/>
         </p:nvSpPr>
@@ -6615,7 +6674,7 @@
       </p:sp>
       <p:sp>
         <p:nvSpPr>
-          <p:cNvPr id="32" name="Shape 30"/>
+          <p:cNvPr id="34" name="Shape 32"/>
           <p:cNvSpPr/>
           <p:nvPr/>
         </p:nvSpPr>
@@ -6638,7 +6697,7 @@
       </p:sp>
       <p:sp>
         <p:nvSpPr>
-          <p:cNvPr id="33" name="Text 31"/>
+          <p:cNvPr id="35" name="Text 33"/>
           <p:cNvSpPr/>
           <p:nvPr/>
         </p:nvSpPr>
@@ -6677,7 +6736,7 @@
       </p:sp>
       <p:sp>
         <p:nvSpPr>
-          <p:cNvPr id="34" name="Shape 32"/>
+          <p:cNvPr id="36" name="Shape 34"/>
           <p:cNvSpPr/>
           <p:nvPr/>
         </p:nvSpPr>
@@ -6697,7 +6756,7 @@
       </p:sp>
       <p:sp>
         <p:nvSpPr>
-          <p:cNvPr id="35" name="Text 33"/>
+          <p:cNvPr id="37" name="Text 35"/>
           <p:cNvSpPr/>
           <p:nvPr/>
         </p:nvSpPr>
@@ -6736,7 +6795,7 @@
       </p:sp>
       <p:sp>
         <p:nvSpPr>
-          <p:cNvPr id="36" name="Shape 34"/>
+          <p:cNvPr id="38" name="Shape 36"/>
           <p:cNvSpPr/>
           <p:nvPr/>
         </p:nvSpPr>
@@ -6756,7 +6815,7 @@
       </p:sp>
       <p:sp>
         <p:nvSpPr>
-          <p:cNvPr id="37" name="Text 35"/>
+          <p:cNvPr id="39" name="Text 37"/>
           <p:cNvSpPr/>
           <p:nvPr/>
         </p:nvSpPr>
@@ -6795,7 +6854,7 @@
       </p:sp>
       <p:sp>
         <p:nvSpPr>
-          <p:cNvPr id="38" name="Shape 36"/>
+          <p:cNvPr id="40" name="Shape 38"/>
           <p:cNvSpPr/>
           <p:nvPr/>
         </p:nvSpPr>
@@ -6815,7 +6874,7 @@
       </p:sp>
       <p:sp>
         <p:nvSpPr>
-          <p:cNvPr id="39" name="Text 37"/>
+          <p:cNvPr id="41" name="Text 39"/>
           <p:cNvSpPr/>
           <p:nvPr/>
         </p:nvSpPr>
@@ -6854,7 +6913,7 @@
       </p:sp>
       <p:sp>
         <p:nvSpPr>
-          <p:cNvPr id="40" name="Shape 38"/>
+          <p:cNvPr id="42" name="Shape 40"/>
           <p:cNvSpPr/>
           <p:nvPr/>
         </p:nvSpPr>
@@ -6874,7 +6933,7 @@
       </p:sp>
       <p:sp>
         <p:nvSpPr>
-          <p:cNvPr id="41" name="Shape 39"/>
+          <p:cNvPr id="43" name="Shape 41"/>
           <p:cNvSpPr/>
           <p:nvPr/>
         </p:nvSpPr>
@@ -6894,7 +6953,7 @@
       </p:sp>
       <p:sp>
         <p:nvSpPr>
-          <p:cNvPr id="42" name="Text 40"/>
+          <p:cNvPr id="44" name="Text 42"/>
           <p:cNvSpPr/>
           <p:nvPr/>
         </p:nvSpPr>
@@ -6933,7 +6992,7 @@
       </p:sp>
       <p:sp>
         <p:nvSpPr>
-          <p:cNvPr id="43" name="Text 41"/>
+          <p:cNvPr id="45" name="Text 43"/>
           <p:cNvSpPr/>
           <p:nvPr/>
         </p:nvSpPr>
@@ -6972,7 +7031,7 @@
       </p:sp>
       <p:sp>
         <p:nvSpPr>
-          <p:cNvPr id="44" name="Shape 42"/>
+          <p:cNvPr id="46" name="Shape 44"/>
           <p:cNvSpPr/>
           <p:nvPr/>
         </p:nvSpPr>
@@ -6995,7 +7054,7 @@
       </p:sp>
       <p:sp>
         <p:nvSpPr>
-          <p:cNvPr id="45" name="Text 43"/>
+          <p:cNvPr id="47" name="Text 45"/>
           <p:cNvSpPr/>
           <p:nvPr/>
         </p:nvSpPr>
@@ -7034,7 +7093,7 @@
       </p:sp>
       <p:sp>
         <p:nvSpPr>
-          <p:cNvPr id="46" name="Shape 44"/>
+          <p:cNvPr id="48" name="Shape 46"/>
           <p:cNvSpPr/>
           <p:nvPr/>
         </p:nvSpPr>
@@ -7054,7 +7113,7 @@
       </p:sp>
       <p:sp>
         <p:nvSpPr>
-          <p:cNvPr id="47" name="Text 45"/>
+          <p:cNvPr id="49" name="Text 47"/>
           <p:cNvSpPr/>
           <p:nvPr/>
         </p:nvSpPr>
@@ -7093,7 +7152,7 @@
       </p:sp>
       <p:sp>
         <p:nvSpPr>
-          <p:cNvPr id="48" name="Shape 46"/>
+          <p:cNvPr id="50" name="Shape 48"/>
           <p:cNvSpPr/>
           <p:nvPr/>
         </p:nvSpPr>
@@ -7113,7 +7172,7 @@
       </p:sp>
       <p:sp>
         <p:nvSpPr>
-          <p:cNvPr id="49" name="Text 47"/>
+          <p:cNvPr id="51" name="Text 49"/>
           <p:cNvSpPr/>
           <p:nvPr/>
         </p:nvSpPr>
@@ -7152,7 +7211,7 @@
       </p:sp>
       <p:sp>
         <p:nvSpPr>
-          <p:cNvPr id="50" name="Shape 48"/>
+          <p:cNvPr id="52" name="Shape 50"/>
           <p:cNvSpPr/>
           <p:nvPr/>
         </p:nvSpPr>
@@ -7172,7 +7231,7 @@
       </p:sp>
       <p:sp>
         <p:nvSpPr>
-          <p:cNvPr id="51" name="Text 49"/>
+          <p:cNvPr id="53" name="Text 51"/>
           <p:cNvSpPr/>
           <p:nvPr/>
         </p:nvSpPr>
@@ -12504,7 +12563,7 @@
                 <a:ea typeface="Calibri" pitchFamily="34" charset="-122"/>
                 <a:cs typeface="Calibri" pitchFamily="34" charset="-120"/>
               </a:rPr>
-              <a:t>原材料经多道提纯工艺，有效去除杂质离子，确保负氧离子释放的稳定性与安全性，避免副产物风险。</a:t>
+              <a:t>独创四步法核心提纯工艺：酸溶→ Ra分离→ 矿物纯化→ 重新合成，彻底去除放射性镭（Ra），保留并激活负氧离子释放活性。</a:t>
             </a:r>
             <a:endParaRPr lang="en-US" sz="1000" dirty="0"/>
           </a:p>
@@ -12519,7 +12578,7 @@
         <p:spPr>
           <a:xfrm>
             <a:off x="685800" y="2926080"/>
-            <a:ext cx="2377440" cy="365760"/>
+            <a:ext cx="2377440" cy="301752"/>
           </a:xfrm>
           <a:prstGeom prst="rect">
             <a:avLst/>
@@ -12543,7 +12602,7 @@
                 <a:ea typeface="Calibri" pitchFamily="34" charset="-122"/>
                 <a:cs typeface="Calibri" pitchFamily="34" charset="-120"/>
               </a:rPr>
-              <a:t>→  多道提纯去除有害杂质</a:t>
+              <a:t>→  酸溶将镭转入溶液体系</a:t>
             </a:r>
             <a:endParaRPr lang="en-US" sz="1000" dirty="0"/>
           </a:p>
@@ -12557,8 +12616,8 @@
         </p:nvSpPr>
         <p:spPr>
           <a:xfrm>
-            <a:off x="685800" y="3310128"/>
-            <a:ext cx="2377440" cy="365760"/>
+            <a:off x="685800" y="3227832"/>
+            <a:ext cx="2377440" cy="301752"/>
           </a:xfrm>
           <a:prstGeom prst="rect">
             <a:avLst/>
@@ -12582,7 +12641,7 @@
                 <a:ea typeface="Calibri" pitchFamily="34" charset="-122"/>
                 <a:cs typeface="Calibri" pitchFamily="34" charset="-120"/>
               </a:rPr>
-              <a:t>→  释放浓度安全可控</a:t>
+              <a:t>→  载体共沉/选择性吸附/离子交换分离Ra</a:t>
             </a:r>
             <a:endParaRPr lang="en-US" sz="1000" dirty="0"/>
           </a:p>
@@ -12596,8 +12655,8 @@
         </p:nvSpPr>
         <p:spPr>
           <a:xfrm>
-            <a:off x="685800" y="3694176"/>
-            <a:ext cx="2377440" cy="365760"/>
+            <a:off x="685800" y="3529584"/>
+            <a:ext cx="2377440" cy="301752"/>
           </a:xfrm>
           <a:prstGeom prst="rect">
             <a:avLst/>
@@ -12621,6 +12680,84 @@
                 <a:ea typeface="Calibri" pitchFamily="34" charset="-122"/>
                 <a:cs typeface="Calibri" pitchFamily="34" charset="-120"/>
               </a:rPr>
+              <a:t>→  纯化主体矿物组分</a:t>
+            </a:r>
+            <a:endParaRPr lang="en-US" sz="1000" dirty="0"/>
+          </a:p>
+        </p:txBody>
+      </p:sp>
+      <p:sp>
+        <p:nvSpPr>
+          <p:cNvPr id="13" name="Text 11"/>
+          <p:cNvSpPr/>
+          <p:nvPr/>
+        </p:nvSpPr>
+        <p:spPr>
+          <a:xfrm>
+            <a:off x="685800" y="3831336"/>
+            <a:ext cx="2377440" cy="301752"/>
+          </a:xfrm>
+          <a:prstGeom prst="rect">
+            <a:avLst/>
+          </a:prstGeom>
+          <a:noFill/>
+          <a:ln/>
+        </p:spPr>
+        <p:txBody>
+          <a:bodyPr wrap="square" rtlCol="0" anchor="ctr"/>
+          <a:lstStyle/>
+          <a:p>
+            <a:pPr indent="0" marL="0">
+              <a:buNone/>
+            </a:pPr>
+            <a:r>
+              <a:rPr lang="en-US" sz="1000" dirty="0">
+                <a:solidFill>
+                  <a:srgbClr val="2C3E50"/>
+                </a:solidFill>
+                <a:latin typeface="Calibri" pitchFamily="34" charset="0"/>
+                <a:ea typeface="Calibri" pitchFamily="34" charset="-122"/>
+                <a:cs typeface="Calibri" pitchFamily="34" charset="-120"/>
+              </a:rPr>
+              <a:t>→  重新合成高活性负氧离子粉</a:t>
+            </a:r>
+            <a:endParaRPr lang="en-US" sz="1000" dirty="0"/>
+          </a:p>
+        </p:txBody>
+      </p:sp>
+      <p:sp>
+        <p:nvSpPr>
+          <p:cNvPr id="14" name="Text 12"/>
+          <p:cNvSpPr/>
+          <p:nvPr/>
+        </p:nvSpPr>
+        <p:spPr>
+          <a:xfrm>
+            <a:off x="685800" y="4133088"/>
+            <a:ext cx="2377440" cy="301752"/>
+          </a:xfrm>
+          <a:prstGeom prst="rect">
+            <a:avLst/>
+          </a:prstGeom>
+          <a:noFill/>
+          <a:ln/>
+        </p:spPr>
+        <p:txBody>
+          <a:bodyPr wrap="square" rtlCol="0" anchor="ctr"/>
+          <a:lstStyle/>
+          <a:p>
+            <a:pPr indent="0" marL="0">
+              <a:buNone/>
+            </a:pPr>
+            <a:r>
+              <a:rPr lang="en-US" sz="1000" dirty="0">
+                <a:solidFill>
+                  <a:srgbClr val="2C3E50"/>
+                </a:solidFill>
+                <a:latin typeface="Calibri" pitchFamily="34" charset="0"/>
+                <a:ea typeface="Calibri" pitchFamily="34" charset="-122"/>
+                <a:cs typeface="Calibri" pitchFamily="34" charset="-120"/>
+              </a:rPr>
               <a:t>→  零臭氧、零辐射</a:t>
             </a:r>
             <a:endParaRPr lang="en-US" sz="1000" dirty="0"/>
@@ -12629,14 +12766,14 @@
       </p:sp>
       <p:sp>
         <p:nvSpPr>
-          <p:cNvPr id="13" name="Text 11"/>
-          <p:cNvSpPr/>
-          <p:nvPr/>
-        </p:nvSpPr>
-        <p:spPr>
-          <a:xfrm>
-            <a:off x="685800" y="4078224"/>
-            <a:ext cx="2377440" cy="365760"/>
+          <p:cNvPr id="15" name="Text 13"/>
+          <p:cNvSpPr/>
+          <p:nvPr/>
+        </p:nvSpPr>
+        <p:spPr>
+          <a:xfrm>
+            <a:off x="685800" y="4434840"/>
+            <a:ext cx="2377440" cy="301752"/>
           </a:xfrm>
           <a:prstGeom prst="rect">
             <a:avLst/>
@@ -12668,7 +12805,7 @@
       </p:sp>
       <p:sp>
         <p:nvSpPr>
-          <p:cNvPr id="14" name="Shape 12"/>
+          <p:cNvPr id="16" name="Shape 14"/>
           <p:cNvSpPr/>
           <p:nvPr/>
         </p:nvSpPr>
@@ -12695,7 +12832,7 @@
       </p:sp>
       <p:sp>
         <p:nvSpPr>
-          <p:cNvPr id="15" name="Shape 13"/>
+          <p:cNvPr id="17" name="Shape 15"/>
           <p:cNvSpPr/>
           <p:nvPr/>
         </p:nvSpPr>
@@ -12715,7 +12852,7 @@
       </p:sp>
       <p:sp>
         <p:nvSpPr>
-          <p:cNvPr id="16" name="Text 14"/>
+          <p:cNvPr id="18" name="Text 16"/>
           <p:cNvSpPr/>
           <p:nvPr/>
         </p:nvSpPr>
@@ -12751,7 +12888,7 @@
       </p:sp>
       <p:sp>
         <p:nvSpPr>
-          <p:cNvPr id="17" name="Text 15"/>
+          <p:cNvPr id="19" name="Text 17"/>
           <p:cNvSpPr/>
           <p:nvPr/>
         </p:nvSpPr>
@@ -12790,7 +12927,7 @@
       </p:sp>
       <p:sp>
         <p:nvSpPr>
-          <p:cNvPr id="18" name="Shape 16"/>
+          <p:cNvPr id="20" name="Shape 18"/>
           <p:cNvSpPr/>
           <p:nvPr/>
         </p:nvSpPr>
@@ -12813,7 +12950,7 @@
       </p:sp>
       <p:sp>
         <p:nvSpPr>
-          <p:cNvPr id="19" name="Text 17"/>
+          <p:cNvPr id="21" name="Text 19"/>
           <p:cNvSpPr/>
           <p:nvPr/>
         </p:nvSpPr>
@@ -12852,14 +12989,14 @@
       </p:sp>
       <p:sp>
         <p:nvSpPr>
-          <p:cNvPr id="20" name="Text 18"/>
+          <p:cNvPr id="22" name="Text 20"/>
           <p:cNvSpPr/>
           <p:nvPr/>
         </p:nvSpPr>
         <p:spPr>
           <a:xfrm>
             <a:off x="3520440" y="2926080"/>
-            <a:ext cx="2377440" cy="365760"/>
+            <a:ext cx="2377440" cy="301752"/>
           </a:xfrm>
           <a:prstGeom prst="rect">
             <a:avLst/>
@@ -12891,14 +13028,14 @@
       </p:sp>
       <p:sp>
         <p:nvSpPr>
-          <p:cNvPr id="21" name="Text 19"/>
-          <p:cNvSpPr/>
-          <p:nvPr/>
-        </p:nvSpPr>
-        <p:spPr>
-          <a:xfrm>
-            <a:off x="3520440" y="3310128"/>
-            <a:ext cx="2377440" cy="365760"/>
+          <p:cNvPr id="23" name="Text 21"/>
+          <p:cNvSpPr/>
+          <p:nvPr/>
+        </p:nvSpPr>
+        <p:spPr>
+          <a:xfrm>
+            <a:off x="3520440" y="3227832"/>
+            <a:ext cx="2377440" cy="301752"/>
           </a:xfrm>
           <a:prstGeom prst="rect">
             <a:avLst/>
@@ -12930,14 +13067,14 @@
       </p:sp>
       <p:sp>
         <p:nvSpPr>
-          <p:cNvPr id="22" name="Text 20"/>
-          <p:cNvSpPr/>
-          <p:nvPr/>
-        </p:nvSpPr>
-        <p:spPr>
-          <a:xfrm>
-            <a:off x="3520440" y="3694176"/>
-            <a:ext cx="2377440" cy="365760"/>
+          <p:cNvPr id="24" name="Text 22"/>
+          <p:cNvSpPr/>
+          <p:nvPr/>
+        </p:nvSpPr>
+        <p:spPr>
+          <a:xfrm>
+            <a:off x="3520440" y="3529584"/>
+            <a:ext cx="2377440" cy="301752"/>
           </a:xfrm>
           <a:prstGeom prst="rect">
             <a:avLst/>
@@ -12969,14 +13106,14 @@
       </p:sp>
       <p:sp>
         <p:nvSpPr>
-          <p:cNvPr id="23" name="Text 21"/>
-          <p:cNvSpPr/>
-          <p:nvPr/>
-        </p:nvSpPr>
-        <p:spPr>
-          <a:xfrm>
-            <a:off x="3520440" y="4078224"/>
-            <a:ext cx="2377440" cy="365760"/>
+          <p:cNvPr id="25" name="Text 23"/>
+          <p:cNvSpPr/>
+          <p:nvPr/>
+        </p:nvSpPr>
+        <p:spPr>
+          <a:xfrm>
+            <a:off x="3520440" y="3831336"/>
+            <a:ext cx="2377440" cy="301752"/>
           </a:xfrm>
           <a:prstGeom prst="rect">
             <a:avLst/>
@@ -13008,7 +13145,7 @@
       </p:sp>
       <p:sp>
         <p:nvSpPr>
-          <p:cNvPr id="24" name="Shape 22"/>
+          <p:cNvPr id="26" name="Shape 24"/>
           <p:cNvSpPr/>
           <p:nvPr/>
         </p:nvSpPr>
@@ -13035,7 +13172,7 @@
       </p:sp>
       <p:sp>
         <p:nvSpPr>
-          <p:cNvPr id="25" name="Shape 23"/>
+          <p:cNvPr id="27" name="Shape 25"/>
           <p:cNvSpPr/>
           <p:nvPr/>
         </p:nvSpPr>
@@ -13055,7 +13192,7 @@
       </p:sp>
       <p:sp>
         <p:nvSpPr>
-          <p:cNvPr id="26" name="Text 24"/>
+          <p:cNvPr id="28" name="Text 26"/>
           <p:cNvSpPr/>
           <p:nvPr/>
         </p:nvSpPr>
@@ -13091,7 +13228,7 @@
       </p:sp>
       <p:sp>
         <p:nvSpPr>
-          <p:cNvPr id="27" name="Text 25"/>
+          <p:cNvPr id="29" name="Text 27"/>
           <p:cNvSpPr/>
           <p:nvPr/>
         </p:nvSpPr>
@@ -13130,7 +13267,7 @@
       </p:sp>
       <p:sp>
         <p:nvSpPr>
-          <p:cNvPr id="28" name="Shape 26"/>
+          <p:cNvPr id="30" name="Shape 28"/>
           <p:cNvSpPr/>
           <p:nvPr/>
         </p:nvSpPr>
@@ -13153,7 +13290,7 @@
       </p:sp>
       <p:sp>
         <p:nvSpPr>
-          <p:cNvPr id="29" name="Text 27"/>
+          <p:cNvPr id="31" name="Text 29"/>
           <p:cNvSpPr/>
           <p:nvPr/>
         </p:nvSpPr>
@@ -13192,14 +13329,14 @@
       </p:sp>
       <p:sp>
         <p:nvSpPr>
-          <p:cNvPr id="30" name="Text 28"/>
+          <p:cNvPr id="32" name="Text 30"/>
           <p:cNvSpPr/>
           <p:nvPr/>
         </p:nvSpPr>
         <p:spPr>
           <a:xfrm>
             <a:off x="6355080" y="2926080"/>
-            <a:ext cx="2377440" cy="365760"/>
+            <a:ext cx="2377440" cy="301752"/>
           </a:xfrm>
           <a:prstGeom prst="rect">
             <a:avLst/>
@@ -13231,14 +13368,14 @@
       </p:sp>
       <p:sp>
         <p:nvSpPr>
-          <p:cNvPr id="31" name="Text 29"/>
-          <p:cNvSpPr/>
-          <p:nvPr/>
-        </p:nvSpPr>
-        <p:spPr>
-          <a:xfrm>
-            <a:off x="6355080" y="3310128"/>
-            <a:ext cx="2377440" cy="365760"/>
+          <p:cNvPr id="33" name="Text 31"/>
+          <p:cNvSpPr/>
+          <p:nvPr/>
+        </p:nvSpPr>
+        <p:spPr>
+          <a:xfrm>
+            <a:off x="6355080" y="3227832"/>
+            <a:ext cx="2377440" cy="301752"/>
           </a:xfrm>
           <a:prstGeom prst="rect">
             <a:avLst/>
@@ -13270,14 +13407,14 @@
       </p:sp>
       <p:sp>
         <p:nvSpPr>
-          <p:cNvPr id="32" name="Text 30"/>
-          <p:cNvSpPr/>
-          <p:nvPr/>
-        </p:nvSpPr>
-        <p:spPr>
-          <a:xfrm>
-            <a:off x="6355080" y="3694176"/>
-            <a:ext cx="2377440" cy="365760"/>
+          <p:cNvPr id="34" name="Text 32"/>
+          <p:cNvSpPr/>
+          <p:nvPr/>
+        </p:nvSpPr>
+        <p:spPr>
+          <a:xfrm>
+            <a:off x="6355080" y="3529584"/>
+            <a:ext cx="2377440" cy="301752"/>
           </a:xfrm>
           <a:prstGeom prst="rect">
             <a:avLst/>
@@ -13309,14 +13446,14 @@
       </p:sp>
       <p:sp>
         <p:nvSpPr>
-          <p:cNvPr id="33" name="Text 31"/>
-          <p:cNvSpPr/>
-          <p:nvPr/>
-        </p:nvSpPr>
-        <p:spPr>
-          <a:xfrm>
-            <a:off x="6355080" y="4078224"/>
-            <a:ext cx="2377440" cy="365760"/>
+          <p:cNvPr id="35" name="Text 33"/>
+          <p:cNvSpPr/>
+          <p:nvPr/>
+        </p:nvSpPr>
+        <p:spPr>
+          <a:xfrm>
+            <a:off x="6355080" y="3831336"/>
+            <a:ext cx="2377440" cy="301752"/>
           </a:xfrm>
           <a:prstGeom prst="rect">
             <a:avLst/>
@@ -13348,7 +13485,7 @@
       </p:sp>
       <p:sp>
         <p:nvSpPr>
-          <p:cNvPr id="34" name="Shape 32"/>
+          <p:cNvPr id="36" name="Shape 34"/>
           <p:cNvSpPr/>
           <p:nvPr/>
         </p:nvSpPr>
@@ -13368,7 +13505,7 @@
       </p:sp>
       <p:sp>
         <p:nvSpPr>
-          <p:cNvPr id="35" name="Text 33"/>
+          <p:cNvPr id="37" name="Text 35"/>
           <p:cNvSpPr/>
           <p:nvPr/>
         </p:nvSpPr>

--- a/HICOOL_深睡科技_v1.pptx
+++ b/HICOOL_深睡科技_v1.pptx
@@ -6312,7 +6312,7 @@
                 <a:ea typeface="Calibri" pitchFamily="34" charset="-122"/>
                 <a:cs typeface="Calibri" pitchFamily="34" charset="-120"/>
               </a:rPr>
-              <a:t>独创四步法核心提纯工艺：酸溶→ Ra分离→ 矿物纯化→ 重新合成，彻底去除放射性镭（Ra），保留并激活负氧离子释放活性。</a:t>
+              <a:t>独创四步法核心提纯工艺——酸溶、载体共沉/选择性吸附/离子交换分离Ra、矿物纯化、再合成——彻底去除放射性镭（Ra），保留并激活负氧离子释放活性，技术壁垒高、难复制。</a:t>
             </a:r>
             <a:endParaRPr lang="en-US" sz="950" dirty="0"/>
           </a:p>
@@ -12563,7 +12563,7 @@
                 <a:ea typeface="Calibri" pitchFamily="34" charset="-122"/>
                 <a:cs typeface="Calibri" pitchFamily="34" charset="-120"/>
               </a:rPr>
-              <a:t>独创四步法核心提纯工艺：酸溶→ Ra分离→ 矿物纯化→ 重新合成，彻底去除放射性镭（Ra），保留并激活负氧离子释放活性。</a:t>
+              <a:t>独创四步法核心提纯工艺——酸溶、载体共沉/选择性吸附/离子交换分离Ra、矿物纯化、再合成——彻底去除放射性镭（Ra），保留并激活负氧离子释放活性，技术壁垒高、难复制。</a:t>
             </a:r>
             <a:endParaRPr lang="en-US" sz="1000" dirty="0"/>
           </a:p>

--- a/HICOOL_深睡科技_v1.pptx
+++ b/HICOOL_深睡科技_v1.pptx
@@ -4,6 +4,9 @@
   <p:sldMasterIdLst>
     <p:sldMasterId id="2147483648" r:id="rId1"/>
   </p:sldMasterIdLst>
+  <p:notesMasterIdLst>
+    <p:notesMasterId r:id="rId14"/>
+  </p:notesMasterIdLst>
   <p:sldIdLst>
     <p:sldId id="256" r:id="rId2"/>
     <p:sldId id="257" r:id="rId3"/>
@@ -13,15 +16,12 @@
     <p:sldId id="261" r:id="rId7"/>
     <p:sldId id="262" r:id="rId8"/>
     <p:sldId id="263" r:id="rId9"/>
-    <p:sldId id="264" r:id="rId10"/>
+    <p:sldId id="269" r:id="rId10"/>
     <p:sldId id="265" r:id="rId11"/>
     <p:sldId id="266" r:id="rId12"/>
     <p:sldId id="267" r:id="rId13"/>
   </p:sldIdLst>
-  <p:notesMasterIdLst>
-    <p:notesMasterId r:id="rId14"/>
-  </p:notesMasterIdLst>
-  <p:sldSz cx="9144000" cy="5143500"/>
+  <p:sldSz cx="9144000" cy="5143500" type="screen16x9"/>
   <p:notesSz cx="5143500" cy="9144000"/>
   <p:defaultTextStyle>
     <a:lvl1pPr marL="0" algn="l" defTabSz="914400" rtl="0" eaLnBrk="1" latinLnBrk="0" hangingPunct="1">
@@ -115,6 +115,11 @@
       </a:defRPr>
     </a:lvl9pPr>
   </p:defaultTextStyle>
+  <p:extLst>
+    <p:ext uri="{EFAFB233-063F-42B5-8137-9DF3F51BA10A}">
+      <p15:sldGuideLst xmlns:p15="http://schemas.microsoft.com/office/powerpoint/2012/main"/>
+    </p:ext>
+  </p:extLst>
 </p:presentation>
 </file>
 
@@ -140,234 +145,10 @@
           <a:chExt cx="0" cy="0"/>
         </a:xfrm>
       </p:grpSpPr>
-      <p:sp>
-        <p:nvSpPr>
-          <p:cNvPr id="2" name="Header Placeholder 1"/>
-          <p:cNvSpPr>
-            <a:spLocks noGrp="1"/>
-          </p:cNvSpPr>
-          <p:nvPr>
-            <p:ph type="hdr" sz="quarter"/>
-          </p:nvPr>
-        </p:nvSpPr>
-        <p:spPr>
-          <a:xfrm>
-            <a:off x="0" y="0"/>
-            <a:ext cx="2971800" cy="458788"/>
-          </a:xfrm>
-          <a:prstGeom prst="rect">
-            <a:avLst/>
-          </a:prstGeom>
-        </p:spPr>
-        <p:txBody>
-          <a:bodyPr vert="horz" lIns="91440" tIns="45720" rIns="91440" bIns="45720" rtlCol="0"/>
-          <a:lstStyle>
-            <a:lvl1pPr algn="l">
-              <a:defRPr sz="1200"/>
-            </a:lvl1pPr>
-          </a:lstStyle>
-          <a:p>
-            <a:endParaRPr lang="en-US"/>
-          </a:p>
-        </p:txBody>
-      </p:sp>
-      <p:sp>
-        <p:nvSpPr>
-          <p:cNvPr id="3" name="Date Placeholder 2"/>
-          <p:cNvSpPr>
-            <a:spLocks noGrp="1"/>
-          </p:cNvSpPr>
-          <p:nvPr>
-            <p:ph type="dt" idx="1"/>
-          </p:nvPr>
-        </p:nvSpPr>
-        <p:spPr>
-          <a:xfrm>
-            <a:off x="3884613" y="0"/>
-            <a:ext cx="2971800" cy="458788"/>
-          </a:xfrm>
-          <a:prstGeom prst="rect">
-            <a:avLst/>
-          </a:prstGeom>
-        </p:spPr>
-        <p:txBody>
-          <a:bodyPr vert="horz" lIns="91440" tIns="45720" rIns="91440" bIns="45720" rtlCol="0"/>
-          <a:lstStyle>
-            <a:lvl1pPr algn="r">
-              <a:defRPr sz="1200"/>
-            </a:lvl1pPr>
-          </a:lstStyle>
-          <a:p>
-            <a:fld id="{5282F153-3F37-0F45-9E97-73ACFA13230C}" type="datetimeFigureOut">
-              <a:rPr lang="en-US"/>
-              <a:t>7/23/19</a:t>
-            </a:fld>
-            <a:endParaRPr lang="en-US"/>
-          </a:p>
-        </p:txBody>
-      </p:sp>
-      <p:sp>
-        <p:nvSpPr>
-          <p:cNvPr id="4" name="Slide Image Placeholder 3"/>
-          <p:cNvSpPr>
-            <a:spLocks noGrp="1" noRot="1" noChangeAspect="1"/>
-          </p:cNvSpPr>
-          <p:nvPr>
-            <p:ph type="sldImg" idx="2"/>
-          </p:nvPr>
-        </p:nvSpPr>
-        <p:spPr>
-          <a:xfrm>
-            <a:off x="685800" y="1143000"/>
-            <a:ext cx="5486400" cy="3086100"/>
-          </a:xfrm>
-          <a:prstGeom prst="rect">
-            <a:avLst/>
-          </a:prstGeom>
-          <a:noFill/>
-          <a:ln w="12700">
-            <a:solidFill>
-              <a:prstClr val="black"/>
-            </a:solidFill>
-          </a:ln>
-        </p:spPr>
-        <p:txBody>
-          <a:bodyPr vert="horz" lIns="91440" tIns="45720" rIns="91440" bIns="45720" rtlCol="0" anchor="ctr"/>
-          <a:lstStyle/>
-          <a:p>
-            <a:endParaRPr lang="en-US"/>
-          </a:p>
-        </p:txBody>
-      </p:sp>
-      <p:sp>
-        <p:nvSpPr>
-          <p:cNvPr id="5" name="Notes Placeholder 4"/>
-          <p:cNvSpPr>
-            <a:spLocks noGrp="1"/>
-          </p:cNvSpPr>
-          <p:nvPr>
-            <p:ph type="body" sz="quarter" idx="3"/>
-          </p:nvPr>
-        </p:nvSpPr>
-        <p:spPr>
-          <a:xfrm>
-            <a:off x="685800" y="4400550"/>
-            <a:ext cx="5486400" cy="3600450"/>
-          </a:xfrm>
-          <a:prstGeom prst="rect">
-            <a:avLst/>
-          </a:prstGeom>
-        </p:spPr>
-        <p:txBody>
-          <a:bodyPr vert="horz" lIns="91440" tIns="45720" rIns="91440" bIns="45720" rtlCol="0"/>
-          <a:lstStyle/>
-          <a:p>
-            <a:pPr lvl="0"/>
-            <a:r>
-              <a:rPr lang="en-US"/>
-              <a:t>Click to edit Master text styles</a:t>
-            </a:r>
-          </a:p>
-          <a:p>
-            <a:pPr lvl="1"/>
-            <a:r>
-              <a:rPr lang="en-US"/>
-              <a:t>Second level</a:t>
-            </a:r>
-          </a:p>
-          <a:p>
-            <a:pPr lvl="2"/>
-            <a:r>
-              <a:rPr lang="en-US"/>
-              <a:t>Third level</a:t>
-            </a:r>
-          </a:p>
-          <a:p>
-            <a:pPr lvl="3"/>
-            <a:r>
-              <a:rPr lang="en-US"/>
-              <a:t>Fourth level</a:t>
-            </a:r>
-          </a:p>
-          <a:p>
-            <a:pPr lvl="4"/>
-            <a:r>
-              <a:rPr lang="en-US"/>
-              <a:t>Fifth level</a:t>
-            </a:r>
-          </a:p>
-        </p:txBody>
-      </p:sp>
-      <p:sp>
-        <p:nvSpPr>
-          <p:cNvPr id="6" name="Footer Placeholder 5"/>
-          <p:cNvSpPr>
-            <a:spLocks noGrp="1"/>
-          </p:cNvSpPr>
-          <p:nvPr>
-            <p:ph type="ftr" sz="quarter" idx="4"/>
-          </p:nvPr>
-        </p:nvSpPr>
-        <p:spPr>
-          <a:xfrm>
-            <a:off x="0" y="8685213"/>
-            <a:ext cx="2971800" cy="458787"/>
-          </a:xfrm>
-          <a:prstGeom prst="rect">
-            <a:avLst/>
-          </a:prstGeom>
-        </p:spPr>
-        <p:txBody>
-          <a:bodyPr vert="horz" lIns="91440" tIns="45720" rIns="91440" bIns="45720" rtlCol="0" anchor="b"/>
-          <a:lstStyle>
-            <a:lvl1pPr algn="l">
-              <a:defRPr sz="1200"/>
-            </a:lvl1pPr>
-          </a:lstStyle>
-          <a:p>
-            <a:endParaRPr lang="en-US"/>
-          </a:p>
-        </p:txBody>
-      </p:sp>
-      <p:sp>
-        <p:nvSpPr>
-          <p:cNvPr id="7" name="Slide Number Placeholder 6"/>
-          <p:cNvSpPr>
-            <a:spLocks noGrp="1"/>
-          </p:cNvSpPr>
-          <p:nvPr>
-            <p:ph type="sldNum" sz="quarter" idx="5"/>
-          </p:nvPr>
-        </p:nvSpPr>
-        <p:spPr>
-          <a:xfrm>
-            <a:off x="3884613" y="8685213"/>
-            <a:ext cx="2971800" cy="458787"/>
-          </a:xfrm>
-          <a:prstGeom prst="rect">
-            <a:avLst/>
-          </a:prstGeom>
-        </p:spPr>
-        <p:txBody>
-          <a:bodyPr vert="horz" lIns="91440" tIns="45720" rIns="91440" bIns="45720" rtlCol="0" anchor="b"/>
-          <a:lstStyle>
-            <a:lvl1pPr algn="r">
-              <a:defRPr sz="1200"/>
-            </a:lvl1pPr>
-          </a:lstStyle>
-          <a:p>
-            <a:fld id="{CE5E9CC1-C706-0F49-92D6-E571CC5EEA8F}" type="slidenum">
-              <a:rPr lang="en-US"/>
-              <a:t>‹#›</a:t>
-            </a:fld>
-            <a:endParaRPr lang="en-US"/>
-          </a:p>
-        </p:txBody>
-      </p:sp>
     </p:spTree>
     <p:extLst>
       <p:ext uri="{BB962C8B-B14F-4D97-AF65-F5344CB8AC3E}">
-        <p14:creationId xmlns:p14="http://schemas.microsoft.com/office/powerpoint/2010/main" val="1024086991"/>
+        <p14:creationId xmlns:p14="http://schemas.microsoft.com/office/powerpoint/2010/main" val="4081197542"/>
       </p:ext>
     </p:extLst>
   </p:cSld>
@@ -511,10 +292,6 @@
           <a:bodyPr/>
           <a:lstStyle/>
           <a:p>
-            <a:r>
-              <a:rPr lang="en-US" dirty="0"/>
-              <a:t/>
-            </a:r>
             <a:endParaRPr lang="en-US" dirty="0"/>
           </a:p>
         </p:txBody>
@@ -599,10 +376,6 @@
           <a:bodyPr/>
           <a:lstStyle/>
           <a:p>
-            <a:r>
-              <a:rPr lang="en-US" dirty="0"/>
-              <a:t/>
-            </a:r>
             <a:endParaRPr lang="en-US" dirty="0"/>
           </a:p>
         </p:txBody>
@@ -687,10 +460,6 @@
           <a:bodyPr/>
           <a:lstStyle/>
           <a:p>
-            <a:r>
-              <a:rPr lang="en-US" dirty="0"/>
-              <a:t/>
-            </a:r>
             <a:endParaRPr lang="en-US" dirty="0"/>
           </a:p>
         </p:txBody>
@@ -775,10 +544,6 @@
           <a:bodyPr/>
           <a:lstStyle/>
           <a:p>
-            <a:r>
-              <a:rPr lang="en-US" dirty="0"/>
-              <a:t/>
-            </a:r>
             <a:endParaRPr lang="en-US" dirty="0"/>
           </a:p>
         </p:txBody>
@@ -863,10 +628,6 @@
           <a:bodyPr/>
           <a:lstStyle/>
           <a:p>
-            <a:r>
-              <a:rPr lang="en-US" dirty="0"/>
-              <a:t/>
-            </a:r>
             <a:endParaRPr lang="en-US" dirty="0"/>
           </a:p>
         </p:txBody>
@@ -951,10 +712,6 @@
           <a:bodyPr/>
           <a:lstStyle/>
           <a:p>
-            <a:r>
-              <a:rPr lang="en-US" dirty="0"/>
-              <a:t/>
-            </a:r>
             <a:endParaRPr lang="en-US" dirty="0"/>
           </a:p>
         </p:txBody>
@@ -1039,10 +796,6 @@
           <a:bodyPr/>
           <a:lstStyle/>
           <a:p>
-            <a:r>
-              <a:rPr lang="en-US" dirty="0"/>
-              <a:t/>
-            </a:r>
             <a:endParaRPr lang="en-US" dirty="0"/>
           </a:p>
         </p:txBody>
@@ -1127,10 +880,6 @@
           <a:bodyPr/>
           <a:lstStyle/>
           <a:p>
-            <a:r>
-              <a:rPr lang="en-US" dirty="0"/>
-              <a:t/>
-            </a:r>
             <a:endParaRPr lang="en-US" dirty="0"/>
           </a:p>
         </p:txBody>
@@ -1215,10 +964,6 @@
           <a:bodyPr/>
           <a:lstStyle/>
           <a:p>
-            <a:r>
-              <a:rPr lang="en-US" dirty="0"/>
-              <a:t/>
-            </a:r>
             <a:endParaRPr lang="en-US" dirty="0"/>
           </a:p>
         </p:txBody>
@@ -1303,10 +1048,6 @@
           <a:bodyPr/>
           <a:lstStyle/>
           <a:p>
-            <a:r>
-              <a:rPr lang="en-US" dirty="0"/>
-              <a:t/>
-            </a:r>
             <a:endParaRPr lang="en-US" dirty="0"/>
           </a:p>
         </p:txBody>
@@ -1391,10 +1132,6 @@
           <a:bodyPr/>
           <a:lstStyle/>
           <a:p>
-            <a:r>
-              <a:rPr lang="en-US" dirty="0"/>
-              <a:t/>
-            </a:r>
             <a:endParaRPr lang="en-US" dirty="0"/>
           </a:p>
         </p:txBody>
@@ -1440,7 +1177,13 @@
   <p:cSld>
     <p:spTree>
       <p:nvGrpSpPr>
-        <p:cNvPr id="1" name=""/>
+        <p:cNvPr id="1" name="">
+          <a:extLst>
+            <a:ext uri="{FF2B5EF4-FFF2-40B4-BE49-F238E27FC236}">
+              <a16:creationId xmlns:a16="http://schemas.microsoft.com/office/drawing/2014/main" id="{71F99D9D-3245-330F-BA83-A8F0F287DEE8}"/>
+            </a:ext>
+          </a:extLst>
+        </p:cNvPr>
         <p:cNvGrpSpPr/>
         <p:nvPr/>
       </p:nvGrpSpPr>
@@ -1454,7 +1197,13 @@
       </p:grpSpPr>
       <p:sp>
         <p:nvSpPr>
-          <p:cNvPr id="2" name="Slide Image Placeholder 1"/>
+          <p:cNvPr id="2" name="Slide Image Placeholder 1">
+            <a:extLst>
+              <a:ext uri="{FF2B5EF4-FFF2-40B4-BE49-F238E27FC236}">
+                <a16:creationId xmlns:a16="http://schemas.microsoft.com/office/drawing/2014/main" id="{C7D0D23A-AACD-F6E4-252F-AAF1E595C01E}"/>
+              </a:ext>
+            </a:extLst>
+          </p:cNvPr>
           <p:cNvSpPr>
             <a:spLocks noGrp="1" noRot="1" noChangeAspect="1"/>
           </p:cNvSpPr>
@@ -1466,7 +1215,13 @@
       </p:sp>
       <p:sp>
         <p:nvSpPr>
-          <p:cNvPr id="3" name="Notes Placeholder 2"/>
+          <p:cNvPr id="3" name="Notes Placeholder 2">
+            <a:extLst>
+              <a:ext uri="{FF2B5EF4-FFF2-40B4-BE49-F238E27FC236}">
+                <a16:creationId xmlns:a16="http://schemas.microsoft.com/office/drawing/2014/main" id="{632F1069-1E01-158B-1447-F8AC9D342F66}"/>
+              </a:ext>
+            </a:extLst>
+          </p:cNvPr>
           <p:cNvSpPr>
             <a:spLocks noGrp="1"/>
           </p:cNvSpPr>
@@ -1479,17 +1234,19 @@
           <a:bodyPr/>
           <a:lstStyle/>
           <a:p>
-            <a:r>
-              <a:rPr lang="en-US" dirty="0"/>
-              <a:t/>
-            </a:r>
             <a:endParaRPr lang="en-US" dirty="0"/>
           </a:p>
         </p:txBody>
       </p:sp>
       <p:sp>
         <p:nvSpPr>
-          <p:cNvPr id="4" name="Slide Number Placeholder 3"/>
+          <p:cNvPr id="4" name="Slide Number Placeholder 3">
+            <a:extLst>
+              <a:ext uri="{FF2B5EF4-FFF2-40B4-BE49-F238E27FC236}">
+                <a16:creationId xmlns:a16="http://schemas.microsoft.com/office/drawing/2014/main" id="{1CF3BD22-1674-5115-81DD-C95251F1E8AD}"/>
+              </a:ext>
+            </a:extLst>
+          </p:cNvPr>
           <p:cNvSpPr>
             <a:spLocks noGrp="1"/>
           </p:cNvSpPr>
@@ -1513,7 +1270,7 @@
     </p:spTree>
     <p:extLst>
       <p:ext uri="{BB962C8B-B14F-4D97-AF65-F5344CB8AC3E}">
-        <p14:creationId xmlns:p14="http://schemas.microsoft.com/office/powerpoint/2010/main" val="1024086991"/>
+        <p14:creationId xmlns:p14="http://schemas.microsoft.com/office/powerpoint/2010/main" val="622405021"/>
       </p:ext>
     </p:extLst>
   </p:cSld>
@@ -1556,6 +1313,11 @@
 <file path=ppt/slideMasters/slideMaster1.xml><?xml version="1.0" encoding="utf-8"?>
 <p:sldMaster xmlns:a="http://schemas.openxmlformats.org/drawingml/2006/main" xmlns:r="http://schemas.openxmlformats.org/officeDocument/2006/relationships" xmlns:p="http://schemas.openxmlformats.org/presentationml/2006/main">
   <p:cSld>
+    <p:bg>
+      <p:bgRef idx="1001">
+        <a:schemeClr val="bg1"/>
+      </p:bgRef>
+    </p:bg>
     <p:spTree>
       <p:nvGrpSpPr>
         <p:cNvPr id="1" name=""/>
@@ -1838,6 +1600,7 @@
         <a:solidFill>
           <a:srgbClr val="0D1B2A"/>
         </a:solidFill>
+        <a:effectLst/>
       </p:bgPr>
     </p:bg>
     <p:spTree>
@@ -1873,6 +1636,13 @@
           </a:solidFill>
           <a:ln/>
         </p:spPr>
+        <p:txBody>
+          <a:bodyPr/>
+          <a:lstStyle/>
+          <a:p>
+            <a:endParaRPr lang="en-US"/>
+          </a:p>
+        </p:txBody>
       </p:sp>
       <p:sp>
         <p:nvSpPr>
@@ -1895,11 +1665,11 @@
           <a:bodyPr wrap="square" rtlCol="0" anchor="ctr"/>
           <a:lstStyle/>
           <a:p>
-            <a:pPr indent="0" marL="0">
-              <a:buNone/>
-            </a:pPr>
-            <a:r>
-              <a:rPr lang="en-US" sz="1800" b="1" spc="400" kern="0" dirty="0">
+            <a:pPr marL="0" indent="0">
+              <a:buNone/>
+            </a:pPr>
+            <a:r>
+              <a:rPr lang="en-US" sz="1800" b="1" kern="0" spc="400" dirty="0">
                 <a:solidFill>
                   <a:srgbClr val="00D4AA"/>
                 </a:solidFill>
@@ -1934,7 +1704,7 @@
           <a:bodyPr wrap="square" rtlCol="0" anchor="ctr"/>
           <a:lstStyle/>
           <a:p>
-            <a:pPr indent="0" marL="0">
+            <a:pPr marL="0" indent="0">
               <a:buNone/>
             </a:pPr>
             <a:r>
@@ -1973,7 +1743,7 @@
           <a:bodyPr wrap="square" rtlCol="0" anchor="ctr"/>
           <a:lstStyle/>
           <a:p>
-            <a:pPr indent="0" marL="0">
+            <a:pPr marL="0" indent="0">
               <a:buNone/>
             </a:pPr>
             <a:r>
@@ -2013,6 +1783,13 @@
             <a:prstDash val="solid"/>
           </a:ln>
         </p:spPr>
+        <p:txBody>
+          <a:bodyPr/>
+          <a:lstStyle/>
+          <a:p>
+            <a:endParaRPr lang="en-US"/>
+          </a:p>
+        </p:txBody>
       </p:sp>
       <p:sp>
         <p:nvSpPr>
@@ -2035,6 +1812,13 @@
           </a:solidFill>
           <a:ln/>
         </p:spPr>
+        <p:txBody>
+          <a:bodyPr/>
+          <a:lstStyle/>
+          <a:p>
+            <a:endParaRPr lang="en-US"/>
+          </a:p>
+        </p:txBody>
       </p:sp>
       <p:sp>
         <p:nvSpPr>
@@ -2057,7 +1841,7 @@
           <a:bodyPr wrap="square" rtlCol="0" anchor="ctr"/>
           <a:lstStyle/>
           <a:p>
-            <a:pPr algn="ctr" indent="0" marL="0">
+            <a:pPr marL="0" indent="0" algn="ctr">
               <a:buNone/>
             </a:pPr>
             <a:r>
@@ -2096,6 +1880,13 @@
           </a:solidFill>
           <a:ln/>
         </p:spPr>
+        <p:txBody>
+          <a:bodyPr/>
+          <a:lstStyle/>
+          <a:p>
+            <a:endParaRPr lang="en-US"/>
+          </a:p>
+        </p:txBody>
       </p:sp>
       <p:sp>
         <p:nvSpPr>
@@ -2118,7 +1909,7 @@
           <a:bodyPr wrap="square" rtlCol="0" anchor="ctr"/>
           <a:lstStyle/>
           <a:p>
-            <a:pPr algn="ctr" indent="0" marL="0">
+            <a:pPr marL="0" indent="0" algn="ctr">
               <a:buNone/>
             </a:pPr>
             <a:r>
@@ -2157,6 +1948,13 @@
           </a:solidFill>
           <a:ln/>
         </p:spPr>
+        <p:txBody>
+          <a:bodyPr/>
+          <a:lstStyle/>
+          <a:p>
+            <a:endParaRPr lang="en-US"/>
+          </a:p>
+        </p:txBody>
       </p:sp>
       <p:sp>
         <p:nvSpPr>
@@ -2179,7 +1977,7 @@
           <a:bodyPr wrap="square" rtlCol="0" anchor="ctr"/>
           <a:lstStyle/>
           <a:p>
-            <a:pPr algn="ctr" indent="0" marL="0">
+            <a:pPr marL="0" indent="0" algn="ctr">
               <a:buNone/>
             </a:pPr>
             <a:r>
@@ -2216,6 +2014,13 @@
           </a:solidFill>
           <a:ln/>
         </p:spPr>
+        <p:txBody>
+          <a:bodyPr/>
+          <a:lstStyle/>
+          <a:p>
+            <a:endParaRPr lang="en-US"/>
+          </a:p>
+        </p:txBody>
       </p:sp>
       <p:sp>
         <p:nvSpPr>
@@ -2238,7 +2043,7 @@
           <a:bodyPr wrap="square" rtlCol="0" anchor="ctr"/>
           <a:lstStyle/>
           <a:p>
-            <a:pPr indent="0" marL="0">
+            <a:pPr marL="0" indent="0">
               <a:buNone/>
             </a:pPr>
             <a:r>
@@ -2272,6 +2077,7 @@
         <a:solidFill>
           <a:srgbClr val="F0F4F8"/>
         </a:solidFill>
+        <a:effectLst/>
       </p:bgPr>
     </p:bg>
     <p:spTree>
@@ -2307,6 +2113,13 @@
           </a:solidFill>
           <a:ln/>
         </p:spPr>
+        <p:txBody>
+          <a:bodyPr/>
+          <a:lstStyle/>
+          <a:p>
+            <a:endParaRPr lang="en-US"/>
+          </a:p>
+        </p:txBody>
       </p:sp>
       <p:sp>
         <p:nvSpPr>
@@ -2329,11 +2142,11 @@
           <a:bodyPr wrap="square" rtlCol="0" anchor="ctr"/>
           <a:lstStyle/>
           <a:p>
-            <a:pPr indent="0" marL="0">
-              <a:buNone/>
-            </a:pPr>
-            <a:r>
-              <a:rPr lang="en-US" sz="1200" b="1" spc="200" kern="0" dirty="0">
+            <a:pPr marL="0" indent="0">
+              <a:buNone/>
+            </a:pPr>
+            <a:r>
+              <a:rPr lang="en-US" sz="1200" b="1" kern="0" spc="200" dirty="0">
                 <a:solidFill>
                   <a:srgbClr val="00D4AA"/>
                 </a:solidFill>
@@ -2366,13 +2179,20 @@
           </a:solidFill>
           <a:ln/>
           <a:effectLst>
-            <a:outerShdw sx="100000" sy="100000" kx="0" ky="0" algn="bl" rotWithShape="0" blurRad="63500" dist="25400" dir="8100000">
+            <a:outerShdw blurRad="63500" dist="25400" dir="8100000" algn="bl" rotWithShape="0">
               <a:srgbClr val="000000">
                 <a:alpha val="10000"/>
               </a:srgbClr>
             </a:outerShdw>
           </a:effectLst>
         </p:spPr>
+        <p:txBody>
+          <a:bodyPr/>
+          <a:lstStyle/>
+          <a:p>
+            <a:endParaRPr lang="en-US"/>
+          </a:p>
+        </p:txBody>
       </p:sp>
       <p:sp>
         <p:nvSpPr>
@@ -2393,6 +2213,13 @@
           </a:solidFill>
           <a:ln/>
         </p:spPr>
+        <p:txBody>
+          <a:bodyPr/>
+          <a:lstStyle/>
+          <a:p>
+            <a:endParaRPr lang="en-US"/>
+          </a:p>
+        </p:txBody>
       </p:sp>
       <p:sp>
         <p:nvSpPr>
@@ -2415,7 +2242,7 @@
           <a:bodyPr wrap="square" rtlCol="0" anchor="ctr"/>
           <a:lstStyle/>
           <a:p>
-            <a:pPr indent="0" marL="0">
+            <a:pPr marL="0" indent="0">
               <a:buNone/>
             </a:pPr>
             <a:r>
@@ -2454,7 +2281,7 @@
           <a:bodyPr wrap="square" rtlCol="0" anchor="ctr"/>
           <a:lstStyle/>
           <a:p>
-            <a:pPr indent="0" marL="0">
+            <a:pPr marL="0" indent="0">
               <a:buNone/>
             </a:pPr>
             <a:r>
@@ -2493,7 +2320,7 @@
           <a:bodyPr wrap="square" rtlCol="0" anchor="ctr"/>
           <a:lstStyle/>
           <a:p>
-            <a:pPr indent="0" marL="0">
+            <a:pPr marL="0" indent="0">
               <a:spcAft>
                 <a:spcPts val="600"/>
               </a:spcAft>
@@ -2513,7 +2340,7 @@
             <a:endParaRPr lang="en-US" sz="1200" dirty="0"/>
           </a:p>
           <a:p>
-            <a:pPr indent="0" marL="0">
+            <a:pPr marL="0" indent="0">
               <a:spcAft>
                 <a:spcPts val="600"/>
               </a:spcAft>
@@ -2533,7 +2360,7 @@
             <a:endParaRPr lang="en-US" sz="1200" dirty="0"/>
           </a:p>
           <a:p>
-            <a:pPr indent="0" marL="0">
+            <a:pPr marL="0" indent="0">
               <a:spcAft>
                 <a:spcPts val="600"/>
               </a:spcAft>
@@ -2573,13 +2400,20 @@
           </a:solidFill>
           <a:ln/>
           <a:effectLst>
-            <a:outerShdw sx="100000" sy="100000" kx="0" ky="0" algn="bl" rotWithShape="0" blurRad="63500" dist="25400" dir="8100000">
+            <a:outerShdw blurRad="63500" dist="25400" dir="8100000" algn="bl" rotWithShape="0">
               <a:srgbClr val="000000">
                 <a:alpha val="10000"/>
               </a:srgbClr>
             </a:outerShdw>
           </a:effectLst>
         </p:spPr>
+        <p:txBody>
+          <a:bodyPr/>
+          <a:lstStyle/>
+          <a:p>
+            <a:endParaRPr lang="en-US"/>
+          </a:p>
+        </p:txBody>
       </p:sp>
       <p:sp>
         <p:nvSpPr>
@@ -2600,6 +2434,13 @@
           </a:solidFill>
           <a:ln/>
         </p:spPr>
+        <p:txBody>
+          <a:bodyPr/>
+          <a:lstStyle/>
+          <a:p>
+            <a:endParaRPr lang="en-US"/>
+          </a:p>
+        </p:txBody>
       </p:sp>
       <p:sp>
         <p:nvSpPr>
@@ -2622,7 +2463,7 @@
           <a:bodyPr wrap="square" rtlCol="0" anchor="ctr"/>
           <a:lstStyle/>
           <a:p>
-            <a:pPr indent="0" marL="0">
+            <a:pPr marL="0" indent="0">
               <a:buNone/>
             </a:pPr>
             <a:r>
@@ -2634,7 +2475,18 @@
                 <a:ea typeface="Calibri" pitchFamily="34" charset="-122"/>
                 <a:cs typeface="Calibri" pitchFamily="34" charset="-120"/>
               </a:rPr>
-              <a:t>🔬  校企合作</a:t>
+              <a:t>🔬  </a:t>
+            </a:r>
+            <a:r>
+              <a:rPr lang="en-US" sz="1400" b="1" dirty="0" err="1">
+                <a:solidFill>
+                  <a:srgbClr val="FFFFFF"/>
+                </a:solidFill>
+                <a:latin typeface="Calibri" pitchFamily="34" charset="0"/>
+                <a:ea typeface="Calibri" pitchFamily="34" charset="-122"/>
+                <a:cs typeface="Calibri" pitchFamily="34" charset="-120"/>
+              </a:rPr>
+              <a:t>校企合作</a:t>
             </a:r>
             <a:endParaRPr lang="en-US" sz="1400" dirty="0"/>
           </a:p>
@@ -2661,7 +2513,7 @@
           <a:bodyPr wrap="square" rtlCol="0" anchor="ctr"/>
           <a:lstStyle/>
           <a:p>
-            <a:pPr indent="0" marL="0">
+            <a:pPr marL="0" indent="0">
               <a:buNone/>
             </a:pPr>
             <a:r>
@@ -2673,7 +2525,18 @@
                 <a:ea typeface="Calibri" pitchFamily="34" charset="-122"/>
                 <a:cs typeface="Calibri" pitchFamily="34" charset="-120"/>
               </a:rPr>
-              <a:t>特普丽 × 北京化工大学</a:t>
+              <a:t>特普丽 × </a:t>
+            </a:r>
+            <a:r>
+              <a:rPr lang="en-US" sz="1400" b="1" dirty="0" err="1">
+                <a:solidFill>
+                  <a:srgbClr val="0D1B2A"/>
+                </a:solidFill>
+                <a:latin typeface="Calibri" pitchFamily="34" charset="0"/>
+                <a:ea typeface="Calibri" pitchFamily="34" charset="-122"/>
+                <a:cs typeface="Calibri" pitchFamily="34" charset="-120"/>
+              </a:rPr>
+              <a:t>北京化工大学</a:t>
             </a:r>
             <a:endParaRPr lang="en-US" sz="1400" dirty="0"/>
           </a:p>
@@ -2700,7 +2563,7 @@
           <a:bodyPr wrap="square" rtlCol="0" anchor="ctr"/>
           <a:lstStyle/>
           <a:p>
-            <a:pPr indent="0" marL="0">
+            <a:pPr marL="0" indent="0">
               <a:buNone/>
             </a:pPr>
             <a:r>
@@ -2717,7 +2580,7 @@
             <a:endParaRPr lang="en-US" sz="1200" dirty="0"/>
           </a:p>
           <a:p>
-            <a:pPr indent="0" marL="0">
+            <a:pPr marL="0" indent="0">
               <a:buNone/>
             </a:pPr>
             <a:r>
@@ -2734,7 +2597,7 @@
             <a:endParaRPr lang="en-US" sz="1200" dirty="0"/>
           </a:p>
           <a:p>
-            <a:pPr indent="0" marL="0">
+            <a:pPr marL="0" indent="0">
               <a:buNone/>
             </a:pPr>
             <a:r>
@@ -2771,13 +2634,20 @@
           </a:solidFill>
           <a:ln/>
           <a:effectLst>
-            <a:outerShdw sx="100000" sy="100000" kx="0" ky="0" algn="bl" rotWithShape="0" blurRad="63500" dist="25400" dir="8100000">
+            <a:outerShdw blurRad="63500" dist="25400" dir="8100000" algn="bl" rotWithShape="0">
               <a:srgbClr val="000000">
                 <a:alpha val="10000"/>
               </a:srgbClr>
             </a:outerShdw>
           </a:effectLst>
         </p:spPr>
+        <p:txBody>
+          <a:bodyPr/>
+          <a:lstStyle/>
+          <a:p>
+            <a:endParaRPr lang="en-US"/>
+          </a:p>
+        </p:txBody>
       </p:sp>
       <p:sp>
         <p:nvSpPr>
@@ -2800,7 +2670,7 @@
           <a:bodyPr wrap="square" rtlCol="0" anchor="ctr"/>
           <a:lstStyle/>
           <a:p>
-            <a:pPr indent="0" marL="0">
+            <a:pPr marL="0" indent="0">
               <a:buNone/>
             </a:pPr>
             <a:r>
@@ -2839,6 +2709,13 @@
           </a:solidFill>
           <a:ln/>
         </p:spPr>
+        <p:txBody>
+          <a:bodyPr/>
+          <a:lstStyle/>
+          <a:p>
+            <a:endParaRPr lang="en-US"/>
+          </a:p>
+        </p:txBody>
       </p:sp>
       <p:sp>
         <p:nvSpPr>
@@ -2861,7 +2738,7 @@
           <a:bodyPr wrap="square" rtlCol="0" anchor="ctr"/>
           <a:lstStyle/>
           <a:p>
-            <a:pPr algn="ctr" indent="0" marL="0">
+            <a:pPr marL="0" indent="0" algn="ctr">
               <a:buNone/>
             </a:pPr>
             <a:r>
@@ -2900,6 +2777,13 @@
           </a:solidFill>
           <a:ln/>
         </p:spPr>
+        <p:txBody>
+          <a:bodyPr/>
+          <a:lstStyle/>
+          <a:p>
+            <a:endParaRPr lang="en-US"/>
+          </a:p>
+        </p:txBody>
       </p:sp>
       <p:sp>
         <p:nvSpPr>
@@ -2922,7 +2806,7 @@
           <a:bodyPr wrap="square" rtlCol="0" anchor="ctr"/>
           <a:lstStyle/>
           <a:p>
-            <a:pPr algn="ctr" indent="0" marL="0">
+            <a:pPr marL="0" indent="0" algn="ctr">
               <a:buNone/>
             </a:pPr>
             <a:r>
@@ -2961,6 +2845,13 @@
           </a:solidFill>
           <a:ln/>
         </p:spPr>
+        <p:txBody>
+          <a:bodyPr/>
+          <a:lstStyle/>
+          <a:p>
+            <a:endParaRPr lang="en-US"/>
+          </a:p>
+        </p:txBody>
       </p:sp>
       <p:sp>
         <p:nvSpPr>
@@ -2983,7 +2874,7 @@
           <a:bodyPr wrap="square" rtlCol="0" anchor="ctr"/>
           <a:lstStyle/>
           <a:p>
-            <a:pPr algn="ctr" indent="0" marL="0">
+            <a:pPr marL="0" indent="0" algn="ctr">
               <a:buNone/>
             </a:pPr>
             <a:r>
@@ -3022,6 +2913,13 @@
           </a:solidFill>
           <a:ln/>
         </p:spPr>
+        <p:txBody>
+          <a:bodyPr/>
+          <a:lstStyle/>
+          <a:p>
+            <a:endParaRPr lang="en-US"/>
+          </a:p>
+        </p:txBody>
       </p:sp>
       <p:sp>
         <p:nvSpPr>
@@ -3044,7 +2942,7 @@
           <a:bodyPr wrap="square" rtlCol="0" anchor="ctr"/>
           <a:lstStyle/>
           <a:p>
-            <a:pPr algn="ctr" indent="0" marL="0">
+            <a:pPr marL="0" indent="0" algn="ctr">
               <a:buNone/>
             </a:pPr>
             <a:r>
@@ -3083,6 +2981,13 @@
           </a:solidFill>
           <a:ln/>
         </p:spPr>
+        <p:txBody>
+          <a:bodyPr/>
+          <a:lstStyle/>
+          <a:p>
+            <a:endParaRPr lang="en-US"/>
+          </a:p>
+        </p:txBody>
       </p:sp>
       <p:sp>
         <p:nvSpPr>
@@ -3105,7 +3010,7 @@
           <a:bodyPr wrap="square" rtlCol="0" anchor="ctr"/>
           <a:lstStyle/>
           <a:p>
-            <a:pPr algn="ctr" indent="0" marL="0">
+            <a:pPr marL="0" indent="0" algn="ctr">
               <a:buNone/>
             </a:pPr>
             <a:r>
@@ -3142,6 +3047,13 @@
           </a:solidFill>
           <a:ln/>
         </p:spPr>
+        <p:txBody>
+          <a:bodyPr/>
+          <a:lstStyle/>
+          <a:p>
+            <a:endParaRPr lang="en-US"/>
+          </a:p>
+        </p:txBody>
       </p:sp>
       <p:sp>
         <p:nvSpPr>
@@ -3164,7 +3076,7 @@
           <a:bodyPr wrap="square" rtlCol="0" anchor="ctr"/>
           <a:lstStyle/>
           <a:p>
-            <a:pPr algn="ctr" indent="0" marL="0">
+            <a:pPr marL="0" indent="0" algn="ctr">
               <a:buNone/>
             </a:pPr>
             <a:r>
@@ -3198,6 +3110,7 @@
         <a:solidFill>
           <a:srgbClr val="0D1B2A"/>
         </a:solidFill>
+        <a:effectLst/>
       </p:bgPr>
     </p:bg>
     <p:spTree>
@@ -3233,6 +3146,13 @@
           </a:solidFill>
           <a:ln/>
         </p:spPr>
+        <p:txBody>
+          <a:bodyPr/>
+          <a:lstStyle/>
+          <a:p>
+            <a:endParaRPr lang="en-US"/>
+          </a:p>
+        </p:txBody>
       </p:sp>
       <p:sp>
         <p:nvSpPr>
@@ -3255,11 +3175,11 @@
           <a:bodyPr wrap="square" rtlCol="0" anchor="ctr"/>
           <a:lstStyle/>
           <a:p>
-            <a:pPr indent="0" marL="0">
-              <a:buNone/>
-            </a:pPr>
-            <a:r>
-              <a:rPr lang="en-US" sz="1200" b="1" spc="200" kern="0" dirty="0">
+            <a:pPr marL="0" indent="0">
+              <a:buNone/>
+            </a:pPr>
+            <a:r>
+              <a:rPr lang="en-US" sz="1200" b="1" kern="0" spc="200" dirty="0">
                 <a:solidFill>
                   <a:srgbClr val="00D4AA"/>
                 </a:solidFill>
@@ -3294,7 +3214,7 @@
           <a:bodyPr wrap="square" rtlCol="0" anchor="ctr"/>
           <a:lstStyle/>
           <a:p>
-            <a:pPr indent="0" marL="0">
+            <a:pPr marL="0" indent="0">
               <a:buNone/>
             </a:pPr>
             <a:r>
@@ -3333,7 +3253,7 @@
           <a:bodyPr wrap="square" rtlCol="0" anchor="ctr"/>
           <a:lstStyle/>
           <a:p>
-            <a:pPr indent="0" marL="0">
+            <a:pPr marL="0" indent="0">
               <a:buNone/>
             </a:pPr>
             <a:r>
@@ -3373,6 +3293,13 @@
             <a:prstDash val="solid"/>
           </a:ln>
         </p:spPr>
+        <p:txBody>
+          <a:bodyPr/>
+          <a:lstStyle/>
+          <a:p>
+            <a:endParaRPr lang="en-US"/>
+          </a:p>
+        </p:txBody>
       </p:sp>
       <p:sp>
         <p:nvSpPr>
@@ -3393,6 +3320,13 @@
           </a:solidFill>
           <a:ln/>
         </p:spPr>
+        <p:txBody>
+          <a:bodyPr/>
+          <a:lstStyle/>
+          <a:p>
+            <a:endParaRPr lang="en-US"/>
+          </a:p>
+        </p:txBody>
       </p:sp>
       <p:sp>
         <p:nvSpPr>
@@ -3415,7 +3349,7 @@
           <a:bodyPr wrap="square" rtlCol="0" anchor="ctr"/>
           <a:lstStyle/>
           <a:p>
-            <a:pPr algn="ctr" indent="0" marL="0">
+            <a:pPr marL="0" indent="0" algn="ctr">
               <a:buNone/>
             </a:pPr>
             <a:r>
@@ -3451,7 +3385,7 @@
           <a:bodyPr wrap="square" rtlCol="0" anchor="ctr"/>
           <a:lstStyle/>
           <a:p>
-            <a:pPr algn="ctr" indent="0" marL="0">
+            <a:pPr marL="0" indent="0" algn="ctr">
               <a:buNone/>
             </a:pPr>
             <a:r>
@@ -3490,7 +3424,7 @@
           <a:bodyPr wrap="square" rtlCol="0" anchor="ctr"/>
           <a:lstStyle/>
           <a:p>
-            <a:pPr indent="0" marL="0">
+            <a:pPr marL="0" indent="0">
               <a:buNone/>
             </a:pPr>
             <a:r>
@@ -3527,6 +3461,13 @@
           </a:solidFill>
           <a:ln/>
         </p:spPr>
+        <p:txBody>
+          <a:bodyPr/>
+          <a:lstStyle/>
+          <a:p>
+            <a:endParaRPr lang="en-US"/>
+          </a:p>
+        </p:txBody>
       </p:sp>
       <p:sp>
         <p:nvSpPr>
@@ -3549,7 +3490,7 @@
           <a:bodyPr wrap="square" rtlCol="0" anchor="ctr"/>
           <a:lstStyle/>
           <a:p>
-            <a:pPr algn="ctr" indent="0" marL="0">
+            <a:pPr marL="0" indent="0" algn="ctr">
               <a:buNone/>
             </a:pPr>
             <a:r>
@@ -3585,7 +3526,7 @@
           <a:bodyPr wrap="square" rtlCol="0" anchor="ctr"/>
           <a:lstStyle/>
           <a:p>
-            <a:pPr algn="ctr" indent="0" marL="0">
+            <a:pPr marL="0" indent="0" algn="ctr">
               <a:buNone/>
             </a:pPr>
             <a:r>
@@ -3624,7 +3565,7 @@
           <a:bodyPr wrap="square" rtlCol="0" anchor="ctr"/>
           <a:lstStyle/>
           <a:p>
-            <a:pPr indent="0" marL="0">
+            <a:pPr marL="0" indent="0">
               <a:buNone/>
             </a:pPr>
             <a:r>
@@ -3661,6 +3602,13 @@
           </a:solidFill>
           <a:ln/>
         </p:spPr>
+        <p:txBody>
+          <a:bodyPr/>
+          <a:lstStyle/>
+          <a:p>
+            <a:endParaRPr lang="en-US"/>
+          </a:p>
+        </p:txBody>
       </p:sp>
       <p:sp>
         <p:nvSpPr>
@@ -3683,7 +3631,7 @@
           <a:bodyPr wrap="square" rtlCol="0" anchor="ctr"/>
           <a:lstStyle/>
           <a:p>
-            <a:pPr algn="ctr" indent="0" marL="0">
+            <a:pPr marL="0" indent="0" algn="ctr">
               <a:buNone/>
             </a:pPr>
             <a:r>
@@ -3719,7 +3667,7 @@
           <a:bodyPr wrap="square" rtlCol="0" anchor="ctr"/>
           <a:lstStyle/>
           <a:p>
-            <a:pPr algn="ctr" indent="0" marL="0">
+            <a:pPr marL="0" indent="0" algn="ctr">
               <a:buNone/>
             </a:pPr>
             <a:r>
@@ -3758,7 +3706,7 @@
           <a:bodyPr wrap="square" rtlCol="0" anchor="ctr"/>
           <a:lstStyle/>
           <a:p>
-            <a:pPr indent="0" marL="0">
+            <a:pPr marL="0" indent="0">
               <a:buNone/>
             </a:pPr>
             <a:r>
@@ -3795,6 +3743,13 @@
           </a:solidFill>
           <a:ln/>
         </p:spPr>
+        <p:txBody>
+          <a:bodyPr/>
+          <a:lstStyle/>
+          <a:p>
+            <a:endParaRPr lang="en-US"/>
+          </a:p>
+        </p:txBody>
       </p:sp>
       <p:sp>
         <p:nvSpPr>
@@ -3817,7 +3772,7 @@
           <a:bodyPr wrap="square" rtlCol="0" anchor="ctr"/>
           <a:lstStyle/>
           <a:p>
-            <a:pPr algn="ctr" indent="0" marL="0">
+            <a:pPr marL="0" indent="0" algn="ctr">
               <a:buNone/>
             </a:pPr>
             <a:r>
@@ -3851,6 +3806,7 @@
         <a:solidFill>
           <a:srgbClr val="0D1B2A"/>
         </a:solidFill>
+        <a:effectLst/>
       </p:bgPr>
     </p:bg>
     <p:spTree>
@@ -3886,6 +3842,13 @@
           </a:solidFill>
           <a:ln/>
         </p:spPr>
+        <p:txBody>
+          <a:bodyPr/>
+          <a:lstStyle/>
+          <a:p>
+            <a:endParaRPr lang="en-US"/>
+          </a:p>
+        </p:txBody>
       </p:sp>
       <p:sp>
         <p:nvSpPr>
@@ -3908,11 +3871,11 @@
           <a:bodyPr wrap="square" rtlCol="0" anchor="ctr"/>
           <a:lstStyle/>
           <a:p>
-            <a:pPr indent="0" marL="0">
-              <a:buNone/>
-            </a:pPr>
-            <a:r>
-              <a:rPr lang="en-US" sz="1200" b="1" spc="200" kern="0" dirty="0">
+            <a:pPr marL="0" indent="0">
+              <a:buNone/>
+            </a:pPr>
+            <a:r>
+              <a:rPr lang="en-US" sz="1200" b="1" kern="0" spc="200" dirty="0">
                 <a:solidFill>
                   <a:srgbClr val="00D4AA"/>
                 </a:solidFill>
@@ -3947,7 +3910,7 @@
           <a:bodyPr wrap="square" rtlCol="0" anchor="ctr"/>
           <a:lstStyle/>
           <a:p>
-            <a:pPr indent="0" marL="0">
+            <a:pPr marL="0" indent="0">
               <a:buNone/>
             </a:pPr>
             <a:r>
@@ -3986,7 +3949,7 @@
           <a:bodyPr wrap="square" rtlCol="0" anchor="ctr"/>
           <a:lstStyle/>
           <a:p>
-            <a:pPr indent="0" marL="0">
+            <a:pPr marL="0" indent="0">
               <a:buNone/>
             </a:pPr>
             <a:r>
@@ -4026,6 +3989,13 @@
             <a:prstDash val="solid"/>
           </a:ln>
         </p:spPr>
+        <p:txBody>
+          <a:bodyPr/>
+          <a:lstStyle/>
+          <a:p>
+            <a:endParaRPr lang="en-US"/>
+          </a:p>
+        </p:txBody>
       </p:sp>
       <p:sp>
         <p:nvSpPr>
@@ -4046,6 +4016,13 @@
           </a:solidFill>
           <a:ln/>
         </p:spPr>
+        <p:txBody>
+          <a:bodyPr/>
+          <a:lstStyle/>
+          <a:p>
+            <a:endParaRPr lang="en-US"/>
+          </a:p>
+        </p:txBody>
       </p:sp>
       <p:sp>
         <p:nvSpPr>
@@ -4066,6 +4043,13 @@
           </a:solidFill>
           <a:ln/>
         </p:spPr>
+        <p:txBody>
+          <a:bodyPr/>
+          <a:lstStyle/>
+          <a:p>
+            <a:endParaRPr lang="en-US"/>
+          </a:p>
+        </p:txBody>
       </p:sp>
       <p:sp>
         <p:nvSpPr>
@@ -4088,7 +4072,7 @@
           <a:bodyPr wrap="square" rtlCol="0" anchor="ctr"/>
           <a:lstStyle/>
           <a:p>
-            <a:pPr algn="ctr" indent="0" marL="0">
+            <a:pPr marL="0" indent="0" algn="ctr">
               <a:buNone/>
             </a:pPr>
             <a:r>
@@ -4127,7 +4111,7 @@
           <a:bodyPr wrap="square" rtlCol="0" anchor="ctr"/>
           <a:lstStyle/>
           <a:p>
-            <a:pPr algn="ctr" indent="0" marL="0">
+            <a:pPr marL="0" indent="0" algn="ctr">
               <a:buNone/>
             </a:pPr>
             <a:r>
@@ -4166,7 +4150,7 @@
           <a:bodyPr wrap="square" rtlCol="0" anchor="ctr"/>
           <a:lstStyle/>
           <a:p>
-            <a:pPr algn="ctr" indent="0" marL="0">
+            <a:pPr marL="0" indent="0" algn="ctr">
               <a:buNone/>
             </a:pPr>
             <a:r>
@@ -4205,7 +4189,7 @@
           <a:bodyPr wrap="square" rtlCol="0" anchor="ctr"/>
           <a:lstStyle/>
           <a:p>
-            <a:pPr algn="ctr" indent="0" marL="0">
+            <a:pPr marL="0" indent="0" algn="ctr">
               <a:buNone/>
             </a:pPr>
             <a:r>
@@ -4242,6 +4226,13 @@
           </a:solidFill>
           <a:ln/>
         </p:spPr>
+        <p:txBody>
+          <a:bodyPr/>
+          <a:lstStyle/>
+          <a:p>
+            <a:endParaRPr lang="en-US"/>
+          </a:p>
+        </p:txBody>
       </p:sp>
       <p:sp>
         <p:nvSpPr>
@@ -4262,6 +4253,13 @@
           </a:solidFill>
           <a:ln/>
         </p:spPr>
+        <p:txBody>
+          <a:bodyPr/>
+          <a:lstStyle/>
+          <a:p>
+            <a:endParaRPr lang="en-US"/>
+          </a:p>
+        </p:txBody>
       </p:sp>
       <p:sp>
         <p:nvSpPr>
@@ -4284,7 +4282,7 @@
           <a:bodyPr wrap="square" rtlCol="0" anchor="ctr"/>
           <a:lstStyle/>
           <a:p>
-            <a:pPr algn="ctr" indent="0" marL="0">
+            <a:pPr marL="0" indent="0" algn="ctr">
               <a:buNone/>
             </a:pPr>
             <a:r>
@@ -4323,7 +4321,7 @@
           <a:bodyPr wrap="square" rtlCol="0" anchor="ctr"/>
           <a:lstStyle/>
           <a:p>
-            <a:pPr algn="ctr" indent="0" marL="0">
+            <a:pPr marL="0" indent="0" algn="ctr">
               <a:buNone/>
             </a:pPr>
             <a:r>
@@ -4362,7 +4360,7 @@
           <a:bodyPr wrap="square" rtlCol="0" anchor="ctr"/>
           <a:lstStyle/>
           <a:p>
-            <a:pPr algn="ctr" indent="0" marL="0">
+            <a:pPr marL="0" indent="0" algn="ctr">
               <a:buNone/>
             </a:pPr>
             <a:r>
@@ -4401,7 +4399,7 @@
           <a:bodyPr wrap="square" rtlCol="0" anchor="ctr"/>
           <a:lstStyle/>
           <a:p>
-            <a:pPr algn="ctr" indent="0" marL="0">
+            <a:pPr marL="0" indent="0" algn="ctr">
               <a:buNone/>
             </a:pPr>
             <a:r>
@@ -4438,6 +4436,13 @@
           </a:solidFill>
           <a:ln/>
         </p:spPr>
+        <p:txBody>
+          <a:bodyPr/>
+          <a:lstStyle/>
+          <a:p>
+            <a:endParaRPr lang="en-US"/>
+          </a:p>
+        </p:txBody>
       </p:sp>
       <p:sp>
         <p:nvSpPr>
@@ -4458,6 +4463,13 @@
           </a:solidFill>
           <a:ln/>
         </p:spPr>
+        <p:txBody>
+          <a:bodyPr/>
+          <a:lstStyle/>
+          <a:p>
+            <a:endParaRPr lang="en-US"/>
+          </a:p>
+        </p:txBody>
       </p:sp>
       <p:sp>
         <p:nvSpPr>
@@ -4480,7 +4492,7 @@
           <a:bodyPr wrap="square" rtlCol="0" anchor="ctr"/>
           <a:lstStyle/>
           <a:p>
-            <a:pPr algn="ctr" indent="0" marL="0">
+            <a:pPr marL="0" indent="0" algn="ctr">
               <a:buNone/>
             </a:pPr>
             <a:r>
@@ -4519,7 +4531,7 @@
           <a:bodyPr wrap="square" rtlCol="0" anchor="ctr"/>
           <a:lstStyle/>
           <a:p>
-            <a:pPr algn="ctr" indent="0" marL="0">
+            <a:pPr marL="0" indent="0" algn="ctr">
               <a:buNone/>
             </a:pPr>
             <a:r>
@@ -4558,7 +4570,7 @@
           <a:bodyPr wrap="square" rtlCol="0" anchor="ctr"/>
           <a:lstStyle/>
           <a:p>
-            <a:pPr algn="ctr" indent="0" marL="0">
+            <a:pPr marL="0" indent="0" algn="ctr">
               <a:buNone/>
             </a:pPr>
             <a:r>
@@ -4597,7 +4609,7 @@
           <a:bodyPr wrap="square" rtlCol="0" anchor="ctr"/>
           <a:lstStyle/>
           <a:p>
-            <a:pPr algn="ctr" indent="0" marL="0">
+            <a:pPr marL="0" indent="0" algn="ctr">
               <a:buNone/>
             </a:pPr>
             <a:r>
@@ -4634,6 +4646,13 @@
           </a:solidFill>
           <a:ln/>
         </p:spPr>
+        <p:txBody>
+          <a:bodyPr/>
+          <a:lstStyle/>
+          <a:p>
+            <a:endParaRPr lang="en-US"/>
+          </a:p>
+        </p:txBody>
       </p:sp>
       <p:sp>
         <p:nvSpPr>
@@ -4656,7 +4675,7 @@
           <a:bodyPr wrap="square" rtlCol="0" anchor="ctr"/>
           <a:lstStyle/>
           <a:p>
-            <a:pPr algn="ctr" indent="0" marL="0">
+            <a:pPr marL="0" indent="0" algn="ctr">
               <a:buNone/>
             </a:pPr>
             <a:r>
@@ -4690,6 +4709,7 @@
         <a:solidFill>
           <a:srgbClr val="F0F4F8"/>
         </a:solidFill>
+        <a:effectLst/>
       </p:bgPr>
     </p:bg>
     <p:spTree>
@@ -4725,6 +4745,13 @@
           </a:solidFill>
           <a:ln/>
         </p:spPr>
+        <p:txBody>
+          <a:bodyPr/>
+          <a:lstStyle/>
+          <a:p>
+            <a:endParaRPr lang="en-US"/>
+          </a:p>
+        </p:txBody>
       </p:sp>
       <p:sp>
         <p:nvSpPr>
@@ -4745,6 +4772,13 @@
           </a:solidFill>
           <a:ln/>
         </p:spPr>
+        <p:txBody>
+          <a:bodyPr/>
+          <a:lstStyle/>
+          <a:p>
+            <a:endParaRPr lang="en-US"/>
+          </a:p>
+        </p:txBody>
       </p:sp>
       <p:sp>
         <p:nvSpPr>
@@ -4767,11 +4801,11 @@
           <a:bodyPr wrap="square" rtlCol="0" anchor="ctr"/>
           <a:lstStyle/>
           <a:p>
-            <a:pPr indent="0" marL="0">
-              <a:buNone/>
-            </a:pPr>
-            <a:r>
-              <a:rPr lang="en-US" sz="1100" b="1" spc="300" kern="0" dirty="0">
+            <a:pPr marL="0" indent="0">
+              <a:buNone/>
+            </a:pPr>
+            <a:r>
+              <a:rPr lang="en-US" sz="1100" b="1" kern="0" spc="300" dirty="0">
                 <a:solidFill>
                   <a:srgbClr val="00D4AA"/>
                 </a:solidFill>
@@ -4806,7 +4840,7 @@
           <a:bodyPr wrap="square" rtlCol="0" anchor="ctr"/>
           <a:lstStyle/>
           <a:p>
-            <a:pPr indent="0" marL="0">
+            <a:pPr marL="0" indent="0">
               <a:buNone/>
             </a:pPr>
             <a:r>
@@ -4845,7 +4879,7 @@
           <a:bodyPr wrap="square" rtlCol="0" anchor="ctr"/>
           <a:lstStyle/>
           <a:p>
-            <a:pPr indent="0" marL="0">
+            <a:pPr marL="0" indent="0">
               <a:buNone/>
             </a:pPr>
             <a:r>
@@ -4884,7 +4918,7 @@
           <a:bodyPr wrap="square" rtlCol="0" anchor="ctr"/>
           <a:lstStyle/>
           <a:p>
-            <a:pPr indent="0" marL="0">
+            <a:pPr marL="0" indent="0">
               <a:buNone/>
             </a:pPr>
             <a:r>
@@ -4923,7 +4957,7 @@
           <a:bodyPr wrap="square" rtlCol="0" anchor="ctr"/>
           <a:lstStyle/>
           <a:p>
-            <a:pPr indent="0" marL="0">
+            <a:pPr marL="0" indent="0">
               <a:buNone/>
             </a:pPr>
             <a:r>
@@ -4963,6 +4997,13 @@
             <a:prstDash val="solid"/>
           </a:ln>
         </p:spPr>
+        <p:txBody>
+          <a:bodyPr/>
+          <a:lstStyle/>
+          <a:p>
+            <a:endParaRPr lang="en-US"/>
+          </a:p>
+        </p:txBody>
       </p:sp>
       <p:sp>
         <p:nvSpPr>
@@ -4985,7 +5026,7 @@
           <a:bodyPr wrap="square" rtlCol="0" anchor="ctr"/>
           <a:lstStyle/>
           <a:p>
-            <a:pPr indent="0" marL="0">
+            <a:pPr marL="0" indent="0">
               <a:buNone/>
             </a:pPr>
             <a:r>
@@ -5024,7 +5065,7 @@
           <a:bodyPr wrap="square" rtlCol="0" anchor="ctr"/>
           <a:lstStyle/>
           <a:p>
-            <a:pPr indent="0" marL="0">
+            <a:pPr marL="0" indent="0">
               <a:buNone/>
             </a:pPr>
             <a:r>
@@ -5063,7 +5104,7 @@
           <a:bodyPr wrap="square" rtlCol="0" anchor="ctr"/>
           <a:lstStyle/>
           <a:p>
-            <a:pPr indent="0" marL="0">
+            <a:pPr marL="0" indent="0">
               <a:buNone/>
             </a:pPr>
             <a:r>
@@ -5102,7 +5143,7 @@
           <a:bodyPr wrap="square" rtlCol="0" anchor="ctr"/>
           <a:lstStyle/>
           <a:p>
-            <a:pPr indent="0" marL="0">
+            <a:pPr marL="0" indent="0">
               <a:buNone/>
             </a:pPr>
             <a:r>
@@ -5114,7 +5155,7 @@
                 <a:ea typeface="Georgia" pitchFamily="34" charset="-122"/>
                 <a:cs typeface="Georgia" pitchFamily="34" charset="-120"/>
               </a:rPr>
-              <a:t>01</a:t>
+              <a:t>1</a:t>
             </a:r>
             <a:endParaRPr lang="en-US" sz="2800" dirty="0"/>
           </a:p>
@@ -5139,6 +5180,13 @@
           </a:solidFill>
           <a:ln/>
         </p:spPr>
+        <p:txBody>
+          <a:bodyPr/>
+          <a:lstStyle/>
+          <a:p>
+            <a:endParaRPr lang="en-US"/>
+          </a:p>
+        </p:txBody>
       </p:sp>
       <p:sp>
         <p:nvSpPr>
@@ -5161,7 +5209,7 @@
           <a:bodyPr wrap="square" rtlCol="0" anchor="ctr"/>
           <a:lstStyle/>
           <a:p>
-            <a:pPr indent="0" marL="0">
+            <a:pPr marL="0" indent="0">
               <a:buNone/>
             </a:pPr>
             <a:r>
@@ -5200,7 +5248,7 @@
           <a:bodyPr wrap="square" rtlCol="0" anchor="ctr"/>
           <a:lstStyle/>
           <a:p>
-            <a:pPr indent="0" marL="0">
+            <a:pPr marL="0" indent="0">
               <a:buNone/>
             </a:pPr>
             <a:r>
@@ -5240,6 +5288,13 @@
             <a:prstDash val="solid"/>
           </a:ln>
         </p:spPr>
+        <p:txBody>
+          <a:bodyPr/>
+          <a:lstStyle/>
+          <a:p>
+            <a:endParaRPr lang="en-US"/>
+          </a:p>
+        </p:txBody>
       </p:sp>
       <p:sp>
         <p:nvSpPr>
@@ -5262,7 +5317,7 @@
           <a:bodyPr wrap="square" rtlCol="0" anchor="ctr"/>
           <a:lstStyle/>
           <a:p>
-            <a:pPr indent="0" marL="0">
+            <a:pPr marL="0" indent="0">
               <a:buNone/>
             </a:pPr>
             <a:r>
@@ -5274,7 +5329,7 @@
                 <a:ea typeface="Georgia" pitchFamily="34" charset="-122"/>
                 <a:cs typeface="Georgia" pitchFamily="34" charset="-120"/>
               </a:rPr>
-              <a:t>02</a:t>
+              <a:t>2</a:t>
             </a:r>
             <a:endParaRPr lang="en-US" sz="2800" dirty="0"/>
           </a:p>
@@ -5299,6 +5354,13 @@
           </a:solidFill>
           <a:ln/>
         </p:spPr>
+        <p:txBody>
+          <a:bodyPr/>
+          <a:lstStyle/>
+          <a:p>
+            <a:endParaRPr lang="en-US"/>
+          </a:p>
+        </p:txBody>
       </p:sp>
       <p:sp>
         <p:nvSpPr>
@@ -5321,7 +5383,7 @@
           <a:bodyPr wrap="square" rtlCol="0" anchor="ctr"/>
           <a:lstStyle/>
           <a:p>
-            <a:pPr indent="0" marL="0">
+            <a:pPr marL="0" indent="0">
               <a:buNone/>
             </a:pPr>
             <a:r>
@@ -5360,7 +5422,7 @@
           <a:bodyPr wrap="square" rtlCol="0" anchor="ctr"/>
           <a:lstStyle/>
           <a:p>
-            <a:pPr indent="0" marL="0">
+            <a:pPr marL="0" indent="0">
               <a:buNone/>
             </a:pPr>
             <a:r>
@@ -5400,6 +5462,13 @@
             <a:prstDash val="solid"/>
           </a:ln>
         </p:spPr>
+        <p:txBody>
+          <a:bodyPr/>
+          <a:lstStyle/>
+          <a:p>
+            <a:endParaRPr lang="en-US"/>
+          </a:p>
+        </p:txBody>
       </p:sp>
       <p:sp>
         <p:nvSpPr>
@@ -5422,7 +5491,7 @@
           <a:bodyPr wrap="square" rtlCol="0" anchor="ctr"/>
           <a:lstStyle/>
           <a:p>
-            <a:pPr indent="0" marL="0">
+            <a:pPr marL="0" indent="0">
               <a:buNone/>
             </a:pPr>
             <a:r>
@@ -5434,7 +5503,7 @@
                 <a:ea typeface="Georgia" pitchFamily="34" charset="-122"/>
                 <a:cs typeface="Georgia" pitchFamily="34" charset="-120"/>
               </a:rPr>
-              <a:t>03</a:t>
+              <a:t>3</a:t>
             </a:r>
             <a:endParaRPr lang="en-US" sz="2800" dirty="0"/>
           </a:p>
@@ -5459,6 +5528,13 @@
           </a:solidFill>
           <a:ln/>
         </p:spPr>
+        <p:txBody>
+          <a:bodyPr/>
+          <a:lstStyle/>
+          <a:p>
+            <a:endParaRPr lang="en-US"/>
+          </a:p>
+        </p:txBody>
       </p:sp>
       <p:sp>
         <p:nvSpPr>
@@ -5481,7 +5557,7 @@
           <a:bodyPr wrap="square" rtlCol="0" anchor="ctr"/>
           <a:lstStyle/>
           <a:p>
-            <a:pPr indent="0" marL="0">
+            <a:pPr marL="0" indent="0">
               <a:buNone/>
             </a:pPr>
             <a:r>
@@ -5520,7 +5596,7 @@
           <a:bodyPr wrap="square" rtlCol="0" anchor="ctr"/>
           <a:lstStyle/>
           <a:p>
-            <a:pPr indent="0" marL="0">
+            <a:pPr marL="0" indent="0">
               <a:buNone/>
             </a:pPr>
             <a:r>
@@ -5557,6 +5633,13 @@
           </a:solidFill>
           <a:ln/>
         </p:spPr>
+        <p:txBody>
+          <a:bodyPr/>
+          <a:lstStyle/>
+          <a:p>
+            <a:endParaRPr lang="en-US"/>
+          </a:p>
+        </p:txBody>
       </p:sp>
       <p:sp>
         <p:nvSpPr>
@@ -5579,7 +5662,7 @@
           <a:bodyPr wrap="square" rtlCol="0" anchor="ctr"/>
           <a:lstStyle/>
           <a:p>
-            <a:pPr indent="0" marL="0">
+            <a:pPr marL="0" indent="0">
               <a:buNone/>
             </a:pPr>
             <a:r>
@@ -5613,6 +5696,7 @@
         <a:solidFill>
           <a:srgbClr val="0D1B2A"/>
         </a:solidFill>
+        <a:effectLst/>
       </p:bgPr>
     </p:bg>
     <p:spTree>
@@ -5648,6 +5732,13 @@
           </a:solidFill>
           <a:ln/>
         </p:spPr>
+        <p:txBody>
+          <a:bodyPr/>
+          <a:lstStyle/>
+          <a:p>
+            <a:endParaRPr lang="en-US"/>
+          </a:p>
+        </p:txBody>
       </p:sp>
       <p:sp>
         <p:nvSpPr>
@@ -5668,6 +5759,13 @@
           </a:solidFill>
           <a:ln/>
         </p:spPr>
+        <p:txBody>
+          <a:bodyPr/>
+          <a:lstStyle/>
+          <a:p>
+            <a:endParaRPr lang="en-US"/>
+          </a:p>
+        </p:txBody>
       </p:sp>
       <p:sp>
         <p:nvSpPr>
@@ -5690,11 +5788,11 @@
           <a:bodyPr wrap="square" rtlCol="0" anchor="ctr"/>
           <a:lstStyle/>
           <a:p>
-            <a:pPr indent="0" marL="0">
-              <a:buNone/>
-            </a:pPr>
-            <a:r>
-              <a:rPr lang="en-US" sz="1100" b="1" spc="300" kern="0" dirty="0">
+            <a:pPr marL="0" indent="0">
+              <a:buNone/>
+            </a:pPr>
+            <a:r>
+              <a:rPr lang="en-US" sz="1100" b="1" kern="0" spc="300" dirty="0">
                 <a:solidFill>
                   <a:srgbClr val="00D4AA"/>
                 </a:solidFill>
@@ -5729,7 +5827,7 @@
           <a:bodyPr wrap="square" rtlCol="0" anchor="ctr"/>
           <a:lstStyle/>
           <a:p>
-            <a:pPr indent="0" marL="0">
+            <a:pPr marL="0" indent="0">
               <a:buNone/>
             </a:pPr>
             <a:r>
@@ -5768,7 +5866,7 @@
           <a:bodyPr wrap="square" rtlCol="0" anchor="ctr"/>
           <a:lstStyle/>
           <a:p>
-            <a:pPr indent="0" marL="0">
+            <a:pPr marL="0" indent="0">
               <a:buNone/>
             </a:pPr>
             <a:r>
@@ -5807,7 +5905,7 @@
           <a:bodyPr wrap="square" rtlCol="0" anchor="ctr"/>
           <a:lstStyle/>
           <a:p>
-            <a:pPr indent="0" marL="0">
+            <a:pPr marL="0" indent="0">
               <a:buNone/>
             </a:pPr>
             <a:r>
@@ -5847,6 +5945,13 @@
             <a:prstDash val="solid"/>
           </a:ln>
         </p:spPr>
+        <p:txBody>
+          <a:bodyPr/>
+          <a:lstStyle/>
+          <a:p>
+            <a:endParaRPr lang="en-US"/>
+          </a:p>
+        </p:txBody>
       </p:sp>
       <p:sp>
         <p:nvSpPr>
@@ -5869,7 +5974,7 @@
           <a:bodyPr wrap="square" rtlCol="0" anchor="ctr"/>
           <a:lstStyle/>
           <a:p>
-            <a:pPr indent="0" marL="0">
+            <a:pPr marL="0" indent="0">
               <a:buNone/>
             </a:pPr>
             <a:r>
@@ -5886,7 +5991,7 @@
             <a:endParaRPr lang="en-US" sz="1200" dirty="0"/>
           </a:p>
           <a:p>
-            <a:pPr indent="0" marL="0">
+            <a:pPr marL="0" indent="0">
               <a:buNone/>
             </a:pPr>
             <a:r>
@@ -5925,7 +6030,7 @@
           <a:bodyPr wrap="square" rtlCol="0" anchor="ctr"/>
           <a:lstStyle/>
           <a:p>
-            <a:pPr indent="0" marL="0">
+            <a:pPr marL="0" indent="0">
               <a:buNone/>
             </a:pPr>
             <a:r>
@@ -5964,7 +6069,7 @@
           <a:bodyPr wrap="square" rtlCol="0" anchor="ctr"/>
           <a:lstStyle/>
           <a:p>
-            <a:pPr indent="0" marL="0">
+            <a:pPr marL="0" indent="0">
               <a:buNone/>
             </a:pPr>
             <a:r>
@@ -6003,7 +6108,7 @@
           <a:bodyPr wrap="square" rtlCol="0" anchor="ctr"/>
           <a:lstStyle/>
           <a:p>
-            <a:pPr indent="0" marL="0">
+            <a:pPr marL="0" indent="0">
               <a:buNone/>
             </a:pPr>
             <a:r>
@@ -6042,7 +6147,7 @@
           <a:bodyPr wrap="square" rtlCol="0" anchor="ctr"/>
           <a:lstStyle/>
           <a:p>
-            <a:pPr indent="0" marL="0">
+            <a:pPr marL="0" indent="0">
               <a:buNone/>
             </a:pPr>
             <a:r>
@@ -6081,11 +6186,11 @@
           <a:bodyPr wrap="square" rtlCol="0" anchor="ctr"/>
           <a:lstStyle/>
           <a:p>
-            <a:pPr indent="0" marL="0">
-              <a:buNone/>
-            </a:pPr>
-            <a:r>
-              <a:rPr lang="en-US" sz="1600" b="1" dirty="0">
+            <a:pPr marL="0" indent="0">
+              <a:buNone/>
+            </a:pPr>
+            <a:r>
+              <a:rPr lang="en-US" sz="1600" b="1" dirty="0" err="1">
                 <a:solidFill>
                   <a:srgbClr val="00D4AA"/>
                 </a:solidFill>
@@ -6093,7 +6198,7 @@
                 <a:ea typeface="Georgia" pitchFamily="34" charset="-122"/>
                 <a:cs typeface="Georgia" pitchFamily="34" charset="-120"/>
               </a:rPr>
-              <a:t>0</a:t>
+              <a:t>未检出辐射</a:t>
             </a:r>
             <a:endParaRPr lang="en-US" sz="1600" dirty="0"/>
           </a:p>
@@ -6120,7 +6225,7 @@
           <a:bodyPr wrap="square" rtlCol="0" anchor="ctr"/>
           <a:lstStyle/>
           <a:p>
-            <a:pPr indent="0" marL="0">
+            <a:pPr marL="0" indent="0">
               <a:buNone/>
             </a:pPr>
             <a:r>
@@ -6157,6 +6262,13 @@
           </a:solidFill>
           <a:ln/>
         </p:spPr>
+        <p:txBody>
+          <a:bodyPr/>
+          <a:lstStyle/>
+          <a:p>
+            <a:endParaRPr lang="en-US"/>
+          </a:p>
+        </p:txBody>
       </p:sp>
       <p:sp>
         <p:nvSpPr>
@@ -6177,6 +6289,13 @@
           </a:solidFill>
           <a:ln/>
         </p:spPr>
+        <p:txBody>
+          <a:bodyPr/>
+          <a:lstStyle/>
+          <a:p>
+            <a:endParaRPr lang="en-US"/>
+          </a:p>
+        </p:txBody>
       </p:sp>
       <p:sp>
         <p:nvSpPr>
@@ -6199,7 +6318,7 @@
           <a:bodyPr wrap="square" rtlCol="0" anchor="ctr"/>
           <a:lstStyle/>
           <a:p>
-            <a:pPr algn="ctr" indent="0" marL="0">
+            <a:pPr marL="0" indent="0" algn="ctr">
               <a:buNone/>
             </a:pPr>
             <a:r>
@@ -6238,7 +6357,7 @@
           <a:bodyPr wrap="square" rtlCol="0" anchor="ctr"/>
           <a:lstStyle/>
           <a:p>
-            <a:pPr algn="ctr" indent="0" marL="0">
+            <a:pPr marL="0" indent="0" algn="ctr">
               <a:buNone/>
             </a:pPr>
             <a:r>
@@ -6278,6 +6397,13 @@
             <a:prstDash val="solid"/>
           </a:ln>
         </p:spPr>
+        <p:txBody>
+          <a:bodyPr/>
+          <a:lstStyle/>
+          <a:p>
+            <a:endParaRPr lang="en-US"/>
+          </a:p>
+        </p:txBody>
       </p:sp>
       <p:sp>
         <p:nvSpPr>
@@ -6300,7 +6426,7 @@
           <a:bodyPr wrap="square" rtlCol="0" anchor="ctr"/>
           <a:lstStyle/>
           <a:p>
-            <a:pPr indent="0" marL="0">
+            <a:pPr marL="0" indent="0">
               <a:buNone/>
             </a:pPr>
             <a:r>
@@ -6312,7 +6438,7 @@
                 <a:ea typeface="Calibri" pitchFamily="34" charset="-122"/>
                 <a:cs typeface="Calibri" pitchFamily="34" charset="-120"/>
               </a:rPr>
-              <a:t>独创四步法核心提纯工艺——酸溶、载体共沉/选择性吸附/离子交换分离Ra、矿物纯化、再合成——彻底去除放射性镭（Ra），保留并激活负氧离子释放活性，技术壁垒高、难复制。</a:t>
+              <a:t>独创四步法核心提纯工艺：酸溶→ Ra分离→ 矿物纯化→ 重新合成，彻底去除放射性镭（Ra），保留并激活负氧离子释放活性。</a:t>
             </a:r>
             <a:endParaRPr lang="en-US" sz="950" dirty="0"/>
           </a:p>
@@ -6337,6 +6463,13 @@
           </a:solidFill>
           <a:ln/>
         </p:spPr>
+        <p:txBody>
+          <a:bodyPr/>
+          <a:lstStyle/>
+          <a:p>
+            <a:endParaRPr lang="en-US"/>
+          </a:p>
+        </p:txBody>
       </p:sp>
       <p:sp>
         <p:nvSpPr>
@@ -6359,7 +6492,7 @@
           <a:bodyPr wrap="square" rtlCol="0" anchor="ctr"/>
           <a:lstStyle/>
           <a:p>
-            <a:pPr indent="0" marL="0">
+            <a:pPr marL="0" indent="0">
               <a:buNone/>
             </a:pPr>
             <a:r>
@@ -6396,6 +6529,13 @@
           </a:solidFill>
           <a:ln/>
         </p:spPr>
+        <p:txBody>
+          <a:bodyPr/>
+          <a:lstStyle/>
+          <a:p>
+            <a:endParaRPr lang="en-US"/>
+          </a:p>
+        </p:txBody>
       </p:sp>
       <p:sp>
         <p:nvSpPr>
@@ -6418,7 +6558,7 @@
           <a:bodyPr wrap="square" rtlCol="0" anchor="ctr"/>
           <a:lstStyle/>
           <a:p>
-            <a:pPr indent="0" marL="0">
+            <a:pPr marL="0" indent="0">
               <a:buNone/>
             </a:pPr>
             <a:r>
@@ -6455,6 +6595,13 @@
           </a:solidFill>
           <a:ln/>
         </p:spPr>
+        <p:txBody>
+          <a:bodyPr/>
+          <a:lstStyle/>
+          <a:p>
+            <a:endParaRPr lang="en-US"/>
+          </a:p>
+        </p:txBody>
       </p:sp>
       <p:sp>
         <p:nvSpPr>
@@ -6477,7 +6624,7 @@
           <a:bodyPr wrap="square" rtlCol="0" anchor="ctr"/>
           <a:lstStyle/>
           <a:p>
-            <a:pPr indent="0" marL="0">
+            <a:pPr marL="0" indent="0">
               <a:buNone/>
             </a:pPr>
             <a:r>
@@ -6514,6 +6661,13 @@
           </a:solidFill>
           <a:ln/>
         </p:spPr>
+        <p:txBody>
+          <a:bodyPr/>
+          <a:lstStyle/>
+          <a:p>
+            <a:endParaRPr lang="en-US"/>
+          </a:p>
+        </p:txBody>
       </p:sp>
       <p:sp>
         <p:nvSpPr>
@@ -6536,7 +6690,7 @@
           <a:bodyPr wrap="square" rtlCol="0" anchor="ctr"/>
           <a:lstStyle/>
           <a:p>
-            <a:pPr indent="0" marL="0">
+            <a:pPr marL="0" indent="0">
               <a:buNone/>
             </a:pPr>
             <a:r>
@@ -6573,6 +6727,13 @@
           </a:solidFill>
           <a:ln/>
         </p:spPr>
+        <p:txBody>
+          <a:bodyPr/>
+          <a:lstStyle/>
+          <a:p>
+            <a:endParaRPr lang="en-US"/>
+          </a:p>
+        </p:txBody>
       </p:sp>
       <p:sp>
         <p:nvSpPr>
@@ -6593,6 +6754,13 @@
           </a:solidFill>
           <a:ln/>
         </p:spPr>
+        <p:txBody>
+          <a:bodyPr/>
+          <a:lstStyle/>
+          <a:p>
+            <a:endParaRPr lang="en-US"/>
+          </a:p>
+        </p:txBody>
       </p:sp>
       <p:sp>
         <p:nvSpPr>
@@ -6615,7 +6783,7 @@
           <a:bodyPr wrap="square" rtlCol="0" anchor="ctr"/>
           <a:lstStyle/>
           <a:p>
-            <a:pPr algn="ctr" indent="0" marL="0">
+            <a:pPr marL="0" indent="0" algn="ctr">
               <a:buNone/>
             </a:pPr>
             <a:r>
@@ -6654,7 +6822,7 @@
           <a:bodyPr wrap="square" rtlCol="0" anchor="ctr"/>
           <a:lstStyle/>
           <a:p>
-            <a:pPr algn="ctr" indent="0" marL="0">
+            <a:pPr marL="0" indent="0" algn="ctr">
               <a:buNone/>
             </a:pPr>
             <a:r>
@@ -6694,6 +6862,13 @@
             <a:prstDash val="solid"/>
           </a:ln>
         </p:spPr>
+        <p:txBody>
+          <a:bodyPr/>
+          <a:lstStyle/>
+          <a:p>
+            <a:endParaRPr lang="en-US"/>
+          </a:p>
+        </p:txBody>
       </p:sp>
       <p:sp>
         <p:nvSpPr>
@@ -6716,7 +6891,7 @@
           <a:bodyPr wrap="square" rtlCol="0" anchor="ctr"/>
           <a:lstStyle/>
           <a:p>
-            <a:pPr indent="0" marL="0">
+            <a:pPr marL="0" indent="0">
               <a:buNone/>
             </a:pPr>
             <a:r>
@@ -6753,6 +6928,13 @@
           </a:solidFill>
           <a:ln/>
         </p:spPr>
+        <p:txBody>
+          <a:bodyPr/>
+          <a:lstStyle/>
+          <a:p>
+            <a:endParaRPr lang="en-US"/>
+          </a:p>
+        </p:txBody>
       </p:sp>
       <p:sp>
         <p:nvSpPr>
@@ -6775,7 +6957,7 @@
           <a:bodyPr wrap="square" rtlCol="0" anchor="ctr"/>
           <a:lstStyle/>
           <a:p>
-            <a:pPr indent="0" marL="0">
+            <a:pPr marL="0" indent="0">
               <a:buNone/>
             </a:pPr>
             <a:r>
@@ -6812,6 +6994,13 @@
           </a:solidFill>
           <a:ln/>
         </p:spPr>
+        <p:txBody>
+          <a:bodyPr/>
+          <a:lstStyle/>
+          <a:p>
+            <a:endParaRPr lang="en-US"/>
+          </a:p>
+        </p:txBody>
       </p:sp>
       <p:sp>
         <p:nvSpPr>
@@ -6834,7 +7023,7 @@
           <a:bodyPr wrap="square" rtlCol="0" anchor="ctr"/>
           <a:lstStyle/>
           <a:p>
-            <a:pPr indent="0" marL="0">
+            <a:pPr marL="0" indent="0">
               <a:buNone/>
             </a:pPr>
             <a:r>
@@ -6871,6 +7060,13 @@
           </a:solidFill>
           <a:ln/>
         </p:spPr>
+        <p:txBody>
+          <a:bodyPr/>
+          <a:lstStyle/>
+          <a:p>
+            <a:endParaRPr lang="en-US"/>
+          </a:p>
+        </p:txBody>
       </p:sp>
       <p:sp>
         <p:nvSpPr>
@@ -6893,7 +7089,7 @@
           <a:bodyPr wrap="square" rtlCol="0" anchor="ctr"/>
           <a:lstStyle/>
           <a:p>
-            <a:pPr indent="0" marL="0">
+            <a:pPr marL="0" indent="0">
               <a:buNone/>
             </a:pPr>
             <a:r>
@@ -6930,6 +7126,13 @@
           </a:solidFill>
           <a:ln/>
         </p:spPr>
+        <p:txBody>
+          <a:bodyPr/>
+          <a:lstStyle/>
+          <a:p>
+            <a:endParaRPr lang="en-US"/>
+          </a:p>
+        </p:txBody>
       </p:sp>
       <p:sp>
         <p:nvSpPr>
@@ -6950,6 +7153,13 @@
           </a:solidFill>
           <a:ln/>
         </p:spPr>
+        <p:txBody>
+          <a:bodyPr/>
+          <a:lstStyle/>
+          <a:p>
+            <a:endParaRPr lang="en-US"/>
+          </a:p>
+        </p:txBody>
       </p:sp>
       <p:sp>
         <p:nvSpPr>
@@ -6972,7 +7182,7 @@
           <a:bodyPr wrap="square" rtlCol="0" anchor="ctr"/>
           <a:lstStyle/>
           <a:p>
-            <a:pPr algn="ctr" indent="0" marL="0">
+            <a:pPr marL="0" indent="0" algn="ctr">
               <a:buNone/>
             </a:pPr>
             <a:r>
@@ -7011,7 +7221,7 @@
           <a:bodyPr wrap="square" rtlCol="0" anchor="ctr"/>
           <a:lstStyle/>
           <a:p>
-            <a:pPr algn="ctr" indent="0" marL="0">
+            <a:pPr marL="0" indent="0" algn="ctr">
               <a:buNone/>
             </a:pPr>
             <a:r>
@@ -7051,6 +7261,13 @@
             <a:prstDash val="solid"/>
           </a:ln>
         </p:spPr>
+        <p:txBody>
+          <a:bodyPr/>
+          <a:lstStyle/>
+          <a:p>
+            <a:endParaRPr lang="en-US"/>
+          </a:p>
+        </p:txBody>
       </p:sp>
       <p:sp>
         <p:nvSpPr>
@@ -7073,7 +7290,7 @@
           <a:bodyPr wrap="square" rtlCol="0" anchor="ctr"/>
           <a:lstStyle/>
           <a:p>
-            <a:pPr indent="0" marL="0">
+            <a:pPr marL="0" indent="0">
               <a:buNone/>
             </a:pPr>
             <a:r>
@@ -7110,6 +7327,13 @@
           </a:solidFill>
           <a:ln/>
         </p:spPr>
+        <p:txBody>
+          <a:bodyPr/>
+          <a:lstStyle/>
+          <a:p>
+            <a:endParaRPr lang="en-US"/>
+          </a:p>
+        </p:txBody>
       </p:sp>
       <p:sp>
         <p:nvSpPr>
@@ -7132,7 +7356,7 @@
           <a:bodyPr wrap="square" rtlCol="0" anchor="ctr"/>
           <a:lstStyle/>
           <a:p>
-            <a:pPr indent="0" marL="0">
+            <a:pPr marL="0" indent="0">
               <a:buNone/>
             </a:pPr>
             <a:r>
@@ -7169,6 +7393,13 @@
           </a:solidFill>
           <a:ln/>
         </p:spPr>
+        <p:txBody>
+          <a:bodyPr/>
+          <a:lstStyle/>
+          <a:p>
+            <a:endParaRPr lang="en-US"/>
+          </a:p>
+        </p:txBody>
       </p:sp>
       <p:sp>
         <p:nvSpPr>
@@ -7191,7 +7422,7 @@
           <a:bodyPr wrap="square" rtlCol="0" anchor="ctr"/>
           <a:lstStyle/>
           <a:p>
-            <a:pPr indent="0" marL="0">
+            <a:pPr marL="0" indent="0">
               <a:buNone/>
             </a:pPr>
             <a:r>
@@ -7228,6 +7459,13 @@
           </a:solidFill>
           <a:ln/>
         </p:spPr>
+        <p:txBody>
+          <a:bodyPr/>
+          <a:lstStyle/>
+          <a:p>
+            <a:endParaRPr lang="en-US"/>
+          </a:p>
+        </p:txBody>
       </p:sp>
       <p:sp>
         <p:nvSpPr>
@@ -7250,7 +7488,7 @@
           <a:bodyPr wrap="square" rtlCol="0" anchor="ctr"/>
           <a:lstStyle/>
           <a:p>
-            <a:pPr indent="0" marL="0">
+            <a:pPr marL="0" indent="0">
               <a:buNone/>
             </a:pPr>
             <a:r>
@@ -7284,6 +7522,7 @@
         <a:solidFill>
           <a:srgbClr val="F0F4F8"/>
         </a:solidFill>
+        <a:effectLst/>
       </p:bgPr>
     </p:bg>
     <p:spTree>
@@ -7319,6 +7558,13 @@
           </a:solidFill>
           <a:ln/>
         </p:spPr>
+        <p:txBody>
+          <a:bodyPr/>
+          <a:lstStyle/>
+          <a:p>
+            <a:endParaRPr lang="en-US"/>
+          </a:p>
+        </p:txBody>
       </p:sp>
       <p:sp>
         <p:nvSpPr>
@@ -7341,11 +7587,11 @@
           <a:bodyPr wrap="square" rtlCol="0" anchor="ctr"/>
           <a:lstStyle/>
           <a:p>
-            <a:pPr indent="0" marL="0">
-              <a:buNone/>
-            </a:pPr>
-            <a:r>
-              <a:rPr lang="en-US" sz="1200" b="1" spc="200" kern="0" dirty="0">
+            <a:pPr marL="0" indent="0">
+              <a:buNone/>
+            </a:pPr>
+            <a:r>
+              <a:rPr lang="en-US" sz="1200" b="1" kern="0" spc="200" dirty="0">
                 <a:solidFill>
                   <a:srgbClr val="00D4AA"/>
                 </a:solidFill>
@@ -7380,7 +7626,7 @@
           <a:bodyPr wrap="square" rtlCol="0" anchor="ctr"/>
           <a:lstStyle/>
           <a:p>
-            <a:pPr indent="0" marL="0">
+            <a:pPr marL="0" indent="0">
               <a:buNone/>
             </a:pPr>
             <a:r>
@@ -7417,13 +7663,20 @@
           </a:solidFill>
           <a:ln/>
           <a:effectLst>
-            <a:outerShdw sx="100000" sy="100000" kx="0" ky="0" algn="bl" rotWithShape="0" blurRad="63500" dist="25400" dir="8100000">
+            <a:outerShdw blurRad="63500" dist="25400" dir="8100000" algn="bl" rotWithShape="0">
               <a:srgbClr val="000000">
                 <a:alpha val="10000"/>
               </a:srgbClr>
             </a:outerShdw>
           </a:effectLst>
         </p:spPr>
+        <p:txBody>
+          <a:bodyPr/>
+          <a:lstStyle/>
+          <a:p>
+            <a:endParaRPr lang="en-US"/>
+          </a:p>
+        </p:txBody>
       </p:sp>
       <p:sp>
         <p:nvSpPr>
@@ -7444,6 +7697,13 @@
           </a:solidFill>
           <a:ln/>
         </p:spPr>
+        <p:txBody>
+          <a:bodyPr/>
+          <a:lstStyle/>
+          <a:p>
+            <a:endParaRPr lang="en-US"/>
+          </a:p>
+        </p:txBody>
       </p:sp>
       <p:sp>
         <p:nvSpPr>
@@ -7466,7 +7726,7 @@
           <a:bodyPr wrap="square" rtlCol="0" anchor="ctr"/>
           <a:lstStyle/>
           <a:p>
-            <a:pPr algn="ctr" indent="0" marL="0">
+            <a:pPr marL="0" indent="0" algn="ctr">
               <a:buNone/>
             </a:pPr>
             <a:r>
@@ -7505,7 +7765,7 @@
           <a:bodyPr wrap="square" rtlCol="0" anchor="ctr"/>
           <a:lstStyle/>
           <a:p>
-            <a:pPr algn="ctr" indent="0" marL="0">
+            <a:pPr marL="0" indent="0" algn="ctr">
               <a:buNone/>
             </a:pPr>
             <a:r>
@@ -7544,7 +7804,7 @@
           <a:bodyPr wrap="square" rtlCol="0" anchor="ctr"/>
           <a:lstStyle/>
           <a:p>
-            <a:pPr algn="ctr" indent="0" marL="0">
+            <a:pPr marL="0" indent="0" algn="ctr">
               <a:buNone/>
             </a:pPr>
             <a:r>
@@ -7581,13 +7841,20 @@
           </a:solidFill>
           <a:ln/>
           <a:effectLst>
-            <a:outerShdw sx="100000" sy="100000" kx="0" ky="0" algn="bl" rotWithShape="0" blurRad="63500" dist="25400" dir="8100000">
+            <a:outerShdw blurRad="63500" dist="25400" dir="8100000" algn="bl" rotWithShape="0">
               <a:srgbClr val="000000">
                 <a:alpha val="10000"/>
               </a:srgbClr>
             </a:outerShdw>
           </a:effectLst>
         </p:spPr>
+        <p:txBody>
+          <a:bodyPr/>
+          <a:lstStyle/>
+          <a:p>
+            <a:endParaRPr lang="en-US"/>
+          </a:p>
+        </p:txBody>
       </p:sp>
       <p:sp>
         <p:nvSpPr>
@@ -7608,6 +7875,13 @@
           </a:solidFill>
           <a:ln/>
         </p:spPr>
+        <p:txBody>
+          <a:bodyPr/>
+          <a:lstStyle/>
+          <a:p>
+            <a:endParaRPr lang="en-US"/>
+          </a:p>
+        </p:txBody>
       </p:sp>
       <p:sp>
         <p:nvSpPr>
@@ -7630,7 +7904,7 @@
           <a:bodyPr wrap="square" rtlCol="0" anchor="ctr"/>
           <a:lstStyle/>
           <a:p>
-            <a:pPr algn="ctr" indent="0" marL="0">
+            <a:pPr marL="0" indent="0" algn="ctr">
               <a:buNone/>
             </a:pPr>
             <a:r>
@@ -7669,7 +7943,7 @@
           <a:bodyPr wrap="square" rtlCol="0" anchor="ctr"/>
           <a:lstStyle/>
           <a:p>
-            <a:pPr algn="ctr" indent="0" marL="0">
+            <a:pPr marL="0" indent="0" algn="ctr">
               <a:buNone/>
             </a:pPr>
             <a:r>
@@ -7708,7 +7982,7 @@
           <a:bodyPr wrap="square" rtlCol="0" anchor="ctr"/>
           <a:lstStyle/>
           <a:p>
-            <a:pPr algn="ctr" indent="0" marL="0">
+            <a:pPr marL="0" indent="0" algn="ctr">
               <a:buNone/>
             </a:pPr>
             <a:r>
@@ -7745,13 +8019,20 @@
           </a:solidFill>
           <a:ln/>
           <a:effectLst>
-            <a:outerShdw sx="100000" sy="100000" kx="0" ky="0" algn="bl" rotWithShape="0" blurRad="63500" dist="25400" dir="8100000">
+            <a:outerShdw blurRad="63500" dist="25400" dir="8100000" algn="bl" rotWithShape="0">
               <a:srgbClr val="000000">
                 <a:alpha val="10000"/>
               </a:srgbClr>
             </a:outerShdw>
           </a:effectLst>
         </p:spPr>
+        <p:txBody>
+          <a:bodyPr/>
+          <a:lstStyle/>
+          <a:p>
+            <a:endParaRPr lang="en-US"/>
+          </a:p>
+        </p:txBody>
       </p:sp>
       <p:sp>
         <p:nvSpPr>
@@ -7772,6 +8053,13 @@
           </a:solidFill>
           <a:ln/>
         </p:spPr>
+        <p:txBody>
+          <a:bodyPr/>
+          <a:lstStyle/>
+          <a:p>
+            <a:endParaRPr lang="en-US"/>
+          </a:p>
+        </p:txBody>
       </p:sp>
       <p:sp>
         <p:nvSpPr>
@@ -7794,7 +8082,7 @@
           <a:bodyPr wrap="square" rtlCol="0" anchor="ctr"/>
           <a:lstStyle/>
           <a:p>
-            <a:pPr algn="ctr" indent="0" marL="0">
+            <a:pPr marL="0" indent="0" algn="ctr">
               <a:buNone/>
             </a:pPr>
             <a:r>
@@ -7833,7 +8121,7 @@
           <a:bodyPr wrap="square" rtlCol="0" anchor="ctr"/>
           <a:lstStyle/>
           <a:p>
-            <a:pPr algn="ctr" indent="0" marL="0">
+            <a:pPr marL="0" indent="0" algn="ctr">
               <a:buNone/>
             </a:pPr>
             <a:r>
@@ -7872,7 +8160,7 @@
           <a:bodyPr wrap="square" rtlCol="0" anchor="ctr"/>
           <a:lstStyle/>
           <a:p>
-            <a:pPr algn="ctr" indent="0" marL="0">
+            <a:pPr marL="0" indent="0" algn="ctr">
               <a:buNone/>
             </a:pPr>
             <a:r>
@@ -7909,13 +8197,20 @@
           </a:solidFill>
           <a:ln/>
           <a:effectLst>
-            <a:outerShdw sx="100000" sy="100000" kx="0" ky="0" algn="bl" rotWithShape="0" blurRad="63500" dist="25400" dir="8100000">
+            <a:outerShdw blurRad="63500" dist="25400" dir="8100000" algn="bl" rotWithShape="0">
               <a:srgbClr val="000000">
                 <a:alpha val="10000"/>
               </a:srgbClr>
             </a:outerShdw>
           </a:effectLst>
         </p:spPr>
+        <p:txBody>
+          <a:bodyPr/>
+          <a:lstStyle/>
+          <a:p>
+            <a:endParaRPr lang="en-US"/>
+          </a:p>
+        </p:txBody>
       </p:sp>
       <p:sp>
         <p:nvSpPr>
@@ -7936,6 +8231,13 @@
           </a:solidFill>
           <a:ln/>
         </p:spPr>
+        <p:txBody>
+          <a:bodyPr/>
+          <a:lstStyle/>
+          <a:p>
+            <a:endParaRPr lang="en-US"/>
+          </a:p>
+        </p:txBody>
       </p:sp>
       <p:sp>
         <p:nvSpPr>
@@ -7958,7 +8260,7 @@
           <a:bodyPr wrap="square" rtlCol="0" anchor="ctr"/>
           <a:lstStyle/>
           <a:p>
-            <a:pPr algn="ctr" indent="0" marL="0">
+            <a:pPr marL="0" indent="0" algn="ctr">
               <a:buNone/>
             </a:pPr>
             <a:r>
@@ -7997,7 +8299,7 @@
           <a:bodyPr wrap="square" rtlCol="0" anchor="ctr"/>
           <a:lstStyle/>
           <a:p>
-            <a:pPr algn="ctr" indent="0" marL="0">
+            <a:pPr marL="0" indent="0" algn="ctr">
               <a:buNone/>
             </a:pPr>
             <a:r>
@@ -8036,7 +8338,7 @@
           <a:bodyPr wrap="square" rtlCol="0" anchor="ctr"/>
           <a:lstStyle/>
           <a:p>
-            <a:pPr algn="ctr" indent="0" marL="0">
+            <a:pPr marL="0" indent="0" algn="ctr">
               <a:buNone/>
             </a:pPr>
             <a:r>
@@ -8063,7 +8365,7 @@
         <p:spPr>
           <a:xfrm>
             <a:off x="548640" y="3246120"/>
-            <a:ext cx="8046720" cy="1280160"/>
+            <a:ext cx="8046720" cy="1577340"/>
           </a:xfrm>
           <a:prstGeom prst="rect">
             <a:avLst/>
@@ -8073,13 +8375,20 @@
           </a:solidFill>
           <a:ln/>
           <a:effectLst>
-            <a:outerShdw sx="100000" sy="100000" kx="0" ky="0" algn="bl" rotWithShape="0" blurRad="63500" dist="25400" dir="8100000">
+            <a:outerShdw blurRad="63500" dist="25400" dir="8100000" algn="bl" rotWithShape="0">
               <a:srgbClr val="000000">
                 <a:alpha val="10000"/>
               </a:srgbClr>
             </a:outerShdw>
           </a:effectLst>
         </p:spPr>
+        <p:txBody>
+          <a:bodyPr/>
+          <a:lstStyle/>
+          <a:p>
+            <a:endParaRPr lang="en-US"/>
+          </a:p>
+        </p:txBody>
       </p:sp>
       <p:sp>
         <p:nvSpPr>
@@ -8102,7 +8411,7 @@
           <a:bodyPr wrap="square" rtlCol="0" anchor="ctr"/>
           <a:lstStyle/>
           <a:p>
-            <a:pPr indent="0" marL="0">
+            <a:pPr marL="0" indent="0">
               <a:buNone/>
             </a:pPr>
             <a:r>
@@ -8122,7 +8431,7 @@
       </p:sp>
       <p:graphicFrame>
         <p:nvGraphicFramePr>
-          <p:cNvPr id="5" name="Table 0"/>
+          <p:cNvPr id="27" name="Table 0"/>
           <p:cNvGraphicFramePr>
             <a:graphicFrameLocks noGrp="1"/>
           </p:cNvGraphicFramePr>
@@ -8136,17 +8445,41 @@
         </p:nvGraphicFramePr>
         <p:xfrm>
           <a:off x="731520" y="3657600"/>
-          <a:ext cx="7680960" cy="914400"/>
+          <a:ext cx="7680960" cy="1097280"/>
         </p:xfrm>
         <a:graphic>
           <a:graphicData uri="http://schemas.openxmlformats.org/drawingml/2006/table">
             <a:tbl>
               <a:tblPr/>
               <a:tblGrid>
-                <a:gridCol w="1645920"/>
-                <a:gridCol w="2011680"/>
-                <a:gridCol w="2011680"/>
-                <a:gridCol w="2011680"/>
+                <a:gridCol w="1645920">
+                  <a:extLst>
+                    <a:ext uri="{9D8B030D-6E8A-4147-A177-3AD203B41FA5}">
+                      <a16:colId xmlns:a16="http://schemas.microsoft.com/office/drawing/2014/main" val="20000"/>
+                    </a:ext>
+                  </a:extLst>
+                </a:gridCol>
+                <a:gridCol w="2011680">
+                  <a:extLst>
+                    <a:ext uri="{9D8B030D-6E8A-4147-A177-3AD203B41FA5}">
+                      <a16:colId xmlns:a16="http://schemas.microsoft.com/office/drawing/2014/main" val="20001"/>
+                    </a:ext>
+                  </a:extLst>
+                </a:gridCol>
+                <a:gridCol w="2011680">
+                  <a:extLst>
+                    <a:ext uri="{9D8B030D-6E8A-4147-A177-3AD203B41FA5}">
+                      <a16:colId xmlns:a16="http://schemas.microsoft.com/office/drawing/2014/main" val="20002"/>
+                    </a:ext>
+                  </a:extLst>
+                </a:gridCol>
+                <a:gridCol w="2011680">
+                  <a:extLst>
+                    <a:ext uri="{9D8B030D-6E8A-4147-A177-3AD203B41FA5}">
+                      <a16:colId xmlns:a16="http://schemas.microsoft.com/office/drawing/2014/main" val="20003"/>
+                    </a:ext>
+                  </a:extLst>
+                </a:gridCol>
               </a:tblGrid>
               <a:tr h="274320">
                 <a:tc>
@@ -8154,7 +8487,7 @@
                     <a:bodyPr/>
                     <a:lstStyle/>
                     <a:p>
-                      <a:pPr algn="ctr" indent="0" marL="0">
+                      <a:pPr marL="0" indent="0" algn="ctr">
                         <a:buNone/>
                       </a:pPr>
                       <a:endParaRPr lang="en-US" sz="1100" dirty="0">
@@ -8164,7 +8497,7 @@
                       </a:endParaRPr>
                     </a:p>
                   </a:txBody>
-                  <a:tcPr marL="91440" marR="91440" marT="45720" marB="45720" anchor="ctr">
+                  <a:tcPr anchor="ctr">
                     <a:lnL w="6350" cap="flat" cmpd="sng" algn="ctr">
                       <a:solidFill>
                         <a:srgbClr val="E2E8F0"/>
@@ -8208,7 +8541,7 @@
                     <a:bodyPr/>
                     <a:lstStyle/>
                     <a:p>
-                      <a:pPr algn="ctr" indent="0" marL="0">
+                      <a:pPr marL="0" indent="0" algn="ctr">
                         <a:buNone/>
                       </a:pPr>
                       <a:r>
@@ -8229,7 +8562,7 @@
                       </a:endParaRPr>
                     </a:p>
                   </a:txBody>
-                  <a:tcPr marL="91440" marR="91440" marT="45720" marB="45720" anchor="ctr">
+                  <a:tcPr anchor="ctr">
                     <a:lnL w="6350" cap="flat" cmpd="sng" algn="ctr">
                       <a:solidFill>
                         <a:srgbClr val="E2E8F0"/>
@@ -8273,7 +8606,7 @@
                     <a:bodyPr/>
                     <a:lstStyle/>
                     <a:p>
-                      <a:pPr algn="ctr" indent="0" marL="0">
+                      <a:pPr marL="0" indent="0" algn="ctr">
                         <a:buNone/>
                       </a:pPr>
                       <a:r>
@@ -8294,7 +8627,7 @@
                       </a:endParaRPr>
                     </a:p>
                   </a:txBody>
-                  <a:tcPr marL="91440" marR="91440" marT="45720" marB="45720" anchor="ctr">
+                  <a:tcPr anchor="ctr">
                     <a:lnL w="6350" cap="flat" cmpd="sng" algn="ctr">
                       <a:solidFill>
                         <a:srgbClr val="E2E8F0"/>
@@ -8338,7 +8671,7 @@
                     <a:bodyPr/>
                     <a:lstStyle/>
                     <a:p>
-                      <a:pPr algn="ctr" indent="0" marL="0">
+                      <a:pPr marL="0" indent="0" algn="ctr">
                         <a:buNone/>
                       </a:pPr>
                       <a:r>
@@ -8359,7 +8692,7 @@
                       </a:endParaRPr>
                     </a:p>
                   </a:txBody>
-                  <a:tcPr marL="91440" marR="91440" marT="45720" marB="45720" anchor="ctr">
+                  <a:tcPr anchor="ctr">
                     <a:lnL w="6350" cap="flat" cmpd="sng" algn="ctr">
                       <a:solidFill>
                         <a:srgbClr val="E2E8F0"/>
@@ -8398,6 +8731,11 @@
                     </a:lnB>
                   </a:tcPr>
                 </a:tc>
+                <a:extLst>
+                  <a:ext uri="{0D108BD9-81ED-4DB2-BD59-A6C34878D82A}">
+                    <a16:rowId xmlns:a16="http://schemas.microsoft.com/office/drawing/2014/main" val="10000"/>
+                  </a:ext>
+                </a:extLst>
               </a:tr>
               <a:tr h="274320">
                 <a:tc>
@@ -8405,7 +8743,7 @@
                     <a:bodyPr/>
                     <a:lstStyle/>
                     <a:p>
-                      <a:pPr algn="ctr" indent="0" marL="0">
+                      <a:pPr marL="0" indent="0" algn="ctr">
                         <a:buNone/>
                       </a:pPr>
                       <a:r>
@@ -8426,7 +8764,7 @@
                       </a:endParaRPr>
                     </a:p>
                   </a:txBody>
-                  <a:tcPr marL="91440" marR="91440" marT="45720" marB="45720" anchor="ctr">
+                  <a:tcPr anchor="ctr">
                     <a:lnL w="6350" cap="flat" cmpd="sng" algn="ctr">
                       <a:solidFill>
                         <a:srgbClr val="E2E8F0"/>
@@ -8470,7 +8808,7 @@
                     <a:bodyPr/>
                     <a:lstStyle/>
                     <a:p>
-                      <a:pPr algn="ctr" indent="0" marL="0">
+                      <a:pPr marL="0" indent="0" algn="ctr">
                         <a:buNone/>
                       </a:pPr>
                       <a:r>
@@ -8491,7 +8829,7 @@
                       </a:endParaRPr>
                     </a:p>
                   </a:txBody>
-                  <a:tcPr marL="91440" marR="91440" marT="45720" marB="45720" anchor="ctr">
+                  <a:tcPr anchor="ctr">
                     <a:lnL w="6350" cap="flat" cmpd="sng" algn="ctr">
                       <a:solidFill>
                         <a:srgbClr val="E2E8F0"/>
@@ -8535,7 +8873,7 @@
                     <a:bodyPr/>
                     <a:lstStyle/>
                     <a:p>
-                      <a:pPr algn="ctr" indent="0" marL="0">
+                      <a:pPr marL="0" indent="0" algn="ctr">
                         <a:buNone/>
                       </a:pPr>
                       <a:r>
@@ -8556,7 +8894,7 @@
                       </a:endParaRPr>
                     </a:p>
                   </a:txBody>
-                  <a:tcPr marL="91440" marR="91440" marT="45720" marB="45720" anchor="ctr">
+                  <a:tcPr anchor="ctr">
                     <a:lnL w="6350" cap="flat" cmpd="sng" algn="ctr">
                       <a:solidFill>
                         <a:srgbClr val="E2E8F0"/>
@@ -8600,7 +8938,7 @@
                     <a:bodyPr/>
                     <a:lstStyle/>
                     <a:p>
-                      <a:pPr algn="ctr" indent="0" marL="0">
+                      <a:pPr marL="0" indent="0" algn="ctr">
                         <a:buNone/>
                       </a:pPr>
                       <a:r>
@@ -8621,7 +8959,7 @@
                       </a:endParaRPr>
                     </a:p>
                   </a:txBody>
-                  <a:tcPr marL="91440" marR="91440" marT="45720" marB="45720" anchor="ctr">
+                  <a:tcPr anchor="ctr">
                     <a:lnL w="6350" cap="flat" cmpd="sng" algn="ctr">
                       <a:solidFill>
                         <a:srgbClr val="E2E8F0"/>
@@ -8660,6 +8998,11 @@
                     </a:lnB>
                   </a:tcPr>
                 </a:tc>
+                <a:extLst>
+                  <a:ext uri="{0D108BD9-81ED-4DB2-BD59-A6C34878D82A}">
+                    <a16:rowId xmlns:a16="http://schemas.microsoft.com/office/drawing/2014/main" val="10001"/>
+                  </a:ext>
+                </a:extLst>
               </a:tr>
               <a:tr h="274320">
                 <a:tc>
@@ -8667,7 +9010,7 @@
                     <a:bodyPr/>
                     <a:lstStyle/>
                     <a:p>
-                      <a:pPr algn="ctr" indent="0" marL="0">
+                      <a:pPr marL="0" indent="0" algn="ctr">
                         <a:buNone/>
                       </a:pPr>
                       <a:r>
@@ -8688,7 +9031,7 @@
                       </a:endParaRPr>
                     </a:p>
                   </a:txBody>
-                  <a:tcPr marL="91440" marR="91440" marT="45720" marB="45720" anchor="ctr">
+                  <a:tcPr anchor="ctr">
                     <a:lnL w="6350" cap="flat" cmpd="sng" algn="ctr">
                       <a:solidFill>
                         <a:srgbClr val="E2E8F0"/>
@@ -8732,7 +9075,7 @@
                     <a:bodyPr/>
                     <a:lstStyle/>
                     <a:p>
-                      <a:pPr algn="ctr" indent="0" marL="0">
+                      <a:pPr marL="0" indent="0" algn="ctr">
                         <a:buNone/>
                       </a:pPr>
                       <a:r>
@@ -8753,7 +9096,7 @@
                       </a:endParaRPr>
                     </a:p>
                   </a:txBody>
-                  <a:tcPr marL="91440" marR="91440" marT="45720" marB="45720" anchor="ctr">
+                  <a:tcPr anchor="ctr">
                     <a:lnL w="6350" cap="flat" cmpd="sng" algn="ctr">
                       <a:solidFill>
                         <a:srgbClr val="E2E8F0"/>
@@ -8797,7 +9140,7 @@
                     <a:bodyPr/>
                     <a:lstStyle/>
                     <a:p>
-                      <a:pPr algn="ctr" indent="0" marL="0">
+                      <a:pPr marL="0" indent="0" algn="ctr">
                         <a:buNone/>
                       </a:pPr>
                       <a:r>
@@ -8818,7 +9161,7 @@
                       </a:endParaRPr>
                     </a:p>
                   </a:txBody>
-                  <a:tcPr marL="91440" marR="91440" marT="45720" marB="45720" anchor="ctr">
+                  <a:tcPr anchor="ctr">
                     <a:lnL w="6350" cap="flat" cmpd="sng" algn="ctr">
                       <a:solidFill>
                         <a:srgbClr val="E2E8F0"/>
@@ -8862,7 +9205,7 @@
                     <a:bodyPr/>
                     <a:lstStyle/>
                     <a:p>
-                      <a:pPr algn="ctr" indent="0" marL="0">
+                      <a:pPr marL="0" indent="0" algn="ctr">
                         <a:buNone/>
                       </a:pPr>
                       <a:r>
@@ -8883,7 +9226,7 @@
                       </a:endParaRPr>
                     </a:p>
                   </a:txBody>
-                  <a:tcPr marL="91440" marR="91440" marT="45720" marB="45720" anchor="ctr">
+                  <a:tcPr anchor="ctr">
                     <a:lnL w="6350" cap="flat" cmpd="sng" algn="ctr">
                       <a:solidFill>
                         <a:srgbClr val="E2E8F0"/>
@@ -8922,6 +9265,11 @@
                     </a:lnB>
                   </a:tcPr>
                 </a:tc>
+                <a:extLst>
+                  <a:ext uri="{0D108BD9-81ED-4DB2-BD59-A6C34878D82A}">
+                    <a16:rowId xmlns:a16="http://schemas.microsoft.com/office/drawing/2014/main" val="10002"/>
+                  </a:ext>
+                </a:extLst>
               </a:tr>
               <a:tr h="274320">
                 <a:tc>
@@ -8929,7 +9277,7 @@
                     <a:bodyPr/>
                     <a:lstStyle/>
                     <a:p>
-                      <a:pPr algn="ctr" indent="0" marL="0">
+                      <a:pPr marL="0" indent="0" algn="ctr">
                         <a:buNone/>
                       </a:pPr>
                       <a:r>
@@ -8950,7 +9298,7 @@
                       </a:endParaRPr>
                     </a:p>
                   </a:txBody>
-                  <a:tcPr marL="91440" marR="91440" marT="45720" marB="45720" anchor="ctr">
+                  <a:tcPr anchor="ctr">
                     <a:lnL w="6350" cap="flat" cmpd="sng" algn="ctr">
                       <a:solidFill>
                         <a:srgbClr val="E2E8F0"/>
@@ -8994,7 +9342,7 @@
                     <a:bodyPr/>
                     <a:lstStyle/>
                     <a:p>
-                      <a:pPr algn="ctr" indent="0" marL="0">
+                      <a:pPr marL="0" indent="0" algn="ctr">
                         <a:buNone/>
                       </a:pPr>
                       <a:r>
@@ -9015,7 +9363,7 @@
                       </a:endParaRPr>
                     </a:p>
                   </a:txBody>
-                  <a:tcPr marL="91440" marR="91440" marT="45720" marB="45720" anchor="ctr">
+                  <a:tcPr anchor="ctr">
                     <a:lnL w="6350" cap="flat" cmpd="sng" algn="ctr">
                       <a:solidFill>
                         <a:srgbClr val="E2E8F0"/>
@@ -9059,7 +9407,7 @@
                     <a:bodyPr/>
                     <a:lstStyle/>
                     <a:p>
-                      <a:pPr algn="ctr" indent="0" marL="0">
+                      <a:pPr marL="0" indent="0" algn="ctr">
                         <a:buNone/>
                       </a:pPr>
                       <a:r>
@@ -9080,7 +9428,7 @@
                       </a:endParaRPr>
                     </a:p>
                   </a:txBody>
-                  <a:tcPr marL="91440" marR="91440" marT="45720" marB="45720" anchor="ctr">
+                  <a:tcPr anchor="ctr">
                     <a:lnL w="6350" cap="flat" cmpd="sng" algn="ctr">
                       <a:solidFill>
                         <a:srgbClr val="E2E8F0"/>
@@ -9124,7 +9472,7 @@
                     <a:bodyPr/>
                     <a:lstStyle/>
                     <a:p>
-                      <a:pPr algn="ctr" indent="0" marL="0">
+                      <a:pPr marL="0" indent="0" algn="ctr">
                         <a:buNone/>
                       </a:pPr>
                       <a:r>
@@ -9145,7 +9493,7 @@
                       </a:endParaRPr>
                     </a:p>
                   </a:txBody>
-                  <a:tcPr marL="91440" marR="91440" marT="45720" marB="45720" anchor="ctr">
+                  <a:tcPr anchor="ctr">
                     <a:lnL w="6350" cap="flat" cmpd="sng" algn="ctr">
                       <a:solidFill>
                         <a:srgbClr val="E2E8F0"/>
@@ -9184,6 +9532,11 @@
                     </a:lnB>
                   </a:tcPr>
                 </a:tc>
+                <a:extLst>
+                  <a:ext uri="{0D108BD9-81ED-4DB2-BD59-A6C34878D82A}">
+                    <a16:rowId xmlns:a16="http://schemas.microsoft.com/office/drawing/2014/main" val="10003"/>
+                  </a:ext>
+                </a:extLst>
               </a:tr>
             </a:tbl>
           </a:graphicData>
@@ -9205,6 +9558,7 @@
         <a:solidFill>
           <a:srgbClr val="F0F4F8"/>
         </a:solidFill>
+        <a:effectLst/>
       </p:bgPr>
     </p:bg>
     <p:spTree>
@@ -9240,6 +9594,13 @@
           </a:solidFill>
           <a:ln/>
         </p:spPr>
+        <p:txBody>
+          <a:bodyPr/>
+          <a:lstStyle/>
+          <a:p>
+            <a:endParaRPr lang="en-US"/>
+          </a:p>
+        </p:txBody>
       </p:sp>
       <p:sp>
         <p:nvSpPr>
@@ -9262,11 +9623,11 @@
           <a:bodyPr wrap="square" rtlCol="0" anchor="ctr"/>
           <a:lstStyle/>
           <a:p>
-            <a:pPr indent="0" marL="0">
-              <a:buNone/>
-            </a:pPr>
-            <a:r>
-              <a:rPr lang="en-US" sz="1200" b="1" spc="200" kern="0" dirty="0">
+            <a:pPr marL="0" indent="0">
+              <a:buNone/>
+            </a:pPr>
+            <a:r>
+              <a:rPr lang="en-US" sz="1200" b="1" kern="0" spc="200" dirty="0">
                 <a:solidFill>
                   <a:srgbClr val="00D4AA"/>
                 </a:solidFill>
@@ -9299,13 +9660,20 @@
           </a:solidFill>
           <a:ln/>
           <a:effectLst>
-            <a:outerShdw sx="100000" sy="100000" kx="0" ky="0" algn="bl" rotWithShape="0" blurRad="63500" dist="25400" dir="8100000">
+            <a:outerShdw blurRad="63500" dist="25400" dir="8100000" algn="bl" rotWithShape="0">
               <a:srgbClr val="000000">
                 <a:alpha val="10000"/>
               </a:srgbClr>
             </a:outerShdw>
           </a:effectLst>
         </p:spPr>
+        <p:txBody>
+          <a:bodyPr/>
+          <a:lstStyle/>
+          <a:p>
+            <a:endParaRPr lang="en-US"/>
+          </a:p>
+        </p:txBody>
       </p:sp>
       <p:sp>
         <p:nvSpPr>
@@ -9326,6 +9694,13 @@
           </a:solidFill>
           <a:ln/>
         </p:spPr>
+        <p:txBody>
+          <a:bodyPr/>
+          <a:lstStyle/>
+          <a:p>
+            <a:endParaRPr lang="en-US"/>
+          </a:p>
+        </p:txBody>
       </p:sp>
       <p:sp>
         <p:nvSpPr>
@@ -9348,7 +9723,7 @@
           <a:bodyPr wrap="square" rtlCol="0" anchor="ctr"/>
           <a:lstStyle/>
           <a:p>
-            <a:pPr algn="ctr" indent="0" marL="0">
+            <a:pPr marL="0" indent="0" algn="ctr">
               <a:buNone/>
             </a:pPr>
             <a:r>
@@ -9387,7 +9762,7 @@
           <a:bodyPr wrap="square" rtlCol="0" anchor="ctr"/>
           <a:lstStyle/>
           <a:p>
-            <a:pPr algn="ctr" indent="0" marL="0">
+            <a:pPr marL="0" indent="0" algn="ctr">
               <a:buNone/>
             </a:pPr>
             <a:r>
@@ -9426,7 +9801,7 @@
           <a:bodyPr wrap="square" rtlCol="0" anchor="ctr"/>
           <a:lstStyle/>
           <a:p>
-            <a:pPr algn="ctr" indent="0" marL="0">
+            <a:pPr marL="0" indent="0" algn="ctr">
               <a:buNone/>
             </a:pPr>
             <a:r>
@@ -9465,7 +9840,7 @@
           <a:bodyPr wrap="square" rtlCol="0" anchor="ctr"/>
           <a:lstStyle/>
           <a:p>
-            <a:pPr algn="ctr" indent="0" marL="0">
+            <a:pPr marL="0" indent="0" algn="ctr">
               <a:buNone/>
             </a:pPr>
             <a:r>
@@ -9505,6 +9880,13 @@
             <a:prstDash val="solid"/>
           </a:ln>
         </p:spPr>
+        <p:txBody>
+          <a:bodyPr/>
+          <a:lstStyle/>
+          <a:p>
+            <a:endParaRPr lang="en-US"/>
+          </a:p>
+        </p:txBody>
       </p:sp>
       <p:sp>
         <p:nvSpPr>
@@ -9527,7 +9909,7 @@
           <a:bodyPr wrap="square" rtlCol="0" anchor="ctr"/>
           <a:lstStyle/>
           <a:p>
-            <a:pPr indent="0" marL="0">
+            <a:pPr marL="0" indent="0">
               <a:buNone/>
             </a:pPr>
             <a:r>
@@ -9566,7 +9948,7 @@
           <a:bodyPr wrap="square" rtlCol="0" anchor="ctr"/>
           <a:lstStyle/>
           <a:p>
-            <a:pPr indent="0" marL="0">
+            <a:pPr marL="0" indent="0">
               <a:buNone/>
             </a:pPr>
             <a:r>
@@ -9605,7 +9987,7 @@
           <a:bodyPr wrap="square" rtlCol="0" anchor="ctr"/>
           <a:lstStyle/>
           <a:p>
-            <a:pPr indent="0" marL="0">
+            <a:pPr marL="0" indent="0">
               <a:buNone/>
             </a:pPr>
             <a:r>
@@ -9644,7 +10026,7 @@
           <a:bodyPr wrap="square" rtlCol="0" anchor="ctr"/>
           <a:lstStyle/>
           <a:p>
-            <a:pPr indent="0" marL="0">
+            <a:pPr marL="0" indent="0">
               <a:buNone/>
             </a:pPr>
             <a:r>
@@ -9681,13 +10063,20 @@
           </a:solidFill>
           <a:ln/>
           <a:effectLst>
-            <a:outerShdw sx="100000" sy="100000" kx="0" ky="0" algn="bl" rotWithShape="0" blurRad="63500" dist="25400" dir="8100000">
+            <a:outerShdw blurRad="63500" dist="25400" dir="8100000" algn="bl" rotWithShape="0">
               <a:srgbClr val="000000">
                 <a:alpha val="10000"/>
               </a:srgbClr>
             </a:outerShdw>
           </a:effectLst>
         </p:spPr>
+        <p:txBody>
+          <a:bodyPr/>
+          <a:lstStyle/>
+          <a:p>
+            <a:endParaRPr lang="en-US"/>
+          </a:p>
+        </p:txBody>
       </p:sp>
       <p:sp>
         <p:nvSpPr>
@@ -9708,6 +10097,13 @@
           </a:solidFill>
           <a:ln/>
         </p:spPr>
+        <p:txBody>
+          <a:bodyPr/>
+          <a:lstStyle/>
+          <a:p>
+            <a:endParaRPr lang="en-US"/>
+          </a:p>
+        </p:txBody>
       </p:sp>
       <p:sp>
         <p:nvSpPr>
@@ -9730,7 +10126,7 @@
           <a:bodyPr wrap="square" rtlCol="0" anchor="ctr"/>
           <a:lstStyle/>
           <a:p>
-            <a:pPr algn="ctr" indent="0" marL="0">
+            <a:pPr marL="0" indent="0" algn="ctr">
               <a:buNone/>
             </a:pPr>
             <a:r>
@@ -9769,7 +10165,7 @@
           <a:bodyPr wrap="square" rtlCol="0" anchor="ctr"/>
           <a:lstStyle/>
           <a:p>
-            <a:pPr algn="ctr" indent="0" marL="0">
+            <a:pPr marL="0" indent="0" algn="ctr">
               <a:buNone/>
             </a:pPr>
             <a:r>
@@ -9808,7 +10204,7 @@
           <a:bodyPr wrap="square" rtlCol="0" anchor="ctr"/>
           <a:lstStyle/>
           <a:p>
-            <a:pPr algn="ctr" indent="0" marL="0">
+            <a:pPr marL="0" indent="0" algn="ctr">
               <a:buNone/>
             </a:pPr>
             <a:r>
@@ -9847,7 +10243,7 @@
           <a:bodyPr wrap="square" rtlCol="0" anchor="ctr"/>
           <a:lstStyle/>
           <a:p>
-            <a:pPr algn="ctr" indent="0" marL="0">
+            <a:pPr marL="0" indent="0" algn="ctr">
               <a:buNone/>
             </a:pPr>
             <a:r>
@@ -9887,6 +10283,13 @@
             <a:prstDash val="solid"/>
           </a:ln>
         </p:spPr>
+        <p:txBody>
+          <a:bodyPr/>
+          <a:lstStyle/>
+          <a:p>
+            <a:endParaRPr lang="en-US"/>
+          </a:p>
+        </p:txBody>
       </p:sp>
       <p:sp>
         <p:nvSpPr>
@@ -9909,7 +10312,7 @@
           <a:bodyPr wrap="square" rtlCol="0" anchor="ctr"/>
           <a:lstStyle/>
           <a:p>
-            <a:pPr indent="0" marL="0">
+            <a:pPr marL="0" indent="0">
               <a:buNone/>
             </a:pPr>
             <a:r>
@@ -9948,7 +10351,7 @@
           <a:bodyPr wrap="square" rtlCol="0" anchor="ctr"/>
           <a:lstStyle/>
           <a:p>
-            <a:pPr indent="0" marL="0">
+            <a:pPr marL="0" indent="0">
               <a:buNone/>
             </a:pPr>
             <a:r>
@@ -9987,7 +10390,7 @@
           <a:bodyPr wrap="square" rtlCol="0" anchor="ctr"/>
           <a:lstStyle/>
           <a:p>
-            <a:pPr indent="0" marL="0">
+            <a:pPr marL="0" indent="0">
               <a:buNone/>
             </a:pPr>
             <a:r>
@@ -10026,7 +10429,7 @@
           <a:bodyPr wrap="square" rtlCol="0" anchor="ctr"/>
           <a:lstStyle/>
           <a:p>
-            <a:pPr indent="0" marL="0">
+            <a:pPr marL="0" indent="0">
               <a:buNone/>
             </a:pPr>
             <a:r>
@@ -10063,13 +10466,20 @@
           </a:solidFill>
           <a:ln/>
           <a:effectLst>
-            <a:outerShdw sx="100000" sy="100000" kx="0" ky="0" algn="bl" rotWithShape="0" blurRad="63500" dist="25400" dir="8100000">
+            <a:outerShdw blurRad="63500" dist="25400" dir="8100000" algn="bl" rotWithShape="0">
               <a:srgbClr val="000000">
                 <a:alpha val="10000"/>
               </a:srgbClr>
             </a:outerShdw>
           </a:effectLst>
         </p:spPr>
+        <p:txBody>
+          <a:bodyPr/>
+          <a:lstStyle/>
+          <a:p>
+            <a:endParaRPr lang="en-US"/>
+          </a:p>
+        </p:txBody>
       </p:sp>
       <p:sp>
         <p:nvSpPr>
@@ -10090,6 +10500,13 @@
           </a:solidFill>
           <a:ln/>
         </p:spPr>
+        <p:txBody>
+          <a:bodyPr/>
+          <a:lstStyle/>
+          <a:p>
+            <a:endParaRPr lang="en-US"/>
+          </a:p>
+        </p:txBody>
       </p:sp>
       <p:sp>
         <p:nvSpPr>
@@ -10112,7 +10529,7 @@
           <a:bodyPr wrap="square" rtlCol="0" anchor="ctr"/>
           <a:lstStyle/>
           <a:p>
-            <a:pPr algn="ctr" indent="0" marL="0">
+            <a:pPr marL="0" indent="0" algn="ctr">
               <a:buNone/>
             </a:pPr>
             <a:r>
@@ -10151,7 +10568,7 @@
           <a:bodyPr wrap="square" rtlCol="0" anchor="ctr"/>
           <a:lstStyle/>
           <a:p>
-            <a:pPr algn="ctr" indent="0" marL="0">
+            <a:pPr marL="0" indent="0" algn="ctr">
               <a:buNone/>
             </a:pPr>
             <a:r>
@@ -10190,7 +10607,7 @@
           <a:bodyPr wrap="square" rtlCol="0" anchor="ctr"/>
           <a:lstStyle/>
           <a:p>
-            <a:pPr algn="ctr" indent="0" marL="0">
+            <a:pPr marL="0" indent="0" algn="ctr">
               <a:buNone/>
             </a:pPr>
             <a:r>
@@ -10229,7 +10646,7 @@
           <a:bodyPr wrap="square" rtlCol="0" anchor="ctr"/>
           <a:lstStyle/>
           <a:p>
-            <a:pPr algn="ctr" indent="0" marL="0">
+            <a:pPr marL="0" indent="0" algn="ctr">
               <a:buNone/>
             </a:pPr>
             <a:r>
@@ -10269,6 +10686,13 @@
             <a:prstDash val="solid"/>
           </a:ln>
         </p:spPr>
+        <p:txBody>
+          <a:bodyPr/>
+          <a:lstStyle/>
+          <a:p>
+            <a:endParaRPr lang="en-US"/>
+          </a:p>
+        </p:txBody>
       </p:sp>
       <p:sp>
         <p:nvSpPr>
@@ -10291,7 +10715,7 @@
           <a:bodyPr wrap="square" rtlCol="0" anchor="ctr"/>
           <a:lstStyle/>
           <a:p>
-            <a:pPr indent="0" marL="0">
+            <a:pPr marL="0" indent="0">
               <a:buNone/>
             </a:pPr>
             <a:r>
@@ -10330,7 +10754,7 @@
           <a:bodyPr wrap="square" rtlCol="0" anchor="ctr"/>
           <a:lstStyle/>
           <a:p>
-            <a:pPr indent="0" marL="0">
+            <a:pPr marL="0" indent="0">
               <a:buNone/>
             </a:pPr>
             <a:r>
@@ -10369,7 +10793,7 @@
           <a:bodyPr wrap="square" rtlCol="0" anchor="ctr"/>
           <a:lstStyle/>
           <a:p>
-            <a:pPr indent="0" marL="0">
+            <a:pPr marL="0" indent="0">
               <a:buNone/>
             </a:pPr>
             <a:r>
@@ -10408,7 +10832,7 @@
           <a:bodyPr wrap="square" rtlCol="0" anchor="ctr"/>
           <a:lstStyle/>
           <a:p>
-            <a:pPr indent="0" marL="0">
+            <a:pPr marL="0" indent="0">
               <a:buNone/>
             </a:pPr>
             <a:r>
@@ -10445,6 +10869,13 @@
           </a:solidFill>
           <a:ln/>
         </p:spPr>
+        <p:txBody>
+          <a:bodyPr/>
+          <a:lstStyle/>
+          <a:p>
+            <a:endParaRPr lang="en-US"/>
+          </a:p>
+        </p:txBody>
       </p:sp>
       <p:sp>
         <p:nvSpPr>
@@ -10467,7 +10898,7 @@
           <a:bodyPr wrap="square" rtlCol="0" anchor="ctr"/>
           <a:lstStyle/>
           <a:p>
-            <a:pPr indent="0" marL="0">
+            <a:pPr marL="0" indent="0">
               <a:buNone/>
             </a:pPr>
             <a:r>
@@ -10501,6 +10932,7 @@
         <a:solidFill>
           <a:srgbClr val="F0F4F8"/>
         </a:solidFill>
+        <a:effectLst/>
       </p:bgPr>
     </p:bg>
     <p:spTree>
@@ -10536,6 +10968,13 @@
           </a:solidFill>
           <a:ln/>
         </p:spPr>
+        <p:txBody>
+          <a:bodyPr/>
+          <a:lstStyle/>
+          <a:p>
+            <a:endParaRPr lang="en-US"/>
+          </a:p>
+        </p:txBody>
       </p:sp>
       <p:sp>
         <p:nvSpPr>
@@ -10558,11 +10997,11 @@
           <a:bodyPr wrap="square" rtlCol="0" anchor="ctr"/>
           <a:lstStyle/>
           <a:p>
-            <a:pPr indent="0" marL="0">
-              <a:buNone/>
-            </a:pPr>
-            <a:r>
-              <a:rPr lang="en-US" sz="1200" b="1" spc="200" kern="0" dirty="0">
+            <a:pPr marL="0" indent="0">
+              <a:buNone/>
+            </a:pPr>
+            <a:r>
+              <a:rPr lang="en-US" sz="1200" b="1" kern="0" spc="200" dirty="0">
                 <a:solidFill>
                   <a:srgbClr val="00D4AA"/>
                 </a:solidFill>
@@ -10595,13 +11034,20 @@
           </a:solidFill>
           <a:ln/>
           <a:effectLst>
-            <a:outerShdw sx="100000" sy="100000" kx="0" ky="0" algn="bl" rotWithShape="0" blurRad="63500" dist="25400" dir="8100000">
+            <a:outerShdw blurRad="63500" dist="25400" dir="8100000" algn="bl" rotWithShape="0">
               <a:srgbClr val="000000">
                 <a:alpha val="10000"/>
               </a:srgbClr>
             </a:outerShdw>
           </a:effectLst>
         </p:spPr>
+        <p:txBody>
+          <a:bodyPr/>
+          <a:lstStyle/>
+          <a:p>
+            <a:endParaRPr lang="en-US"/>
+          </a:p>
+        </p:txBody>
       </p:sp>
       <p:sp>
         <p:nvSpPr>
@@ -10622,6 +11068,13 @@
           </a:solidFill>
           <a:ln/>
         </p:spPr>
+        <p:txBody>
+          <a:bodyPr/>
+          <a:lstStyle/>
+          <a:p>
+            <a:endParaRPr lang="en-US"/>
+          </a:p>
+        </p:txBody>
       </p:sp>
       <p:sp>
         <p:nvSpPr>
@@ -10644,7 +11097,7 @@
           <a:bodyPr wrap="square" rtlCol="0" anchor="ctr"/>
           <a:lstStyle/>
           <a:p>
-            <a:pPr indent="0" marL="0">
+            <a:pPr marL="0" indent="0">
               <a:buNone/>
             </a:pPr>
             <a:r>
@@ -10683,7 +11136,7 @@
           <a:bodyPr wrap="square" rtlCol="0" anchor="ctr"/>
           <a:lstStyle/>
           <a:p>
-            <a:pPr indent="0" marL="0">
+            <a:pPr marL="0" indent="0">
               <a:buNone/>
             </a:pPr>
             <a:r>
@@ -10722,7 +11175,7 @@
           <a:bodyPr wrap="square" rtlCol="0" anchor="ctr"/>
           <a:lstStyle/>
           <a:p>
-            <a:pPr indent="0" marL="0">
+            <a:pPr marL="0" indent="0">
               <a:buNone/>
             </a:pPr>
             <a:r>
@@ -10761,7 +11214,7 @@
           <a:bodyPr wrap="square" rtlCol="0" anchor="ctr"/>
           <a:lstStyle/>
           <a:p>
-            <a:pPr indent="0" marL="0">
+            <a:pPr marL="0" indent="0">
               <a:buNone/>
             </a:pPr>
             <a:r>
@@ -10800,7 +11253,7 @@
           <a:bodyPr wrap="square" rtlCol="0" anchor="ctr"/>
           <a:lstStyle/>
           <a:p>
-            <a:pPr indent="0" marL="0">
+            <a:pPr marL="0" indent="0">
               <a:buNone/>
             </a:pPr>
             <a:r>
@@ -10839,7 +11292,7 @@
           <a:bodyPr wrap="square" rtlCol="0" anchor="ctr"/>
           <a:lstStyle/>
           <a:p>
-            <a:pPr indent="0" marL="0">
+            <a:pPr marL="0" indent="0">
               <a:buNone/>
             </a:pPr>
             <a:r>
@@ -10876,13 +11329,20 @@
           </a:solidFill>
           <a:ln/>
           <a:effectLst>
-            <a:outerShdw sx="100000" sy="100000" kx="0" ky="0" algn="bl" rotWithShape="0" blurRad="63500" dist="25400" dir="8100000">
+            <a:outerShdw blurRad="63500" dist="25400" dir="8100000" algn="bl" rotWithShape="0">
               <a:srgbClr val="000000">
                 <a:alpha val="10000"/>
               </a:srgbClr>
             </a:outerShdw>
           </a:effectLst>
         </p:spPr>
+        <p:txBody>
+          <a:bodyPr/>
+          <a:lstStyle/>
+          <a:p>
+            <a:endParaRPr lang="en-US"/>
+          </a:p>
+        </p:txBody>
       </p:sp>
       <p:sp>
         <p:nvSpPr>
@@ -10903,6 +11363,13 @@
           </a:solidFill>
           <a:ln/>
         </p:spPr>
+        <p:txBody>
+          <a:bodyPr/>
+          <a:lstStyle/>
+          <a:p>
+            <a:endParaRPr lang="en-US"/>
+          </a:p>
+        </p:txBody>
       </p:sp>
       <p:sp>
         <p:nvSpPr>
@@ -10925,7 +11392,7 @@
           <a:bodyPr wrap="square" rtlCol="0" anchor="ctr"/>
           <a:lstStyle/>
           <a:p>
-            <a:pPr indent="0" marL="0">
+            <a:pPr marL="0" indent="0">
               <a:buNone/>
             </a:pPr>
             <a:r>
@@ -10964,7 +11431,7 @@
           <a:bodyPr wrap="square" rtlCol="0" anchor="ctr"/>
           <a:lstStyle/>
           <a:p>
-            <a:pPr indent="0" marL="0">
+            <a:pPr marL="0" indent="0">
               <a:buNone/>
             </a:pPr>
             <a:r>
@@ -11003,7 +11470,7 @@
           <a:bodyPr wrap="square" rtlCol="0" anchor="ctr"/>
           <a:lstStyle/>
           <a:p>
-            <a:pPr indent="0" marL="0">
+            <a:pPr marL="0" indent="0">
               <a:buNone/>
             </a:pPr>
             <a:r>
@@ -11042,6 +11509,13 @@
           </a:solidFill>
           <a:ln/>
         </p:spPr>
+        <p:txBody>
+          <a:bodyPr/>
+          <a:lstStyle/>
+          <a:p>
+            <a:endParaRPr lang="en-US"/>
+          </a:p>
+        </p:txBody>
       </p:sp>
       <p:sp>
         <p:nvSpPr>
@@ -11064,7 +11538,7 @@
           <a:bodyPr wrap="square" rtlCol="0" anchor="ctr"/>
           <a:lstStyle/>
           <a:p>
-            <a:pPr algn="ctr" indent="0" marL="0">
+            <a:pPr marL="0" indent="0" algn="ctr">
               <a:buNone/>
             </a:pPr>
             <a:r>
@@ -11101,13 +11575,20 @@
           </a:solidFill>
           <a:ln/>
           <a:effectLst>
-            <a:outerShdw sx="100000" sy="100000" kx="0" ky="0" algn="bl" rotWithShape="0" blurRad="63500" dist="25400" dir="8100000">
+            <a:outerShdw blurRad="63500" dist="25400" dir="8100000" algn="bl" rotWithShape="0">
               <a:srgbClr val="000000">
                 <a:alpha val="10000"/>
               </a:srgbClr>
             </a:outerShdw>
           </a:effectLst>
         </p:spPr>
+        <p:txBody>
+          <a:bodyPr/>
+          <a:lstStyle/>
+          <a:p>
+            <a:endParaRPr lang="en-US"/>
+          </a:p>
+        </p:txBody>
       </p:sp>
       <p:sp>
         <p:nvSpPr>
@@ -11128,6 +11609,13 @@
           </a:solidFill>
           <a:ln/>
         </p:spPr>
+        <p:txBody>
+          <a:bodyPr/>
+          <a:lstStyle/>
+          <a:p>
+            <a:endParaRPr lang="en-US"/>
+          </a:p>
+        </p:txBody>
       </p:sp>
       <p:sp>
         <p:nvSpPr>
@@ -11150,7 +11638,7 @@
           <a:bodyPr wrap="square" rtlCol="0" anchor="ctr"/>
           <a:lstStyle/>
           <a:p>
-            <a:pPr indent="0" marL="0">
+            <a:pPr marL="0" indent="0">
               <a:buNone/>
             </a:pPr>
             <a:r>
@@ -11189,7 +11677,7 @@
           <a:bodyPr wrap="square" rtlCol="0" anchor="ctr"/>
           <a:lstStyle/>
           <a:p>
-            <a:pPr indent="0" marL="0">
+            <a:pPr marL="0" indent="0">
               <a:buNone/>
             </a:pPr>
             <a:r>
@@ -11228,7 +11716,7 @@
           <a:bodyPr wrap="square" rtlCol="0" anchor="ctr"/>
           <a:lstStyle/>
           <a:p>
-            <a:pPr indent="0" marL="0">
+            <a:pPr marL="0" indent="0">
               <a:buNone/>
             </a:pPr>
             <a:r>
@@ -11265,6 +11753,13 @@
           </a:solidFill>
           <a:ln/>
         </p:spPr>
+        <p:txBody>
+          <a:bodyPr/>
+          <a:lstStyle/>
+          <a:p>
+            <a:endParaRPr lang="en-US"/>
+          </a:p>
+        </p:txBody>
       </p:sp>
       <p:sp>
         <p:nvSpPr>
@@ -11287,7 +11782,7 @@
           <a:bodyPr wrap="square" rtlCol="0" anchor="ctr"/>
           <a:lstStyle/>
           <a:p>
-            <a:pPr algn="ctr" indent="0" marL="0">
+            <a:pPr marL="0" indent="0" algn="ctr">
               <a:buNone/>
             </a:pPr>
             <a:r>
@@ -11321,6 +11816,7 @@
         <a:solidFill>
           <a:srgbClr val="F0F4F8"/>
         </a:solidFill>
+        <a:effectLst/>
       </p:bgPr>
     </p:bg>
     <p:spTree>
@@ -11356,6 +11852,13 @@
           </a:solidFill>
           <a:ln/>
         </p:spPr>
+        <p:txBody>
+          <a:bodyPr/>
+          <a:lstStyle/>
+          <a:p>
+            <a:endParaRPr lang="en-US"/>
+          </a:p>
+        </p:txBody>
       </p:sp>
       <p:sp>
         <p:nvSpPr>
@@ -11378,11 +11881,11 @@
           <a:bodyPr wrap="square" rtlCol="0" anchor="ctr"/>
           <a:lstStyle/>
           <a:p>
-            <a:pPr indent="0" marL="0">
-              <a:buNone/>
-            </a:pPr>
-            <a:r>
-              <a:rPr lang="en-US" sz="1200" b="1" spc="200" kern="0" dirty="0">
+            <a:pPr marL="0" indent="0">
+              <a:buNone/>
+            </a:pPr>
+            <a:r>
+              <a:rPr lang="en-US" sz="1200" b="1" kern="0" spc="200" dirty="0">
                 <a:solidFill>
                   <a:srgbClr val="00D4AA"/>
                 </a:solidFill>
@@ -11417,7 +11920,7 @@
           <a:bodyPr wrap="square" rtlCol="0" anchor="ctr"/>
           <a:lstStyle/>
           <a:p>
-            <a:pPr indent="0" marL="0">
+            <a:pPr marL="0" indent="0">
               <a:buNone/>
             </a:pPr>
             <a:r>
@@ -11454,13 +11957,20 @@
           </a:solidFill>
           <a:ln/>
           <a:effectLst>
-            <a:outerShdw sx="100000" sy="100000" kx="0" ky="0" algn="bl" rotWithShape="0" blurRad="63500" dist="25400" dir="8100000">
+            <a:outerShdw blurRad="63500" dist="25400" dir="8100000" algn="bl" rotWithShape="0">
               <a:srgbClr val="000000">
                 <a:alpha val="10000"/>
               </a:srgbClr>
             </a:outerShdw>
           </a:effectLst>
         </p:spPr>
+        <p:txBody>
+          <a:bodyPr/>
+          <a:lstStyle/>
+          <a:p>
+            <a:endParaRPr lang="en-US"/>
+          </a:p>
+        </p:txBody>
       </p:sp>
       <p:sp>
         <p:nvSpPr>
@@ -11481,6 +11991,13 @@
           </a:solidFill>
           <a:ln/>
         </p:spPr>
+        <p:txBody>
+          <a:bodyPr/>
+          <a:lstStyle/>
+          <a:p>
+            <a:endParaRPr lang="en-US"/>
+          </a:p>
+        </p:txBody>
       </p:sp>
       <p:sp>
         <p:nvSpPr>
@@ -11503,7 +12020,7 @@
           <a:bodyPr wrap="square" rtlCol="0" anchor="ctr"/>
           <a:lstStyle/>
           <a:p>
-            <a:pPr indent="0" marL="0">
+            <a:pPr marL="0" indent="0">
               <a:buNone/>
             </a:pPr>
             <a:r>
@@ -11539,7 +12056,7 @@
           <a:bodyPr wrap="square" rtlCol="0" anchor="ctr"/>
           <a:lstStyle/>
           <a:p>
-            <a:pPr indent="0" marL="0">
+            <a:pPr marL="0" indent="0">
               <a:buNone/>
             </a:pPr>
             <a:r>
@@ -11578,7 +12095,7 @@
           <a:bodyPr wrap="square" rtlCol="0" anchor="ctr"/>
           <a:lstStyle/>
           <a:p>
-            <a:pPr indent="0" marL="0">
+            <a:pPr marL="0" indent="0">
               <a:buNone/>
             </a:pPr>
             <a:r>
@@ -11617,7 +12134,7 @@
           <a:bodyPr wrap="square" rtlCol="0" anchor="ctr"/>
           <a:lstStyle/>
           <a:p>
-            <a:pPr indent="0" marL="0">
+            <a:pPr marL="0" indent="0">
               <a:buNone/>
             </a:pPr>
             <a:r>
@@ -11654,13 +12171,20 @@
           </a:solidFill>
           <a:ln/>
           <a:effectLst>
-            <a:outerShdw sx="100000" sy="100000" kx="0" ky="0" algn="bl" rotWithShape="0" blurRad="63500" dist="25400" dir="8100000">
+            <a:outerShdw blurRad="63500" dist="25400" dir="8100000" algn="bl" rotWithShape="0">
               <a:srgbClr val="000000">
                 <a:alpha val="10000"/>
               </a:srgbClr>
             </a:outerShdw>
           </a:effectLst>
         </p:spPr>
+        <p:txBody>
+          <a:bodyPr/>
+          <a:lstStyle/>
+          <a:p>
+            <a:endParaRPr lang="en-US"/>
+          </a:p>
+        </p:txBody>
       </p:sp>
       <p:sp>
         <p:nvSpPr>
@@ -11681,6 +12205,13 @@
           </a:solidFill>
           <a:ln/>
         </p:spPr>
+        <p:txBody>
+          <a:bodyPr/>
+          <a:lstStyle/>
+          <a:p>
+            <a:endParaRPr lang="en-US"/>
+          </a:p>
+        </p:txBody>
       </p:sp>
       <p:sp>
         <p:nvSpPr>
@@ -11703,7 +12234,7 @@
           <a:bodyPr wrap="square" rtlCol="0" anchor="ctr"/>
           <a:lstStyle/>
           <a:p>
-            <a:pPr indent="0" marL="0">
+            <a:pPr marL="0" indent="0">
               <a:buNone/>
             </a:pPr>
             <a:r>
@@ -11739,7 +12270,7 @@
           <a:bodyPr wrap="square" rtlCol="0" anchor="ctr"/>
           <a:lstStyle/>
           <a:p>
-            <a:pPr indent="0" marL="0">
+            <a:pPr marL="0" indent="0">
               <a:buNone/>
             </a:pPr>
             <a:r>
@@ -11778,7 +12309,7 @@
           <a:bodyPr wrap="square" rtlCol="0" anchor="ctr"/>
           <a:lstStyle/>
           <a:p>
-            <a:pPr indent="0" marL="0">
+            <a:pPr marL="0" indent="0">
               <a:buNone/>
             </a:pPr>
             <a:r>
@@ -11817,7 +12348,7 @@
           <a:bodyPr wrap="square" rtlCol="0" anchor="ctr"/>
           <a:lstStyle/>
           <a:p>
-            <a:pPr indent="0" marL="0">
+            <a:pPr marL="0" indent="0">
               <a:buNone/>
             </a:pPr>
             <a:r>
@@ -11854,13 +12385,20 @@
           </a:solidFill>
           <a:ln/>
           <a:effectLst>
-            <a:outerShdw sx="100000" sy="100000" kx="0" ky="0" algn="bl" rotWithShape="0" blurRad="63500" dist="25400" dir="8100000">
+            <a:outerShdw blurRad="63500" dist="25400" dir="8100000" algn="bl" rotWithShape="0">
               <a:srgbClr val="000000">
                 <a:alpha val="10000"/>
               </a:srgbClr>
             </a:outerShdw>
           </a:effectLst>
         </p:spPr>
+        <p:txBody>
+          <a:bodyPr/>
+          <a:lstStyle/>
+          <a:p>
+            <a:endParaRPr lang="en-US"/>
+          </a:p>
+        </p:txBody>
       </p:sp>
       <p:sp>
         <p:nvSpPr>
@@ -11881,6 +12419,13 @@
           </a:solidFill>
           <a:ln/>
         </p:spPr>
+        <p:txBody>
+          <a:bodyPr/>
+          <a:lstStyle/>
+          <a:p>
+            <a:endParaRPr lang="en-US"/>
+          </a:p>
+        </p:txBody>
       </p:sp>
       <p:sp>
         <p:nvSpPr>
@@ -11903,7 +12448,7 @@
           <a:bodyPr wrap="square" rtlCol="0" anchor="ctr"/>
           <a:lstStyle/>
           <a:p>
-            <a:pPr indent="0" marL="0">
+            <a:pPr marL="0" indent="0">
               <a:buNone/>
             </a:pPr>
             <a:r>
@@ -11939,7 +12484,7 @@
           <a:bodyPr wrap="square" rtlCol="0" anchor="ctr"/>
           <a:lstStyle/>
           <a:p>
-            <a:pPr indent="0" marL="0">
+            <a:pPr marL="0" indent="0">
               <a:buNone/>
             </a:pPr>
             <a:r>
@@ -11978,7 +12523,7 @@
           <a:bodyPr wrap="square" rtlCol="0" anchor="ctr"/>
           <a:lstStyle/>
           <a:p>
-            <a:pPr indent="0" marL="0">
+            <a:pPr marL="0" indent="0">
               <a:buNone/>
             </a:pPr>
             <a:r>
@@ -12017,7 +12562,7 @@
           <a:bodyPr wrap="square" rtlCol="0" anchor="ctr"/>
           <a:lstStyle/>
           <a:p>
-            <a:pPr indent="0" marL="0">
+            <a:pPr marL="0" indent="0">
               <a:buNone/>
             </a:pPr>
             <a:r>
@@ -12054,13 +12599,20 @@
           </a:solidFill>
           <a:ln/>
           <a:effectLst>
-            <a:outerShdw sx="100000" sy="100000" kx="0" ky="0" algn="bl" rotWithShape="0" blurRad="63500" dist="25400" dir="8100000">
+            <a:outerShdw blurRad="63500" dist="25400" dir="8100000" algn="bl" rotWithShape="0">
               <a:srgbClr val="000000">
                 <a:alpha val="10000"/>
               </a:srgbClr>
             </a:outerShdw>
           </a:effectLst>
         </p:spPr>
+        <p:txBody>
+          <a:bodyPr/>
+          <a:lstStyle/>
+          <a:p>
+            <a:endParaRPr lang="en-US"/>
+          </a:p>
+        </p:txBody>
       </p:sp>
       <p:sp>
         <p:nvSpPr>
@@ -12081,6 +12633,13 @@
           </a:solidFill>
           <a:ln/>
         </p:spPr>
+        <p:txBody>
+          <a:bodyPr/>
+          <a:lstStyle/>
+          <a:p>
+            <a:endParaRPr lang="en-US"/>
+          </a:p>
+        </p:txBody>
       </p:sp>
       <p:sp>
         <p:nvSpPr>
@@ -12103,7 +12662,7 @@
           <a:bodyPr wrap="square" rtlCol="0" anchor="ctr"/>
           <a:lstStyle/>
           <a:p>
-            <a:pPr indent="0" marL="0">
+            <a:pPr marL="0" indent="0">
               <a:buNone/>
             </a:pPr>
             <a:r>
@@ -12139,7 +12698,7 @@
           <a:bodyPr wrap="square" rtlCol="0" anchor="ctr"/>
           <a:lstStyle/>
           <a:p>
-            <a:pPr indent="0" marL="0">
+            <a:pPr marL="0" indent="0">
               <a:buNone/>
             </a:pPr>
             <a:r>
@@ -12178,7 +12737,7 @@
           <a:bodyPr wrap="square" rtlCol="0" anchor="ctr"/>
           <a:lstStyle/>
           <a:p>
-            <a:pPr indent="0" marL="0">
+            <a:pPr marL="0" indent="0">
               <a:buNone/>
             </a:pPr>
             <a:r>
@@ -12217,7 +12776,7 @@
           <a:bodyPr wrap="square" rtlCol="0" anchor="ctr"/>
           <a:lstStyle/>
           <a:p>
-            <a:pPr indent="0" marL="0">
+            <a:pPr marL="0" indent="0">
               <a:buNone/>
             </a:pPr>
             <a:r>
@@ -12254,6 +12813,13 @@
           </a:solidFill>
           <a:ln/>
         </p:spPr>
+        <p:txBody>
+          <a:bodyPr/>
+          <a:lstStyle/>
+          <a:p>
+            <a:endParaRPr lang="en-US"/>
+          </a:p>
+        </p:txBody>
       </p:sp>
       <p:sp>
         <p:nvSpPr>
@@ -12276,7 +12842,7 @@
           <a:bodyPr wrap="square" rtlCol="0" anchor="ctr"/>
           <a:lstStyle/>
           <a:p>
-            <a:pPr indent="0" marL="0">
+            <a:pPr marL="0" indent="0">
               <a:buNone/>
             </a:pPr>
             <a:r>
@@ -12310,6 +12876,7 @@
         <a:solidFill>
           <a:srgbClr val="F0F4F8"/>
         </a:solidFill>
+        <a:effectLst/>
       </p:bgPr>
     </p:bg>
     <p:spTree>
@@ -12345,6 +12912,13 @@
           </a:solidFill>
           <a:ln/>
         </p:spPr>
+        <p:txBody>
+          <a:bodyPr/>
+          <a:lstStyle/>
+          <a:p>
+            <a:endParaRPr lang="en-US"/>
+          </a:p>
+        </p:txBody>
       </p:sp>
       <p:sp>
         <p:nvSpPr>
@@ -12367,11 +12941,11 @@
           <a:bodyPr wrap="square" rtlCol="0" anchor="ctr"/>
           <a:lstStyle/>
           <a:p>
-            <a:pPr indent="0" marL="0">
-              <a:buNone/>
-            </a:pPr>
-            <a:r>
-              <a:rPr lang="en-US" sz="1200" b="1" spc="200" kern="0" dirty="0">
+            <a:pPr marL="0" indent="0">
+              <a:buNone/>
+            </a:pPr>
+            <a:r>
+              <a:rPr lang="en-US" sz="1200" b="1" kern="0" spc="200" dirty="0">
                 <a:solidFill>
                   <a:srgbClr val="00D4AA"/>
                 </a:solidFill>
@@ -12404,13 +12978,20 @@
           </a:solidFill>
           <a:ln/>
           <a:effectLst>
-            <a:outerShdw sx="100000" sy="100000" kx="0" ky="0" algn="bl" rotWithShape="0" blurRad="63500" dist="25400" dir="8100000">
+            <a:outerShdw blurRad="63500" dist="25400" dir="8100000" algn="bl" rotWithShape="0">
               <a:srgbClr val="000000">
                 <a:alpha val="10000"/>
               </a:srgbClr>
             </a:outerShdw>
           </a:effectLst>
         </p:spPr>
+        <p:txBody>
+          <a:bodyPr/>
+          <a:lstStyle/>
+          <a:p>
+            <a:endParaRPr lang="en-US"/>
+          </a:p>
+        </p:txBody>
       </p:sp>
       <p:sp>
         <p:nvSpPr>
@@ -12431,6 +13012,13 @@
           </a:solidFill>
           <a:ln/>
         </p:spPr>
+        <p:txBody>
+          <a:bodyPr/>
+          <a:lstStyle/>
+          <a:p>
+            <a:endParaRPr lang="en-US"/>
+          </a:p>
+        </p:txBody>
       </p:sp>
       <p:sp>
         <p:nvSpPr>
@@ -12453,7 +13041,7 @@
           <a:bodyPr wrap="square" rtlCol="0" anchor="ctr"/>
           <a:lstStyle/>
           <a:p>
-            <a:pPr algn="ctr" indent="0" marL="0">
+            <a:pPr marL="0" indent="0" algn="ctr">
               <a:buNone/>
             </a:pPr>
             <a:r>
@@ -12489,11 +13077,33 @@
           <a:bodyPr wrap="square" rtlCol="0" anchor="ctr"/>
           <a:lstStyle/>
           <a:p>
-            <a:pPr algn="ctr" indent="0" marL="0">
-              <a:buNone/>
-            </a:pPr>
-            <a:r>
-              <a:rPr lang="en-US" sz="1500" b="1" dirty="0">
+            <a:pPr marL="0" indent="0" algn="ctr">
+              <a:buNone/>
+            </a:pPr>
+            <a:r>
+              <a:rPr lang="en-US" sz="1500" b="1" dirty="0" err="1">
+                <a:solidFill>
+                  <a:srgbClr val="2C3E50"/>
+                </a:solidFill>
+                <a:latin typeface="Calibri" pitchFamily="34" charset="0"/>
+                <a:ea typeface="Calibri" pitchFamily="34" charset="-122"/>
+                <a:cs typeface="Calibri" pitchFamily="34" charset="-120"/>
+              </a:rPr>
+              <a:t>独家专利工艺</a:t>
+            </a:r>
+            <a:r>
+              <a:rPr lang="zh-CN" altLang="en-US" sz="1500" b="1" dirty="0">
+                <a:solidFill>
+                  <a:srgbClr val="2C3E50"/>
+                </a:solidFill>
+                <a:latin typeface="Calibri" pitchFamily="34" charset="0"/>
+                <a:ea typeface="Calibri" pitchFamily="34" charset="-122"/>
+                <a:cs typeface="Calibri" pitchFamily="34" charset="-120"/>
+              </a:rPr>
+              <a:t>：</a:t>
+            </a:r>
+            <a:r>
+              <a:rPr lang="en-US" sz="1500" b="1" dirty="0" err="1">
                 <a:solidFill>
                   <a:srgbClr val="2C3E50"/>
                 </a:solidFill>
@@ -12529,6 +13139,13 @@
             <a:prstDash val="solid"/>
           </a:ln>
         </p:spPr>
+        <p:txBody>
+          <a:bodyPr/>
+          <a:lstStyle/>
+          <a:p>
+            <a:endParaRPr lang="en-US"/>
+          </a:p>
+        </p:txBody>
       </p:sp>
       <p:sp>
         <p:nvSpPr>
@@ -12551,11 +13168,11 @@
           <a:bodyPr wrap="square" rtlCol="0" anchor="ctr"/>
           <a:lstStyle/>
           <a:p>
-            <a:pPr indent="0" marL="0">
-              <a:buNone/>
-            </a:pPr>
-            <a:r>
-              <a:rPr lang="en-US" sz="1000" dirty="0">
+            <a:pPr marL="0" indent="0">
+              <a:buNone/>
+            </a:pPr>
+            <a:r>
+              <a:rPr lang="zh-CN" altLang="en-US" sz="1000" dirty="0">
                 <a:solidFill>
                   <a:srgbClr val="7F8C8D"/>
                 </a:solidFill>
@@ -12563,9 +13180,16 @@
                 <a:ea typeface="Calibri" pitchFamily="34" charset="-122"/>
                 <a:cs typeface="Calibri" pitchFamily="34" charset="-120"/>
               </a:rPr>
-              <a:t>独创四步法核心提纯工艺——酸溶、载体共沉/选择性吸附/离子交换分离Ra、矿物纯化、再合成——彻底去除放射性镭（Ra），保留并激活负氧离子释放活性，技术壁垒高、难复制。</a:t>
-            </a:r>
-            <a:endParaRPr lang="en-US" sz="1000" dirty="0"/>
+              <a:t>原材料经多道提纯工艺，有效去除杂质离子，确保负氧离子释放的稳定性与安全性，避免副产物风险。</a:t>
+            </a:r>
+            <a:endParaRPr lang="en-US" sz="1000" dirty="0">
+              <a:solidFill>
+                <a:srgbClr val="7F8C8D"/>
+              </a:solidFill>
+              <a:latin typeface="Calibri" pitchFamily="34" charset="0"/>
+              <a:ea typeface="Calibri" pitchFamily="34" charset="-122"/>
+              <a:cs typeface="Calibri" pitchFamily="34" charset="-120"/>
+            </a:endParaRPr>
           </a:p>
         </p:txBody>
       </p:sp>
@@ -12590,7 +13214,7 @@
           <a:bodyPr wrap="square" rtlCol="0" anchor="ctr"/>
           <a:lstStyle/>
           <a:p>
-            <a:pPr indent="0" marL="0">
+            <a:pPr marL="0" indent="0">
               <a:buNone/>
             </a:pPr>
             <a:r>
@@ -12617,19 +13241,19 @@
         <p:spPr>
           <a:xfrm>
             <a:off x="685800" y="3227832"/>
-            <a:ext cx="2377440" cy="301752"/>
-          </a:xfrm>
-          <a:prstGeom prst="rect">
-            <a:avLst/>
-          </a:prstGeom>
-          <a:noFill/>
-          <a:ln/>
-        </p:spPr>
-        <p:txBody>
-          <a:bodyPr wrap="square" rtlCol="0" anchor="ctr"/>
-          <a:lstStyle/>
-          <a:p>
-            <a:pPr indent="0" marL="0">
+            <a:ext cx="2514600" cy="301752"/>
+          </a:xfrm>
+          <a:prstGeom prst="rect">
+            <a:avLst/>
+          </a:prstGeom>
+          <a:noFill/>
+          <a:ln/>
+        </p:spPr>
+        <p:txBody>
+          <a:bodyPr wrap="square" rtlCol="0" anchor="ctr"/>
+          <a:lstStyle/>
+          <a:p>
+            <a:pPr marL="0" indent="0">
               <a:buNone/>
             </a:pPr>
             <a:r>
@@ -12668,7 +13292,7 @@
           <a:bodyPr wrap="square" rtlCol="0" anchor="ctr"/>
           <a:lstStyle/>
           <a:p>
-            <a:pPr indent="0" marL="0">
+            <a:pPr marL="0" indent="0">
               <a:buNone/>
             </a:pPr>
             <a:r>
@@ -12707,7 +13331,7 @@
           <a:bodyPr wrap="square" rtlCol="0" anchor="ctr"/>
           <a:lstStyle/>
           <a:p>
-            <a:pPr indent="0" marL="0">
+            <a:pPr marL="0" indent="0">
               <a:buNone/>
             </a:pPr>
             <a:r>
@@ -12746,7 +13370,7 @@
           <a:bodyPr wrap="square" rtlCol="0" anchor="ctr"/>
           <a:lstStyle/>
           <a:p>
-            <a:pPr indent="0" marL="0">
+            <a:pPr marL="0" indent="0">
               <a:buNone/>
             </a:pPr>
             <a:r>
@@ -12758,38 +13382,10 @@
                 <a:ea typeface="Calibri" pitchFamily="34" charset="-122"/>
                 <a:cs typeface="Calibri" pitchFamily="34" charset="-120"/>
               </a:rPr>
-              <a:t>→  零臭氧、零辐射</a:t>
-            </a:r>
-            <a:endParaRPr lang="en-US" sz="1000" dirty="0"/>
-          </a:p>
-        </p:txBody>
-      </p:sp>
-      <p:sp>
-        <p:nvSpPr>
-          <p:cNvPr id="15" name="Text 13"/>
-          <p:cNvSpPr/>
-          <p:nvPr/>
-        </p:nvSpPr>
-        <p:spPr>
-          <a:xfrm>
-            <a:off x="685800" y="4434840"/>
-            <a:ext cx="2377440" cy="301752"/>
-          </a:xfrm>
-          <a:prstGeom prst="rect">
-            <a:avLst/>
-          </a:prstGeom>
-          <a:noFill/>
-          <a:ln/>
-        </p:spPr>
-        <p:txBody>
-          <a:bodyPr wrap="square" rtlCol="0" anchor="ctr"/>
-          <a:lstStyle/>
-          <a:p>
-            <a:pPr indent="0" marL="0">
-              <a:buNone/>
-            </a:pPr>
-            <a:r>
-              <a:rPr lang="en-US" sz="1000" dirty="0">
+              <a:t>→  </a:t>
+            </a:r>
+            <a:r>
+              <a:rPr lang="en-US" sz="1000" dirty="0" err="1">
                 <a:solidFill>
                   <a:srgbClr val="2C3E50"/>
                 </a:solidFill>
@@ -12797,7 +13393,40 @@
                 <a:ea typeface="Calibri" pitchFamily="34" charset="-122"/>
                 <a:cs typeface="Calibri" pitchFamily="34" charset="-120"/>
               </a:rPr>
-              <a:t>→  森林级浓度无醉氧</a:t>
+              <a:t>零臭氧、超低辐射</a:t>
+            </a:r>
+            <a:r>
+              <a:rPr lang="zh-CN" altLang="en-US" sz="1000" dirty="0">
+                <a:solidFill>
+                  <a:srgbClr val="2C3E50"/>
+                </a:solidFill>
+                <a:latin typeface="Calibri" pitchFamily="34" charset="0"/>
+                <a:ea typeface="Calibri" pitchFamily="34" charset="-122"/>
+                <a:cs typeface="Calibri" pitchFamily="34" charset="-120"/>
+              </a:rPr>
+              <a:t>（</a:t>
+            </a:r>
+            <a:r>
+              <a:rPr lang="en-US" sz="1000" dirty="0" err="1">
+                <a:solidFill>
+                  <a:srgbClr val="2C3E50"/>
+                </a:solidFill>
+                <a:latin typeface="Calibri" pitchFamily="34" charset="0"/>
+                <a:ea typeface="Calibri" pitchFamily="34" charset="-122"/>
+                <a:cs typeface="Calibri" pitchFamily="34" charset="-120"/>
+              </a:rPr>
+              <a:t>未检出</a:t>
+            </a:r>
+            <a:r>
+              <a:rPr lang="zh-CN" altLang="en-US" sz="1000" dirty="0">
+                <a:solidFill>
+                  <a:srgbClr val="2C3E50"/>
+                </a:solidFill>
+                <a:latin typeface="Calibri" pitchFamily="34" charset="0"/>
+                <a:ea typeface="Calibri" pitchFamily="34" charset="-122"/>
+                <a:cs typeface="Calibri" pitchFamily="34" charset="-120"/>
+              </a:rPr>
+              <a:t>）</a:t>
             </a:r>
             <a:endParaRPr lang="en-US" sz="1000" dirty="0"/>
           </a:p>
@@ -12822,13 +13451,20 @@
           </a:solidFill>
           <a:ln/>
           <a:effectLst>
-            <a:outerShdw sx="100000" sy="100000" kx="0" ky="0" algn="bl" rotWithShape="0" blurRad="63500" dist="25400" dir="8100000">
+            <a:outerShdw blurRad="63500" dist="25400" dir="8100000" algn="bl" rotWithShape="0">
               <a:srgbClr val="000000">
                 <a:alpha val="10000"/>
               </a:srgbClr>
             </a:outerShdw>
           </a:effectLst>
         </p:spPr>
+        <p:txBody>
+          <a:bodyPr/>
+          <a:lstStyle/>
+          <a:p>
+            <a:endParaRPr lang="en-US"/>
+          </a:p>
+        </p:txBody>
       </p:sp>
       <p:sp>
         <p:nvSpPr>
@@ -12849,6 +13485,13 @@
           </a:solidFill>
           <a:ln/>
         </p:spPr>
+        <p:txBody>
+          <a:bodyPr/>
+          <a:lstStyle/>
+          <a:p>
+            <a:endParaRPr lang="en-US"/>
+          </a:p>
+        </p:txBody>
       </p:sp>
       <p:sp>
         <p:nvSpPr>
@@ -12871,7 +13514,7 @@
           <a:bodyPr wrap="square" rtlCol="0" anchor="ctr"/>
           <a:lstStyle/>
           <a:p>
-            <a:pPr algn="ctr" indent="0" marL="0">
+            <a:pPr marL="0" indent="0" algn="ctr">
               <a:buNone/>
             </a:pPr>
             <a:r>
@@ -12907,7 +13550,7 @@
           <a:bodyPr wrap="square" rtlCol="0" anchor="ctr"/>
           <a:lstStyle/>
           <a:p>
-            <a:pPr algn="ctr" indent="0" marL="0">
+            <a:pPr marL="0" indent="0" algn="ctr">
               <a:buNone/>
             </a:pPr>
             <a:r>
@@ -12947,6 +13590,13 @@
             <a:prstDash val="solid"/>
           </a:ln>
         </p:spPr>
+        <p:txBody>
+          <a:bodyPr/>
+          <a:lstStyle/>
+          <a:p>
+            <a:endParaRPr lang="en-US"/>
+          </a:p>
+        </p:txBody>
       </p:sp>
       <p:sp>
         <p:nvSpPr>
@@ -12969,7 +13619,7 @@
           <a:bodyPr wrap="square" rtlCol="0" anchor="ctr"/>
           <a:lstStyle/>
           <a:p>
-            <a:pPr indent="0" marL="0">
+            <a:pPr marL="0" indent="0">
               <a:buNone/>
             </a:pPr>
             <a:r>
@@ -13008,7 +13658,7 @@
           <a:bodyPr wrap="square" rtlCol="0" anchor="ctr"/>
           <a:lstStyle/>
           <a:p>
-            <a:pPr indent="0" marL="0">
+            <a:pPr marL="0" indent="0">
               <a:buNone/>
             </a:pPr>
             <a:r>
@@ -13047,7 +13697,7 @@
           <a:bodyPr wrap="square" rtlCol="0" anchor="ctr"/>
           <a:lstStyle/>
           <a:p>
-            <a:pPr indent="0" marL="0">
+            <a:pPr marL="0" indent="0">
               <a:buNone/>
             </a:pPr>
             <a:r>
@@ -13086,7 +13736,7 @@
           <a:bodyPr wrap="square" rtlCol="0" anchor="ctr"/>
           <a:lstStyle/>
           <a:p>
-            <a:pPr indent="0" marL="0">
+            <a:pPr marL="0" indent="0">
               <a:buNone/>
             </a:pPr>
             <a:r>
@@ -13125,7 +13775,7 @@
           <a:bodyPr wrap="square" rtlCol="0" anchor="ctr"/>
           <a:lstStyle/>
           <a:p>
-            <a:pPr indent="0" marL="0">
+            <a:pPr marL="0" indent="0">
               <a:buNone/>
             </a:pPr>
             <a:r>
@@ -13162,13 +13812,20 @@
           </a:solidFill>
           <a:ln/>
           <a:effectLst>
-            <a:outerShdw sx="100000" sy="100000" kx="0" ky="0" algn="bl" rotWithShape="0" blurRad="63500" dist="25400" dir="8100000">
+            <a:outerShdw blurRad="63500" dist="25400" dir="8100000" algn="bl" rotWithShape="0">
               <a:srgbClr val="000000">
                 <a:alpha val="10000"/>
               </a:srgbClr>
             </a:outerShdw>
           </a:effectLst>
         </p:spPr>
+        <p:txBody>
+          <a:bodyPr/>
+          <a:lstStyle/>
+          <a:p>
+            <a:endParaRPr lang="en-US"/>
+          </a:p>
+        </p:txBody>
       </p:sp>
       <p:sp>
         <p:nvSpPr>
@@ -13189,6 +13846,13 @@
           </a:solidFill>
           <a:ln/>
         </p:spPr>
+        <p:txBody>
+          <a:bodyPr/>
+          <a:lstStyle/>
+          <a:p>
+            <a:endParaRPr lang="en-US"/>
+          </a:p>
+        </p:txBody>
       </p:sp>
       <p:sp>
         <p:nvSpPr>
@@ -13211,7 +13875,7 @@
           <a:bodyPr wrap="square" rtlCol="0" anchor="ctr"/>
           <a:lstStyle/>
           <a:p>
-            <a:pPr algn="ctr" indent="0" marL="0">
+            <a:pPr marL="0" indent="0" algn="ctr">
               <a:buNone/>
             </a:pPr>
             <a:r>
@@ -13247,7 +13911,7 @@
           <a:bodyPr wrap="square" rtlCol="0" anchor="ctr"/>
           <a:lstStyle/>
           <a:p>
-            <a:pPr algn="ctr" indent="0" marL="0">
+            <a:pPr marL="0" indent="0" algn="ctr">
               <a:buNone/>
             </a:pPr>
             <a:r>
@@ -13287,6 +13951,13 @@
             <a:prstDash val="solid"/>
           </a:ln>
         </p:spPr>
+        <p:txBody>
+          <a:bodyPr/>
+          <a:lstStyle/>
+          <a:p>
+            <a:endParaRPr lang="en-US"/>
+          </a:p>
+        </p:txBody>
       </p:sp>
       <p:sp>
         <p:nvSpPr>
@@ -13309,7 +13980,7 @@
           <a:bodyPr wrap="square" rtlCol="0" anchor="ctr"/>
           <a:lstStyle/>
           <a:p>
-            <a:pPr indent="0" marL="0">
+            <a:pPr marL="0" indent="0">
               <a:buNone/>
             </a:pPr>
             <a:r>
@@ -13348,7 +14019,7 @@
           <a:bodyPr wrap="square" rtlCol="0" anchor="ctr"/>
           <a:lstStyle/>
           <a:p>
-            <a:pPr indent="0" marL="0">
+            <a:pPr marL="0" indent="0">
               <a:buNone/>
             </a:pPr>
             <a:r>
@@ -13387,7 +14058,7 @@
           <a:bodyPr wrap="square" rtlCol="0" anchor="ctr"/>
           <a:lstStyle/>
           <a:p>
-            <a:pPr indent="0" marL="0">
+            <a:pPr marL="0" indent="0">
               <a:buNone/>
             </a:pPr>
             <a:r>
@@ -13426,7 +14097,7 @@
           <a:bodyPr wrap="square" rtlCol="0" anchor="ctr"/>
           <a:lstStyle/>
           <a:p>
-            <a:pPr indent="0" marL="0">
+            <a:pPr marL="0" indent="0">
               <a:buNone/>
             </a:pPr>
             <a:r>
@@ -13465,7 +14136,7 @@
           <a:bodyPr wrap="square" rtlCol="0" anchor="ctr"/>
           <a:lstStyle/>
           <a:p>
-            <a:pPr indent="0" marL="0">
+            <a:pPr marL="0" indent="0">
               <a:buNone/>
             </a:pPr>
             <a:r>
@@ -13502,6 +14173,13 @@
           </a:solidFill>
           <a:ln/>
         </p:spPr>
+        <p:txBody>
+          <a:bodyPr/>
+          <a:lstStyle/>
+          <a:p>
+            <a:endParaRPr lang="en-US"/>
+          </a:p>
+        </p:txBody>
       </p:sp>
       <p:sp>
         <p:nvSpPr>
@@ -13524,7 +14202,7 @@
           <a:bodyPr wrap="square" rtlCol="0" anchor="ctr"/>
           <a:lstStyle/>
           <a:p>
-            <a:pPr algn="ctr" indent="0" marL="0">
+            <a:pPr marL="0" indent="0" algn="ctr">
               <a:buNone/>
             </a:pPr>
             <a:r>
@@ -13552,17 +14230,16 @@
 
 <file path=ppt/slides/slide9.xml><?xml version="1.0" encoding="utf-8"?>
 <p:sld xmlns:a="http://schemas.openxmlformats.org/drawingml/2006/main" xmlns:r="http://schemas.openxmlformats.org/officeDocument/2006/relationships" xmlns:p="http://schemas.openxmlformats.org/presentationml/2006/main">
-  <p:cSld name="Slide 9">
-    <p:bg>
-      <p:bgPr>
-        <a:solidFill>
-          <a:srgbClr val="F0F4F8"/>
-        </a:solidFill>
-      </p:bgPr>
-    </p:bg>
+  <p:cSld>
     <p:spTree>
       <p:nvGrpSpPr>
-        <p:cNvPr id="1" name=""/>
+        <p:cNvPr id="1" name="">
+          <a:extLst>
+            <a:ext uri="{FF2B5EF4-FFF2-40B4-BE49-F238E27FC236}">
+              <a16:creationId xmlns:a16="http://schemas.microsoft.com/office/drawing/2014/main" id="{D7C745F7-B747-81E1-3DC3-B862C4E952B3}"/>
+            </a:ext>
+          </a:extLst>
+        </p:cNvPr>
         <p:cNvGrpSpPr/>
         <p:nvPr/>
       </p:nvGrpSpPr>
@@ -13576,7 +14253,13 @@
       </p:grpSpPr>
       <p:sp>
         <p:nvSpPr>
-          <p:cNvPr id="2" name="Shape 0"/>
+          <p:cNvPr id="2" name="Shape 0">
+            <a:extLst>
+              <a:ext uri="{FF2B5EF4-FFF2-40B4-BE49-F238E27FC236}">
+                <a16:creationId xmlns:a16="http://schemas.microsoft.com/office/drawing/2014/main" id="{353FA1DD-79AB-D72E-4872-AF4DCFFBE894}"/>
+              </a:ext>
+            </a:extLst>
+          </p:cNvPr>
           <p:cNvSpPr/>
           <p:nvPr/>
         </p:nvSpPr>
@@ -13593,33 +14276,46 @@
           </a:solidFill>
           <a:ln/>
         </p:spPr>
-      </p:sp>
-      <p:sp>
-        <p:nvSpPr>
-          <p:cNvPr id="3" name="Text 1"/>
-          <p:cNvSpPr/>
-          <p:nvPr/>
-        </p:nvSpPr>
-        <p:spPr>
-          <a:xfrm>
-            <a:off x="457200" y="274320"/>
-            <a:ext cx="548640" cy="320040"/>
-          </a:xfrm>
-          <a:prstGeom prst="rect">
-            <a:avLst/>
-          </a:prstGeom>
-          <a:noFill/>
-          <a:ln/>
-        </p:spPr>
-        <p:txBody>
-          <a:bodyPr wrap="square" rtlCol="0" anchor="ctr"/>
-          <a:lstStyle/>
-          <a:p>
-            <a:pPr indent="0" marL="0">
-              <a:buNone/>
-            </a:pPr>
-            <a:r>
-              <a:rPr lang="en-US" sz="1100" b="1" spc="200" kern="0" dirty="0">
+        <p:txBody>
+          <a:bodyPr/>
+          <a:lstStyle/>
+          <a:p>
+            <a:endParaRPr lang="en-US"/>
+          </a:p>
+        </p:txBody>
+      </p:sp>
+      <p:sp>
+        <p:nvSpPr>
+          <p:cNvPr id="3" name="Text 1">
+            <a:extLst>
+              <a:ext uri="{FF2B5EF4-FFF2-40B4-BE49-F238E27FC236}">
+                <a16:creationId xmlns:a16="http://schemas.microsoft.com/office/drawing/2014/main" id="{5D30FBFE-55DB-FA8F-266C-0A51CAC5FDF0}"/>
+              </a:ext>
+            </a:extLst>
+          </p:cNvPr>
+          <p:cNvSpPr/>
+          <p:nvPr/>
+        </p:nvSpPr>
+        <p:spPr>
+          <a:xfrm>
+            <a:off x="548640" y="320040"/>
+            <a:ext cx="3657600" cy="365760"/>
+          </a:xfrm>
+          <a:prstGeom prst="rect">
+            <a:avLst/>
+          </a:prstGeom>
+          <a:noFill/>
+          <a:ln/>
+        </p:spPr>
+        <p:txBody>
+          <a:bodyPr wrap="square" rtlCol="0" anchor="ctr"/>
+          <a:lstStyle/>
+          <a:p>
+            <a:pPr marL="0" indent="0">
+              <a:buNone/>
+            </a:pPr>
+            <a:r>
+              <a:rPr lang="en-US" sz="1200" b="1" kern="0" spc="200" dirty="0">
                 <a:solidFill>
                   <a:srgbClr val="00D4AA"/>
                 </a:solidFill>
@@ -13627,1681 +14323,162 @@
                 <a:ea typeface="Calibri" pitchFamily="34" charset="-122"/>
                 <a:cs typeface="Calibri" pitchFamily="34" charset="-120"/>
               </a:rPr>
-              <a:t>08</a:t>
-            </a:r>
-            <a:endParaRPr lang="en-US" sz="1100" dirty="0"/>
-          </a:p>
-        </p:txBody>
-      </p:sp>
-      <p:sp>
-        <p:nvSpPr>
-          <p:cNvPr id="4" name="Text 2"/>
-          <p:cNvSpPr/>
-          <p:nvPr/>
-        </p:nvSpPr>
-        <p:spPr>
-          <a:xfrm>
-            <a:off x="960120" y="274320"/>
-            <a:ext cx="2743200" cy="320040"/>
-          </a:xfrm>
-          <a:prstGeom prst="rect">
-            <a:avLst/>
-          </a:prstGeom>
-          <a:noFill/>
-          <a:ln/>
-        </p:spPr>
-        <p:txBody>
-          <a:bodyPr wrap="square" rtlCol="0" anchor="ctr"/>
-          <a:lstStyle/>
-          <a:p>
-            <a:pPr indent="0" marL="0">
-              <a:buNone/>
-            </a:pPr>
-            <a:r>
-              <a:rPr lang="en-US" sz="1100" dirty="0">
-                <a:solidFill>
-                  <a:srgbClr val="7F8C8D"/>
-                </a:solidFill>
-                <a:latin typeface="Calibri" pitchFamily="34" charset="0"/>
-                <a:ea typeface="Calibri" pitchFamily="34" charset="-122"/>
-                <a:cs typeface="Calibri" pitchFamily="34" charset="-120"/>
-              </a:rPr>
-              <a:t>跨学科团队</a:t>
-            </a:r>
-            <a:endParaRPr lang="en-US" sz="1100" dirty="0"/>
-          </a:p>
-        </p:txBody>
-      </p:sp>
-      <p:sp>
-        <p:nvSpPr>
-          <p:cNvPr id="5" name="Text 3"/>
-          <p:cNvSpPr/>
-          <p:nvPr/>
-        </p:nvSpPr>
-        <p:spPr>
-          <a:xfrm>
-            <a:off x="457200" y="621792"/>
-            <a:ext cx="8229600" cy="365760"/>
-          </a:xfrm>
-          <a:prstGeom prst="rect">
-            <a:avLst/>
-          </a:prstGeom>
-          <a:noFill/>
-          <a:ln/>
-        </p:spPr>
-        <p:txBody>
-          <a:bodyPr wrap="square" rtlCol="0" anchor="ctr"/>
-          <a:lstStyle/>
-          <a:p>
-            <a:pPr indent="0" marL="0">
-              <a:buNone/>
-            </a:pPr>
-            <a:r>
-              <a:rPr lang="en-US" sz="2000" b="1" dirty="0">
-                <a:solidFill>
-                  <a:srgbClr val="0D1B2A"/>
-                </a:solidFill>
-                <a:latin typeface="Georgia" pitchFamily="34" charset="0"/>
-                <a:ea typeface="Georgia" pitchFamily="34" charset="-122"/>
-                <a:cs typeface="Georgia" pitchFamily="34" charset="-120"/>
-              </a:rPr>
-              <a:t>产学研医投 · 全链条核心成员</a:t>
-            </a:r>
-            <a:endParaRPr lang="en-US" sz="2000" dirty="0"/>
-          </a:p>
-        </p:txBody>
-      </p:sp>
-      <p:sp>
-        <p:nvSpPr>
-          <p:cNvPr id="6" name="Shape 4"/>
-          <p:cNvSpPr/>
-          <p:nvPr/>
-        </p:nvSpPr>
-        <p:spPr>
-          <a:xfrm>
-            <a:off x="457200" y="1097280"/>
-            <a:ext cx="2651760" cy="1828800"/>
+              <a:t>0</a:t>
+            </a:r>
+            <a:r>
+              <a:rPr lang="en-US" altLang="zh-CN" sz="1200" b="1" kern="0" spc="200" dirty="0">
+                <a:solidFill>
+                  <a:srgbClr val="00D4AA"/>
+                </a:solidFill>
+                <a:latin typeface="Calibri" pitchFamily="34" charset="0"/>
+                <a:ea typeface="Calibri" pitchFamily="34" charset="-122"/>
+                <a:cs typeface="Calibri" pitchFamily="34" charset="-120"/>
+              </a:rPr>
+              <a:t>8</a:t>
+            </a:r>
+            <a:r>
+              <a:rPr lang="en-US" sz="1200" b="1" kern="0" spc="200" dirty="0">
+                <a:solidFill>
+                  <a:srgbClr val="00D4AA"/>
+                </a:solidFill>
+                <a:latin typeface="Calibri" pitchFamily="34" charset="0"/>
+                <a:ea typeface="Calibri" pitchFamily="34" charset="-122"/>
+                <a:cs typeface="Calibri" pitchFamily="34" charset="-120"/>
+              </a:rPr>
+              <a:t>  </a:t>
+            </a:r>
+            <a:r>
+              <a:rPr lang="en-US" sz="1200" b="1" kern="0" spc="200" dirty="0" err="1">
+                <a:solidFill>
+                  <a:srgbClr val="00D4AA"/>
+                </a:solidFill>
+                <a:latin typeface="Calibri" pitchFamily="34" charset="0"/>
+                <a:ea typeface="Calibri" pitchFamily="34" charset="-122"/>
+                <a:cs typeface="Calibri" pitchFamily="34" charset="-120"/>
+              </a:rPr>
+              <a:t>团队与使命匹配</a:t>
+            </a:r>
+            <a:endParaRPr lang="en-US" sz="1200" dirty="0"/>
+          </a:p>
+        </p:txBody>
+      </p:sp>
+      <p:sp>
+        <p:nvSpPr>
+          <p:cNvPr id="36" name="Shape 34">
+            <a:extLst>
+              <a:ext uri="{FF2B5EF4-FFF2-40B4-BE49-F238E27FC236}">
+                <a16:creationId xmlns:a16="http://schemas.microsoft.com/office/drawing/2014/main" id="{93E214C0-A723-38CF-2A3F-85AC2A3BC4C5}"/>
+              </a:ext>
+            </a:extLst>
+          </p:cNvPr>
+          <p:cNvSpPr/>
+          <p:nvPr/>
+        </p:nvSpPr>
+        <p:spPr>
+          <a:xfrm>
+            <a:off x="0" y="4617720"/>
+            <a:ext cx="9144000" cy="525780"/>
           </a:xfrm>
           <a:prstGeom prst="rect">
             <a:avLst/>
           </a:prstGeom>
           <a:solidFill>
-            <a:srgbClr val="FFFFFF"/>
+            <a:srgbClr val="0D1B2A"/>
           </a:solidFill>
           <a:ln/>
-          <a:effectLst>
-            <a:outerShdw sx="100000" sy="100000" kx="0" ky="0" algn="bl" rotWithShape="0" blurRad="63500" dist="25400" dir="8100000">
-              <a:srgbClr val="000000">
-                <a:alpha val="10000"/>
-              </a:srgbClr>
-            </a:outerShdw>
-          </a:effectLst>
-        </p:spPr>
-      </p:sp>
-      <p:sp>
-        <p:nvSpPr>
-          <p:cNvPr id="7" name="Shape 5"/>
-          <p:cNvSpPr/>
-          <p:nvPr/>
-        </p:nvSpPr>
-        <p:spPr>
-          <a:xfrm>
-            <a:off x="457200" y="1097280"/>
-            <a:ext cx="777240" cy="1828800"/>
-          </a:xfrm>
-          <a:prstGeom prst="rect">
-            <a:avLst/>
-          </a:prstGeom>
-          <a:solidFill>
-            <a:srgbClr val="1A3A6B"/>
-          </a:solidFill>
-          <a:ln/>
-        </p:spPr>
-      </p:sp>
-      <p:sp>
-        <p:nvSpPr>
-          <p:cNvPr id="8" name="Text 6"/>
-          <p:cNvSpPr/>
-          <p:nvPr/>
-        </p:nvSpPr>
-        <p:spPr>
-          <a:xfrm>
-            <a:off x="457200" y="1691640"/>
-            <a:ext cx="777240" cy="640080"/>
-          </a:xfrm>
-          <a:prstGeom prst="rect">
-            <a:avLst/>
-          </a:prstGeom>
-          <a:noFill/>
-          <a:ln/>
-        </p:spPr>
-        <p:txBody>
-          <a:bodyPr wrap="square" rtlCol="0" anchor="ctr"/>
-          <a:lstStyle/>
-          <a:p>
-            <a:pPr algn="ctr" indent="0" marL="0">
-              <a:buNone/>
-            </a:pPr>
-            <a:r>
-              <a:rPr lang="en-US" sz="2000" b="1" dirty="0">
+        </p:spPr>
+        <p:txBody>
+          <a:bodyPr/>
+          <a:lstStyle/>
+          <a:p>
+            <a:endParaRPr lang="en-US"/>
+          </a:p>
+        </p:txBody>
+      </p:sp>
+      <p:sp>
+        <p:nvSpPr>
+          <p:cNvPr id="37" name="Text 35">
+            <a:extLst>
+              <a:ext uri="{FF2B5EF4-FFF2-40B4-BE49-F238E27FC236}">
+                <a16:creationId xmlns:a16="http://schemas.microsoft.com/office/drawing/2014/main" id="{3792D3B0-8CE0-C9F6-FF04-B8F8DF8DA014}"/>
+              </a:ext>
+            </a:extLst>
+          </p:cNvPr>
+          <p:cNvSpPr/>
+          <p:nvPr/>
+        </p:nvSpPr>
+        <p:spPr>
+          <a:xfrm>
+            <a:off x="548640" y="4617720"/>
+            <a:ext cx="8229600" cy="525780"/>
+          </a:xfrm>
+          <a:prstGeom prst="rect">
+            <a:avLst/>
+          </a:prstGeom>
+          <a:noFill/>
+          <a:ln/>
+        </p:spPr>
+        <p:txBody>
+          <a:bodyPr wrap="square" rtlCol="0" anchor="ctr"/>
+          <a:lstStyle/>
+          <a:p>
+            <a:pPr marL="0" indent="0" algn="ctr">
+              <a:buNone/>
+            </a:pPr>
+            <a:r>
+              <a:rPr lang="en-US" sz="1200" dirty="0" err="1">
                 <a:solidFill>
                   <a:srgbClr val="FFFFFF"/>
                 </a:solidFill>
-                <a:latin typeface="Georgia" pitchFamily="34" charset="0"/>
-                <a:ea typeface="Georgia" pitchFamily="34" charset="-122"/>
-                <a:cs typeface="Georgia" pitchFamily="34" charset="-120"/>
-              </a:rPr>
-              <a:t>YQ</a:t>
-            </a:r>
-            <a:endParaRPr lang="en-US" sz="2000" dirty="0"/>
-          </a:p>
-        </p:txBody>
-      </p:sp>
-      <p:sp>
-        <p:nvSpPr>
-          <p:cNvPr id="9" name="Text 7"/>
-          <p:cNvSpPr/>
-          <p:nvPr/>
-        </p:nvSpPr>
-        <p:spPr>
-          <a:xfrm>
-            <a:off x="1371600" y="1234440"/>
-            <a:ext cx="1645920" cy="347472"/>
-          </a:xfrm>
-          <a:prstGeom prst="rect">
-            <a:avLst/>
-          </a:prstGeom>
-          <a:noFill/>
-          <a:ln/>
-        </p:spPr>
-        <p:txBody>
-          <a:bodyPr wrap="square" rtlCol="0" anchor="ctr"/>
-          <a:lstStyle/>
-          <a:p>
-            <a:pPr indent="0" marL="0">
-              <a:buNone/>
-            </a:pPr>
-            <a:r>
-              <a:rPr lang="en-US" sz="1500" b="1" dirty="0">
-                <a:solidFill>
-                  <a:srgbClr val="2C3E50"/>
-                </a:solidFill>
-                <a:latin typeface="Calibri" pitchFamily="34" charset="0"/>
-                <a:ea typeface="Calibri" pitchFamily="34" charset="-122"/>
-                <a:cs typeface="Calibri" pitchFamily="34" charset="-120"/>
-              </a:rPr>
-              <a:t>杨起</a:t>
-            </a:r>
-            <a:endParaRPr lang="en-US" sz="1500" dirty="0"/>
-          </a:p>
-        </p:txBody>
-      </p:sp>
-      <p:sp>
-        <p:nvSpPr>
-          <p:cNvPr id="10" name="Text 8"/>
-          <p:cNvSpPr/>
-          <p:nvPr/>
-        </p:nvSpPr>
-        <p:spPr>
-          <a:xfrm>
-            <a:off x="1371600" y="1572768"/>
-            <a:ext cx="1645920" cy="274320"/>
-          </a:xfrm>
-          <a:prstGeom prst="rect">
-            <a:avLst/>
-          </a:prstGeom>
-          <a:noFill/>
-          <a:ln/>
-        </p:spPr>
-        <p:txBody>
-          <a:bodyPr wrap="square" rtlCol="0" anchor="ctr"/>
-          <a:lstStyle/>
-          <a:p>
-            <a:pPr indent="0" marL="0">
-              <a:buNone/>
-            </a:pPr>
-            <a:r>
-              <a:rPr lang="en-US" sz="1000" b="1" dirty="0">
-                <a:solidFill>
-                  <a:srgbClr val="1A3A6B"/>
-                </a:solidFill>
-                <a:latin typeface="Calibri" pitchFamily="34" charset="0"/>
-                <a:ea typeface="Calibri" pitchFamily="34" charset="-122"/>
-                <a:cs typeface="Calibri" pitchFamily="34" charset="-120"/>
-              </a:rPr>
-              <a:t>特普丽创始人</a:t>
-            </a:r>
-            <a:endParaRPr lang="en-US" sz="1000" dirty="0"/>
-          </a:p>
-        </p:txBody>
-      </p:sp>
-      <p:sp>
-        <p:nvSpPr>
-          <p:cNvPr id="11" name="Text 9"/>
-          <p:cNvSpPr/>
-          <p:nvPr/>
-        </p:nvSpPr>
-        <p:spPr>
-          <a:xfrm>
-            <a:off x="1371600" y="1828800"/>
-            <a:ext cx="1645920" cy="228600"/>
-          </a:xfrm>
-          <a:prstGeom prst="rect">
-            <a:avLst/>
-          </a:prstGeom>
-          <a:noFill/>
-          <a:ln/>
-        </p:spPr>
-        <p:txBody>
-          <a:bodyPr wrap="square" rtlCol="0" anchor="ctr"/>
-          <a:lstStyle/>
-          <a:p>
-            <a:pPr indent="0" marL="0">
-              <a:buNone/>
-            </a:pPr>
-            <a:r>
-              <a:rPr lang="en-US" sz="900" dirty="0">
-                <a:solidFill>
-                  <a:srgbClr val="7F8C8D"/>
-                </a:solidFill>
-                <a:latin typeface="Calibri" pitchFamily="34" charset="0"/>
-                <a:ea typeface="Calibri" pitchFamily="34" charset="-122"/>
-                <a:cs typeface="Calibri" pitchFamily="34" charset="-120"/>
-              </a:rPr>
-              <a:t>特普丽新装饰材料</a:t>
-            </a:r>
-            <a:endParaRPr lang="en-US" sz="900" dirty="0"/>
-          </a:p>
-        </p:txBody>
-      </p:sp>
-      <p:sp>
-        <p:nvSpPr>
-          <p:cNvPr id="12" name="Shape 10"/>
-          <p:cNvSpPr/>
-          <p:nvPr/>
-        </p:nvSpPr>
-        <p:spPr>
-          <a:xfrm>
-            <a:off x="1371600" y="2121408"/>
-            <a:ext cx="1600200" cy="0"/>
-          </a:xfrm>
-          <a:prstGeom prst="line">
-            <a:avLst/>
-          </a:prstGeom>
-          <a:noFill/>
-          <a:ln w="6350">
-            <a:solidFill>
-              <a:srgbClr val="E2E8F0"/>
-            </a:solidFill>
-            <a:prstDash val="solid"/>
-          </a:ln>
-        </p:spPr>
-      </p:sp>
-      <p:sp>
-        <p:nvSpPr>
-          <p:cNvPr id="13" name="Text 11"/>
-          <p:cNvSpPr/>
-          <p:nvPr/>
-        </p:nvSpPr>
-        <p:spPr>
-          <a:xfrm>
-            <a:off x="1371600" y="2176272"/>
-            <a:ext cx="1600200" cy="685800"/>
-          </a:xfrm>
-          <a:prstGeom prst="rect">
-            <a:avLst/>
-          </a:prstGeom>
-          <a:noFill/>
-          <a:ln/>
-        </p:spPr>
-        <p:txBody>
-          <a:bodyPr wrap="square" rtlCol="0" anchor="ctr"/>
-          <a:lstStyle/>
-          <a:p>
-            <a:pPr indent="0" marL="0">
-              <a:buNone/>
-            </a:pPr>
-            <a:r>
-              <a:rPr lang="en-US" sz="850" dirty="0">
-                <a:solidFill>
-                  <a:srgbClr val="7F8C8D"/>
-                </a:solidFill>
-                <a:latin typeface="Calibri" pitchFamily="34" charset="0"/>
-                <a:ea typeface="Calibri" pitchFamily="34" charset="-122"/>
-                <a:cs typeface="Calibri" pitchFamily="34" charset="-120"/>
-              </a:rPr>
-              <a:t>50年室内材料研发经验，主导企业战略决策。深耕装饰装修行业，是国内功能型室内材料的先驱探索者。</a:t>
-            </a:r>
-            <a:endParaRPr lang="en-US" sz="850" dirty="0"/>
-          </a:p>
-        </p:txBody>
-      </p:sp>
-      <p:sp>
-        <p:nvSpPr>
-          <p:cNvPr id="14" name="Shape 12"/>
-          <p:cNvSpPr/>
-          <p:nvPr/>
-        </p:nvSpPr>
-        <p:spPr>
-          <a:xfrm>
-            <a:off x="3291840" y="1097280"/>
-            <a:ext cx="2651760" cy="1828800"/>
-          </a:xfrm>
-          <a:prstGeom prst="rect">
-            <a:avLst/>
-          </a:prstGeom>
-          <a:solidFill>
-            <a:srgbClr val="FFFFFF"/>
-          </a:solidFill>
-          <a:ln/>
-          <a:effectLst>
-            <a:outerShdw sx="100000" sy="100000" kx="0" ky="0" algn="bl" rotWithShape="0" blurRad="63500" dist="25400" dir="8100000">
-              <a:srgbClr val="000000">
-                <a:alpha val="10000"/>
-              </a:srgbClr>
-            </a:outerShdw>
-          </a:effectLst>
-        </p:spPr>
-      </p:sp>
-      <p:sp>
-        <p:nvSpPr>
-          <p:cNvPr id="15" name="Shape 13"/>
-          <p:cNvSpPr/>
-          <p:nvPr/>
-        </p:nvSpPr>
-        <p:spPr>
-          <a:xfrm>
-            <a:off x="3291840" y="1097280"/>
-            <a:ext cx="777240" cy="1828800"/>
-          </a:xfrm>
-          <a:prstGeom prst="rect">
-            <a:avLst/>
-          </a:prstGeom>
-          <a:solidFill>
-            <a:srgbClr val="00D4AA"/>
-          </a:solidFill>
-          <a:ln/>
-        </p:spPr>
-      </p:sp>
-      <p:sp>
-        <p:nvSpPr>
-          <p:cNvPr id="16" name="Text 14"/>
-          <p:cNvSpPr/>
-          <p:nvPr/>
-        </p:nvSpPr>
-        <p:spPr>
-          <a:xfrm>
-            <a:off x="3291840" y="1691640"/>
-            <a:ext cx="777240" cy="640080"/>
-          </a:xfrm>
-          <a:prstGeom prst="rect">
-            <a:avLst/>
-          </a:prstGeom>
-          <a:noFill/>
-          <a:ln/>
-        </p:spPr>
-        <p:txBody>
-          <a:bodyPr wrap="square" rtlCol="0" anchor="ctr"/>
-          <a:lstStyle/>
-          <a:p>
-            <a:pPr algn="ctr" indent="0" marL="0">
-              <a:buNone/>
-            </a:pPr>
-            <a:r>
-              <a:rPr lang="en-US" sz="2000" b="1" dirty="0">
+                <a:latin typeface="Calibri" pitchFamily="34" charset="0"/>
+                <a:ea typeface="Calibri" pitchFamily="34" charset="-122"/>
+                <a:cs typeface="Calibri" pitchFamily="34" charset="-120"/>
+              </a:rPr>
+              <a:t>医工结合团队</a:t>
+            </a:r>
+            <a:r>
+              <a:rPr lang="zh-CN" altLang="en-US" sz="1200" dirty="0">
                 <a:solidFill>
                   <a:srgbClr val="FFFFFF"/>
                 </a:solidFill>
-                <a:latin typeface="Georgia" pitchFamily="34" charset="0"/>
-                <a:ea typeface="Georgia" pitchFamily="34" charset="-122"/>
-                <a:cs typeface="Georgia" pitchFamily="34" charset="-120"/>
-              </a:rPr>
-              <a:t>LL</a:t>
-            </a:r>
-            <a:endParaRPr lang="en-US" sz="2000" dirty="0"/>
-          </a:p>
-        </p:txBody>
-      </p:sp>
-      <p:sp>
-        <p:nvSpPr>
-          <p:cNvPr id="17" name="Text 15"/>
-          <p:cNvSpPr/>
-          <p:nvPr/>
-        </p:nvSpPr>
-        <p:spPr>
-          <a:xfrm>
-            <a:off x="4206240" y="1234440"/>
-            <a:ext cx="1645920" cy="347472"/>
-          </a:xfrm>
-          <a:prstGeom prst="rect">
-            <a:avLst/>
-          </a:prstGeom>
-          <a:noFill/>
-          <a:ln/>
-        </p:spPr>
-        <p:txBody>
-          <a:bodyPr wrap="square" rtlCol="0" anchor="ctr"/>
-          <a:lstStyle/>
-          <a:p>
-            <a:pPr indent="0" marL="0">
-              <a:buNone/>
-            </a:pPr>
-            <a:r>
-              <a:rPr lang="en-US" sz="1500" b="1" dirty="0">
-                <a:solidFill>
-                  <a:srgbClr val="2C3E50"/>
-                </a:solidFill>
-                <a:latin typeface="Calibri" pitchFamily="34" charset="0"/>
-                <a:ea typeface="Calibri" pitchFamily="34" charset="-122"/>
-                <a:cs typeface="Calibri" pitchFamily="34" charset="-120"/>
-              </a:rPr>
-              <a:t>励铃</a:t>
-            </a:r>
-            <a:endParaRPr lang="en-US" sz="1500" dirty="0"/>
-          </a:p>
-        </p:txBody>
-      </p:sp>
-      <p:sp>
-        <p:nvSpPr>
-          <p:cNvPr id="18" name="Text 16"/>
-          <p:cNvSpPr/>
-          <p:nvPr/>
-        </p:nvSpPr>
-        <p:spPr>
-          <a:xfrm>
-            <a:off x="4206240" y="1572768"/>
-            <a:ext cx="1645920" cy="274320"/>
-          </a:xfrm>
-          <a:prstGeom prst="rect">
-            <a:avLst/>
-          </a:prstGeom>
-          <a:noFill/>
-          <a:ln/>
-        </p:spPr>
-        <p:txBody>
-          <a:bodyPr wrap="square" rtlCol="0" anchor="ctr"/>
-          <a:lstStyle/>
-          <a:p>
-            <a:pPr indent="0" marL="0">
-              <a:buNone/>
-            </a:pPr>
-            <a:r>
-              <a:rPr lang="en-US" sz="1000" b="1" dirty="0">
-                <a:solidFill>
-                  <a:srgbClr val="00D4AA"/>
-                </a:solidFill>
-                <a:latin typeface="Calibri" pitchFamily="34" charset="0"/>
-                <a:ea typeface="Calibri" pitchFamily="34" charset="-122"/>
-                <a:cs typeface="Calibri" pitchFamily="34" charset="-120"/>
-              </a:rPr>
-              <a:t>核心技术负责人</a:t>
-            </a:r>
-            <a:endParaRPr lang="en-US" sz="1000" dirty="0"/>
-          </a:p>
-        </p:txBody>
-      </p:sp>
-      <p:sp>
-        <p:nvSpPr>
-          <p:cNvPr id="19" name="Text 17"/>
-          <p:cNvSpPr/>
-          <p:nvPr/>
-        </p:nvSpPr>
-        <p:spPr>
-          <a:xfrm>
-            <a:off x="4206240" y="1828800"/>
-            <a:ext cx="1645920" cy="228600"/>
-          </a:xfrm>
-          <a:prstGeom prst="rect">
-            <a:avLst/>
-          </a:prstGeom>
-          <a:noFill/>
-          <a:ln/>
-        </p:spPr>
-        <p:txBody>
-          <a:bodyPr wrap="square" rtlCol="0" anchor="ctr"/>
-          <a:lstStyle/>
-          <a:p>
-            <a:pPr indent="0" marL="0">
-              <a:buNone/>
-            </a:pPr>
-            <a:r>
-              <a:rPr lang="en-US" sz="900" dirty="0">
-                <a:solidFill>
-                  <a:srgbClr val="7F8C8D"/>
-                </a:solidFill>
-                <a:latin typeface="Calibri" pitchFamily="34" charset="0"/>
-                <a:ea typeface="Calibri" pitchFamily="34" charset="-122"/>
-                <a:cs typeface="Calibri" pitchFamily="34" charset="-120"/>
-              </a:rPr>
-              <a:t>北京化工大学</a:t>
-            </a:r>
-            <a:endParaRPr lang="en-US" sz="900" dirty="0"/>
-          </a:p>
-        </p:txBody>
-      </p:sp>
-      <p:sp>
-        <p:nvSpPr>
-          <p:cNvPr id="20" name="Shape 18"/>
-          <p:cNvSpPr/>
-          <p:nvPr/>
-        </p:nvSpPr>
-        <p:spPr>
-          <a:xfrm>
-            <a:off x="4206240" y="2121408"/>
-            <a:ext cx="1600200" cy="0"/>
-          </a:xfrm>
-          <a:prstGeom prst="line">
-            <a:avLst/>
-          </a:prstGeom>
-          <a:noFill/>
-          <a:ln w="6350">
-            <a:solidFill>
-              <a:srgbClr val="E2E8F0"/>
-            </a:solidFill>
-            <a:prstDash val="solid"/>
-          </a:ln>
-        </p:spPr>
-      </p:sp>
-      <p:sp>
-        <p:nvSpPr>
-          <p:cNvPr id="21" name="Text 19"/>
-          <p:cNvSpPr/>
-          <p:nvPr/>
-        </p:nvSpPr>
-        <p:spPr>
-          <a:xfrm>
-            <a:off x="4206240" y="2176272"/>
-            <a:ext cx="1600200" cy="685800"/>
-          </a:xfrm>
-          <a:prstGeom prst="rect">
-            <a:avLst/>
-          </a:prstGeom>
-          <a:noFill/>
-          <a:ln/>
-        </p:spPr>
-        <p:txBody>
-          <a:bodyPr wrap="square" rtlCol="0" anchor="ctr"/>
-          <a:lstStyle/>
-          <a:p>
-            <a:pPr indent="0" marL="0">
-              <a:buNone/>
-            </a:pPr>
-            <a:r>
-              <a:rPr lang="en-US" sz="850" dirty="0">
-                <a:solidFill>
-                  <a:srgbClr val="7F8C8D"/>
-                </a:solidFill>
-                <a:latin typeface="Calibri" pitchFamily="34" charset="0"/>
-                <a:ea typeface="Calibri" pitchFamily="34" charset="-122"/>
-                <a:cs typeface="Calibri" pitchFamily="34" charset="-120"/>
-              </a:rPr>
-              <a:t>AMIC无源负氧离子技术发明人。长期从事功能材料研究，发表核心期刊论文20余篇，主持多项国家级科研项目。</a:t>
-            </a:r>
-            <a:endParaRPr lang="en-US" sz="850" dirty="0"/>
-          </a:p>
-        </p:txBody>
-      </p:sp>
-      <p:sp>
-        <p:nvSpPr>
-          <p:cNvPr id="22" name="Shape 20"/>
-          <p:cNvSpPr/>
-          <p:nvPr/>
-        </p:nvSpPr>
-        <p:spPr>
-          <a:xfrm>
-            <a:off x="6126480" y="1097280"/>
-            <a:ext cx="2651760" cy="1828800"/>
-          </a:xfrm>
-          <a:prstGeom prst="rect">
-            <a:avLst/>
-          </a:prstGeom>
-          <a:solidFill>
-            <a:srgbClr val="FFFFFF"/>
-          </a:solidFill>
-          <a:ln/>
-          <a:effectLst>
-            <a:outerShdw sx="100000" sy="100000" kx="0" ky="0" algn="bl" rotWithShape="0" blurRad="63500" dist="25400" dir="8100000">
-              <a:srgbClr val="000000">
-                <a:alpha val="10000"/>
-              </a:srgbClr>
-            </a:outerShdw>
-          </a:effectLst>
-        </p:spPr>
-      </p:sp>
-      <p:sp>
-        <p:nvSpPr>
-          <p:cNvPr id="23" name="Shape 21"/>
-          <p:cNvSpPr/>
-          <p:nvPr/>
-        </p:nvSpPr>
-        <p:spPr>
-          <a:xfrm>
-            <a:off x="6126480" y="1097280"/>
-            <a:ext cx="777240" cy="1828800"/>
-          </a:xfrm>
-          <a:prstGeom prst="rect">
-            <a:avLst/>
-          </a:prstGeom>
-          <a:solidFill>
-            <a:srgbClr val="7C3AED"/>
-          </a:solidFill>
-          <a:ln/>
-        </p:spPr>
-      </p:sp>
-      <p:sp>
-        <p:nvSpPr>
-          <p:cNvPr id="24" name="Text 22"/>
-          <p:cNvSpPr/>
-          <p:nvPr/>
-        </p:nvSpPr>
-        <p:spPr>
-          <a:xfrm>
-            <a:off x="6126480" y="1691640"/>
-            <a:ext cx="777240" cy="640080"/>
-          </a:xfrm>
-          <a:prstGeom prst="rect">
-            <a:avLst/>
-          </a:prstGeom>
-          <a:noFill/>
-          <a:ln/>
-        </p:spPr>
-        <p:txBody>
-          <a:bodyPr wrap="square" rtlCol="0" anchor="ctr"/>
-          <a:lstStyle/>
-          <a:p>
-            <a:pPr algn="ctr" indent="0" marL="0">
-              <a:buNone/>
-            </a:pPr>
-            <a:r>
-              <a:rPr lang="en-US" sz="2000" b="1" dirty="0">
+                <a:latin typeface="Calibri" pitchFamily="34" charset="0"/>
+                <a:ea typeface="Calibri" pitchFamily="34" charset="-122"/>
+                <a:cs typeface="Calibri" pitchFamily="34" charset="-120"/>
+              </a:rPr>
+              <a:t>，深入行业</a:t>
+            </a:r>
+            <a:r>
+              <a:rPr lang="en-US" altLang="zh-CN" sz="1200" dirty="0">
                 <a:solidFill>
                   <a:srgbClr val="FFFFFF"/>
                 </a:solidFill>
-                <a:latin typeface="Georgia" pitchFamily="34" charset="0"/>
-                <a:ea typeface="Georgia" pitchFamily="34" charset="-122"/>
-                <a:cs typeface="Georgia" pitchFamily="34" charset="-120"/>
-              </a:rPr>
-              <a:t>ZH</a:t>
-            </a:r>
-            <a:endParaRPr lang="en-US" sz="2000" dirty="0"/>
-          </a:p>
-        </p:txBody>
-      </p:sp>
-      <p:sp>
-        <p:nvSpPr>
-          <p:cNvPr id="25" name="Text 23"/>
-          <p:cNvSpPr/>
-          <p:nvPr/>
-        </p:nvSpPr>
-        <p:spPr>
-          <a:xfrm>
-            <a:off x="7040880" y="1234440"/>
-            <a:ext cx="1645920" cy="347472"/>
-          </a:xfrm>
-          <a:prstGeom prst="rect">
-            <a:avLst/>
-          </a:prstGeom>
-          <a:noFill/>
-          <a:ln/>
-        </p:spPr>
-        <p:txBody>
-          <a:bodyPr wrap="square" rtlCol="0" anchor="ctr"/>
-          <a:lstStyle/>
-          <a:p>
-            <a:pPr indent="0" marL="0">
-              <a:buNone/>
-            </a:pPr>
-            <a:r>
-              <a:rPr lang="en-US" sz="1500" b="1" dirty="0">
-                <a:solidFill>
-                  <a:srgbClr val="2C3E50"/>
-                </a:solidFill>
-                <a:latin typeface="Calibri" pitchFamily="34" charset="0"/>
-                <a:ea typeface="Calibri" pitchFamily="34" charset="-122"/>
-                <a:cs typeface="Calibri" pitchFamily="34" charset="-120"/>
-              </a:rPr>
-              <a:t>张华</a:t>
-            </a:r>
-            <a:endParaRPr lang="en-US" sz="1500" dirty="0"/>
-          </a:p>
-        </p:txBody>
-      </p:sp>
-      <p:sp>
-        <p:nvSpPr>
-          <p:cNvPr id="26" name="Text 24"/>
-          <p:cNvSpPr/>
-          <p:nvPr/>
-        </p:nvSpPr>
-        <p:spPr>
-          <a:xfrm>
-            <a:off x="7040880" y="1572768"/>
-            <a:ext cx="1645920" cy="274320"/>
-          </a:xfrm>
-          <a:prstGeom prst="rect">
-            <a:avLst/>
-          </a:prstGeom>
-          <a:noFill/>
-          <a:ln/>
-        </p:spPr>
-        <p:txBody>
-          <a:bodyPr wrap="square" rtlCol="0" anchor="ctr"/>
-          <a:lstStyle/>
-          <a:p>
-            <a:pPr indent="0" marL="0">
-              <a:buNone/>
-            </a:pPr>
-            <a:r>
-              <a:rPr lang="en-US" sz="1000" b="1" dirty="0">
-                <a:solidFill>
-                  <a:srgbClr val="7C3AED"/>
-                </a:solidFill>
-                <a:latin typeface="Calibri" pitchFamily="34" charset="0"/>
-                <a:ea typeface="Calibri" pitchFamily="34" charset="-122"/>
-                <a:cs typeface="Calibri" pitchFamily="34" charset="-120"/>
-              </a:rPr>
-              <a:t>临床医学负责人</a:t>
-            </a:r>
-            <a:endParaRPr lang="en-US" sz="1000" dirty="0"/>
-          </a:p>
-        </p:txBody>
-      </p:sp>
-      <p:sp>
-        <p:nvSpPr>
-          <p:cNvPr id="27" name="Text 25"/>
-          <p:cNvSpPr/>
-          <p:nvPr/>
-        </p:nvSpPr>
-        <p:spPr>
-          <a:xfrm>
-            <a:off x="7040880" y="1828800"/>
-            <a:ext cx="1645920" cy="228600"/>
-          </a:xfrm>
-          <a:prstGeom prst="rect">
-            <a:avLst/>
-          </a:prstGeom>
-          <a:noFill/>
-          <a:ln/>
-        </p:spPr>
-        <p:txBody>
-          <a:bodyPr wrap="square" rtlCol="0" anchor="ctr"/>
-          <a:lstStyle/>
-          <a:p>
-            <a:pPr indent="0" marL="0">
-              <a:buNone/>
-            </a:pPr>
-            <a:r>
-              <a:rPr lang="en-US" sz="900" dirty="0">
-                <a:solidFill>
-                  <a:srgbClr val="7F8C8D"/>
-                </a:solidFill>
-                <a:latin typeface="Calibri" pitchFamily="34" charset="0"/>
-                <a:ea typeface="Calibri" pitchFamily="34" charset="-122"/>
-                <a:cs typeface="Calibri" pitchFamily="34" charset="-120"/>
-              </a:rPr>
-              <a:t>北京协和医院睡眠中心</a:t>
-            </a:r>
-            <a:endParaRPr lang="en-US" sz="900" dirty="0"/>
-          </a:p>
-        </p:txBody>
-      </p:sp>
-      <p:sp>
-        <p:nvSpPr>
-          <p:cNvPr id="28" name="Shape 26"/>
-          <p:cNvSpPr/>
-          <p:nvPr/>
-        </p:nvSpPr>
-        <p:spPr>
-          <a:xfrm>
-            <a:off x="7040880" y="2121408"/>
-            <a:ext cx="1600200" cy="0"/>
-          </a:xfrm>
-          <a:prstGeom prst="line">
-            <a:avLst/>
-          </a:prstGeom>
-          <a:noFill/>
-          <a:ln w="6350">
-            <a:solidFill>
-              <a:srgbClr val="E2E8F0"/>
-            </a:solidFill>
-            <a:prstDash val="solid"/>
-          </a:ln>
-        </p:spPr>
-      </p:sp>
-      <p:sp>
-        <p:nvSpPr>
-          <p:cNvPr id="29" name="Text 27"/>
-          <p:cNvSpPr/>
-          <p:nvPr/>
-        </p:nvSpPr>
-        <p:spPr>
-          <a:xfrm>
-            <a:off x="7040880" y="2176272"/>
-            <a:ext cx="1600200" cy="685800"/>
-          </a:xfrm>
-          <a:prstGeom prst="rect">
-            <a:avLst/>
-          </a:prstGeom>
-          <a:noFill/>
-          <a:ln/>
-        </p:spPr>
-        <p:txBody>
-          <a:bodyPr wrap="square" rtlCol="0" anchor="ctr"/>
-          <a:lstStyle/>
-          <a:p>
-            <a:pPr indent="0" marL="0">
-              <a:buNone/>
-            </a:pPr>
-            <a:r>
-              <a:rPr lang="en-US" sz="850" dirty="0">
-                <a:solidFill>
-                  <a:srgbClr val="7F8C8D"/>
-                </a:solidFill>
-                <a:latin typeface="Calibri" pitchFamily="34" charset="0"/>
-                <a:ea typeface="Calibri" pitchFamily="34" charset="-122"/>
-                <a:cs typeface="Calibri" pitchFamily="34" charset="-120"/>
-              </a:rPr>
-              <a:t>北京协和医院睡眠医学专家，主持负氧离子微环境干预睡眠障碍的临床研究设计，主导40对40双盲试验。</a:t>
-            </a:r>
-            <a:endParaRPr lang="en-US" sz="850" dirty="0"/>
-          </a:p>
-        </p:txBody>
-      </p:sp>
-      <p:sp>
-        <p:nvSpPr>
-          <p:cNvPr id="30" name="Shape 28"/>
-          <p:cNvSpPr/>
-          <p:nvPr/>
-        </p:nvSpPr>
-        <p:spPr>
-          <a:xfrm>
-            <a:off x="457200" y="3063240"/>
-            <a:ext cx="2651760" cy="1828800"/>
-          </a:xfrm>
-          <a:prstGeom prst="rect">
-            <a:avLst/>
-          </a:prstGeom>
-          <a:solidFill>
-            <a:srgbClr val="FFFFFF"/>
-          </a:solidFill>
-          <a:ln/>
-          <a:effectLst>
-            <a:outerShdw sx="100000" sy="100000" kx="0" ky="0" algn="bl" rotWithShape="0" blurRad="63500" dist="25400" dir="8100000">
-              <a:srgbClr val="000000">
-                <a:alpha val="10000"/>
-              </a:srgbClr>
-            </a:outerShdw>
-          </a:effectLst>
-        </p:spPr>
-      </p:sp>
-      <p:sp>
-        <p:nvSpPr>
-          <p:cNvPr id="31" name="Shape 29"/>
-          <p:cNvSpPr/>
-          <p:nvPr/>
-        </p:nvSpPr>
-        <p:spPr>
-          <a:xfrm>
-            <a:off x="457200" y="3063240"/>
-            <a:ext cx="777240" cy="1828800"/>
-          </a:xfrm>
-          <a:prstGeom prst="rect">
-            <a:avLst/>
-          </a:prstGeom>
-          <a:solidFill>
-            <a:srgbClr val="FF6B35"/>
-          </a:solidFill>
-          <a:ln/>
-        </p:spPr>
-      </p:sp>
-      <p:sp>
-        <p:nvSpPr>
-          <p:cNvPr id="32" name="Text 30"/>
-          <p:cNvSpPr/>
-          <p:nvPr/>
-        </p:nvSpPr>
-        <p:spPr>
-          <a:xfrm>
-            <a:off x="457200" y="3657600"/>
-            <a:ext cx="777240" cy="640080"/>
-          </a:xfrm>
-          <a:prstGeom prst="rect">
-            <a:avLst/>
-          </a:prstGeom>
-          <a:noFill/>
-          <a:ln/>
-        </p:spPr>
-        <p:txBody>
-          <a:bodyPr wrap="square" rtlCol="0" anchor="ctr"/>
-          <a:lstStyle/>
-          <a:p>
-            <a:pPr algn="ctr" indent="0" marL="0">
-              <a:buNone/>
-            </a:pPr>
-            <a:r>
-              <a:rPr lang="en-US" sz="2000" b="1" dirty="0">
+                <a:latin typeface="Calibri" pitchFamily="34" charset="0"/>
+                <a:ea typeface="Calibri" pitchFamily="34" charset="-122"/>
+                <a:cs typeface="Calibri" pitchFamily="34" charset="-120"/>
+              </a:rPr>
+              <a:t>30</a:t>
+            </a:r>
+            <a:r>
+              <a:rPr lang="zh-CN" altLang="en-US" sz="1200" dirty="0">
                 <a:solidFill>
                   <a:srgbClr val="FFFFFF"/>
                 </a:solidFill>
-                <a:latin typeface="Georgia" pitchFamily="34" charset="0"/>
-                <a:ea typeface="Georgia" pitchFamily="34" charset="-122"/>
-                <a:cs typeface="Georgia" pitchFamily="34" charset="-120"/>
-              </a:rPr>
-              <a:t>WL</a:t>
-            </a:r>
-            <a:endParaRPr lang="en-US" sz="2000" dirty="0"/>
-          </a:p>
-        </p:txBody>
-      </p:sp>
-      <p:sp>
-        <p:nvSpPr>
-          <p:cNvPr id="33" name="Text 31"/>
-          <p:cNvSpPr/>
-          <p:nvPr/>
-        </p:nvSpPr>
-        <p:spPr>
-          <a:xfrm>
-            <a:off x="1371600" y="3200400"/>
-            <a:ext cx="1645920" cy="347472"/>
-          </a:xfrm>
-          <a:prstGeom prst="rect">
-            <a:avLst/>
-          </a:prstGeom>
-          <a:noFill/>
-          <a:ln/>
-        </p:spPr>
-        <p:txBody>
-          <a:bodyPr wrap="square" rtlCol="0" anchor="ctr"/>
-          <a:lstStyle/>
-          <a:p>
-            <a:pPr indent="0" marL="0">
-              <a:buNone/>
-            </a:pPr>
-            <a:r>
-              <a:rPr lang="en-US" sz="1500" b="1" dirty="0">
-                <a:solidFill>
-                  <a:srgbClr val="2C3E50"/>
-                </a:solidFill>
-                <a:latin typeface="Calibri" pitchFamily="34" charset="0"/>
-                <a:ea typeface="Calibri" pitchFamily="34" charset="-122"/>
-                <a:cs typeface="Calibri" pitchFamily="34" charset="-120"/>
-              </a:rPr>
-              <a:t>王磊</a:t>
-            </a:r>
-            <a:endParaRPr lang="en-US" sz="1500" dirty="0"/>
-          </a:p>
-        </p:txBody>
-      </p:sp>
-      <p:sp>
-        <p:nvSpPr>
-          <p:cNvPr id="34" name="Text 32"/>
-          <p:cNvSpPr/>
-          <p:nvPr/>
-        </p:nvSpPr>
-        <p:spPr>
-          <a:xfrm>
-            <a:off x="1371600" y="3538728"/>
-            <a:ext cx="1645920" cy="274320"/>
-          </a:xfrm>
-          <a:prstGeom prst="rect">
-            <a:avLst/>
-          </a:prstGeom>
-          <a:noFill/>
-          <a:ln/>
-        </p:spPr>
-        <p:txBody>
-          <a:bodyPr wrap="square" rtlCol="0" anchor="ctr"/>
-          <a:lstStyle/>
-          <a:p>
-            <a:pPr indent="0" marL="0">
-              <a:buNone/>
-            </a:pPr>
-            <a:r>
-              <a:rPr lang="en-US" sz="1000" b="1" dirty="0">
-                <a:solidFill>
-                  <a:srgbClr val="FF6B35"/>
-                </a:solidFill>
-                <a:latin typeface="Calibri" pitchFamily="34" charset="0"/>
-                <a:ea typeface="Calibri" pitchFamily="34" charset="-122"/>
-                <a:cs typeface="Calibri" pitchFamily="34" charset="-120"/>
-              </a:rPr>
-              <a:t>市场负责人</a:t>
-            </a:r>
-            <a:endParaRPr lang="en-US" sz="1000" dirty="0"/>
-          </a:p>
-        </p:txBody>
-      </p:sp>
-      <p:sp>
-        <p:nvSpPr>
-          <p:cNvPr id="35" name="Text 33"/>
-          <p:cNvSpPr/>
-          <p:nvPr/>
-        </p:nvSpPr>
-        <p:spPr>
-          <a:xfrm>
-            <a:off x="1371600" y="3794760"/>
-            <a:ext cx="1645920" cy="228600"/>
-          </a:xfrm>
-          <a:prstGeom prst="rect">
-            <a:avLst/>
-          </a:prstGeom>
-          <a:noFill/>
-          <a:ln/>
-        </p:spPr>
-        <p:txBody>
-          <a:bodyPr wrap="square" rtlCol="0" anchor="ctr"/>
-          <a:lstStyle/>
-          <a:p>
-            <a:pPr indent="0" marL="0">
-              <a:buNone/>
-            </a:pPr>
-            <a:r>
-              <a:rPr lang="en-US" sz="900" dirty="0">
-                <a:solidFill>
-                  <a:srgbClr val="7F8C8D"/>
-                </a:solidFill>
-                <a:latin typeface="Calibri" pitchFamily="34" charset="0"/>
-                <a:ea typeface="Calibri" pitchFamily="34" charset="-122"/>
-                <a:cs typeface="Calibri" pitchFamily="34" charset="-120"/>
-              </a:rPr>
-              <a:t>北京博飞生物科技</a:t>
-            </a:r>
-            <a:endParaRPr lang="en-US" sz="900" dirty="0"/>
-          </a:p>
-        </p:txBody>
-      </p:sp>
-      <p:sp>
-        <p:nvSpPr>
-          <p:cNvPr id="36" name="Shape 34"/>
-          <p:cNvSpPr/>
-          <p:nvPr/>
-        </p:nvSpPr>
-        <p:spPr>
-          <a:xfrm>
-            <a:off x="1371600" y="4087368"/>
-            <a:ext cx="1600200" cy="0"/>
-          </a:xfrm>
-          <a:prstGeom prst="line">
-            <a:avLst/>
-          </a:prstGeom>
-          <a:noFill/>
-          <a:ln w="6350">
-            <a:solidFill>
-              <a:srgbClr val="E2E8F0"/>
-            </a:solidFill>
-            <a:prstDash val="solid"/>
-          </a:ln>
-        </p:spPr>
-      </p:sp>
-      <p:sp>
-        <p:nvSpPr>
-          <p:cNvPr id="37" name="Text 35"/>
-          <p:cNvSpPr/>
-          <p:nvPr/>
-        </p:nvSpPr>
-        <p:spPr>
-          <a:xfrm>
-            <a:off x="1371600" y="4142232"/>
-            <a:ext cx="1600200" cy="685800"/>
-          </a:xfrm>
-          <a:prstGeom prst="rect">
-            <a:avLst/>
-          </a:prstGeom>
-          <a:noFill/>
-          <a:ln/>
-        </p:spPr>
-        <p:txBody>
-          <a:bodyPr wrap="square" rtlCol="0" anchor="ctr"/>
-          <a:lstStyle/>
-          <a:p>
-            <a:pPr indent="0" marL="0">
-              <a:buNone/>
-            </a:pPr>
-            <a:r>
-              <a:rPr lang="en-US" sz="850" dirty="0">
-                <a:solidFill>
-                  <a:srgbClr val="7F8C8D"/>
-                </a:solidFill>
-                <a:latin typeface="Calibri" pitchFamily="34" charset="0"/>
-                <a:ea typeface="Calibri" pitchFamily="34" charset="-122"/>
-                <a:cs typeface="Calibri" pitchFamily="34" charset="-120"/>
-              </a:rPr>
-              <a:t>医疗器械市场营销专家，10年+医疗健康领域市场拓展经验，深耕医院渠道与睡眠医学市场。</a:t>
-            </a:r>
-            <a:endParaRPr lang="en-US" sz="850" dirty="0"/>
-          </a:p>
-        </p:txBody>
-      </p:sp>
-      <p:sp>
-        <p:nvSpPr>
-          <p:cNvPr id="38" name="Shape 36"/>
-          <p:cNvSpPr/>
-          <p:nvPr/>
-        </p:nvSpPr>
-        <p:spPr>
-          <a:xfrm>
-            <a:off x="3291840" y="3063240"/>
-            <a:ext cx="2651760" cy="1828800"/>
-          </a:xfrm>
-          <a:prstGeom prst="rect">
-            <a:avLst/>
-          </a:prstGeom>
-          <a:solidFill>
-            <a:srgbClr val="FFFFFF"/>
-          </a:solidFill>
-          <a:ln/>
-          <a:effectLst>
-            <a:outerShdw sx="100000" sy="100000" kx="0" ky="0" algn="bl" rotWithShape="0" blurRad="63500" dist="25400" dir="8100000">
-              <a:srgbClr val="000000">
-                <a:alpha val="10000"/>
-              </a:srgbClr>
-            </a:outerShdw>
-          </a:effectLst>
-        </p:spPr>
-      </p:sp>
-      <p:sp>
-        <p:nvSpPr>
-          <p:cNvPr id="39" name="Shape 37"/>
-          <p:cNvSpPr/>
-          <p:nvPr/>
-        </p:nvSpPr>
-        <p:spPr>
-          <a:xfrm>
-            <a:off x="3291840" y="3063240"/>
-            <a:ext cx="777240" cy="1828800"/>
-          </a:xfrm>
-          <a:prstGeom prst="rect">
-            <a:avLst/>
-          </a:prstGeom>
-          <a:solidFill>
-            <a:srgbClr val="1A3A6B"/>
-          </a:solidFill>
-          <a:ln/>
-        </p:spPr>
-      </p:sp>
-      <p:sp>
-        <p:nvSpPr>
-          <p:cNvPr id="40" name="Text 38"/>
-          <p:cNvSpPr/>
-          <p:nvPr/>
-        </p:nvSpPr>
-        <p:spPr>
-          <a:xfrm>
-            <a:off x="3291840" y="3657600"/>
-            <a:ext cx="777240" cy="640080"/>
-          </a:xfrm>
-          <a:prstGeom prst="rect">
-            <a:avLst/>
-          </a:prstGeom>
-          <a:noFill/>
-          <a:ln/>
-        </p:spPr>
-        <p:txBody>
-          <a:bodyPr wrap="square" rtlCol="0" anchor="ctr"/>
-          <a:lstStyle/>
-          <a:p>
-            <a:pPr algn="ctr" indent="0" marL="0">
-              <a:buNone/>
-            </a:pPr>
-            <a:r>
-              <a:rPr lang="en-US" sz="2000" b="1" dirty="0">
-                <a:solidFill>
-                  <a:srgbClr val="FFFFFF"/>
-                </a:solidFill>
-                <a:latin typeface="Georgia" pitchFamily="34" charset="0"/>
-                <a:ea typeface="Georgia" pitchFamily="34" charset="-122"/>
-                <a:cs typeface="Georgia" pitchFamily="34" charset="-120"/>
-              </a:rPr>
-              <a:t>ZGY</a:t>
-            </a:r>
-            <a:endParaRPr lang="en-US" sz="2000" dirty="0"/>
-          </a:p>
-        </p:txBody>
-      </p:sp>
-      <p:sp>
-        <p:nvSpPr>
-          <p:cNvPr id="41" name="Text 39"/>
-          <p:cNvSpPr/>
-          <p:nvPr/>
-        </p:nvSpPr>
-        <p:spPr>
-          <a:xfrm>
-            <a:off x="4206240" y="3200400"/>
-            <a:ext cx="1645920" cy="347472"/>
-          </a:xfrm>
-          <a:prstGeom prst="rect">
-            <a:avLst/>
-          </a:prstGeom>
-          <a:noFill/>
-          <a:ln/>
-        </p:spPr>
-        <p:txBody>
-          <a:bodyPr wrap="square" rtlCol="0" anchor="ctr"/>
-          <a:lstStyle/>
-          <a:p>
-            <a:pPr indent="0" marL="0">
-              <a:buNone/>
-            </a:pPr>
-            <a:r>
-              <a:rPr lang="en-US" sz="1500" b="1" dirty="0">
-                <a:solidFill>
-                  <a:srgbClr val="2C3E50"/>
-                </a:solidFill>
-                <a:latin typeface="Calibri" pitchFamily="34" charset="0"/>
-                <a:ea typeface="Calibri" pitchFamily="34" charset="-122"/>
-                <a:cs typeface="Calibri" pitchFamily="34" charset="-120"/>
-              </a:rPr>
-              <a:t>朱国勇</a:t>
-            </a:r>
-            <a:endParaRPr lang="en-US" sz="1500" dirty="0"/>
-          </a:p>
-        </p:txBody>
-      </p:sp>
-      <p:sp>
-        <p:nvSpPr>
-          <p:cNvPr id="42" name="Text 40"/>
-          <p:cNvSpPr/>
-          <p:nvPr/>
-        </p:nvSpPr>
-        <p:spPr>
-          <a:xfrm>
-            <a:off x="4206240" y="3538728"/>
-            <a:ext cx="1645920" cy="274320"/>
-          </a:xfrm>
-          <a:prstGeom prst="rect">
-            <a:avLst/>
-          </a:prstGeom>
-          <a:noFill/>
-          <a:ln/>
-        </p:spPr>
-        <p:txBody>
-          <a:bodyPr wrap="square" rtlCol="0" anchor="ctr"/>
-          <a:lstStyle/>
-          <a:p>
-            <a:pPr indent="0" marL="0">
-              <a:buNone/>
-            </a:pPr>
-            <a:r>
-              <a:rPr lang="en-US" sz="1000" b="1" dirty="0">
-                <a:solidFill>
-                  <a:srgbClr val="1A3A6B"/>
-                </a:solidFill>
-                <a:latin typeface="Calibri" pitchFamily="34" charset="0"/>
-                <a:ea typeface="Calibri" pitchFamily="34" charset="-122"/>
-                <a:cs typeface="Calibri" pitchFamily="34" charset="-120"/>
-              </a:rPr>
-              <a:t>C端全国总代</a:t>
-            </a:r>
-            <a:endParaRPr lang="en-US" sz="1000" dirty="0"/>
-          </a:p>
-        </p:txBody>
-      </p:sp>
-      <p:sp>
-        <p:nvSpPr>
-          <p:cNvPr id="43" name="Text 41"/>
-          <p:cNvSpPr/>
-          <p:nvPr/>
-        </p:nvSpPr>
-        <p:spPr>
-          <a:xfrm>
-            <a:off x="4206240" y="3794760"/>
-            <a:ext cx="1645920" cy="228600"/>
-          </a:xfrm>
-          <a:prstGeom prst="rect">
-            <a:avLst/>
-          </a:prstGeom>
-          <a:noFill/>
-          <a:ln/>
-        </p:spPr>
-        <p:txBody>
-          <a:bodyPr wrap="square" rtlCol="0" anchor="ctr"/>
-          <a:lstStyle/>
-          <a:p>
-            <a:pPr indent="0" marL="0">
-              <a:buNone/>
-            </a:pPr>
-            <a:r>
-              <a:rPr lang="en-US" sz="900" dirty="0">
-                <a:solidFill>
-                  <a:srgbClr val="7F8C8D"/>
-                </a:solidFill>
-                <a:latin typeface="Calibri" pitchFamily="34" charset="0"/>
-                <a:ea typeface="Calibri" pitchFamily="34" charset="-122"/>
-                <a:cs typeface="Calibri" pitchFamily="34" charset="-120"/>
-              </a:rPr>
-              <a:t>深睡科技战略合作</a:t>
-            </a:r>
-            <a:endParaRPr lang="en-US" sz="900" dirty="0"/>
-          </a:p>
-        </p:txBody>
-      </p:sp>
-      <p:sp>
-        <p:nvSpPr>
-          <p:cNvPr id="44" name="Shape 42"/>
-          <p:cNvSpPr/>
-          <p:nvPr/>
-        </p:nvSpPr>
-        <p:spPr>
-          <a:xfrm>
-            <a:off x="4206240" y="4087368"/>
-            <a:ext cx="1600200" cy="0"/>
-          </a:xfrm>
-          <a:prstGeom prst="line">
-            <a:avLst/>
-          </a:prstGeom>
-          <a:noFill/>
-          <a:ln w="6350">
-            <a:solidFill>
-              <a:srgbClr val="E2E8F0"/>
-            </a:solidFill>
-            <a:prstDash val="solid"/>
-          </a:ln>
-        </p:spPr>
-      </p:sp>
-      <p:sp>
-        <p:nvSpPr>
-          <p:cNvPr id="45" name="Text 43"/>
-          <p:cNvSpPr/>
-          <p:nvPr/>
-        </p:nvSpPr>
-        <p:spPr>
-          <a:xfrm>
-            <a:off x="4206240" y="4142232"/>
-            <a:ext cx="1600200" cy="685800"/>
-          </a:xfrm>
-          <a:prstGeom prst="rect">
-            <a:avLst/>
-          </a:prstGeom>
-          <a:noFill/>
-          <a:ln/>
-        </p:spPr>
-        <p:txBody>
-          <a:bodyPr wrap="square" rtlCol="0" anchor="ctr"/>
-          <a:lstStyle/>
-          <a:p>
-            <a:pPr indent="0" marL="0">
-              <a:buNone/>
-            </a:pPr>
-            <a:r>
-              <a:rPr lang="en-US" sz="850" dirty="0">
-                <a:solidFill>
-                  <a:srgbClr val="7F8C8D"/>
-                </a:solidFill>
-                <a:latin typeface="Calibri" pitchFamily="34" charset="0"/>
-                <a:ea typeface="Calibri" pitchFamily="34" charset="-122"/>
-                <a:cs typeface="Calibri" pitchFamily="34" charset="-120"/>
-              </a:rPr>
-              <a:t>全国渠道建设专家，已签约C端年销售额1000万渠道代理协议，负责全国C端市场拓展与经销商体系建立。</a:t>
-            </a:r>
-            <a:endParaRPr lang="en-US" sz="850" dirty="0"/>
-          </a:p>
-        </p:txBody>
-      </p:sp>
-      <p:sp>
-        <p:nvSpPr>
-          <p:cNvPr id="46" name="Shape 44"/>
-          <p:cNvSpPr/>
-          <p:nvPr/>
-        </p:nvSpPr>
-        <p:spPr>
-          <a:xfrm>
-            <a:off x="6126480" y="3063240"/>
-            <a:ext cx="2651760" cy="1828800"/>
-          </a:xfrm>
-          <a:prstGeom prst="rect">
-            <a:avLst/>
-          </a:prstGeom>
-          <a:solidFill>
-            <a:srgbClr val="FFFFFF"/>
-          </a:solidFill>
-          <a:ln/>
-          <a:effectLst>
-            <a:outerShdw sx="100000" sy="100000" kx="0" ky="0" algn="bl" rotWithShape="0" blurRad="63500" dist="25400" dir="8100000">
-              <a:srgbClr val="000000">
-                <a:alpha val="10000"/>
-              </a:srgbClr>
-            </a:outerShdw>
-          </a:effectLst>
-        </p:spPr>
-      </p:sp>
-      <p:sp>
-        <p:nvSpPr>
-          <p:cNvPr id="47" name="Shape 45"/>
-          <p:cNvSpPr/>
-          <p:nvPr/>
-        </p:nvSpPr>
-        <p:spPr>
-          <a:xfrm>
-            <a:off x="6126480" y="3063240"/>
-            <a:ext cx="777240" cy="1828800"/>
-          </a:xfrm>
-          <a:prstGeom prst="rect">
-            <a:avLst/>
-          </a:prstGeom>
-          <a:solidFill>
-            <a:srgbClr val="00D4AA"/>
-          </a:solidFill>
-          <a:ln/>
-        </p:spPr>
-      </p:sp>
-      <p:sp>
-        <p:nvSpPr>
-          <p:cNvPr id="48" name="Text 46"/>
-          <p:cNvSpPr/>
-          <p:nvPr/>
-        </p:nvSpPr>
-        <p:spPr>
-          <a:xfrm>
-            <a:off x="6126480" y="3657600"/>
-            <a:ext cx="777240" cy="640080"/>
-          </a:xfrm>
-          <a:prstGeom prst="rect">
-            <a:avLst/>
-          </a:prstGeom>
-          <a:noFill/>
-          <a:ln/>
-        </p:spPr>
-        <p:txBody>
-          <a:bodyPr wrap="square" rtlCol="0" anchor="ctr"/>
-          <a:lstStyle/>
-          <a:p>
-            <a:pPr algn="ctr" indent="0" marL="0">
-              <a:buNone/>
-            </a:pPr>
-            <a:r>
-              <a:rPr lang="en-US" sz="2000" b="1" dirty="0">
-                <a:solidFill>
-                  <a:srgbClr val="FFFFFF"/>
-                </a:solidFill>
-                <a:latin typeface="Georgia" pitchFamily="34" charset="0"/>
-                <a:ea typeface="Georgia" pitchFamily="34" charset="-122"/>
-                <a:cs typeface="Georgia" pitchFamily="34" charset="-120"/>
-              </a:rPr>
-              <a:t>LM</a:t>
-            </a:r>
-            <a:endParaRPr lang="en-US" sz="2000" dirty="0"/>
-          </a:p>
-        </p:txBody>
-      </p:sp>
-      <p:sp>
-        <p:nvSpPr>
-          <p:cNvPr id="49" name="Text 47"/>
-          <p:cNvSpPr/>
-          <p:nvPr/>
-        </p:nvSpPr>
-        <p:spPr>
-          <a:xfrm>
-            <a:off x="7040880" y="3200400"/>
-            <a:ext cx="1645920" cy="347472"/>
-          </a:xfrm>
-          <a:prstGeom prst="rect">
-            <a:avLst/>
-          </a:prstGeom>
-          <a:noFill/>
-          <a:ln/>
-        </p:spPr>
-        <p:txBody>
-          <a:bodyPr wrap="square" rtlCol="0" anchor="ctr"/>
-          <a:lstStyle/>
-          <a:p>
-            <a:pPr indent="0" marL="0">
-              <a:buNone/>
-            </a:pPr>
-            <a:r>
-              <a:rPr lang="en-US" sz="1500" b="1" dirty="0">
-                <a:solidFill>
-                  <a:srgbClr val="2C3E50"/>
-                </a:solidFill>
-                <a:latin typeface="Calibri" pitchFamily="34" charset="0"/>
-                <a:ea typeface="Calibri" pitchFamily="34" charset="-122"/>
-                <a:cs typeface="Calibri" pitchFamily="34" charset="-120"/>
-              </a:rPr>
-              <a:t>李明</a:t>
-            </a:r>
-            <a:endParaRPr lang="en-US" sz="1500" dirty="0"/>
-          </a:p>
-        </p:txBody>
-      </p:sp>
-      <p:sp>
-        <p:nvSpPr>
-          <p:cNvPr id="50" name="Text 48"/>
-          <p:cNvSpPr/>
-          <p:nvPr/>
-        </p:nvSpPr>
-        <p:spPr>
-          <a:xfrm>
-            <a:off x="7040880" y="3538728"/>
-            <a:ext cx="1645920" cy="274320"/>
-          </a:xfrm>
-          <a:prstGeom prst="rect">
-            <a:avLst/>
-          </a:prstGeom>
-          <a:noFill/>
-          <a:ln/>
-        </p:spPr>
-        <p:txBody>
-          <a:bodyPr wrap="square" rtlCol="0" anchor="ctr"/>
-          <a:lstStyle/>
-          <a:p>
-            <a:pPr indent="0" marL="0">
-              <a:buNone/>
-            </a:pPr>
-            <a:r>
-              <a:rPr lang="en-US" sz="1000" b="1" dirty="0">
-                <a:solidFill>
-                  <a:srgbClr val="00D4AA"/>
-                </a:solidFill>
-                <a:latin typeface="Calibri" pitchFamily="34" charset="0"/>
-                <a:ea typeface="Calibri" pitchFamily="34" charset="-122"/>
-                <a:cs typeface="Calibri" pitchFamily="34" charset="-120"/>
-              </a:rPr>
-              <a:t>投资关系负责人</a:t>
-            </a:r>
-            <a:endParaRPr lang="en-US" sz="1000" dirty="0"/>
-          </a:p>
-        </p:txBody>
-      </p:sp>
-      <p:sp>
-        <p:nvSpPr>
-          <p:cNvPr id="51" name="Text 49"/>
-          <p:cNvSpPr/>
-          <p:nvPr/>
-        </p:nvSpPr>
-        <p:spPr>
-          <a:xfrm>
-            <a:off x="7040880" y="3794760"/>
-            <a:ext cx="1645920" cy="228600"/>
-          </a:xfrm>
-          <a:prstGeom prst="rect">
-            <a:avLst/>
-          </a:prstGeom>
-          <a:noFill/>
-          <a:ln/>
-        </p:spPr>
-        <p:txBody>
-          <a:bodyPr wrap="square" rtlCol="0" anchor="ctr"/>
-          <a:lstStyle/>
-          <a:p>
-            <a:pPr indent="0" marL="0">
-              <a:buNone/>
-            </a:pPr>
-            <a:r>
-              <a:rPr lang="en-US" sz="900" dirty="0">
-                <a:solidFill>
-                  <a:srgbClr val="7F8C8D"/>
-                </a:solidFill>
-                <a:latin typeface="Calibri" pitchFamily="34" charset="0"/>
-                <a:ea typeface="Calibri" pitchFamily="34" charset="-122"/>
-                <a:cs typeface="Calibri" pitchFamily="34" charset="-120"/>
-              </a:rPr>
-              <a:t>深睡科技</a:t>
-            </a:r>
-            <a:endParaRPr lang="en-US" sz="900" dirty="0"/>
-          </a:p>
-        </p:txBody>
-      </p:sp>
-      <p:sp>
-        <p:nvSpPr>
-          <p:cNvPr id="52" name="Shape 50"/>
-          <p:cNvSpPr/>
-          <p:nvPr/>
-        </p:nvSpPr>
-        <p:spPr>
-          <a:xfrm>
-            <a:off x="7040880" y="4087368"/>
-            <a:ext cx="1600200" cy="0"/>
-          </a:xfrm>
-          <a:prstGeom prst="line">
-            <a:avLst/>
-          </a:prstGeom>
-          <a:noFill/>
-          <a:ln w="6350">
-            <a:solidFill>
-              <a:srgbClr val="E2E8F0"/>
-            </a:solidFill>
-            <a:prstDash val="solid"/>
-          </a:ln>
-        </p:spPr>
-      </p:sp>
-      <p:sp>
-        <p:nvSpPr>
-          <p:cNvPr id="53" name="Text 51"/>
-          <p:cNvSpPr/>
-          <p:nvPr/>
-        </p:nvSpPr>
-        <p:spPr>
-          <a:xfrm>
-            <a:off x="7040880" y="4142232"/>
-            <a:ext cx="1600200" cy="685800"/>
-          </a:xfrm>
-          <a:prstGeom prst="rect">
-            <a:avLst/>
-          </a:prstGeom>
-          <a:noFill/>
-          <a:ln/>
-        </p:spPr>
-        <p:txBody>
-          <a:bodyPr wrap="square" rtlCol="0" anchor="ctr"/>
-          <a:lstStyle/>
-          <a:p>
-            <a:pPr indent="0" marL="0">
-              <a:buNone/>
-            </a:pPr>
-            <a:r>
-              <a:rPr lang="en-US" sz="850" dirty="0">
-                <a:solidFill>
-                  <a:srgbClr val="7F8C8D"/>
-                </a:solidFill>
-                <a:latin typeface="Calibri" pitchFamily="34" charset="0"/>
-                <a:ea typeface="Calibri" pitchFamily="34" charset="-122"/>
-                <a:cs typeface="Calibri" pitchFamily="34" charset="-120"/>
-              </a:rPr>
-              <a:t>负责企业投融资及政府项目申报，主导HICOOL等创业大赛参赛申报，擅长产学研医投全链条资源整合。</a:t>
-            </a:r>
-            <a:endParaRPr lang="en-US" sz="850" dirty="0"/>
+                <a:latin typeface="Calibri" pitchFamily="34" charset="0"/>
+                <a:ea typeface="Calibri" pitchFamily="34" charset="-122"/>
+                <a:cs typeface="Calibri" pitchFamily="34" charset="-120"/>
+              </a:rPr>
+              <a:t>年</a:t>
+            </a:r>
+            <a:endParaRPr lang="en-US" sz="1200" dirty="0"/>
           </a:p>
         </p:txBody>
       </p:sp>
     </p:spTree>
+    <p:extLst>
+      <p:ext uri="{BB962C8B-B14F-4D97-AF65-F5344CB8AC3E}">
+        <p14:creationId xmlns:p14="http://schemas.microsoft.com/office/powerpoint/2010/main" val="938099965"/>
+      </p:ext>
+    </p:extLst>
   </p:cSld>
   <p:clrMapOvr>
     <a:masterClrMapping/>
@@ -15602,4 +14779,319 @@
     </a:ext>
   </a:extLst>
 </a:theme>
+</file>
+
+<file path=ppt/theme/theme2.xml><?xml version="1.0" encoding="utf-8"?>
+<a:theme xmlns:a="http://schemas.openxmlformats.org/drawingml/2006/main" name="Office Theme">
+  <a:themeElements>
+    <a:clrScheme name="Office">
+      <a:dk1>
+        <a:sysClr val="windowText" lastClr="000000"/>
+      </a:dk1>
+      <a:lt1>
+        <a:sysClr val="window" lastClr="FFFFFF"/>
+      </a:lt1>
+      <a:dk2>
+        <a:srgbClr val="0E2841"/>
+      </a:dk2>
+      <a:lt2>
+        <a:srgbClr val="E8E8E8"/>
+      </a:lt2>
+      <a:accent1>
+        <a:srgbClr val="156082"/>
+      </a:accent1>
+      <a:accent2>
+        <a:srgbClr val="E97132"/>
+      </a:accent2>
+      <a:accent3>
+        <a:srgbClr val="196B24"/>
+      </a:accent3>
+      <a:accent4>
+        <a:srgbClr val="0F9ED5"/>
+      </a:accent4>
+      <a:accent5>
+        <a:srgbClr val="A02B93"/>
+      </a:accent5>
+      <a:accent6>
+        <a:srgbClr val="4EA72E"/>
+      </a:accent6>
+      <a:hlink>
+        <a:srgbClr val="467886"/>
+      </a:hlink>
+      <a:folHlink>
+        <a:srgbClr val="96607D"/>
+      </a:folHlink>
+    </a:clrScheme>
+    <a:fontScheme name="Office">
+      <a:majorFont>
+        <a:latin typeface="Aptos Display" panose="02110004020202020204"/>
+        <a:ea typeface=""/>
+        <a:cs typeface=""/>
+        <a:font script="Jpan" typeface="游ゴシック Light"/>
+        <a:font script="Hang" typeface="맑은 고딕"/>
+        <a:font script="Hans" typeface="等线 Light"/>
+        <a:font script="Hant" typeface="新細明體"/>
+        <a:font script="Arab" typeface="Times New Roman"/>
+        <a:font script="Hebr" typeface="Times New Roman"/>
+        <a:font script="Thai" typeface="Angsana New"/>
+        <a:font script="Ethi" typeface="Nyala"/>
+        <a:font script="Beng" typeface="Vrinda"/>
+        <a:font script="Gujr" typeface="Shruti"/>
+        <a:font script="Khmr" typeface="MoolBoran"/>
+        <a:font script="Knda" typeface="Tunga"/>
+        <a:font script="Guru" typeface="Raavi"/>
+        <a:font script="Cans" typeface="Euphemia"/>
+        <a:font script="Cher" typeface="Plantagenet Cherokee"/>
+        <a:font script="Yiii" typeface="Microsoft Yi Baiti"/>
+        <a:font script="Tibt" typeface="Microsoft Himalaya"/>
+        <a:font script="Thaa" typeface="MV Boli"/>
+        <a:font script="Deva" typeface="Mangal"/>
+        <a:font script="Telu" typeface="Gautami"/>
+        <a:font script="Taml" typeface="Latha"/>
+        <a:font script="Syrc" typeface="Estrangelo Edessa"/>
+        <a:font script="Orya" typeface="Kalinga"/>
+        <a:font script="Mlym" typeface="Kartika"/>
+        <a:font script="Laoo" typeface="DokChampa"/>
+        <a:font script="Sinh" typeface="Iskoola Pota"/>
+        <a:font script="Mong" typeface="Mongolian Baiti"/>
+        <a:font script="Viet" typeface="Times New Roman"/>
+        <a:font script="Uigh" typeface="Microsoft Uighur"/>
+        <a:font script="Geor" typeface="Sylfaen"/>
+        <a:font script="Armn" typeface="Arial"/>
+        <a:font script="Bugi" typeface="Leelawadee UI"/>
+        <a:font script="Bopo" typeface="Microsoft JhengHei"/>
+        <a:font script="Java" typeface="Javanese Text"/>
+        <a:font script="Lisu" typeface="Segoe UI"/>
+        <a:font script="Mymr" typeface="Myanmar Text"/>
+        <a:font script="Nkoo" typeface="Ebrima"/>
+        <a:font script="Olck" typeface="Nirmala UI"/>
+        <a:font script="Osma" typeface="Ebrima"/>
+        <a:font script="Phag" typeface="Phagspa"/>
+        <a:font script="Syrn" typeface="Estrangelo Edessa"/>
+        <a:font script="Syrj" typeface="Estrangelo Edessa"/>
+        <a:font script="Syre" typeface="Estrangelo Edessa"/>
+        <a:font script="Sora" typeface="Nirmala UI"/>
+        <a:font script="Tale" typeface="Microsoft Tai Le"/>
+        <a:font script="Talu" typeface="Microsoft New Tai Lue"/>
+        <a:font script="Tfng" typeface="Ebrima"/>
+      </a:majorFont>
+      <a:minorFont>
+        <a:latin typeface="Aptos" panose="02110004020202020204"/>
+        <a:ea typeface=""/>
+        <a:cs typeface=""/>
+        <a:font script="Jpan" typeface="游ゴシック"/>
+        <a:font script="Hang" typeface="맑은 고딕"/>
+        <a:font script="Hans" typeface="等线"/>
+        <a:font script="Hant" typeface="新細明體"/>
+        <a:font script="Arab" typeface="Arial"/>
+        <a:font script="Hebr" typeface="Arial"/>
+        <a:font script="Thai" typeface="Cordia New"/>
+        <a:font script="Ethi" typeface="Nyala"/>
+        <a:font script="Beng" typeface="Vrinda"/>
+        <a:font script="Gujr" typeface="Shruti"/>
+        <a:font script="Khmr" typeface="DaunPenh"/>
+        <a:font script="Knda" typeface="Tunga"/>
+        <a:font script="Guru" typeface="Raavi"/>
+        <a:font script="Cans" typeface="Euphemia"/>
+        <a:font script="Cher" typeface="Plantagenet Cherokee"/>
+        <a:font script="Yiii" typeface="Microsoft Yi Baiti"/>
+        <a:font script="Tibt" typeface="Microsoft Himalaya"/>
+        <a:font script="Thaa" typeface="MV Boli"/>
+        <a:font script="Deva" typeface="Mangal"/>
+        <a:font script="Telu" typeface="Gautami"/>
+        <a:font script="Taml" typeface="Latha"/>
+        <a:font script="Syrc" typeface="Estrangelo Edessa"/>
+        <a:font script="Orya" typeface="Kalinga"/>
+        <a:font script="Mlym" typeface="Kartika"/>
+        <a:font script="Laoo" typeface="DokChampa"/>
+        <a:font script="Sinh" typeface="Iskoola Pota"/>
+        <a:font script="Mong" typeface="Mongolian Baiti"/>
+        <a:font script="Viet" typeface="Arial"/>
+        <a:font script="Uigh" typeface="Microsoft Uighur"/>
+        <a:font script="Geor" typeface="Sylfaen"/>
+        <a:font script="Armn" typeface="Arial"/>
+        <a:font script="Bugi" typeface="Leelawadee UI"/>
+        <a:font script="Bopo" typeface="Microsoft JhengHei"/>
+        <a:font script="Java" typeface="Javanese Text"/>
+        <a:font script="Lisu" typeface="Segoe UI"/>
+        <a:font script="Mymr" typeface="Myanmar Text"/>
+        <a:font script="Nkoo" typeface="Ebrima"/>
+        <a:font script="Olck" typeface="Nirmala UI"/>
+        <a:font script="Osma" typeface="Ebrima"/>
+        <a:font script="Phag" typeface="Phagspa"/>
+        <a:font script="Syrn" typeface="Estrangelo Edessa"/>
+        <a:font script="Syrj" typeface="Estrangelo Edessa"/>
+        <a:font script="Syre" typeface="Estrangelo Edessa"/>
+        <a:font script="Sora" typeface="Nirmala UI"/>
+        <a:font script="Tale" typeface="Microsoft Tai Le"/>
+        <a:font script="Talu" typeface="Microsoft New Tai Lue"/>
+        <a:font script="Tfng" typeface="Ebrima"/>
+      </a:minorFont>
+    </a:fontScheme>
+    <a:fmtScheme name="Office">
+      <a:fillStyleLst>
+        <a:solidFill>
+          <a:schemeClr val="phClr"/>
+        </a:solidFill>
+        <a:gradFill rotWithShape="1">
+          <a:gsLst>
+            <a:gs pos="0">
+              <a:schemeClr val="phClr">
+                <a:lumMod val="110000"/>
+                <a:satMod val="105000"/>
+                <a:tint val="67000"/>
+              </a:schemeClr>
+            </a:gs>
+            <a:gs pos="50000">
+              <a:schemeClr val="phClr">
+                <a:lumMod val="105000"/>
+                <a:satMod val="103000"/>
+                <a:tint val="73000"/>
+              </a:schemeClr>
+            </a:gs>
+            <a:gs pos="100000">
+              <a:schemeClr val="phClr">
+                <a:lumMod val="105000"/>
+                <a:satMod val="109000"/>
+                <a:tint val="81000"/>
+              </a:schemeClr>
+            </a:gs>
+          </a:gsLst>
+          <a:lin ang="5400000" scaled="0"/>
+        </a:gradFill>
+        <a:gradFill rotWithShape="1">
+          <a:gsLst>
+            <a:gs pos="0">
+              <a:schemeClr val="phClr">
+                <a:satMod val="103000"/>
+                <a:lumMod val="102000"/>
+                <a:tint val="94000"/>
+              </a:schemeClr>
+            </a:gs>
+            <a:gs pos="50000">
+              <a:schemeClr val="phClr">
+                <a:satMod val="110000"/>
+                <a:lumMod val="100000"/>
+                <a:shade val="100000"/>
+              </a:schemeClr>
+            </a:gs>
+            <a:gs pos="100000">
+              <a:schemeClr val="phClr">
+                <a:lumMod val="99000"/>
+                <a:satMod val="120000"/>
+                <a:shade val="78000"/>
+              </a:schemeClr>
+            </a:gs>
+          </a:gsLst>
+          <a:lin ang="5400000" scaled="0"/>
+        </a:gradFill>
+      </a:fillStyleLst>
+      <a:lnStyleLst>
+        <a:ln w="12700" cap="flat" cmpd="sng" algn="ctr">
+          <a:solidFill>
+            <a:schemeClr val="phClr"/>
+          </a:solidFill>
+          <a:prstDash val="solid"/>
+          <a:miter lim="800000"/>
+        </a:ln>
+        <a:ln w="19050" cap="flat" cmpd="sng" algn="ctr">
+          <a:solidFill>
+            <a:schemeClr val="phClr"/>
+          </a:solidFill>
+          <a:prstDash val="solid"/>
+          <a:miter lim="800000"/>
+        </a:ln>
+        <a:ln w="25400" cap="flat" cmpd="sng" algn="ctr">
+          <a:solidFill>
+            <a:schemeClr val="phClr"/>
+          </a:solidFill>
+          <a:prstDash val="solid"/>
+          <a:miter lim="800000"/>
+        </a:ln>
+      </a:lnStyleLst>
+      <a:effectStyleLst>
+        <a:effectStyle>
+          <a:effectLst/>
+        </a:effectStyle>
+        <a:effectStyle>
+          <a:effectLst/>
+        </a:effectStyle>
+        <a:effectStyle>
+          <a:effectLst>
+            <a:outerShdw blurRad="57150" dist="19050" dir="5400000" algn="ctr" rotWithShape="0">
+              <a:srgbClr val="000000">
+                <a:alpha val="63000"/>
+              </a:srgbClr>
+            </a:outerShdw>
+          </a:effectLst>
+        </a:effectStyle>
+      </a:effectStyleLst>
+      <a:bgFillStyleLst>
+        <a:solidFill>
+          <a:schemeClr val="phClr"/>
+        </a:solidFill>
+        <a:solidFill>
+          <a:schemeClr val="phClr">
+            <a:tint val="95000"/>
+            <a:satMod val="170000"/>
+          </a:schemeClr>
+        </a:solidFill>
+        <a:gradFill rotWithShape="1">
+          <a:gsLst>
+            <a:gs pos="0">
+              <a:schemeClr val="phClr">
+                <a:tint val="93000"/>
+                <a:satMod val="150000"/>
+                <a:shade val="98000"/>
+                <a:lumMod val="102000"/>
+              </a:schemeClr>
+            </a:gs>
+            <a:gs pos="50000">
+              <a:schemeClr val="phClr">
+                <a:tint val="98000"/>
+                <a:satMod val="130000"/>
+                <a:shade val="90000"/>
+                <a:lumMod val="103000"/>
+              </a:schemeClr>
+            </a:gs>
+            <a:gs pos="100000">
+              <a:schemeClr val="phClr">
+                <a:shade val="63000"/>
+                <a:satMod val="120000"/>
+              </a:schemeClr>
+            </a:gs>
+          </a:gsLst>
+          <a:lin ang="5400000" scaled="0"/>
+        </a:gradFill>
+      </a:bgFillStyleLst>
+    </a:fmtScheme>
+  </a:themeElements>
+  <a:objectDefaults>
+    <a:lnDef>
+      <a:spPr/>
+      <a:bodyPr/>
+      <a:lstStyle/>
+      <a:style>
+        <a:lnRef idx="2">
+          <a:schemeClr val="accent1"/>
+        </a:lnRef>
+        <a:fillRef idx="0">
+          <a:schemeClr val="accent1"/>
+        </a:fillRef>
+        <a:effectRef idx="1">
+          <a:schemeClr val="accent1"/>
+        </a:effectRef>
+        <a:fontRef idx="minor">
+          <a:schemeClr val="tx1"/>
+        </a:fontRef>
+      </a:style>
+    </a:lnDef>
+  </a:objectDefaults>
+  <a:extraClrSchemeLst/>
+  <a:extLst>
+    <a:ext uri="{05A4C25C-085E-4340-85A3-A5531E510DB2}">
+      <thm15:themeFamily xmlns:thm15="http://schemas.microsoft.com/office/thememl/2012/main" name="Office Theme" id="{2E142A2C-CD16-42D6-873A-C26D2A0506FA}" vid="{1BDDFF52-6CD6-40A5-AB3C-68EB2F1E4D0A}"/>
+    </a:ext>
+  </a:extLst>
+</a:theme>
 </file>